--- a/Nuclear_Fuel_Performance/NE533_Spring2026/Module3/Lec16_PCI.pptx
+++ b/Nuclear_Fuel_Performance/NE533_Spring2026/Module3/Lec16_PCI.pptx
@@ -324,7 +324,7 @@
             </a:pPr>
             <a:fld id="{D6F3A803-A045-354B-887A-01433CE46FC2}" type="datetime1">
               <a:rPr lang="en-US" smtClean="0"/>
-              <a:t>4/1/25</a:t>
+              <a:t>3/12/26</a:t>
             </a:fld>
             <a:endParaRPr lang="en-US"/>
           </a:p>
@@ -517,7 +517,7 @@
             </a:pPr>
             <a:fld id="{A8B33C1D-C2E2-1049-AA3F-CD6E91052752}" type="datetime1">
               <a:rPr lang="en-US" smtClean="0"/>
-              <a:t>4/1/25</a:t>
+              <a:t>3/12/26</a:t>
             </a:fld>
             <a:endParaRPr lang="en-US"/>
           </a:p>
@@ -719,7 +719,7 @@
             </a:pPr>
             <a:fld id="{2791AD68-B60C-4542-BDDD-2074DE6DE828}" type="datetime1">
               <a:rPr lang="en-US" smtClean="0"/>
-              <a:t>4/1/25</a:t>
+              <a:t>3/12/26</a:t>
             </a:fld>
             <a:endParaRPr lang="en-US"/>
           </a:p>
@@ -921,7 +921,7 @@
             </a:pPr>
             <a:fld id="{C5BD04BF-9DC2-6341-92B2-BD109A2EF3B1}" type="datetime1">
               <a:rPr lang="en-US" smtClean="0"/>
-              <a:t>4/1/25</a:t>
+              <a:t>3/12/26</a:t>
             </a:fld>
             <a:endParaRPr lang="en-US"/>
           </a:p>
@@ -1191,7 +1191,7 @@
             </a:pPr>
             <a:fld id="{FB0FFBC7-3028-644D-986B-D9855CB74B38}" type="datetime1">
               <a:rPr lang="en-US" smtClean="0"/>
-              <a:t>4/1/25</a:t>
+              <a:t>3/12/26</a:t>
             </a:fld>
             <a:endParaRPr lang="en-US"/>
           </a:p>
@@ -1506,7 +1506,7 @@
             </a:pPr>
             <a:fld id="{2C3B8AE4-01F5-CC42-9C62-61BC6528368B}" type="datetime1">
               <a:rPr lang="en-US" smtClean="0"/>
-              <a:t>4/1/25</a:t>
+              <a:t>3/12/26</a:t>
             </a:fld>
             <a:endParaRPr lang="en-US"/>
           </a:p>
@@ -1949,7 +1949,7 @@
             </a:pPr>
             <a:fld id="{77E49314-4A78-2444-9569-44EB70168344}" type="datetime1">
               <a:rPr lang="en-US" smtClean="0"/>
-              <a:t>4/1/25</a:t>
+              <a:t>3/12/26</a:t>
             </a:fld>
             <a:endParaRPr lang="en-US"/>
           </a:p>
@@ -2094,7 +2094,7 @@
             </a:pPr>
             <a:fld id="{5BC22837-4683-B242-B000-BCEE30621787}" type="datetime1">
               <a:rPr lang="en-US" smtClean="0"/>
-              <a:t>4/1/25</a:t>
+              <a:t>3/12/26</a:t>
             </a:fld>
             <a:endParaRPr lang="en-US"/>
           </a:p>
@@ -2213,7 +2213,7 @@
             </a:pPr>
             <a:fld id="{DCDAE926-7EF1-0B40-B57E-417D188A609C}" type="datetime1">
               <a:rPr lang="en-US" smtClean="0"/>
-              <a:t>4/1/25</a:t>
+              <a:t>3/12/26</a:t>
             </a:fld>
             <a:endParaRPr lang="en-US"/>
           </a:p>
@@ -2512,7 +2512,7 @@
             </a:pPr>
             <a:fld id="{518D107B-B9C7-5B41-A168-55258AB95F52}" type="datetime1">
               <a:rPr lang="en-US" smtClean="0"/>
-              <a:t>4/1/25</a:t>
+              <a:t>3/12/26</a:t>
             </a:fld>
             <a:endParaRPr lang="en-US"/>
           </a:p>
@@ -2796,7 +2796,7 @@
             </a:pPr>
             <a:fld id="{3AD92D36-EE82-3142-B011-9831FB5E702F}" type="datetime1">
               <a:rPr lang="en-US" smtClean="0"/>
-              <a:t>4/1/25</a:t>
+              <a:t>3/12/26</a:t>
             </a:fld>
             <a:endParaRPr lang="en-US"/>
           </a:p>
@@ -2937,7 +2937,7 @@
               </a14:hiddenLine>
             </a:ext>
             <a:ext uri="{FAA26D3D-D897-4be2-8F04-BA451C77F1D7}">
-              <ma14:placeholderFlag xmlns:ma14="http://schemas.microsoft.com/office/mac/drawingml/2011/main" xmlns="" val="1"/>
+              <ma14:placeholderFlag xmlns="" xmlns:ma14="http://schemas.microsoft.com/office/mac/drawingml/2011/main" val="1"/>
             </a:ext>
           </a:extLst>
         </p:spPr>
@@ -3005,7 +3005,7 @@
               </a14:hiddenLine>
             </a:ext>
             <a:ext uri="{FAA26D3D-D897-4be2-8F04-BA451C77F1D7}">
-              <ma14:placeholderFlag xmlns:ma14="http://schemas.microsoft.com/office/mac/drawingml/2011/main" xmlns="" val="1"/>
+              <ma14:placeholderFlag xmlns="" xmlns:ma14="http://schemas.microsoft.com/office/mac/drawingml/2011/main" val="1"/>
             </a:ext>
           </a:extLst>
         </p:spPr>
@@ -3101,7 +3101,7 @@
             </a:pPr>
             <a:fld id="{3EE08B4B-7256-494F-A90D-3891BD685F4A}" type="datetime1">
               <a:rPr lang="en-US" smtClean="0"/>
-              <a:t>4/1/25</a:t>
+              <a:t>3/12/26</a:t>
             </a:fld>
             <a:endParaRPr lang="en-US" dirty="0"/>
           </a:p>
@@ -3728,7 +3728,7 @@
           <a:p>
             <a:r>
               <a:rPr lang="en-US" dirty="0"/>
-              <a:t>Spring 2025</a:t>
+              <a:t>Spring 2026</a:t>
             </a:r>
           </a:p>
         </p:txBody>

--- a/Nuclear_Fuel_Performance/NE533_Spring2026/Module3/Lec16_PCI.pptx
+++ b/Nuclear_Fuel_Performance/NE533_Spring2026/Module3/Lec16_PCI.pptx
@@ -6,30 +6,17 @@
   </p:sldMasterIdLst>
   <p:sldIdLst>
     <p:sldId id="537" r:id="rId2"/>
-    <p:sldId id="279" r:id="rId3"/>
-    <p:sldId id="587" r:id="rId4"/>
-    <p:sldId id="575" r:id="rId5"/>
-    <p:sldId id="550" r:id="rId6"/>
-    <p:sldId id="544" r:id="rId7"/>
-    <p:sldId id="551" r:id="rId8"/>
-    <p:sldId id="545" r:id="rId9"/>
-    <p:sldId id="554" r:id="rId10"/>
-    <p:sldId id="556" r:id="rId11"/>
-    <p:sldId id="557" r:id="rId12"/>
-    <p:sldId id="558" r:id="rId13"/>
-    <p:sldId id="559" r:id="rId14"/>
-    <p:sldId id="560" r:id="rId15"/>
-    <p:sldId id="561" r:id="rId16"/>
-    <p:sldId id="562" r:id="rId17"/>
-    <p:sldId id="563" r:id="rId18"/>
-    <p:sldId id="564" r:id="rId19"/>
-    <p:sldId id="565" r:id="rId20"/>
-    <p:sldId id="566" r:id="rId21"/>
-    <p:sldId id="568" r:id="rId22"/>
-    <p:sldId id="572" r:id="rId23"/>
-    <p:sldId id="553" r:id="rId24"/>
-    <p:sldId id="570" r:id="rId25"/>
-    <p:sldId id="571" r:id="rId26"/>
+    <p:sldId id="575" r:id="rId3"/>
+    <p:sldId id="588" r:id="rId4"/>
+    <p:sldId id="589" r:id="rId5"/>
+    <p:sldId id="590" r:id="rId6"/>
+    <p:sldId id="591" r:id="rId7"/>
+    <p:sldId id="592" r:id="rId8"/>
+    <p:sldId id="593" r:id="rId9"/>
+    <p:sldId id="594" r:id="rId10"/>
+    <p:sldId id="595" r:id="rId11"/>
+    <p:sldId id="596" r:id="rId12"/>
+    <p:sldId id="597" r:id="rId13"/>
   </p:sldIdLst>
   <p:sldSz cx="12192000" cy="6858000"/>
   <p:notesSz cx="6858000" cy="9144000"/>
@@ -324,7 +311,7 @@
             </a:pPr>
             <a:fld id="{D6F3A803-A045-354B-887A-01433CE46FC2}" type="datetime1">
               <a:rPr lang="en-US" smtClean="0"/>
-              <a:t>3/12/26</a:t>
+              <a:t>3/20/26</a:t>
             </a:fld>
             <a:endParaRPr lang="en-US"/>
           </a:p>
@@ -517,7 +504,7 @@
             </a:pPr>
             <a:fld id="{A8B33C1D-C2E2-1049-AA3F-CD6E91052752}" type="datetime1">
               <a:rPr lang="en-US" smtClean="0"/>
-              <a:t>3/12/26</a:t>
+              <a:t>3/20/26</a:t>
             </a:fld>
             <a:endParaRPr lang="en-US"/>
           </a:p>
@@ -719,7 +706,7 @@
             </a:pPr>
             <a:fld id="{2791AD68-B60C-4542-BDDD-2074DE6DE828}" type="datetime1">
               <a:rPr lang="en-US" smtClean="0"/>
-              <a:t>3/12/26</a:t>
+              <a:t>3/20/26</a:t>
             </a:fld>
             <a:endParaRPr lang="en-US"/>
           </a:p>
@@ -921,7 +908,7 @@
             </a:pPr>
             <a:fld id="{C5BD04BF-9DC2-6341-92B2-BD109A2EF3B1}" type="datetime1">
               <a:rPr lang="en-US" smtClean="0"/>
-              <a:t>3/12/26</a:t>
+              <a:t>3/20/26</a:t>
             </a:fld>
             <a:endParaRPr lang="en-US"/>
           </a:p>
@@ -1191,7 +1178,7 @@
             </a:pPr>
             <a:fld id="{FB0FFBC7-3028-644D-986B-D9855CB74B38}" type="datetime1">
               <a:rPr lang="en-US" smtClean="0"/>
-              <a:t>3/12/26</a:t>
+              <a:t>3/20/26</a:t>
             </a:fld>
             <a:endParaRPr lang="en-US"/>
           </a:p>
@@ -1506,7 +1493,7 @@
             </a:pPr>
             <a:fld id="{2C3B8AE4-01F5-CC42-9C62-61BC6528368B}" type="datetime1">
               <a:rPr lang="en-US" smtClean="0"/>
-              <a:t>3/12/26</a:t>
+              <a:t>3/20/26</a:t>
             </a:fld>
             <a:endParaRPr lang="en-US"/>
           </a:p>
@@ -1949,7 +1936,7 @@
             </a:pPr>
             <a:fld id="{77E49314-4A78-2444-9569-44EB70168344}" type="datetime1">
               <a:rPr lang="en-US" smtClean="0"/>
-              <a:t>3/12/26</a:t>
+              <a:t>3/20/26</a:t>
             </a:fld>
             <a:endParaRPr lang="en-US"/>
           </a:p>
@@ -2094,7 +2081,7 @@
             </a:pPr>
             <a:fld id="{5BC22837-4683-B242-B000-BCEE30621787}" type="datetime1">
               <a:rPr lang="en-US" smtClean="0"/>
-              <a:t>3/12/26</a:t>
+              <a:t>3/20/26</a:t>
             </a:fld>
             <a:endParaRPr lang="en-US"/>
           </a:p>
@@ -2213,7 +2200,7 @@
             </a:pPr>
             <a:fld id="{DCDAE926-7EF1-0B40-B57E-417D188A609C}" type="datetime1">
               <a:rPr lang="en-US" smtClean="0"/>
-              <a:t>3/12/26</a:t>
+              <a:t>3/20/26</a:t>
             </a:fld>
             <a:endParaRPr lang="en-US"/>
           </a:p>
@@ -2512,7 +2499,7 @@
             </a:pPr>
             <a:fld id="{518D107B-B9C7-5B41-A168-55258AB95F52}" type="datetime1">
               <a:rPr lang="en-US" smtClean="0"/>
-              <a:t>3/12/26</a:t>
+              <a:t>3/20/26</a:t>
             </a:fld>
             <a:endParaRPr lang="en-US"/>
           </a:p>
@@ -2796,7 +2783,7 @@
             </a:pPr>
             <a:fld id="{3AD92D36-EE82-3142-B011-9831FB5E702F}" type="datetime1">
               <a:rPr lang="en-US" smtClean="0"/>
-              <a:t>3/12/26</a:t>
+              <a:t>3/20/26</a:t>
             </a:fld>
             <a:endParaRPr lang="en-US"/>
           </a:p>
@@ -2937,7 +2924,7 @@
               </a14:hiddenLine>
             </a:ext>
             <a:ext uri="{FAA26D3D-D897-4be2-8F04-BA451C77F1D7}">
-              <ma14:placeholderFlag xmlns="" xmlns:ma14="http://schemas.microsoft.com/office/mac/drawingml/2011/main" val="1"/>
+              <ma14:placeholderFlag xmlns:ma14="http://schemas.microsoft.com/office/mac/drawingml/2011/main" xmlns="" val="1"/>
             </a:ext>
           </a:extLst>
         </p:spPr>
@@ -3005,7 +2992,7 @@
               </a14:hiddenLine>
             </a:ext>
             <a:ext uri="{FAA26D3D-D897-4be2-8F04-BA451C77F1D7}">
-              <ma14:placeholderFlag xmlns="" xmlns:ma14="http://schemas.microsoft.com/office/mac/drawingml/2011/main" val="1"/>
+              <ma14:placeholderFlag xmlns:ma14="http://schemas.microsoft.com/office/mac/drawingml/2011/main" xmlns="" val="1"/>
             </a:ext>
           </a:extLst>
         </p:spPr>
@@ -3101,7 +3088,7 @@
             </a:pPr>
             <a:fld id="{3EE08B4B-7256-494F-A90D-3891BD685F4A}" type="datetime1">
               <a:rPr lang="en-US" smtClean="0"/>
-              <a:t>3/12/26</a:t>
+              <a:t>3/20/26</a:t>
             </a:fld>
             <a:endParaRPr lang="en-US" dirty="0"/>
           </a:p>
@@ -3803,7 +3790,7 @@
           <p:cNvPr id="2" name="Title 1">
             <a:extLst>
               <a:ext uri="{FF2B5EF4-FFF2-40B4-BE49-F238E27FC236}">
-                <a16:creationId xmlns:a16="http://schemas.microsoft.com/office/drawing/2014/main" id="{A4BEE184-821E-A447-870D-9DF2A30482D5}"/>
+                <a16:creationId xmlns:a16="http://schemas.microsoft.com/office/drawing/2014/main" id="{B16AAD79-5D47-294E-8347-12E7FA582E89}"/>
               </a:ext>
             </a:extLst>
           </p:cNvPr>
@@ -3821,7 +3808,7 @@
           <a:p>
             <a:r>
               <a:rPr lang="en-US" dirty="0"/>
-              <a:t>Pellet Deformation</a:t>
+              <a:t>PCI Mitigation</a:t>
             </a:r>
           </a:p>
         </p:txBody>
@@ -3831,7 +3818,7 @@
           <p:cNvPr id="3" name="Content Placeholder 2">
             <a:extLst>
               <a:ext uri="{FF2B5EF4-FFF2-40B4-BE49-F238E27FC236}">
-                <a16:creationId xmlns:a16="http://schemas.microsoft.com/office/drawing/2014/main" id="{694A868B-4CD2-2946-8ECF-2646D5B9B02F}"/>
+                <a16:creationId xmlns:a16="http://schemas.microsoft.com/office/drawing/2014/main" id="{24A15A08-ED25-5C49-AAF1-50993BB389EE}"/>
               </a:ext>
             </a:extLst>
           </p:cNvPr>
@@ -3844,8 +3831,8 @@
         </p:nvSpPr>
         <p:spPr>
           <a:xfrm>
-            <a:off x="609600" y="2160495"/>
-            <a:ext cx="7252252" cy="3965670"/>
+            <a:off x="609600" y="1968501"/>
+            <a:ext cx="7371522" cy="3965670"/>
           </a:xfrm>
         </p:spPr>
         <p:txBody>
@@ -3853,38 +3840,24 @@
           <a:lstStyle/>
           <a:p>
             <a:r>
-              <a:rPr lang="en-US" sz="2000" dirty="0"/>
-              <a:t>The large thermal gradients in the radial direction, and a lesser extent in the axial direction, contribute to non-uniform thermal expansion, which results in a shape that resembles an hourglass</a:t>
-            </a:r>
-          </a:p>
-          <a:p>
-            <a:r>
-              <a:rPr lang="en-US" sz="2000" dirty="0"/>
-              <a:t>Pellet cracking due to thermal stresses further contributes to the </a:t>
-            </a:r>
-            <a:r>
-              <a:rPr lang="en-US" sz="2000" dirty="0" err="1"/>
-              <a:t>hourglassing</a:t>
-            </a:r>
-            <a:r>
-              <a:rPr lang="en-US" sz="2000" dirty="0"/>
-              <a:t> effect</a:t>
-            </a:r>
-          </a:p>
-          <a:p>
-            <a:r>
-              <a:rPr lang="en-US" sz="2000" dirty="0"/>
-              <a:t>The edges of cylindrical pellets induce large local stress concentrations in the cladding when the pellet-clad gap closes, leading to enhanced risk of perforation</a:t>
-            </a:r>
-          </a:p>
-          <a:p>
-            <a:endParaRPr lang="en-US" sz="2000" dirty="0"/>
-          </a:p>
-          <a:p>
-            <a:endParaRPr lang="en-US" sz="2000" dirty="0"/>
-          </a:p>
-          <a:p>
-            <a:endParaRPr lang="en-US" sz="2000" dirty="0"/>
+              <a:rPr lang="en-US" sz="1900" dirty="0"/>
+              <a:t>There are two primary approaches to mitigate PCI failures: 1) changes in the design of various components – notably, the fuel pellet, fuel cladding and fuel assembly; 2) the manner in which the reactor is operated can be altered to minimize PCI failures</a:t>
+            </a:r>
+          </a:p>
+          <a:p>
+            <a:r>
+              <a:rPr lang="en-US" sz="1900" dirty="0"/>
+              <a:t>The design of fuel has changed to better optimize performance and reliability, including modifying the fuel pellet geometry, microstructure (i.e., grain size and porosity), and composition (i.e., initial O/M, minor additives)</a:t>
+            </a:r>
+          </a:p>
+          <a:p>
+            <a:r>
+              <a:rPr lang="en-US" sz="1900" dirty="0"/>
+              <a:t>Many design changes of the cladding have been investigated, including the development of small grain sizes and texture control, alloy composition, inclusion of an inner liner and the application of a pellet-clad interlayer </a:t>
+            </a:r>
+          </a:p>
+          <a:p>
+            <a:endParaRPr lang="en-US" sz="1900" dirty="0"/>
           </a:p>
         </p:txBody>
       </p:sp>
@@ -3893,1528 +3866,7 @@
           <p:cNvPr id="4" name="Slide Number Placeholder 3">
             <a:extLst>
               <a:ext uri="{FF2B5EF4-FFF2-40B4-BE49-F238E27FC236}">
-                <a16:creationId xmlns:a16="http://schemas.microsoft.com/office/drawing/2014/main" id="{1FC349F8-C0D3-FD4D-9EA4-98CFD5016C8E}"/>
-              </a:ext>
-            </a:extLst>
-          </p:cNvPr>
-          <p:cNvSpPr>
-            <a:spLocks noGrp="1"/>
-          </p:cNvSpPr>
-          <p:nvPr>
-            <p:ph type="sldNum" sz="quarter" idx="12"/>
-          </p:nvPr>
-        </p:nvSpPr>
-        <p:spPr/>
-        <p:txBody>
-          <a:bodyPr/>
-          <a:lstStyle/>
-          <a:p>
-            <a:pPr>
-              <a:defRPr/>
-            </a:pPr>
-            <a:fld id="{3FF2C605-4958-CF43-AA48-80339EFDB0AF}" type="slidenum">
-              <a:rPr lang="en-US" smtClean="0"/>
-              <a:pPr>
-                <a:defRPr/>
-              </a:pPr>
-              <a:t>10</a:t>
-            </a:fld>
-            <a:endParaRPr lang="en-US"/>
-          </a:p>
-        </p:txBody>
-      </p:sp>
-      <p:pic>
-        <p:nvPicPr>
-          <p:cNvPr id="5" name="Picture 4">
-            <a:extLst>
-              <a:ext uri="{FF2B5EF4-FFF2-40B4-BE49-F238E27FC236}">
-                <a16:creationId xmlns:a16="http://schemas.microsoft.com/office/drawing/2014/main" id="{EC2346A4-55DC-004A-AD2E-A8F77E8BD434}"/>
-              </a:ext>
-            </a:extLst>
-          </p:cNvPr>
-          <p:cNvPicPr>
-            <a:picLocks noChangeAspect="1"/>
-          </p:cNvPicPr>
-          <p:nvPr/>
-        </p:nvPicPr>
-        <p:blipFill>
-          <a:blip r:embed="rId2"/>
-          <a:stretch>
-            <a:fillRect/>
-          </a:stretch>
-        </p:blipFill>
-        <p:spPr>
-          <a:xfrm>
-            <a:off x="8010939" y="2549480"/>
-            <a:ext cx="4092438" cy="2463314"/>
-          </a:xfrm>
-          <a:prstGeom prst="rect">
-            <a:avLst/>
-          </a:prstGeom>
-        </p:spPr>
-      </p:pic>
-    </p:spTree>
-    <p:extLst>
-      <p:ext uri="{BB962C8B-B14F-4D97-AF65-F5344CB8AC3E}">
-        <p14:creationId xmlns:p14="http://schemas.microsoft.com/office/powerpoint/2010/main" val="1904569693"/>
-      </p:ext>
-    </p:extLst>
-  </p:cSld>
-  <p:clrMapOvr>
-    <a:masterClrMapping/>
-  </p:clrMapOvr>
-</p:sld>
-</file>
-
-<file path=ppt/slides/slide11.xml><?xml version="1.0" encoding="utf-8"?>
-<p:sld xmlns:a="http://schemas.openxmlformats.org/drawingml/2006/main" xmlns:r="http://schemas.openxmlformats.org/officeDocument/2006/relationships" xmlns:p="http://schemas.openxmlformats.org/presentationml/2006/main">
-  <p:cSld>
-    <p:spTree>
-      <p:nvGrpSpPr>
-        <p:cNvPr id="1" name=""/>
-        <p:cNvGrpSpPr/>
-        <p:nvPr/>
-      </p:nvGrpSpPr>
-      <p:grpSpPr>
-        <a:xfrm>
-          <a:off x="0" y="0"/>
-          <a:ext cx="0" cy="0"/>
-          <a:chOff x="0" y="0"/>
-          <a:chExt cx="0" cy="0"/>
-        </a:xfrm>
-      </p:grpSpPr>
-      <p:sp>
-        <p:nvSpPr>
-          <p:cNvPr id="2" name="Title 1">
-            <a:extLst>
-              <a:ext uri="{FF2B5EF4-FFF2-40B4-BE49-F238E27FC236}">
-                <a16:creationId xmlns:a16="http://schemas.microsoft.com/office/drawing/2014/main" id="{8A42F25B-C8A4-F641-A634-875FBE6E01A6}"/>
-              </a:ext>
-            </a:extLst>
-          </p:cNvPr>
-          <p:cNvSpPr>
-            <a:spLocks noGrp="1"/>
-          </p:cNvSpPr>
-          <p:nvPr>
-            <p:ph type="title"/>
-          </p:nvPr>
-        </p:nvSpPr>
-        <p:spPr/>
-        <p:txBody>
-          <a:bodyPr/>
-          <a:lstStyle/>
-          <a:p>
-            <a:r>
-              <a:rPr lang="en-US" dirty="0"/>
-              <a:t>Fuel Cracking</a:t>
-            </a:r>
-          </a:p>
-        </p:txBody>
-      </p:sp>
-      <p:sp>
-        <p:nvSpPr>
-          <p:cNvPr id="3" name="Content Placeholder 2">
-            <a:extLst>
-              <a:ext uri="{FF2B5EF4-FFF2-40B4-BE49-F238E27FC236}">
-                <a16:creationId xmlns:a16="http://schemas.microsoft.com/office/drawing/2014/main" id="{97747485-D423-B94B-B6F5-C61417765EBA}"/>
-              </a:ext>
-            </a:extLst>
-          </p:cNvPr>
-          <p:cNvSpPr>
-            <a:spLocks noGrp="1"/>
-          </p:cNvSpPr>
-          <p:nvPr>
-            <p:ph idx="1"/>
-          </p:nvPr>
-        </p:nvSpPr>
-        <p:spPr>
-          <a:xfrm>
-            <a:off x="609600" y="2160495"/>
-            <a:ext cx="6496878" cy="3965670"/>
-          </a:xfrm>
-        </p:spPr>
-        <p:txBody>
-          <a:bodyPr/>
-          <a:lstStyle/>
-          <a:p>
-            <a:r>
-              <a:rPr lang="en-US" sz="2000" dirty="0"/>
-              <a:t>Fuel pellets experience varying degrees of fracture due to large internal stresses induced by thermal expansion that exceed the fracture strength of UO2</a:t>
-            </a:r>
-          </a:p>
-          <a:p>
-            <a:r>
-              <a:rPr lang="en-US" sz="2000" dirty="0"/>
-              <a:t>The fracture strength varies from 80 to 150 MPa and is strongly influenced by pellet microstructure, such as porosity, pore size, and grain size</a:t>
-            </a:r>
-          </a:p>
-          <a:p>
-            <a:r>
-              <a:rPr lang="en-US" sz="2000" dirty="0"/>
-              <a:t>The number of fuel cracks generally increases with larger thermal gradients, thus the number of cracks in the fuel increases with respect to linear power</a:t>
-            </a:r>
-          </a:p>
-          <a:p>
-            <a:endParaRPr lang="en-US" sz="2000" dirty="0"/>
-          </a:p>
-          <a:p>
-            <a:endParaRPr lang="en-US" sz="2000" dirty="0"/>
-          </a:p>
-        </p:txBody>
-      </p:sp>
-      <p:sp>
-        <p:nvSpPr>
-          <p:cNvPr id="4" name="Slide Number Placeholder 3">
-            <a:extLst>
-              <a:ext uri="{FF2B5EF4-FFF2-40B4-BE49-F238E27FC236}">
-                <a16:creationId xmlns:a16="http://schemas.microsoft.com/office/drawing/2014/main" id="{B58601DF-55A3-C14C-AE85-F5A5C4F23FDF}"/>
-              </a:ext>
-            </a:extLst>
-          </p:cNvPr>
-          <p:cNvSpPr>
-            <a:spLocks noGrp="1"/>
-          </p:cNvSpPr>
-          <p:nvPr>
-            <p:ph type="sldNum" sz="quarter" idx="12"/>
-          </p:nvPr>
-        </p:nvSpPr>
-        <p:spPr/>
-        <p:txBody>
-          <a:bodyPr/>
-          <a:lstStyle/>
-          <a:p>
-            <a:pPr>
-              <a:defRPr/>
-            </a:pPr>
-            <a:fld id="{3FF2C605-4958-CF43-AA48-80339EFDB0AF}" type="slidenum">
-              <a:rPr lang="en-US" smtClean="0"/>
-              <a:pPr>
-                <a:defRPr/>
-              </a:pPr>
-              <a:t>11</a:t>
-            </a:fld>
-            <a:endParaRPr lang="en-US"/>
-          </a:p>
-        </p:txBody>
-      </p:sp>
-      <p:pic>
-        <p:nvPicPr>
-          <p:cNvPr id="5" name="Picture 4">
-            <a:extLst>
-              <a:ext uri="{FF2B5EF4-FFF2-40B4-BE49-F238E27FC236}">
-                <a16:creationId xmlns:a16="http://schemas.microsoft.com/office/drawing/2014/main" id="{DAF5BD17-C14B-EA43-8F32-8978059CBE8C}"/>
-              </a:ext>
-            </a:extLst>
-          </p:cNvPr>
-          <p:cNvPicPr>
-            <a:picLocks noChangeAspect="1"/>
-          </p:cNvPicPr>
-          <p:nvPr/>
-        </p:nvPicPr>
-        <p:blipFill>
-          <a:blip r:embed="rId2"/>
-          <a:stretch>
-            <a:fillRect/>
-          </a:stretch>
-        </p:blipFill>
-        <p:spPr>
-          <a:xfrm>
-            <a:off x="6963465" y="2567608"/>
-            <a:ext cx="5003800" cy="2895600"/>
-          </a:xfrm>
-          <a:prstGeom prst="rect">
-            <a:avLst/>
-          </a:prstGeom>
-        </p:spPr>
-      </p:pic>
-    </p:spTree>
-    <p:extLst>
-      <p:ext uri="{BB962C8B-B14F-4D97-AF65-F5344CB8AC3E}">
-        <p14:creationId xmlns:p14="http://schemas.microsoft.com/office/powerpoint/2010/main" val="4198640679"/>
-      </p:ext>
-    </p:extLst>
-  </p:cSld>
-  <p:clrMapOvr>
-    <a:masterClrMapping/>
-  </p:clrMapOvr>
-</p:sld>
-</file>
-
-<file path=ppt/slides/slide12.xml><?xml version="1.0" encoding="utf-8"?>
-<p:sld xmlns:a="http://schemas.openxmlformats.org/drawingml/2006/main" xmlns:r="http://schemas.openxmlformats.org/officeDocument/2006/relationships" xmlns:p="http://schemas.openxmlformats.org/presentationml/2006/main">
-  <p:cSld>
-    <p:spTree>
-      <p:nvGrpSpPr>
-        <p:cNvPr id="1" name=""/>
-        <p:cNvGrpSpPr/>
-        <p:nvPr/>
-      </p:nvGrpSpPr>
-      <p:grpSpPr>
-        <a:xfrm>
-          <a:off x="0" y="0"/>
-          <a:ext cx="0" cy="0"/>
-          <a:chOff x="0" y="0"/>
-          <a:chExt cx="0" cy="0"/>
-        </a:xfrm>
-      </p:grpSpPr>
-      <p:sp>
-        <p:nvSpPr>
-          <p:cNvPr id="2" name="Title 1">
-            <a:extLst>
-              <a:ext uri="{FF2B5EF4-FFF2-40B4-BE49-F238E27FC236}">
-                <a16:creationId xmlns:a16="http://schemas.microsoft.com/office/drawing/2014/main" id="{87FA1C80-A2D9-C641-ABFE-DF709C05FB61}"/>
-              </a:ext>
-            </a:extLst>
-          </p:cNvPr>
-          <p:cNvSpPr>
-            <a:spLocks noGrp="1"/>
-          </p:cNvSpPr>
-          <p:nvPr>
-            <p:ph type="title"/>
-          </p:nvPr>
-        </p:nvSpPr>
-        <p:spPr/>
-        <p:txBody>
-          <a:bodyPr/>
-          <a:lstStyle/>
-          <a:p>
-            <a:r>
-              <a:rPr lang="en-US" dirty="0"/>
-              <a:t>Missing Pellet Surface</a:t>
-            </a:r>
-          </a:p>
-        </p:txBody>
-      </p:sp>
-      <p:sp>
-        <p:nvSpPr>
-          <p:cNvPr id="3" name="Content Placeholder 2">
-            <a:extLst>
-              <a:ext uri="{FF2B5EF4-FFF2-40B4-BE49-F238E27FC236}">
-                <a16:creationId xmlns:a16="http://schemas.microsoft.com/office/drawing/2014/main" id="{54DFB008-190A-DB4D-B1DD-21E4F4729B22}"/>
-              </a:ext>
-            </a:extLst>
-          </p:cNvPr>
-          <p:cNvSpPr>
-            <a:spLocks noGrp="1"/>
-          </p:cNvSpPr>
-          <p:nvPr>
-            <p:ph idx="1"/>
-          </p:nvPr>
-        </p:nvSpPr>
-        <p:spPr>
-          <a:xfrm>
-            <a:off x="609600" y="2160495"/>
-            <a:ext cx="7583940" cy="3965670"/>
-          </a:xfrm>
-        </p:spPr>
-        <p:txBody>
-          <a:bodyPr/>
-          <a:lstStyle/>
-          <a:p>
-            <a:r>
-              <a:rPr lang="en-US" sz="2000" dirty="0"/>
-              <a:t>Several failures have been experienced in LWRs in the early 2000s due to physical defects in the fuel, often due to chipping, which is often referred to as a Missing Pellet Surface (MPS)</a:t>
-            </a:r>
-          </a:p>
-          <a:p>
-            <a:r>
-              <a:rPr lang="en-US" sz="2000" dirty="0"/>
-              <a:t>The cladding eventually creeps down onto the fuel, except in the vicinity of the MPS</a:t>
-            </a:r>
-          </a:p>
-          <a:p>
-            <a:r>
-              <a:rPr lang="en-US" sz="2000" dirty="0"/>
-              <a:t>A local stress concentration is experienced in the cladding adjacent to the MPS as a result of the bending moment that is induced by non-uniform contact coupled with an expanding pellet</a:t>
-            </a:r>
-          </a:p>
-          <a:p>
-            <a:r>
-              <a:rPr lang="en-US" sz="2000" dirty="0"/>
-              <a:t>The increased local concentration of corrosive fission product species together with enhanced local stresses elevates the risk for SCC failure</a:t>
-            </a:r>
-          </a:p>
-        </p:txBody>
-      </p:sp>
-      <p:sp>
-        <p:nvSpPr>
-          <p:cNvPr id="4" name="Slide Number Placeholder 3">
-            <a:extLst>
-              <a:ext uri="{FF2B5EF4-FFF2-40B4-BE49-F238E27FC236}">
-                <a16:creationId xmlns:a16="http://schemas.microsoft.com/office/drawing/2014/main" id="{8BD3A7B8-AAE7-D345-824A-C66A32331538}"/>
-              </a:ext>
-            </a:extLst>
-          </p:cNvPr>
-          <p:cNvSpPr>
-            <a:spLocks noGrp="1"/>
-          </p:cNvSpPr>
-          <p:nvPr>
-            <p:ph type="sldNum" sz="quarter" idx="12"/>
-          </p:nvPr>
-        </p:nvSpPr>
-        <p:spPr/>
-        <p:txBody>
-          <a:bodyPr/>
-          <a:lstStyle/>
-          <a:p>
-            <a:pPr>
-              <a:defRPr/>
-            </a:pPr>
-            <a:fld id="{3FF2C605-4958-CF43-AA48-80339EFDB0AF}" type="slidenum">
-              <a:rPr lang="en-US" smtClean="0"/>
-              <a:pPr>
-                <a:defRPr/>
-              </a:pPr>
-              <a:t>12</a:t>
-            </a:fld>
-            <a:endParaRPr lang="en-US"/>
-          </a:p>
-        </p:txBody>
-      </p:sp>
-      <p:pic>
-        <p:nvPicPr>
-          <p:cNvPr id="5" name="Picture 4">
-            <a:extLst>
-              <a:ext uri="{FF2B5EF4-FFF2-40B4-BE49-F238E27FC236}">
-                <a16:creationId xmlns:a16="http://schemas.microsoft.com/office/drawing/2014/main" id="{981E96FC-10BC-C946-BBD8-67F80C59EE41}"/>
-              </a:ext>
-            </a:extLst>
-          </p:cNvPr>
-          <p:cNvPicPr>
-            <a:picLocks noChangeAspect="1"/>
-          </p:cNvPicPr>
-          <p:nvPr/>
-        </p:nvPicPr>
-        <p:blipFill>
-          <a:blip r:embed="rId2"/>
-          <a:stretch>
-            <a:fillRect/>
-          </a:stretch>
-        </p:blipFill>
-        <p:spPr>
-          <a:xfrm rot="5400000">
-            <a:off x="6974976" y="2855722"/>
-            <a:ext cx="5825988" cy="1914772"/>
-          </a:xfrm>
-          <a:prstGeom prst="rect">
-            <a:avLst/>
-          </a:prstGeom>
-        </p:spPr>
-      </p:pic>
-      <p:sp>
-        <p:nvSpPr>
-          <p:cNvPr id="6" name="TextBox 5">
-            <a:extLst>
-              <a:ext uri="{FF2B5EF4-FFF2-40B4-BE49-F238E27FC236}">
-                <a16:creationId xmlns:a16="http://schemas.microsoft.com/office/drawing/2014/main" id="{5A6CD551-5772-C14D-B4EF-4EA0C3D1E8F7}"/>
-              </a:ext>
-            </a:extLst>
-          </p:cNvPr>
-          <p:cNvSpPr txBox="1"/>
-          <p:nvPr/>
-        </p:nvSpPr>
-        <p:spPr>
-          <a:xfrm>
-            <a:off x="11161643" y="1689652"/>
-            <a:ext cx="785192" cy="377687"/>
-          </a:xfrm>
-          <a:prstGeom prst="rect">
-            <a:avLst/>
-          </a:prstGeom>
-          <a:noFill/>
-        </p:spPr>
-        <p:txBody>
-          <a:bodyPr wrap="square" rtlCol="0">
-            <a:spAutoFit/>
-          </a:bodyPr>
-          <a:lstStyle/>
-          <a:p>
-            <a:r>
-              <a:rPr lang="en-US" dirty="0"/>
-              <a:t>PWR</a:t>
-            </a:r>
-          </a:p>
-        </p:txBody>
-      </p:sp>
-      <p:sp>
-        <p:nvSpPr>
-          <p:cNvPr id="7" name="TextBox 6">
-            <a:extLst>
-              <a:ext uri="{FF2B5EF4-FFF2-40B4-BE49-F238E27FC236}">
-                <a16:creationId xmlns:a16="http://schemas.microsoft.com/office/drawing/2014/main" id="{BAA969E6-C69F-B34D-82A5-650D9BA499AA}"/>
-              </a:ext>
-            </a:extLst>
-          </p:cNvPr>
-          <p:cNvSpPr txBox="1"/>
-          <p:nvPr/>
-        </p:nvSpPr>
-        <p:spPr>
-          <a:xfrm>
-            <a:off x="11161643" y="3765643"/>
-            <a:ext cx="785192" cy="377687"/>
-          </a:xfrm>
-          <a:prstGeom prst="rect">
-            <a:avLst/>
-          </a:prstGeom>
-          <a:noFill/>
-        </p:spPr>
-        <p:txBody>
-          <a:bodyPr wrap="square" rtlCol="0">
-            <a:spAutoFit/>
-          </a:bodyPr>
-          <a:lstStyle/>
-          <a:p>
-            <a:r>
-              <a:rPr lang="en-US" dirty="0"/>
-              <a:t>BWR</a:t>
-            </a:r>
-          </a:p>
-        </p:txBody>
-      </p:sp>
-      <p:sp>
-        <p:nvSpPr>
-          <p:cNvPr id="8" name="TextBox 7">
-            <a:extLst>
-              <a:ext uri="{FF2B5EF4-FFF2-40B4-BE49-F238E27FC236}">
-                <a16:creationId xmlns:a16="http://schemas.microsoft.com/office/drawing/2014/main" id="{0DF07BC7-F14D-6445-AC4E-C3AD2C4F4B63}"/>
-              </a:ext>
-            </a:extLst>
-          </p:cNvPr>
-          <p:cNvSpPr txBox="1"/>
-          <p:nvPr/>
-        </p:nvSpPr>
-        <p:spPr>
-          <a:xfrm>
-            <a:off x="11161643" y="5463947"/>
-            <a:ext cx="785192" cy="377687"/>
-          </a:xfrm>
-          <a:prstGeom prst="rect">
-            <a:avLst/>
-          </a:prstGeom>
-          <a:noFill/>
-        </p:spPr>
-        <p:txBody>
-          <a:bodyPr wrap="square" rtlCol="0">
-            <a:spAutoFit/>
-          </a:bodyPr>
-          <a:lstStyle/>
-          <a:p>
-            <a:r>
-              <a:rPr lang="en-US" dirty="0"/>
-              <a:t>PHWR</a:t>
-            </a:r>
-          </a:p>
-        </p:txBody>
-      </p:sp>
-    </p:spTree>
-    <p:extLst>
-      <p:ext uri="{BB962C8B-B14F-4D97-AF65-F5344CB8AC3E}">
-        <p14:creationId xmlns:p14="http://schemas.microsoft.com/office/powerpoint/2010/main" val="1471129304"/>
-      </p:ext>
-    </p:extLst>
-  </p:cSld>
-  <p:clrMapOvr>
-    <a:masterClrMapping/>
-  </p:clrMapOvr>
-</p:sld>
-</file>
-
-<file path=ppt/slides/slide13.xml><?xml version="1.0" encoding="utf-8"?>
-<p:sld xmlns:a="http://schemas.openxmlformats.org/drawingml/2006/main" xmlns:r="http://schemas.openxmlformats.org/officeDocument/2006/relationships" xmlns:p="http://schemas.openxmlformats.org/presentationml/2006/main">
-  <p:cSld>
-    <p:spTree>
-      <p:nvGrpSpPr>
-        <p:cNvPr id="1" name=""/>
-        <p:cNvGrpSpPr/>
-        <p:nvPr/>
-      </p:nvGrpSpPr>
-      <p:grpSpPr>
-        <a:xfrm>
-          <a:off x="0" y="0"/>
-          <a:ext cx="0" cy="0"/>
-          <a:chOff x="0" y="0"/>
-          <a:chExt cx="0" cy="0"/>
-        </a:xfrm>
-      </p:grpSpPr>
-      <p:sp>
-        <p:nvSpPr>
-          <p:cNvPr id="2" name="Title 1">
-            <a:extLst>
-              <a:ext uri="{FF2B5EF4-FFF2-40B4-BE49-F238E27FC236}">
-                <a16:creationId xmlns:a16="http://schemas.microsoft.com/office/drawing/2014/main" id="{0555DD9A-1220-1144-BD8B-042CC9EB6602}"/>
-              </a:ext>
-            </a:extLst>
-          </p:cNvPr>
-          <p:cNvSpPr>
-            <a:spLocks noGrp="1"/>
-          </p:cNvSpPr>
-          <p:nvPr>
-            <p:ph type="title"/>
-          </p:nvPr>
-        </p:nvSpPr>
-        <p:spPr/>
-        <p:txBody>
-          <a:bodyPr/>
-          <a:lstStyle/>
-          <a:p>
-            <a:r>
-              <a:rPr lang="en-US" dirty="0"/>
-              <a:t>Sufficient Time</a:t>
-            </a:r>
-          </a:p>
-        </p:txBody>
-      </p:sp>
-      <p:sp>
-        <p:nvSpPr>
-          <p:cNvPr id="3" name="Content Placeholder 2">
-            <a:extLst>
-              <a:ext uri="{FF2B5EF4-FFF2-40B4-BE49-F238E27FC236}">
-                <a16:creationId xmlns:a16="http://schemas.microsoft.com/office/drawing/2014/main" id="{566F8C05-B768-114A-A48F-B6FF7320AEF1}"/>
-              </a:ext>
-            </a:extLst>
-          </p:cNvPr>
-          <p:cNvSpPr>
-            <a:spLocks noGrp="1"/>
-          </p:cNvSpPr>
-          <p:nvPr>
-            <p:ph idx="1"/>
-          </p:nvPr>
-        </p:nvSpPr>
-        <p:spPr>
-          <a:xfrm>
-            <a:off x="609600" y="2160495"/>
-            <a:ext cx="6496878" cy="3965670"/>
-          </a:xfrm>
-        </p:spPr>
-        <p:txBody>
-          <a:bodyPr/>
-          <a:lstStyle/>
-          <a:p>
-            <a:r>
-              <a:rPr lang="en-US" sz="2000" dirty="0"/>
-              <a:t>A sufficient duration of time is required for SCC to develop in the cladding</a:t>
-            </a:r>
-          </a:p>
-          <a:p>
-            <a:r>
-              <a:rPr lang="en-US" sz="2000" dirty="0"/>
-              <a:t>The SCC process can be divided into four stages:</a:t>
-            </a:r>
-          </a:p>
-          <a:p>
-            <a:pPr lvl="1"/>
-            <a:r>
-              <a:rPr lang="en-US" sz="2000" dirty="0"/>
-              <a:t>Development of the corrosive environment and the surface conditions required for SCC to initiate,</a:t>
-            </a:r>
-          </a:p>
-          <a:p>
-            <a:pPr lvl="1"/>
-            <a:r>
-              <a:rPr lang="en-US" sz="2000" dirty="0"/>
-              <a:t>Initiation of SCC,</a:t>
-            </a:r>
-          </a:p>
-          <a:p>
-            <a:pPr lvl="1"/>
-            <a:r>
-              <a:rPr lang="en-US" sz="2000" dirty="0"/>
-              <a:t>Propagation of SCC, and</a:t>
-            </a:r>
-          </a:p>
-          <a:p>
-            <a:pPr lvl="1"/>
-            <a:r>
-              <a:rPr lang="en-US" sz="2000" dirty="0"/>
-              <a:t>Failure</a:t>
-            </a:r>
-          </a:p>
-          <a:p>
-            <a:r>
-              <a:rPr lang="en-US" sz="2000" dirty="0"/>
-              <a:t>The SCC-induced crack will typically propagate through the majority of the cladding wall, and then the remaining ligament typically fails by ductile shear</a:t>
-            </a:r>
-          </a:p>
-          <a:p>
-            <a:endParaRPr lang="en-US" sz="2000" dirty="0"/>
-          </a:p>
-        </p:txBody>
-      </p:sp>
-      <p:sp>
-        <p:nvSpPr>
-          <p:cNvPr id="4" name="Slide Number Placeholder 3">
-            <a:extLst>
-              <a:ext uri="{FF2B5EF4-FFF2-40B4-BE49-F238E27FC236}">
-                <a16:creationId xmlns:a16="http://schemas.microsoft.com/office/drawing/2014/main" id="{FBBB87AF-7527-7942-835A-F119283D17F3}"/>
-              </a:ext>
-            </a:extLst>
-          </p:cNvPr>
-          <p:cNvSpPr>
-            <a:spLocks noGrp="1"/>
-          </p:cNvSpPr>
-          <p:nvPr>
-            <p:ph type="sldNum" sz="quarter" idx="12"/>
-          </p:nvPr>
-        </p:nvSpPr>
-        <p:spPr/>
-        <p:txBody>
-          <a:bodyPr/>
-          <a:lstStyle/>
-          <a:p>
-            <a:pPr>
-              <a:defRPr/>
-            </a:pPr>
-            <a:fld id="{3FF2C605-4958-CF43-AA48-80339EFDB0AF}" type="slidenum">
-              <a:rPr lang="en-US" smtClean="0"/>
-              <a:pPr>
-                <a:defRPr/>
-              </a:pPr>
-              <a:t>13</a:t>
-            </a:fld>
-            <a:endParaRPr lang="en-US"/>
-          </a:p>
-        </p:txBody>
-      </p:sp>
-      <p:pic>
-        <p:nvPicPr>
-          <p:cNvPr id="5" name="Picture 4">
-            <a:extLst>
-              <a:ext uri="{FF2B5EF4-FFF2-40B4-BE49-F238E27FC236}">
-                <a16:creationId xmlns:a16="http://schemas.microsoft.com/office/drawing/2014/main" id="{791FA79B-1788-574C-B497-510F5D08D8E8}"/>
-              </a:ext>
-            </a:extLst>
-          </p:cNvPr>
-          <p:cNvPicPr>
-            <a:picLocks noChangeAspect="1"/>
-          </p:cNvPicPr>
-          <p:nvPr/>
-        </p:nvPicPr>
-        <p:blipFill>
-          <a:blip r:embed="rId2"/>
-          <a:stretch>
-            <a:fillRect/>
-          </a:stretch>
-        </p:blipFill>
-        <p:spPr>
-          <a:xfrm>
-            <a:off x="7054459" y="2490317"/>
-            <a:ext cx="4906731" cy="2678032"/>
-          </a:xfrm>
-          <a:prstGeom prst="rect">
-            <a:avLst/>
-          </a:prstGeom>
-        </p:spPr>
-      </p:pic>
-    </p:spTree>
-    <p:extLst>
-      <p:ext uri="{BB962C8B-B14F-4D97-AF65-F5344CB8AC3E}">
-        <p14:creationId xmlns:p14="http://schemas.microsoft.com/office/powerpoint/2010/main" val="1497798887"/>
-      </p:ext>
-    </p:extLst>
-  </p:cSld>
-  <p:clrMapOvr>
-    <a:masterClrMapping/>
-  </p:clrMapOvr>
-</p:sld>
-</file>
-
-<file path=ppt/slides/slide14.xml><?xml version="1.0" encoding="utf-8"?>
-<p:sld xmlns:a="http://schemas.openxmlformats.org/drawingml/2006/main" xmlns:r="http://schemas.openxmlformats.org/officeDocument/2006/relationships" xmlns:p="http://schemas.openxmlformats.org/presentationml/2006/main">
-  <p:cSld>
-    <p:spTree>
-      <p:nvGrpSpPr>
-        <p:cNvPr id="1" name=""/>
-        <p:cNvGrpSpPr/>
-        <p:nvPr/>
-      </p:nvGrpSpPr>
-      <p:grpSpPr>
-        <a:xfrm>
-          <a:off x="0" y="0"/>
-          <a:ext cx="0" cy="0"/>
-          <a:chOff x="0" y="0"/>
-          <a:chExt cx="0" cy="0"/>
-        </a:xfrm>
-      </p:grpSpPr>
-      <p:sp>
-        <p:nvSpPr>
-          <p:cNvPr id="2" name="Title 1">
-            <a:extLst>
-              <a:ext uri="{FF2B5EF4-FFF2-40B4-BE49-F238E27FC236}">
-                <a16:creationId xmlns:a16="http://schemas.microsoft.com/office/drawing/2014/main" id="{11143CB5-ECD5-BD4E-8755-4D707D76FDE3}"/>
-              </a:ext>
-            </a:extLst>
-          </p:cNvPr>
-          <p:cNvSpPr>
-            <a:spLocks noGrp="1"/>
-          </p:cNvSpPr>
-          <p:nvPr>
-            <p:ph type="title"/>
-          </p:nvPr>
-        </p:nvSpPr>
-        <p:spPr/>
-        <p:txBody>
-          <a:bodyPr/>
-          <a:lstStyle/>
-          <a:p>
-            <a:r>
-              <a:rPr lang="en-US" dirty="0"/>
-              <a:t>Effect of Burnup</a:t>
-            </a:r>
-          </a:p>
-        </p:txBody>
-      </p:sp>
-      <p:sp>
-        <p:nvSpPr>
-          <p:cNvPr id="3" name="Content Placeholder 2">
-            <a:extLst>
-              <a:ext uri="{FF2B5EF4-FFF2-40B4-BE49-F238E27FC236}">
-                <a16:creationId xmlns:a16="http://schemas.microsoft.com/office/drawing/2014/main" id="{EB301521-ADC4-384B-A325-7953D67ACCBF}"/>
-              </a:ext>
-            </a:extLst>
-          </p:cNvPr>
-          <p:cNvSpPr>
-            <a:spLocks noGrp="1"/>
-          </p:cNvSpPr>
-          <p:nvPr>
-            <p:ph idx="1"/>
-          </p:nvPr>
-        </p:nvSpPr>
-        <p:spPr>
-          <a:xfrm>
-            <a:off x="609600" y="2160495"/>
-            <a:ext cx="7470913" cy="3965670"/>
-          </a:xfrm>
-        </p:spPr>
-        <p:txBody>
-          <a:bodyPr/>
-          <a:lstStyle/>
-          <a:p>
-            <a:r>
-              <a:rPr lang="en-US" sz="2000" dirty="0"/>
-              <a:t>The period of time to establish the conditions for SCC is related to burnup, and is complicated by the numerous mechanisms associated with changes in both the fuel and cladding during the course of irradiation</a:t>
-            </a:r>
-          </a:p>
-          <a:p>
-            <a:r>
-              <a:rPr lang="en-US" sz="2000" dirty="0"/>
-              <a:t>The mechanisms with relevance to SCC that become more pronounced with burnup include irradiation damage to the cladding, fission product swelling, fission gas release, and formation of a High Burnup Structure</a:t>
-            </a:r>
-          </a:p>
-          <a:p>
-            <a:r>
-              <a:rPr lang="en-US" sz="2000" dirty="0"/>
-              <a:t>The local burnup in the rim region can be 2–3 times greater than the average burnup in highly irradiated fuel, which means that the local concentrations of fission and activation products in the rim region are considerably higher, which have a direct influence on the fuel surface chemistry</a:t>
-            </a:r>
-          </a:p>
-          <a:p>
-            <a:endParaRPr lang="en-US" sz="2000" dirty="0"/>
-          </a:p>
-          <a:p>
-            <a:endParaRPr lang="en-US" sz="2000" dirty="0"/>
-          </a:p>
-          <a:p>
-            <a:endParaRPr lang="en-US" sz="2000" dirty="0"/>
-          </a:p>
-          <a:p>
-            <a:endParaRPr lang="en-US" sz="2000" dirty="0"/>
-          </a:p>
-        </p:txBody>
-      </p:sp>
-      <p:sp>
-        <p:nvSpPr>
-          <p:cNvPr id="4" name="Slide Number Placeholder 3">
-            <a:extLst>
-              <a:ext uri="{FF2B5EF4-FFF2-40B4-BE49-F238E27FC236}">
-                <a16:creationId xmlns:a16="http://schemas.microsoft.com/office/drawing/2014/main" id="{37EB7E91-A068-524A-A68A-7FA2037C0CC3}"/>
-              </a:ext>
-            </a:extLst>
-          </p:cNvPr>
-          <p:cNvSpPr>
-            <a:spLocks noGrp="1"/>
-          </p:cNvSpPr>
-          <p:nvPr>
-            <p:ph type="sldNum" sz="quarter" idx="12"/>
-          </p:nvPr>
-        </p:nvSpPr>
-        <p:spPr/>
-        <p:txBody>
-          <a:bodyPr/>
-          <a:lstStyle/>
-          <a:p>
-            <a:pPr>
-              <a:defRPr/>
-            </a:pPr>
-            <a:fld id="{3FF2C605-4958-CF43-AA48-80339EFDB0AF}" type="slidenum">
-              <a:rPr lang="en-US" smtClean="0"/>
-              <a:pPr>
-                <a:defRPr/>
-              </a:pPr>
-              <a:t>14</a:t>
-            </a:fld>
-            <a:endParaRPr lang="en-US"/>
-          </a:p>
-        </p:txBody>
-      </p:sp>
-      <p:pic>
-        <p:nvPicPr>
-          <p:cNvPr id="5" name="Picture 4">
-            <a:extLst>
-              <a:ext uri="{FF2B5EF4-FFF2-40B4-BE49-F238E27FC236}">
-                <a16:creationId xmlns:a16="http://schemas.microsoft.com/office/drawing/2014/main" id="{426015F6-E79E-EA43-9381-6402A993FD22}"/>
-              </a:ext>
-            </a:extLst>
-          </p:cNvPr>
-          <p:cNvPicPr>
-            <a:picLocks noChangeAspect="1"/>
-          </p:cNvPicPr>
-          <p:nvPr/>
-        </p:nvPicPr>
-        <p:blipFill>
-          <a:blip r:embed="rId2"/>
-          <a:stretch>
-            <a:fillRect/>
-          </a:stretch>
-        </p:blipFill>
-        <p:spPr>
-          <a:xfrm>
-            <a:off x="8080513" y="2484712"/>
-            <a:ext cx="3919900" cy="3071262"/>
-          </a:xfrm>
-          <a:prstGeom prst="rect">
-            <a:avLst/>
-          </a:prstGeom>
-        </p:spPr>
-      </p:pic>
-    </p:spTree>
-    <p:extLst>
-      <p:ext uri="{BB962C8B-B14F-4D97-AF65-F5344CB8AC3E}">
-        <p14:creationId xmlns:p14="http://schemas.microsoft.com/office/powerpoint/2010/main" val="3410169714"/>
-      </p:ext>
-    </p:extLst>
-  </p:cSld>
-  <p:clrMapOvr>
-    <a:masterClrMapping/>
-  </p:clrMapOvr>
-</p:sld>
-</file>
-
-<file path=ppt/slides/slide15.xml><?xml version="1.0" encoding="utf-8"?>
-<p:sld xmlns:a="http://schemas.openxmlformats.org/drawingml/2006/main" xmlns:r="http://schemas.openxmlformats.org/officeDocument/2006/relationships" xmlns:p="http://schemas.openxmlformats.org/presentationml/2006/main">
-  <p:cSld>
-    <p:spTree>
-      <p:nvGrpSpPr>
-        <p:cNvPr id="1" name=""/>
-        <p:cNvGrpSpPr/>
-        <p:nvPr/>
-      </p:nvGrpSpPr>
-      <p:grpSpPr>
-        <a:xfrm>
-          <a:off x="0" y="0"/>
-          <a:ext cx="0" cy="0"/>
-          <a:chOff x="0" y="0"/>
-          <a:chExt cx="0" cy="0"/>
-        </a:xfrm>
-      </p:grpSpPr>
-      <p:sp>
-        <p:nvSpPr>
-          <p:cNvPr id="2" name="Title 1">
-            <a:extLst>
-              <a:ext uri="{FF2B5EF4-FFF2-40B4-BE49-F238E27FC236}">
-                <a16:creationId xmlns:a16="http://schemas.microsoft.com/office/drawing/2014/main" id="{D49DAC8C-D51F-3D4E-AC9F-8E4CCBFC19BB}"/>
-              </a:ext>
-            </a:extLst>
-          </p:cNvPr>
-          <p:cNvSpPr>
-            <a:spLocks noGrp="1"/>
-          </p:cNvSpPr>
-          <p:nvPr>
-            <p:ph type="title"/>
-          </p:nvPr>
-        </p:nvSpPr>
-        <p:spPr/>
-        <p:txBody>
-          <a:bodyPr/>
-          <a:lstStyle/>
-          <a:p>
-            <a:r>
-              <a:rPr lang="en-US" dirty="0"/>
-              <a:t>Rim/HBS Region</a:t>
-            </a:r>
-          </a:p>
-        </p:txBody>
-      </p:sp>
-      <p:sp>
-        <p:nvSpPr>
-          <p:cNvPr id="3" name="Content Placeholder 2">
-            <a:extLst>
-              <a:ext uri="{FF2B5EF4-FFF2-40B4-BE49-F238E27FC236}">
-                <a16:creationId xmlns:a16="http://schemas.microsoft.com/office/drawing/2014/main" id="{7C9F432B-BD93-754E-A252-7F89F8D02E72}"/>
-              </a:ext>
-            </a:extLst>
-          </p:cNvPr>
-          <p:cNvSpPr>
-            <a:spLocks noGrp="1"/>
-          </p:cNvSpPr>
-          <p:nvPr>
-            <p:ph idx="1"/>
-          </p:nvPr>
-        </p:nvSpPr>
-        <p:spPr>
-          <a:xfrm>
-            <a:off x="609600" y="2160495"/>
-            <a:ext cx="7113104" cy="3965670"/>
-          </a:xfrm>
-        </p:spPr>
-        <p:txBody>
-          <a:bodyPr/>
-          <a:lstStyle/>
-          <a:p>
-            <a:r>
-              <a:rPr lang="en-US" sz="2000" dirty="0"/>
-              <a:t>In medium burnup fuels, an internal zirconia layer 6–12 mm thick forms on the clad inner wall as soon as pellet-clad contact occurs</a:t>
-            </a:r>
-          </a:p>
-          <a:p>
-            <a:r>
-              <a:rPr lang="en-US" sz="2000" dirty="0"/>
-              <a:t>The coverage of the clad internal surface by zirconia tends to extend progressively with further irradiation and gap closing</a:t>
-            </a:r>
-          </a:p>
-          <a:p>
-            <a:r>
-              <a:rPr lang="en-US" sz="2000" dirty="0"/>
-              <a:t>High burnup fuel shows the development of a very effective pellet-clad bonding characterized by an intimate mixing of U and of the internal zirconia layer</a:t>
-            </a:r>
-          </a:p>
-          <a:p>
-            <a:r>
-              <a:rPr lang="en-US" sz="2000" dirty="0"/>
-              <a:t>Pellet-clad bonding, has been observed and seems to be controlled by the irradiation duration at closed pellet-clad gap</a:t>
-            </a:r>
-          </a:p>
-          <a:p>
-            <a:endParaRPr lang="en-US" sz="2000" dirty="0"/>
-          </a:p>
-        </p:txBody>
-      </p:sp>
-      <p:sp>
-        <p:nvSpPr>
-          <p:cNvPr id="4" name="Slide Number Placeholder 3">
-            <a:extLst>
-              <a:ext uri="{FF2B5EF4-FFF2-40B4-BE49-F238E27FC236}">
-                <a16:creationId xmlns:a16="http://schemas.microsoft.com/office/drawing/2014/main" id="{9405EA36-273D-4D4F-A697-6F935AC1678D}"/>
-              </a:ext>
-            </a:extLst>
-          </p:cNvPr>
-          <p:cNvSpPr>
-            <a:spLocks noGrp="1"/>
-          </p:cNvSpPr>
-          <p:nvPr>
-            <p:ph type="sldNum" sz="quarter" idx="12"/>
-          </p:nvPr>
-        </p:nvSpPr>
-        <p:spPr/>
-        <p:txBody>
-          <a:bodyPr/>
-          <a:lstStyle/>
-          <a:p>
-            <a:pPr>
-              <a:defRPr/>
-            </a:pPr>
-            <a:fld id="{3FF2C605-4958-CF43-AA48-80339EFDB0AF}" type="slidenum">
-              <a:rPr lang="en-US" smtClean="0"/>
-              <a:pPr>
-                <a:defRPr/>
-              </a:pPr>
-              <a:t>15</a:t>
-            </a:fld>
-            <a:endParaRPr lang="en-US"/>
-          </a:p>
-        </p:txBody>
-      </p:sp>
-      <p:pic>
-        <p:nvPicPr>
-          <p:cNvPr id="5" name="Picture 4">
-            <a:extLst>
-              <a:ext uri="{FF2B5EF4-FFF2-40B4-BE49-F238E27FC236}">
-                <a16:creationId xmlns:a16="http://schemas.microsoft.com/office/drawing/2014/main" id="{B0B97EA5-85C8-FF4C-9B3F-D12C52923C94}"/>
-              </a:ext>
-            </a:extLst>
-          </p:cNvPr>
-          <p:cNvPicPr>
-            <a:picLocks noChangeAspect="1"/>
-          </p:cNvPicPr>
-          <p:nvPr/>
-        </p:nvPicPr>
-        <p:blipFill rotWithShape="1">
-          <a:blip r:embed="rId2"/>
-          <a:srcRect r="50958"/>
-          <a:stretch/>
-        </p:blipFill>
-        <p:spPr>
-          <a:xfrm>
-            <a:off x="8222837" y="2374465"/>
-            <a:ext cx="3634545" cy="3006508"/>
-          </a:xfrm>
-          <a:prstGeom prst="rect">
-            <a:avLst/>
-          </a:prstGeom>
-        </p:spPr>
-      </p:pic>
-    </p:spTree>
-    <p:extLst>
-      <p:ext uri="{BB962C8B-B14F-4D97-AF65-F5344CB8AC3E}">
-        <p14:creationId xmlns:p14="http://schemas.microsoft.com/office/powerpoint/2010/main" val="3539285791"/>
-      </p:ext>
-    </p:extLst>
-  </p:cSld>
-  <p:clrMapOvr>
-    <a:masterClrMapping/>
-  </p:clrMapOvr>
-</p:sld>
-</file>
-
-<file path=ppt/slides/slide16.xml><?xml version="1.0" encoding="utf-8"?>
-<p:sld xmlns:a="http://schemas.openxmlformats.org/drawingml/2006/main" xmlns:r="http://schemas.openxmlformats.org/officeDocument/2006/relationships" xmlns:p="http://schemas.openxmlformats.org/presentationml/2006/main">
-  <p:cSld>
-    <p:spTree>
-      <p:nvGrpSpPr>
-        <p:cNvPr id="1" name=""/>
-        <p:cNvGrpSpPr/>
-        <p:nvPr/>
-      </p:nvGrpSpPr>
-      <p:grpSpPr>
-        <a:xfrm>
-          <a:off x="0" y="0"/>
-          <a:ext cx="0" cy="0"/>
-          <a:chOff x="0" y="0"/>
-          <a:chExt cx="0" cy="0"/>
-        </a:xfrm>
-      </p:grpSpPr>
-      <p:sp>
-        <p:nvSpPr>
-          <p:cNvPr id="2" name="Title 1">
-            <a:extLst>
-              <a:ext uri="{FF2B5EF4-FFF2-40B4-BE49-F238E27FC236}">
-                <a16:creationId xmlns:a16="http://schemas.microsoft.com/office/drawing/2014/main" id="{77E1810E-872A-8442-A155-D866A12AA58F}"/>
-              </a:ext>
-            </a:extLst>
-          </p:cNvPr>
-          <p:cNvSpPr>
-            <a:spLocks noGrp="1"/>
-          </p:cNvSpPr>
-          <p:nvPr>
-            <p:ph type="title"/>
-          </p:nvPr>
-        </p:nvSpPr>
-        <p:spPr/>
-        <p:txBody>
-          <a:bodyPr/>
-          <a:lstStyle/>
-          <a:p>
-            <a:r>
-              <a:rPr lang="en-US" dirty="0"/>
-              <a:t>Rim/HBS Region</a:t>
-            </a:r>
-          </a:p>
-        </p:txBody>
-      </p:sp>
-      <p:sp>
-        <p:nvSpPr>
-          <p:cNvPr id="3" name="Content Placeholder 2">
-            <a:extLst>
-              <a:ext uri="{FF2B5EF4-FFF2-40B4-BE49-F238E27FC236}">
-                <a16:creationId xmlns:a16="http://schemas.microsoft.com/office/drawing/2014/main" id="{54966A64-C35B-EB44-9E7E-612E7FC54E1C}"/>
-              </a:ext>
-            </a:extLst>
-          </p:cNvPr>
-          <p:cNvSpPr>
-            <a:spLocks noGrp="1"/>
-          </p:cNvSpPr>
-          <p:nvPr>
-            <p:ph idx="1"/>
-          </p:nvPr>
-        </p:nvSpPr>
-        <p:spPr>
-          <a:xfrm>
-            <a:off x="609600" y="2160495"/>
-            <a:ext cx="5661991" cy="3965670"/>
-          </a:xfrm>
-        </p:spPr>
-        <p:txBody>
-          <a:bodyPr/>
-          <a:lstStyle/>
-          <a:p>
-            <a:r>
-              <a:rPr lang="en-US" sz="2000" dirty="0"/>
-              <a:t>The HBS region has a much higher porosity (up to 30% locally) than the bulk of the fuel, which affects the mechanical properties</a:t>
-            </a:r>
-          </a:p>
-          <a:p>
-            <a:r>
-              <a:rPr lang="en-US" sz="2000" dirty="0"/>
-              <a:t>Microhardness measurements show an inverse trend of the strength with porosity</a:t>
-            </a:r>
-          </a:p>
-          <a:p>
-            <a:r>
-              <a:rPr lang="en-US" sz="2000" dirty="0"/>
-              <a:t>The softening of the fuel surface might be beneficial in reducing mechanical stresses imposed by the fuel on the cladding at the point of contact</a:t>
-            </a:r>
-          </a:p>
-          <a:p>
-            <a:endParaRPr lang="en-US" sz="2000" dirty="0"/>
-          </a:p>
-        </p:txBody>
-      </p:sp>
-      <p:sp>
-        <p:nvSpPr>
-          <p:cNvPr id="4" name="Slide Number Placeholder 3">
-            <a:extLst>
-              <a:ext uri="{FF2B5EF4-FFF2-40B4-BE49-F238E27FC236}">
-                <a16:creationId xmlns:a16="http://schemas.microsoft.com/office/drawing/2014/main" id="{8FE7966F-5105-6146-B368-3408D6660A17}"/>
-              </a:ext>
-            </a:extLst>
-          </p:cNvPr>
-          <p:cNvSpPr>
-            <a:spLocks noGrp="1"/>
-          </p:cNvSpPr>
-          <p:nvPr>
-            <p:ph type="sldNum" sz="quarter" idx="12"/>
-          </p:nvPr>
-        </p:nvSpPr>
-        <p:spPr/>
-        <p:txBody>
-          <a:bodyPr/>
-          <a:lstStyle/>
-          <a:p>
-            <a:pPr>
-              <a:defRPr/>
-            </a:pPr>
-            <a:fld id="{3FF2C605-4958-CF43-AA48-80339EFDB0AF}" type="slidenum">
-              <a:rPr lang="en-US" smtClean="0"/>
-              <a:pPr>
-                <a:defRPr/>
-              </a:pPr>
-              <a:t>16</a:t>
-            </a:fld>
-            <a:endParaRPr lang="en-US"/>
-          </a:p>
-        </p:txBody>
-      </p:sp>
-      <p:pic>
-        <p:nvPicPr>
-          <p:cNvPr id="5" name="Picture 4">
-            <a:extLst>
-              <a:ext uri="{FF2B5EF4-FFF2-40B4-BE49-F238E27FC236}">
-                <a16:creationId xmlns:a16="http://schemas.microsoft.com/office/drawing/2014/main" id="{F79872E4-D76F-ED4C-B38E-B6D74EEFA821}"/>
-              </a:ext>
-            </a:extLst>
-          </p:cNvPr>
-          <p:cNvPicPr>
-            <a:picLocks noChangeAspect="1"/>
-          </p:cNvPicPr>
-          <p:nvPr/>
-        </p:nvPicPr>
-        <p:blipFill>
-          <a:blip r:embed="rId2"/>
-          <a:stretch>
-            <a:fillRect/>
-          </a:stretch>
-        </p:blipFill>
-        <p:spPr>
-          <a:xfrm>
-            <a:off x="6602773" y="2424111"/>
-            <a:ext cx="5371669" cy="3298205"/>
-          </a:xfrm>
-          <a:prstGeom prst="rect">
-            <a:avLst/>
-          </a:prstGeom>
-        </p:spPr>
-      </p:pic>
-    </p:spTree>
-    <p:extLst>
-      <p:ext uri="{BB962C8B-B14F-4D97-AF65-F5344CB8AC3E}">
-        <p14:creationId xmlns:p14="http://schemas.microsoft.com/office/powerpoint/2010/main" val="1789801955"/>
-      </p:ext>
-    </p:extLst>
-  </p:cSld>
-  <p:clrMapOvr>
-    <a:masterClrMapping/>
-  </p:clrMapOvr>
-</p:sld>
-</file>
-
-<file path=ppt/slides/slide17.xml><?xml version="1.0" encoding="utf-8"?>
-<p:sld xmlns:a="http://schemas.openxmlformats.org/drawingml/2006/main" xmlns:r="http://schemas.openxmlformats.org/officeDocument/2006/relationships" xmlns:p="http://schemas.openxmlformats.org/presentationml/2006/main">
-  <p:cSld>
-    <p:spTree>
-      <p:nvGrpSpPr>
-        <p:cNvPr id="1" name=""/>
-        <p:cNvGrpSpPr/>
-        <p:nvPr/>
-      </p:nvGrpSpPr>
-      <p:grpSpPr>
-        <a:xfrm>
-          <a:off x="0" y="0"/>
-          <a:ext cx="0" cy="0"/>
-          <a:chOff x="0" y="0"/>
-          <a:chExt cx="0" cy="0"/>
-        </a:xfrm>
-      </p:grpSpPr>
-      <p:sp>
-        <p:nvSpPr>
-          <p:cNvPr id="2" name="Title 1">
-            <a:extLst>
-              <a:ext uri="{FF2B5EF4-FFF2-40B4-BE49-F238E27FC236}">
-                <a16:creationId xmlns:a16="http://schemas.microsoft.com/office/drawing/2014/main" id="{311FF886-29FF-7545-BBF9-5A5DD9867A13}"/>
-              </a:ext>
-            </a:extLst>
-          </p:cNvPr>
-          <p:cNvSpPr>
-            <a:spLocks noGrp="1"/>
-          </p:cNvSpPr>
-          <p:nvPr>
-            <p:ph type="title"/>
-          </p:nvPr>
-        </p:nvSpPr>
-        <p:spPr/>
-        <p:txBody>
-          <a:bodyPr/>
-          <a:lstStyle/>
-          <a:p>
-            <a:r>
-              <a:rPr lang="en-US" dirty="0"/>
-              <a:t>HBS and Fission Gas Release</a:t>
-            </a:r>
-          </a:p>
-        </p:txBody>
-      </p:sp>
-      <p:sp>
-        <p:nvSpPr>
-          <p:cNvPr id="3" name="Content Placeholder 2">
-            <a:extLst>
-              <a:ext uri="{FF2B5EF4-FFF2-40B4-BE49-F238E27FC236}">
-                <a16:creationId xmlns:a16="http://schemas.microsoft.com/office/drawing/2014/main" id="{C6178F3E-0DFC-EE47-AAAC-5F32BE74B5AD}"/>
-              </a:ext>
-            </a:extLst>
-          </p:cNvPr>
-          <p:cNvSpPr>
-            <a:spLocks noGrp="1"/>
-          </p:cNvSpPr>
-          <p:nvPr>
-            <p:ph idx="1"/>
-          </p:nvPr>
-        </p:nvSpPr>
-        <p:spPr>
-          <a:xfrm>
-            <a:off x="609600" y="2160495"/>
-            <a:ext cx="6725478" cy="3965670"/>
-          </a:xfrm>
-        </p:spPr>
-        <p:txBody>
-          <a:bodyPr/>
-          <a:lstStyle/>
-          <a:p>
-            <a:r>
-              <a:rPr lang="en-US" dirty="0"/>
-              <a:t>The large increase in porosity within the HBS in high burnup fuel also affects fission gas release, providing local intergranular accommodation for retaining fission gases</a:t>
-            </a:r>
-          </a:p>
-          <a:p>
-            <a:r>
-              <a:rPr lang="en-US" dirty="0"/>
-              <a:t>Although the formation of the HBS promotes local fission gas retention, the fraction of fission gases that are released to the gap still increases with burnup</a:t>
-            </a:r>
-          </a:p>
-          <a:p>
-            <a:endParaRPr lang="en-US" dirty="0"/>
-          </a:p>
-          <a:p>
-            <a:endParaRPr lang="en-US" dirty="0"/>
-          </a:p>
-        </p:txBody>
-      </p:sp>
-      <p:sp>
-        <p:nvSpPr>
-          <p:cNvPr id="4" name="Slide Number Placeholder 3">
-            <a:extLst>
-              <a:ext uri="{FF2B5EF4-FFF2-40B4-BE49-F238E27FC236}">
-                <a16:creationId xmlns:a16="http://schemas.microsoft.com/office/drawing/2014/main" id="{3F5C3E58-1917-1447-9D06-A9D9853D6F04}"/>
-              </a:ext>
-            </a:extLst>
-          </p:cNvPr>
-          <p:cNvSpPr>
-            <a:spLocks noGrp="1"/>
-          </p:cNvSpPr>
-          <p:nvPr>
-            <p:ph type="sldNum" sz="quarter" idx="12"/>
-          </p:nvPr>
-        </p:nvSpPr>
-        <p:spPr/>
-        <p:txBody>
-          <a:bodyPr/>
-          <a:lstStyle/>
-          <a:p>
-            <a:pPr>
-              <a:defRPr/>
-            </a:pPr>
-            <a:fld id="{3FF2C605-4958-CF43-AA48-80339EFDB0AF}" type="slidenum">
-              <a:rPr lang="en-US" smtClean="0"/>
-              <a:pPr>
-                <a:defRPr/>
-              </a:pPr>
-              <a:t>17</a:t>
-            </a:fld>
-            <a:endParaRPr lang="en-US"/>
-          </a:p>
-        </p:txBody>
-      </p:sp>
-      <p:pic>
-        <p:nvPicPr>
-          <p:cNvPr id="5" name="Picture 4">
-            <a:extLst>
-              <a:ext uri="{FF2B5EF4-FFF2-40B4-BE49-F238E27FC236}">
-                <a16:creationId xmlns:a16="http://schemas.microsoft.com/office/drawing/2014/main" id="{49391CD0-F1F0-7B4F-9B77-8511B0997003}"/>
-              </a:ext>
-            </a:extLst>
-          </p:cNvPr>
-          <p:cNvPicPr>
-            <a:picLocks noChangeAspect="1"/>
-          </p:cNvPicPr>
-          <p:nvPr/>
-        </p:nvPicPr>
-        <p:blipFill>
-          <a:blip r:embed="rId2"/>
-          <a:stretch>
-            <a:fillRect/>
-          </a:stretch>
-        </p:blipFill>
-        <p:spPr>
-          <a:xfrm>
-            <a:off x="7684991" y="2075621"/>
-            <a:ext cx="4433018" cy="3221936"/>
-          </a:xfrm>
-          <a:prstGeom prst="rect">
-            <a:avLst/>
-          </a:prstGeom>
-        </p:spPr>
-      </p:pic>
-    </p:spTree>
-    <p:extLst>
-      <p:ext uri="{BB962C8B-B14F-4D97-AF65-F5344CB8AC3E}">
-        <p14:creationId xmlns:p14="http://schemas.microsoft.com/office/powerpoint/2010/main" val="1020499243"/>
-      </p:ext>
-    </p:extLst>
-  </p:cSld>
-  <p:clrMapOvr>
-    <a:masterClrMapping/>
-  </p:clrMapOvr>
-</p:sld>
-</file>
-
-<file path=ppt/slides/slide18.xml><?xml version="1.0" encoding="utf-8"?>
-<p:sld xmlns:a="http://schemas.openxmlformats.org/drawingml/2006/main" xmlns:r="http://schemas.openxmlformats.org/officeDocument/2006/relationships" xmlns:p="http://schemas.openxmlformats.org/presentationml/2006/main">
-  <p:cSld>
-    <p:spTree>
-      <p:nvGrpSpPr>
-        <p:cNvPr id="1" name=""/>
-        <p:cNvGrpSpPr/>
-        <p:nvPr/>
-      </p:nvGrpSpPr>
-      <p:grpSpPr>
-        <a:xfrm>
-          <a:off x="0" y="0"/>
-          <a:ext cx="0" cy="0"/>
-          <a:chOff x="0" y="0"/>
-          <a:chExt cx="0" cy="0"/>
-        </a:xfrm>
-      </p:grpSpPr>
-      <p:sp>
-        <p:nvSpPr>
-          <p:cNvPr id="2" name="Title 1">
-            <a:extLst>
-              <a:ext uri="{FF2B5EF4-FFF2-40B4-BE49-F238E27FC236}">
-                <a16:creationId xmlns:a16="http://schemas.microsoft.com/office/drawing/2014/main" id="{DA774063-561C-7B43-A6EC-B0A56677ECFB}"/>
-              </a:ext>
-            </a:extLst>
-          </p:cNvPr>
-          <p:cNvSpPr>
-            <a:spLocks noGrp="1"/>
-          </p:cNvSpPr>
-          <p:nvPr>
-            <p:ph type="title"/>
-          </p:nvPr>
-        </p:nvSpPr>
-        <p:spPr/>
-        <p:txBody>
-          <a:bodyPr/>
-          <a:lstStyle/>
-          <a:p>
-            <a:r>
-              <a:rPr lang="en-US" dirty="0"/>
-              <a:t>Incubation Time</a:t>
-            </a:r>
-          </a:p>
-        </p:txBody>
-      </p:sp>
-      <p:sp>
-        <p:nvSpPr>
-          <p:cNvPr id="3" name="Content Placeholder 2">
-            <a:extLst>
-              <a:ext uri="{FF2B5EF4-FFF2-40B4-BE49-F238E27FC236}">
-                <a16:creationId xmlns:a16="http://schemas.microsoft.com/office/drawing/2014/main" id="{D3CB08B0-934B-B34B-A890-0A932C4E7E43}"/>
-              </a:ext>
-            </a:extLst>
-          </p:cNvPr>
-          <p:cNvSpPr>
-            <a:spLocks noGrp="1"/>
-          </p:cNvSpPr>
-          <p:nvPr>
-            <p:ph idx="1"/>
-          </p:nvPr>
-        </p:nvSpPr>
-        <p:spPr>
-          <a:xfrm>
-            <a:off x="609600" y="2160495"/>
-            <a:ext cx="8128000" cy="3965670"/>
-          </a:xfrm>
-        </p:spPr>
-        <p:txBody>
-          <a:bodyPr/>
-          <a:lstStyle/>
-          <a:p>
-            <a:r>
-              <a:rPr lang="en-US" sz="2000" dirty="0"/>
-              <a:t>The corrosive environment, represented by a sufficient inventory of chemically active fission gases in the gap, not only depends on burnup, but the ability of these gases to chemically attack the cladding</a:t>
-            </a:r>
-          </a:p>
-          <a:p>
-            <a:r>
-              <a:rPr lang="en-US" sz="2000" dirty="0"/>
-              <a:t>This environment requires that the normally protective oxide coating on the inner surface of the cladding is breached, thus permitting corrosive species to chemically react with the bare cladding</a:t>
-            </a:r>
-          </a:p>
-          <a:p>
-            <a:r>
-              <a:rPr lang="en-US" sz="2000" dirty="0"/>
-              <a:t>The incubation time reflects the time required for a flaw in the protective oxide to be developed and for sufficient ZrI4 to form in the cladding, resulting in the development of cracks</a:t>
-            </a:r>
-          </a:p>
-          <a:p>
-            <a:endParaRPr lang="en-US" sz="2000" dirty="0"/>
-          </a:p>
-          <a:p>
-            <a:endParaRPr lang="en-US" sz="2000" dirty="0"/>
-          </a:p>
-        </p:txBody>
-      </p:sp>
-      <p:sp>
-        <p:nvSpPr>
-          <p:cNvPr id="4" name="Slide Number Placeholder 3">
-            <a:extLst>
-              <a:ext uri="{FF2B5EF4-FFF2-40B4-BE49-F238E27FC236}">
-                <a16:creationId xmlns:a16="http://schemas.microsoft.com/office/drawing/2014/main" id="{475BB7BF-C98F-A743-8620-62B55C634083}"/>
+                <a16:creationId xmlns:a16="http://schemas.microsoft.com/office/drawing/2014/main" id="{215C8750-2B58-7A4B-84C2-24D693AD1937}"/>
               </a:ext>
             </a:extLst>
           </p:cNvPr>
@@ -5481,1404 +3933,7 @@
                 <a:tabLst/>
                 <a:defRPr/>
               </a:pPr>
-              <a:t>18</a:t>
-            </a:fld>
-            <a:endParaRPr kumimoji="0" lang="en-US" sz="1200" b="0" i="0" u="none" strike="noStrike" kern="1200" cap="none" spc="0" normalizeH="0" baseline="0" noProof="0">
-              <a:ln>
-                <a:noFill/>
-              </a:ln>
-              <a:solidFill>
-                <a:prstClr val="black">
-                  <a:tint val="75000"/>
-                </a:prstClr>
-              </a:solidFill>
-              <a:effectLst/>
-              <a:uLnTx/>
-              <a:uFillTx/>
-              <a:latin typeface="Calibri"/>
-              <a:ea typeface="+mn-ea"/>
-              <a:cs typeface="+mn-cs"/>
-            </a:endParaRPr>
-          </a:p>
-        </p:txBody>
-      </p:sp>
-      <p:pic>
-        <p:nvPicPr>
-          <p:cNvPr id="5" name="Picture 4">
-            <a:extLst>
-              <a:ext uri="{FF2B5EF4-FFF2-40B4-BE49-F238E27FC236}">
-                <a16:creationId xmlns:a16="http://schemas.microsoft.com/office/drawing/2014/main" id="{5861E6A0-13FC-D44B-8134-B0065CA06AB3}"/>
-              </a:ext>
-            </a:extLst>
-          </p:cNvPr>
-          <p:cNvPicPr>
-            <a:picLocks noChangeAspect="1"/>
-          </p:cNvPicPr>
-          <p:nvPr/>
-        </p:nvPicPr>
-        <p:blipFill>
-          <a:blip r:embed="rId2"/>
-          <a:stretch>
-            <a:fillRect/>
-          </a:stretch>
-        </p:blipFill>
-        <p:spPr>
-          <a:xfrm>
-            <a:off x="8895354" y="1643031"/>
-            <a:ext cx="3296646" cy="3965671"/>
-          </a:xfrm>
-          <a:prstGeom prst="rect">
-            <a:avLst/>
-          </a:prstGeom>
-        </p:spPr>
-      </p:pic>
-    </p:spTree>
-    <p:extLst>
-      <p:ext uri="{BB962C8B-B14F-4D97-AF65-F5344CB8AC3E}">
-        <p14:creationId xmlns:p14="http://schemas.microsoft.com/office/powerpoint/2010/main" val="1157490197"/>
-      </p:ext>
-    </p:extLst>
-  </p:cSld>
-  <p:clrMapOvr>
-    <a:masterClrMapping/>
-  </p:clrMapOvr>
-</p:sld>
-</file>
-
-<file path=ppt/slides/slide19.xml><?xml version="1.0" encoding="utf-8"?>
-<p:sld xmlns:a="http://schemas.openxmlformats.org/drawingml/2006/main" xmlns:r="http://schemas.openxmlformats.org/officeDocument/2006/relationships" xmlns:p="http://schemas.openxmlformats.org/presentationml/2006/main">
-  <p:cSld>
-    <p:spTree>
-      <p:nvGrpSpPr>
-        <p:cNvPr id="1" name=""/>
-        <p:cNvGrpSpPr/>
-        <p:nvPr/>
-      </p:nvGrpSpPr>
-      <p:grpSpPr>
-        <a:xfrm>
-          <a:off x="0" y="0"/>
-          <a:ext cx="0" cy="0"/>
-          <a:chOff x="0" y="0"/>
-          <a:chExt cx="0" cy="0"/>
-        </a:xfrm>
-      </p:grpSpPr>
-      <p:sp>
-        <p:nvSpPr>
-          <p:cNvPr id="2" name="Title 1">
-            <a:extLst>
-              <a:ext uri="{FF2B5EF4-FFF2-40B4-BE49-F238E27FC236}">
-                <a16:creationId xmlns:a16="http://schemas.microsoft.com/office/drawing/2014/main" id="{94444BB4-24F5-7949-9004-1EE893D6C526}"/>
-              </a:ext>
-            </a:extLst>
-          </p:cNvPr>
-          <p:cNvSpPr>
-            <a:spLocks noGrp="1"/>
-          </p:cNvSpPr>
-          <p:nvPr>
-            <p:ph type="title"/>
-          </p:nvPr>
-        </p:nvSpPr>
-        <p:spPr/>
-        <p:txBody>
-          <a:bodyPr/>
-          <a:lstStyle/>
-          <a:p>
-            <a:r>
-              <a:rPr lang="en-US" dirty="0"/>
-              <a:t>Crack Propagation</a:t>
-            </a:r>
-          </a:p>
-        </p:txBody>
-      </p:sp>
-      <p:sp>
-        <p:nvSpPr>
-          <p:cNvPr id="3" name="Content Placeholder 2">
-            <a:extLst>
-              <a:ext uri="{FF2B5EF4-FFF2-40B4-BE49-F238E27FC236}">
-                <a16:creationId xmlns:a16="http://schemas.microsoft.com/office/drawing/2014/main" id="{CFD54EE0-E9D0-B84C-BFF4-B784E5135CB2}"/>
-              </a:ext>
-            </a:extLst>
-          </p:cNvPr>
-          <p:cNvSpPr>
-            <a:spLocks noGrp="1"/>
-          </p:cNvSpPr>
-          <p:nvPr>
-            <p:ph idx="1"/>
-          </p:nvPr>
-        </p:nvSpPr>
-        <p:spPr>
-          <a:xfrm>
-            <a:off x="609599" y="2160495"/>
-            <a:ext cx="7152861" cy="3965670"/>
-          </a:xfrm>
-        </p:spPr>
-        <p:txBody>
-          <a:bodyPr/>
-          <a:lstStyle/>
-          <a:p>
-            <a:r>
-              <a:rPr lang="en-US" sz="2000" dirty="0"/>
-              <a:t>Once a crack has initiated, it can propagate through the cladding wall with a sufficiently high applied load</a:t>
-            </a:r>
-          </a:p>
-          <a:p>
-            <a:r>
-              <a:rPr lang="en-US" sz="2000" dirty="0"/>
-              <a:t>Both intergranular and </a:t>
-            </a:r>
-            <a:r>
-              <a:rPr lang="en-US" sz="2000" dirty="0" err="1"/>
-              <a:t>transgranular</a:t>
-            </a:r>
-            <a:r>
-              <a:rPr lang="en-US" sz="2000" dirty="0"/>
-              <a:t> propagation modes are possible</a:t>
-            </a:r>
-          </a:p>
-          <a:p>
-            <a:r>
-              <a:rPr lang="en-US" sz="2000" dirty="0"/>
-              <a:t>The propagation rate is a linear function of the stress intensity factor, K</a:t>
-            </a:r>
-            <a:r>
-              <a:rPr lang="en-US" sz="2000" baseline="-25000" dirty="0"/>
-              <a:t>SCC</a:t>
-            </a:r>
-            <a:r>
-              <a:rPr lang="en-US" sz="2000" dirty="0"/>
-              <a:t>, and is independent on the propagation mode for sufficiently high K</a:t>
-            </a:r>
-            <a:r>
-              <a:rPr lang="en-US" sz="2000" baseline="-25000" dirty="0"/>
-              <a:t>SCC</a:t>
-            </a:r>
-            <a:endParaRPr lang="en-US" sz="2000" dirty="0"/>
-          </a:p>
-          <a:p>
-            <a:r>
-              <a:rPr lang="en-US" sz="2000" dirty="0"/>
-              <a:t>The increase in iodine content generally increases the crack propagation rate</a:t>
-            </a:r>
-          </a:p>
-          <a:p>
-            <a:r>
-              <a:rPr lang="en-US" sz="2000" dirty="0"/>
-              <a:t>Increasing temperature results in decreasing the susceptibility to PCI failure, while neutron irradiation has been found to increase susceptibility</a:t>
-            </a:r>
-          </a:p>
-          <a:p>
-            <a:endParaRPr lang="en-US" sz="2000" dirty="0"/>
-          </a:p>
-          <a:p>
-            <a:endParaRPr lang="en-US" sz="2000" dirty="0"/>
-          </a:p>
-          <a:p>
-            <a:endParaRPr lang="en-US" sz="2000" dirty="0"/>
-          </a:p>
-        </p:txBody>
-      </p:sp>
-      <p:sp>
-        <p:nvSpPr>
-          <p:cNvPr id="4" name="Slide Number Placeholder 3">
-            <a:extLst>
-              <a:ext uri="{FF2B5EF4-FFF2-40B4-BE49-F238E27FC236}">
-                <a16:creationId xmlns:a16="http://schemas.microsoft.com/office/drawing/2014/main" id="{574FE000-83A7-814E-8937-7C6C20C52B13}"/>
-              </a:ext>
-            </a:extLst>
-          </p:cNvPr>
-          <p:cNvSpPr>
-            <a:spLocks noGrp="1"/>
-          </p:cNvSpPr>
-          <p:nvPr>
-            <p:ph type="sldNum" sz="quarter" idx="12"/>
-          </p:nvPr>
-        </p:nvSpPr>
-        <p:spPr/>
-        <p:txBody>
-          <a:bodyPr/>
-          <a:lstStyle/>
-          <a:p>
-            <a:pPr marL="0" marR="0" lvl="0" indent="0" algn="r" defTabSz="914400" rtl="0" eaLnBrk="1" fontAlgn="auto" latinLnBrk="0" hangingPunct="1">
-              <a:lnSpc>
-                <a:spcPct val="100000"/>
-              </a:lnSpc>
-              <a:spcBef>
-                <a:spcPts val="0"/>
-              </a:spcBef>
-              <a:spcAft>
-                <a:spcPts val="0"/>
-              </a:spcAft>
-              <a:buClrTx/>
-              <a:buSzTx/>
-              <a:buFontTx/>
-              <a:buNone/>
-              <a:tabLst/>
-              <a:defRPr/>
-            </a:pPr>
-            <a:fld id="{3FF2C605-4958-CF43-AA48-80339EFDB0AF}" type="slidenum">
-              <a:rPr kumimoji="0" lang="en-US" sz="1200" b="0" i="0" u="none" strike="noStrike" kern="1200" cap="none" spc="0" normalizeH="0" baseline="0" noProof="0" smtClean="0">
-                <a:ln>
-                  <a:noFill/>
-                </a:ln>
-                <a:solidFill>
-                  <a:prstClr val="black">
-                    <a:tint val="75000"/>
-                  </a:prstClr>
-                </a:solidFill>
-                <a:effectLst/>
-                <a:uLnTx/>
-                <a:uFillTx/>
-                <a:latin typeface="Calibri"/>
-                <a:ea typeface="+mn-ea"/>
-                <a:cs typeface="+mn-cs"/>
-              </a:rPr>
-              <a:pPr marL="0" marR="0" lvl="0" indent="0" algn="r" defTabSz="914400" rtl="0" eaLnBrk="1" fontAlgn="auto" latinLnBrk="0" hangingPunct="1">
-                <a:lnSpc>
-                  <a:spcPct val="100000"/>
-                </a:lnSpc>
-                <a:spcBef>
-                  <a:spcPts val="0"/>
-                </a:spcBef>
-                <a:spcAft>
-                  <a:spcPts val="0"/>
-                </a:spcAft>
-                <a:buClrTx/>
-                <a:buSzTx/>
-                <a:buFontTx/>
-                <a:buNone/>
-                <a:tabLst/>
-                <a:defRPr/>
-              </a:pPr>
-              <a:t>19</a:t>
-            </a:fld>
-            <a:endParaRPr kumimoji="0" lang="en-US" sz="1200" b="0" i="0" u="none" strike="noStrike" kern="1200" cap="none" spc="0" normalizeH="0" baseline="0" noProof="0">
-              <a:ln>
-                <a:noFill/>
-              </a:ln>
-              <a:solidFill>
-                <a:prstClr val="black">
-                  <a:tint val="75000"/>
-                </a:prstClr>
-              </a:solidFill>
-              <a:effectLst/>
-              <a:uLnTx/>
-              <a:uFillTx/>
-              <a:latin typeface="Calibri"/>
-              <a:ea typeface="+mn-ea"/>
-              <a:cs typeface="+mn-cs"/>
-            </a:endParaRPr>
-          </a:p>
-        </p:txBody>
-      </p:sp>
-      <p:pic>
-        <p:nvPicPr>
-          <p:cNvPr id="5" name="Picture 4">
-            <a:extLst>
-              <a:ext uri="{FF2B5EF4-FFF2-40B4-BE49-F238E27FC236}">
-                <a16:creationId xmlns:a16="http://schemas.microsoft.com/office/drawing/2014/main" id="{852CF916-F7A8-784A-9DFD-FA3D3F9C07D6}"/>
-              </a:ext>
-            </a:extLst>
-          </p:cNvPr>
-          <p:cNvPicPr>
-            <a:picLocks noChangeAspect="1"/>
-          </p:cNvPicPr>
-          <p:nvPr/>
-        </p:nvPicPr>
-        <p:blipFill>
-          <a:blip r:embed="rId2"/>
-          <a:stretch>
-            <a:fillRect/>
-          </a:stretch>
-        </p:blipFill>
-        <p:spPr>
-          <a:xfrm>
-            <a:off x="8243491" y="1755049"/>
-            <a:ext cx="3246969" cy="2154896"/>
-          </a:xfrm>
-          <a:prstGeom prst="rect">
-            <a:avLst/>
-          </a:prstGeom>
-        </p:spPr>
-      </p:pic>
-      <p:pic>
-        <p:nvPicPr>
-          <p:cNvPr id="6" name="Picture 5">
-            <a:extLst>
-              <a:ext uri="{FF2B5EF4-FFF2-40B4-BE49-F238E27FC236}">
-                <a16:creationId xmlns:a16="http://schemas.microsoft.com/office/drawing/2014/main" id="{A129B5F3-830B-AA4D-B01B-7EA318FE12D8}"/>
-              </a:ext>
-            </a:extLst>
-          </p:cNvPr>
-          <p:cNvPicPr>
-            <a:picLocks noChangeAspect="1"/>
-          </p:cNvPicPr>
-          <p:nvPr/>
-        </p:nvPicPr>
-        <p:blipFill>
-          <a:blip r:embed="rId3"/>
-          <a:stretch>
-            <a:fillRect/>
-          </a:stretch>
-        </p:blipFill>
-        <p:spPr>
-          <a:xfrm>
-            <a:off x="8243491" y="4226247"/>
-            <a:ext cx="3246969" cy="2184147"/>
-          </a:xfrm>
-          <a:prstGeom prst="rect">
-            <a:avLst/>
-          </a:prstGeom>
-        </p:spPr>
-      </p:pic>
-      <p:sp>
-        <p:nvSpPr>
-          <p:cNvPr id="7" name="TextBox 6">
-            <a:extLst>
-              <a:ext uri="{FF2B5EF4-FFF2-40B4-BE49-F238E27FC236}">
-                <a16:creationId xmlns:a16="http://schemas.microsoft.com/office/drawing/2014/main" id="{452F32A7-C558-FD4D-97EB-EA788289C8C5}"/>
-              </a:ext>
-            </a:extLst>
-          </p:cNvPr>
-          <p:cNvSpPr txBox="1"/>
-          <p:nvPr/>
-        </p:nvSpPr>
-        <p:spPr>
-          <a:xfrm>
-            <a:off x="9257887" y="1434307"/>
-            <a:ext cx="1580322" cy="369332"/>
-          </a:xfrm>
-          <a:prstGeom prst="rect">
-            <a:avLst/>
-          </a:prstGeom>
-          <a:noFill/>
-        </p:spPr>
-        <p:txBody>
-          <a:bodyPr wrap="square" rtlCol="0">
-            <a:spAutoFit/>
-          </a:bodyPr>
-          <a:lstStyle/>
-          <a:p>
-            <a:pPr marL="0" marR="0" lvl="0" indent="0" algn="l" defTabSz="914400" rtl="0" eaLnBrk="1" fontAlgn="auto" latinLnBrk="0" hangingPunct="1">
-              <a:lnSpc>
-                <a:spcPct val="100000"/>
-              </a:lnSpc>
-              <a:spcBef>
-                <a:spcPts val="0"/>
-              </a:spcBef>
-              <a:spcAft>
-                <a:spcPts val="0"/>
-              </a:spcAft>
-              <a:buClrTx/>
-              <a:buSzTx/>
-              <a:buFontTx/>
-              <a:buNone/>
-              <a:tabLst/>
-              <a:defRPr/>
-            </a:pPr>
-            <a:r>
-              <a:rPr kumimoji="0" lang="en-US" sz="1800" b="0" i="0" u="none" strike="noStrike" kern="1200" cap="none" spc="0" normalizeH="0" baseline="0" noProof="0" dirty="0" err="1">
-                <a:ln>
-                  <a:noFill/>
-                </a:ln>
-                <a:solidFill>
-                  <a:prstClr val="black"/>
-                </a:solidFill>
-                <a:effectLst/>
-                <a:uLnTx/>
-                <a:uFillTx/>
-                <a:latin typeface="Calibri"/>
-                <a:ea typeface="+mn-ea"/>
-                <a:cs typeface="+mn-cs"/>
-              </a:rPr>
-              <a:t>Transgranular</a:t>
-            </a:r>
-            <a:endParaRPr kumimoji="0" lang="en-US" sz="1800" b="0" i="0" u="none" strike="noStrike" kern="1200" cap="none" spc="0" normalizeH="0" baseline="0" noProof="0" dirty="0">
-              <a:ln>
-                <a:noFill/>
-              </a:ln>
-              <a:solidFill>
-                <a:prstClr val="black"/>
-              </a:solidFill>
-              <a:effectLst/>
-              <a:uLnTx/>
-              <a:uFillTx/>
-              <a:latin typeface="Calibri"/>
-              <a:ea typeface="+mn-ea"/>
-              <a:cs typeface="+mn-cs"/>
-            </a:endParaRPr>
-          </a:p>
-        </p:txBody>
-      </p:sp>
-      <p:sp>
-        <p:nvSpPr>
-          <p:cNvPr id="8" name="TextBox 7">
-            <a:extLst>
-              <a:ext uri="{FF2B5EF4-FFF2-40B4-BE49-F238E27FC236}">
-                <a16:creationId xmlns:a16="http://schemas.microsoft.com/office/drawing/2014/main" id="{D3F0F608-C1C2-B94D-BE74-262B78983CDA}"/>
-              </a:ext>
-            </a:extLst>
-          </p:cNvPr>
-          <p:cNvSpPr txBox="1"/>
-          <p:nvPr/>
-        </p:nvSpPr>
-        <p:spPr>
-          <a:xfrm>
-            <a:off x="9257887" y="3880713"/>
-            <a:ext cx="1580322" cy="369332"/>
-          </a:xfrm>
-          <a:prstGeom prst="rect">
-            <a:avLst/>
-          </a:prstGeom>
-          <a:noFill/>
-        </p:spPr>
-        <p:txBody>
-          <a:bodyPr wrap="square" rtlCol="0">
-            <a:spAutoFit/>
-          </a:bodyPr>
-          <a:lstStyle/>
-          <a:p>
-            <a:pPr marL="0" marR="0" lvl="0" indent="0" algn="l" defTabSz="914400" rtl="0" eaLnBrk="1" fontAlgn="auto" latinLnBrk="0" hangingPunct="1">
-              <a:lnSpc>
-                <a:spcPct val="100000"/>
-              </a:lnSpc>
-              <a:spcBef>
-                <a:spcPts val="0"/>
-              </a:spcBef>
-              <a:spcAft>
-                <a:spcPts val="0"/>
-              </a:spcAft>
-              <a:buClrTx/>
-              <a:buSzTx/>
-              <a:buFontTx/>
-              <a:buNone/>
-              <a:tabLst/>
-              <a:defRPr/>
-            </a:pPr>
-            <a:r>
-              <a:rPr kumimoji="0" lang="en-US" sz="1800" b="0" i="0" u="none" strike="noStrike" kern="1200" cap="none" spc="0" normalizeH="0" baseline="0" noProof="0" dirty="0">
-                <a:ln>
-                  <a:noFill/>
-                </a:ln>
-                <a:solidFill>
-                  <a:prstClr val="black"/>
-                </a:solidFill>
-                <a:effectLst/>
-                <a:uLnTx/>
-                <a:uFillTx/>
-                <a:latin typeface="Calibri"/>
-                <a:ea typeface="+mn-ea"/>
-                <a:cs typeface="+mn-cs"/>
-              </a:rPr>
-              <a:t>Intergranular</a:t>
-            </a:r>
-          </a:p>
-        </p:txBody>
-      </p:sp>
-    </p:spTree>
-    <p:extLst>
-      <p:ext uri="{BB962C8B-B14F-4D97-AF65-F5344CB8AC3E}">
-        <p14:creationId xmlns:p14="http://schemas.microsoft.com/office/powerpoint/2010/main" val="3601032657"/>
-      </p:ext>
-    </p:extLst>
-  </p:cSld>
-  <p:clrMapOvr>
-    <a:masterClrMapping/>
-  </p:clrMapOvr>
-</p:sld>
-</file>
-
-<file path=ppt/slides/slide2.xml><?xml version="1.0" encoding="utf-8"?>
-<p:sld xmlns:a="http://schemas.openxmlformats.org/drawingml/2006/main" xmlns:r="http://schemas.openxmlformats.org/officeDocument/2006/relationships" xmlns:p="http://schemas.openxmlformats.org/presentationml/2006/main">
-  <p:cSld>
-    <p:spTree>
-      <p:nvGrpSpPr>
-        <p:cNvPr id="1" name=""/>
-        <p:cNvGrpSpPr/>
-        <p:nvPr/>
-      </p:nvGrpSpPr>
-      <p:grpSpPr>
-        <a:xfrm>
-          <a:off x="0" y="0"/>
-          <a:ext cx="0" cy="0"/>
-          <a:chOff x="0" y="0"/>
-          <a:chExt cx="0" cy="0"/>
-        </a:xfrm>
-      </p:grpSpPr>
-      <p:sp>
-        <p:nvSpPr>
-          <p:cNvPr id="2" name="Title 1">
-            <a:extLst>
-              <a:ext uri="{FF2B5EF4-FFF2-40B4-BE49-F238E27FC236}">
-                <a16:creationId xmlns:a16="http://schemas.microsoft.com/office/drawing/2014/main" id="{E6A26517-7A8C-6D44-8A80-103F9AD20C90}"/>
-              </a:ext>
-            </a:extLst>
-          </p:cNvPr>
-          <p:cNvSpPr>
-            <a:spLocks noGrp="1"/>
-          </p:cNvSpPr>
-          <p:nvPr>
-            <p:ph type="title"/>
-          </p:nvPr>
-        </p:nvSpPr>
-        <p:spPr/>
-        <p:txBody>
-          <a:bodyPr/>
-          <a:lstStyle/>
-          <a:p>
-            <a:pPr algn="l"/>
-            <a:r>
-              <a:rPr lang="en-US" dirty="0"/>
-              <a:t>MOOSE Project Part 3</a:t>
-            </a:r>
-          </a:p>
-        </p:txBody>
-      </p:sp>
-      <p:sp>
-        <p:nvSpPr>
-          <p:cNvPr id="16" name="TextBox 15">
-            <a:extLst>
-              <a:ext uri="{FF2B5EF4-FFF2-40B4-BE49-F238E27FC236}">
-                <a16:creationId xmlns:a16="http://schemas.microsoft.com/office/drawing/2014/main" id="{7FC4C34D-9F6B-3A44-A4E8-FDD2910214C5}"/>
-              </a:ext>
-            </a:extLst>
-          </p:cNvPr>
-          <p:cNvSpPr txBox="1"/>
-          <p:nvPr/>
-        </p:nvSpPr>
-        <p:spPr>
-          <a:xfrm>
-            <a:off x="667873" y="1968501"/>
-            <a:ext cx="7256928" cy="4708981"/>
-          </a:xfrm>
-          <a:prstGeom prst="rect">
-            <a:avLst/>
-          </a:prstGeom>
-          <a:noFill/>
-        </p:spPr>
-        <p:txBody>
-          <a:bodyPr wrap="square" rtlCol="0">
-            <a:spAutoFit/>
-          </a:bodyPr>
-          <a:lstStyle/>
-          <a:p>
-            <a:pPr marL="285750" marR="0" lvl="0" indent="-285750" algn="l" defTabSz="914400" rtl="0" eaLnBrk="1" fontAlgn="auto" latinLnBrk="0" hangingPunct="1">
-              <a:lnSpc>
-                <a:spcPct val="100000"/>
-              </a:lnSpc>
-              <a:spcBef>
-                <a:spcPts val="600"/>
-              </a:spcBef>
-              <a:spcAft>
-                <a:spcPts val="0"/>
-              </a:spcAft>
-              <a:buClrTx/>
-              <a:buSzTx/>
-              <a:buFont typeface="Arial" panose="020B0604020202020204" pitchFamily="34" charset="0"/>
-              <a:buChar char="•"/>
-              <a:tabLst/>
-              <a:defRPr/>
-            </a:pPr>
-            <a:r>
-              <a:rPr kumimoji="0" lang="en-US" sz="2000" b="0" i="0" u="none" strike="noStrike" kern="1200" cap="none" spc="0" normalizeH="0" baseline="0" noProof="0" dirty="0">
-                <a:ln>
-                  <a:noFill/>
-                </a:ln>
-                <a:solidFill>
-                  <a:prstClr val="black"/>
-                </a:solidFill>
-                <a:effectLst/>
-                <a:uLnTx/>
-                <a:uFillTx/>
-                <a:latin typeface="Arial" panose="020B0604020202020204" pitchFamily="34" charset="0"/>
-                <a:ea typeface="+mn-ea"/>
-                <a:cs typeface="Arial" panose="020B0604020202020204" pitchFamily="34" charset="0"/>
-              </a:rPr>
-              <a:t>Same setup as part 1</a:t>
-            </a:r>
-          </a:p>
-          <a:p>
-            <a:pPr marL="285750" marR="0" lvl="0" indent="-285750" algn="l" defTabSz="914400" rtl="0" eaLnBrk="1" fontAlgn="auto" latinLnBrk="0" hangingPunct="1">
-              <a:lnSpc>
-                <a:spcPct val="100000"/>
-              </a:lnSpc>
-              <a:spcBef>
-                <a:spcPts val="600"/>
-              </a:spcBef>
-              <a:spcAft>
-                <a:spcPts val="0"/>
-              </a:spcAft>
-              <a:buClrTx/>
-              <a:buSzTx/>
-              <a:buFont typeface="Arial" panose="020B0604020202020204" pitchFamily="34" charset="0"/>
-              <a:buChar char="•"/>
-              <a:tabLst/>
-              <a:defRPr/>
-            </a:pPr>
-            <a:r>
-              <a:rPr lang="en-US" sz="2000" dirty="0">
-                <a:solidFill>
-                  <a:prstClr val="black"/>
-                </a:solidFill>
-                <a:latin typeface="Arial" panose="020B0604020202020204" pitchFamily="34" charset="0"/>
-                <a:cs typeface="Arial" panose="020B0604020202020204" pitchFamily="34" charset="0"/>
-              </a:rPr>
-              <a:t>Include effects of thermal expansion, densification, and FP-induced swelling</a:t>
-            </a:r>
-          </a:p>
-          <a:p>
-            <a:pPr marL="285750" marR="0" lvl="0" indent="-285750" algn="l" defTabSz="914400" rtl="0" eaLnBrk="1" fontAlgn="auto" latinLnBrk="0" hangingPunct="1">
-              <a:lnSpc>
-                <a:spcPct val="100000"/>
-              </a:lnSpc>
-              <a:spcBef>
-                <a:spcPts val="600"/>
-              </a:spcBef>
-              <a:spcAft>
-                <a:spcPts val="0"/>
-              </a:spcAft>
-              <a:buClrTx/>
-              <a:buSzTx/>
-              <a:buFont typeface="Arial" panose="020B0604020202020204" pitchFamily="34" charset="0"/>
-              <a:buChar char="•"/>
-              <a:tabLst/>
-              <a:defRPr/>
-            </a:pPr>
-            <a:r>
-              <a:rPr lang="en-US" sz="2000" dirty="0">
-                <a:solidFill>
-                  <a:prstClr val="black"/>
-                </a:solidFill>
-                <a:latin typeface="Arial" panose="020B0604020202020204" pitchFamily="34" charset="0"/>
-                <a:cs typeface="Arial" panose="020B0604020202020204" pitchFamily="34" charset="0"/>
-              </a:rPr>
-              <a:t>Simulate until gap closure, but d</a:t>
-            </a:r>
-            <a:r>
-              <a:rPr kumimoji="0" lang="en-US" sz="2000" b="0" i="0" u="none" strike="noStrike" kern="1200" cap="none" spc="0" normalizeH="0" baseline="0" noProof="0" dirty="0">
-                <a:ln>
-                  <a:noFill/>
-                </a:ln>
-                <a:solidFill>
-                  <a:prstClr val="black"/>
-                </a:solidFill>
-                <a:effectLst/>
-                <a:uLnTx/>
-                <a:uFillTx/>
-                <a:latin typeface="Arial" panose="020B0604020202020204" pitchFamily="34" charset="0"/>
-                <a:ea typeface="+mn-ea"/>
-                <a:cs typeface="Arial" panose="020B0604020202020204" pitchFamily="34" charset="0"/>
-              </a:rPr>
-              <a:t>o not need to handle contact</a:t>
-            </a:r>
-          </a:p>
-          <a:p>
-            <a:pPr marL="285750" indent="-285750">
-              <a:spcBef>
-                <a:spcPts val="600"/>
-              </a:spcBef>
-              <a:buFont typeface="Arial" panose="020B0604020202020204" pitchFamily="34" charset="0"/>
-              <a:buChar char="•"/>
-              <a:defRPr/>
-            </a:pPr>
-            <a:r>
-              <a:rPr kumimoji="0" lang="en-US" sz="2000" b="0" i="0" u="none" strike="noStrike" kern="1200" cap="none" spc="0" normalizeH="0" baseline="0" noProof="0" dirty="0">
-                <a:ln>
-                  <a:noFill/>
-                </a:ln>
-                <a:solidFill>
-                  <a:prstClr val="black"/>
-                </a:solidFill>
-                <a:effectLst/>
-                <a:uLnTx/>
-                <a:uFillTx/>
-                <a:latin typeface="Arial" panose="020B0604020202020204" pitchFamily="34" charset="0"/>
-                <a:ea typeface="+mn-ea"/>
-                <a:cs typeface="Arial" panose="020B0604020202020204" pitchFamily="34" charset="0"/>
-              </a:rPr>
-              <a:t>LHR is uniform, constant</a:t>
-            </a:r>
-          </a:p>
-          <a:p>
-            <a:pPr marL="285750" indent="-285750">
-              <a:spcBef>
-                <a:spcPts val="600"/>
-              </a:spcBef>
-              <a:buFont typeface="Arial" panose="020B0604020202020204" pitchFamily="34" charset="0"/>
-              <a:buChar char="•"/>
-              <a:defRPr/>
-            </a:pPr>
-            <a:r>
-              <a:rPr kumimoji="0" lang="en-US" sz="2000" b="0" i="0" u="none" strike="noStrike" kern="1200" cap="none" spc="0" normalizeH="0" baseline="0" noProof="0" dirty="0">
-                <a:ln>
-                  <a:noFill/>
-                </a:ln>
-                <a:solidFill>
-                  <a:prstClr val="black"/>
-                </a:solidFill>
-                <a:effectLst/>
-                <a:uLnTx/>
-                <a:uFillTx/>
-                <a:latin typeface="Arial" panose="020B0604020202020204" pitchFamily="34" charset="0"/>
-                <a:ea typeface="+mn-ea"/>
-                <a:cs typeface="Arial" panose="020B0604020202020204" pitchFamily="34" charset="0"/>
-              </a:rPr>
-              <a:t>T and burnup dependent kth</a:t>
-            </a:r>
-          </a:p>
-          <a:p>
-            <a:pPr marL="285750" marR="0" lvl="0" indent="-285750" algn="l" defTabSz="914400" rtl="0" eaLnBrk="1" fontAlgn="auto" latinLnBrk="0" hangingPunct="1">
-              <a:lnSpc>
-                <a:spcPct val="100000"/>
-              </a:lnSpc>
-              <a:spcBef>
-                <a:spcPts val="600"/>
-              </a:spcBef>
-              <a:spcAft>
-                <a:spcPts val="0"/>
-              </a:spcAft>
-              <a:buClrTx/>
-              <a:buSzTx/>
-              <a:buFont typeface="Arial" panose="020B0604020202020204" pitchFamily="34" charset="0"/>
-              <a:buChar char="•"/>
-              <a:tabLst/>
-              <a:defRPr/>
-            </a:pPr>
-            <a:r>
-              <a:rPr lang="en-US" sz="2000" dirty="0">
-                <a:solidFill>
-                  <a:prstClr val="black"/>
-                </a:solidFill>
-                <a:latin typeface="Arial" panose="020B0604020202020204" pitchFamily="34" charset="0"/>
-                <a:cs typeface="Arial" panose="020B0604020202020204" pitchFamily="34" charset="0"/>
-              </a:rPr>
-              <a:t>Make appropriate assumptions where needed</a:t>
-            </a:r>
-          </a:p>
-          <a:p>
-            <a:pPr marL="285750" indent="-285750">
-              <a:spcBef>
-                <a:spcPts val="600"/>
-              </a:spcBef>
-              <a:buFont typeface="Arial" panose="020B0604020202020204" pitchFamily="34" charset="0"/>
-              <a:buChar char="•"/>
-              <a:defRPr/>
-            </a:pPr>
-            <a:r>
-              <a:rPr kumimoji="0" lang="en-US" sz="2000" b="0" i="0" u="none" strike="noStrike" kern="1200" cap="none" spc="0" normalizeH="0" baseline="0" noProof="0" dirty="0">
-                <a:ln>
-                  <a:noFill/>
-                </a:ln>
-                <a:solidFill>
-                  <a:prstClr val="black"/>
-                </a:solidFill>
-                <a:effectLst/>
-                <a:uLnTx/>
-                <a:uFillTx/>
-                <a:latin typeface="Arial" panose="020B0604020202020204" pitchFamily="34" charset="0"/>
-                <a:ea typeface="+mn-ea"/>
-                <a:cs typeface="Arial" panose="020B0604020202020204" pitchFamily="34" charset="0"/>
-              </a:rPr>
-              <a:t>Determine the displacements and stress state in the fuel as a function of time</a:t>
-            </a:r>
-          </a:p>
-          <a:p>
-            <a:pPr marL="285750" indent="-285750">
-              <a:spcBef>
-                <a:spcPts val="600"/>
-              </a:spcBef>
-              <a:buFont typeface="Arial" panose="020B0604020202020204" pitchFamily="34" charset="0"/>
-              <a:buChar char="•"/>
-              <a:defRPr/>
-            </a:pPr>
-            <a:r>
-              <a:rPr lang="en-US" sz="2000" dirty="0">
-                <a:solidFill>
-                  <a:prstClr val="black"/>
-                </a:solidFill>
-                <a:latin typeface="Arial" panose="020B0604020202020204" pitchFamily="34" charset="0"/>
-                <a:cs typeface="Arial" panose="020B0604020202020204" pitchFamily="34" charset="0"/>
-              </a:rPr>
-              <a:t>Perform appropriate analyses: Thermal stresses cracks in fuel? When do we have gap closure? Etc. </a:t>
-            </a:r>
-            <a:endParaRPr kumimoji="0" lang="en-US" sz="2000" b="0" i="0" u="none" strike="noStrike" kern="1200" cap="none" spc="0" normalizeH="0" baseline="0" noProof="0" dirty="0">
-              <a:ln>
-                <a:noFill/>
-              </a:ln>
-              <a:solidFill>
-                <a:prstClr val="black"/>
-              </a:solidFill>
-              <a:effectLst/>
-              <a:uLnTx/>
-              <a:uFillTx/>
-              <a:latin typeface="Arial" panose="020B0604020202020204" pitchFamily="34" charset="0"/>
-              <a:ea typeface="+mn-ea"/>
-              <a:cs typeface="Arial" panose="020B0604020202020204" pitchFamily="34" charset="0"/>
-            </a:endParaRPr>
-          </a:p>
-          <a:p>
-            <a:pPr marL="285750" marR="0" lvl="0" indent="-285750" algn="l" defTabSz="914400" rtl="0" eaLnBrk="1" fontAlgn="auto" latinLnBrk="0" hangingPunct="1">
-              <a:lnSpc>
-                <a:spcPct val="100000"/>
-              </a:lnSpc>
-              <a:spcBef>
-                <a:spcPts val="600"/>
-              </a:spcBef>
-              <a:spcAft>
-                <a:spcPts val="0"/>
-              </a:spcAft>
-              <a:buClrTx/>
-              <a:buSzTx/>
-              <a:buFont typeface="Arial" panose="020B0604020202020204" pitchFamily="34" charset="0"/>
-              <a:buChar char="•"/>
-              <a:tabLst/>
-              <a:defRPr/>
-            </a:pPr>
-            <a:endParaRPr kumimoji="0" lang="en-US" sz="2000" b="0" i="0" u="none" strike="noStrike" kern="1200" cap="none" spc="0" normalizeH="0" baseline="0" noProof="0" dirty="0">
-              <a:ln>
-                <a:noFill/>
-              </a:ln>
-              <a:solidFill>
-                <a:prstClr val="black"/>
-              </a:solidFill>
-              <a:effectLst/>
-              <a:uLnTx/>
-              <a:uFillTx/>
-              <a:latin typeface="Arial" panose="020B0604020202020204" pitchFamily="34" charset="0"/>
-              <a:ea typeface="+mn-ea"/>
-              <a:cs typeface="Arial" panose="020B0604020202020204" pitchFamily="34" charset="0"/>
-            </a:endParaRPr>
-          </a:p>
-        </p:txBody>
-      </p:sp>
-      <p:sp>
-        <p:nvSpPr>
-          <p:cNvPr id="8" name="Slide Number Placeholder 3">
-            <a:extLst>
-              <a:ext uri="{FF2B5EF4-FFF2-40B4-BE49-F238E27FC236}">
-                <a16:creationId xmlns:a16="http://schemas.microsoft.com/office/drawing/2014/main" id="{C3C64425-8DDE-D258-DCC1-DC3D554C51E6}"/>
-              </a:ext>
-            </a:extLst>
-          </p:cNvPr>
-          <p:cNvSpPr>
-            <a:spLocks noGrp="1"/>
-          </p:cNvSpPr>
-          <p:nvPr>
-            <p:ph type="sldNum" sz="quarter" idx="12"/>
-          </p:nvPr>
-        </p:nvSpPr>
-        <p:spPr>
-          <a:xfrm>
-            <a:off x="8737600" y="6356351"/>
-            <a:ext cx="2844800" cy="365125"/>
-          </a:xfrm>
-        </p:spPr>
-        <p:txBody>
-          <a:bodyPr/>
-          <a:lstStyle/>
-          <a:p>
-            <a:pPr marL="0" marR="0" lvl="0" indent="0" algn="r" defTabSz="914400" rtl="0" eaLnBrk="1" fontAlgn="auto" latinLnBrk="0" hangingPunct="1">
-              <a:lnSpc>
-                <a:spcPct val="100000"/>
-              </a:lnSpc>
-              <a:spcBef>
-                <a:spcPts val="0"/>
-              </a:spcBef>
-              <a:spcAft>
-                <a:spcPts val="0"/>
-              </a:spcAft>
-              <a:buClrTx/>
-              <a:buSzTx/>
-              <a:buFontTx/>
-              <a:buNone/>
-              <a:tabLst/>
-              <a:defRPr/>
-            </a:pPr>
-            <a:fld id="{3FF2C605-4958-CF43-AA48-80339EFDB0AF}" type="slidenum">
-              <a:rPr kumimoji="0" lang="en-US" sz="1200" b="0" i="0" u="none" strike="noStrike" kern="1200" cap="none" spc="0" normalizeH="0" baseline="0" noProof="0" smtClean="0">
-                <a:ln>
-                  <a:noFill/>
-                </a:ln>
-                <a:solidFill>
-                  <a:prstClr val="black">
-                    <a:tint val="75000"/>
-                  </a:prstClr>
-                </a:solidFill>
-                <a:effectLst/>
-                <a:uLnTx/>
-                <a:uFillTx/>
-                <a:latin typeface="Calibri"/>
-                <a:ea typeface="+mn-ea"/>
-                <a:cs typeface="+mn-cs"/>
-              </a:rPr>
-              <a:pPr marL="0" marR="0" lvl="0" indent="0" algn="r" defTabSz="914400" rtl="0" eaLnBrk="1" fontAlgn="auto" latinLnBrk="0" hangingPunct="1">
-                <a:lnSpc>
-                  <a:spcPct val="100000"/>
-                </a:lnSpc>
-                <a:spcBef>
-                  <a:spcPts val="0"/>
-                </a:spcBef>
-                <a:spcAft>
-                  <a:spcPts val="0"/>
-                </a:spcAft>
-                <a:buClrTx/>
-                <a:buSzTx/>
-                <a:buFontTx/>
-                <a:buNone/>
-                <a:tabLst/>
-                <a:defRPr/>
-              </a:pPr>
-              <a:t>2</a:t>
-            </a:fld>
-            <a:endParaRPr kumimoji="0" lang="en-US" sz="1200" b="0" i="0" u="none" strike="noStrike" kern="1200" cap="none" spc="0" normalizeH="0" baseline="0" noProof="0">
-              <a:ln>
-                <a:noFill/>
-              </a:ln>
-              <a:solidFill>
-                <a:prstClr val="black">
-                  <a:tint val="75000"/>
-                </a:prstClr>
-              </a:solidFill>
-              <a:effectLst/>
-              <a:uLnTx/>
-              <a:uFillTx/>
-              <a:latin typeface="Calibri"/>
-              <a:ea typeface="+mn-ea"/>
-              <a:cs typeface="+mn-cs"/>
-            </a:endParaRPr>
-          </a:p>
-        </p:txBody>
-      </p:sp>
-      <p:pic>
-        <p:nvPicPr>
-          <p:cNvPr id="49" name="Picture 48">
-            <a:extLst>
-              <a:ext uri="{FF2B5EF4-FFF2-40B4-BE49-F238E27FC236}">
-                <a16:creationId xmlns:a16="http://schemas.microsoft.com/office/drawing/2014/main" id="{CBAE0723-C2EC-57A5-A88B-4B0422D94524}"/>
-              </a:ext>
-            </a:extLst>
-          </p:cNvPr>
-          <p:cNvPicPr>
-            <a:picLocks noChangeAspect="1"/>
-          </p:cNvPicPr>
-          <p:nvPr/>
-        </p:nvPicPr>
-        <p:blipFill>
-          <a:blip r:embed="rId2"/>
-          <a:stretch>
-            <a:fillRect/>
-          </a:stretch>
-        </p:blipFill>
-        <p:spPr>
-          <a:xfrm>
-            <a:off x="8205774" y="1560786"/>
-            <a:ext cx="4158551" cy="3589283"/>
-          </a:xfrm>
-          <a:prstGeom prst="rect">
-            <a:avLst/>
-          </a:prstGeom>
-        </p:spPr>
-      </p:pic>
-    </p:spTree>
-    <p:extLst>
-      <p:ext uri="{BB962C8B-B14F-4D97-AF65-F5344CB8AC3E}">
-        <p14:creationId xmlns:p14="http://schemas.microsoft.com/office/powerpoint/2010/main" val="2003456929"/>
-      </p:ext>
-    </p:extLst>
-  </p:cSld>
-  <p:clrMapOvr>
-    <a:masterClrMapping/>
-  </p:clrMapOvr>
-</p:sld>
-</file>
-
-<file path=ppt/slides/slide20.xml><?xml version="1.0" encoding="utf-8"?>
-<p:sld xmlns:a="http://schemas.openxmlformats.org/drawingml/2006/main" xmlns:r="http://schemas.openxmlformats.org/officeDocument/2006/relationships" xmlns:p="http://schemas.openxmlformats.org/presentationml/2006/main">
-  <p:cSld>
-    <p:spTree>
-      <p:nvGrpSpPr>
-        <p:cNvPr id="1" name=""/>
-        <p:cNvGrpSpPr/>
-        <p:nvPr/>
-      </p:nvGrpSpPr>
-      <p:grpSpPr>
-        <a:xfrm>
-          <a:off x="0" y="0"/>
-          <a:ext cx="0" cy="0"/>
-          <a:chOff x="0" y="0"/>
-          <a:chExt cx="0" cy="0"/>
-        </a:xfrm>
-      </p:grpSpPr>
-      <p:sp>
-        <p:nvSpPr>
-          <p:cNvPr id="2" name="Title 1">
-            <a:extLst>
-              <a:ext uri="{FF2B5EF4-FFF2-40B4-BE49-F238E27FC236}">
-                <a16:creationId xmlns:a16="http://schemas.microsoft.com/office/drawing/2014/main" id="{C4F649AA-0316-E54F-A523-93797234130E}"/>
-              </a:ext>
-            </a:extLst>
-          </p:cNvPr>
-          <p:cNvSpPr>
-            <a:spLocks noGrp="1"/>
-          </p:cNvSpPr>
-          <p:nvPr>
-            <p:ph type="title"/>
-          </p:nvPr>
-        </p:nvSpPr>
-        <p:spPr/>
-        <p:txBody>
-          <a:bodyPr/>
-          <a:lstStyle/>
-          <a:p>
-            <a:r>
-              <a:rPr lang="en-US" dirty="0"/>
-              <a:t>Through-Cracks</a:t>
-            </a:r>
-          </a:p>
-        </p:txBody>
-      </p:sp>
-      <p:sp>
-        <p:nvSpPr>
-          <p:cNvPr id="3" name="Content Placeholder 2">
-            <a:extLst>
-              <a:ext uri="{FF2B5EF4-FFF2-40B4-BE49-F238E27FC236}">
-                <a16:creationId xmlns:a16="http://schemas.microsoft.com/office/drawing/2014/main" id="{74F6013A-8125-5645-8D9E-38FD4740420A}"/>
-              </a:ext>
-            </a:extLst>
-          </p:cNvPr>
-          <p:cNvSpPr>
-            <a:spLocks noGrp="1"/>
-          </p:cNvSpPr>
-          <p:nvPr>
-            <p:ph idx="1"/>
-          </p:nvPr>
-        </p:nvSpPr>
-        <p:spPr/>
-        <p:txBody>
-          <a:bodyPr/>
-          <a:lstStyle/>
-          <a:p>
-            <a:r>
-              <a:rPr lang="en-US" sz="2000" dirty="0"/>
-              <a:t>Following the formation of a through-wall crack and the ingress of water into the fuel-clad gap, the cracking process is arrested since the corrosive species (notably I, Cs, and Cd) have been discharged</a:t>
-            </a:r>
-          </a:p>
-          <a:p>
-            <a:r>
-              <a:rPr lang="en-US" sz="2000" dirty="0"/>
-              <a:t>The ingress of water in the fuel-clad gap may result in clad </a:t>
-            </a:r>
-            <a:r>
-              <a:rPr lang="en-US" sz="2000" dirty="0" err="1"/>
-              <a:t>hydriding</a:t>
-            </a:r>
-            <a:r>
-              <a:rPr lang="en-US" sz="2000" dirty="0"/>
-              <a:t> on the inner surface</a:t>
-            </a:r>
-          </a:p>
-          <a:p>
-            <a:r>
-              <a:rPr lang="en-US" sz="2000" dirty="0"/>
-              <a:t>The initial SCC crack can oxidize, and volume expansion may lead to resealing the primary failure</a:t>
-            </a:r>
-          </a:p>
-          <a:p>
-            <a:r>
-              <a:rPr lang="en-US" sz="2000" dirty="0"/>
-              <a:t>All PCI cracks are pin-hole defects, whereas observable cracks are secondary due to clad </a:t>
-            </a:r>
-            <a:r>
-              <a:rPr lang="en-US" sz="2000" dirty="0" err="1"/>
-              <a:t>hydriding</a:t>
-            </a:r>
-            <a:r>
-              <a:rPr lang="en-US" sz="2000" dirty="0"/>
-              <a:t> or ductile tearing</a:t>
-            </a:r>
-          </a:p>
-          <a:p>
-            <a:r>
-              <a:rPr lang="en-US" sz="2000" dirty="0"/>
-              <a:t>The time to failure depends on many parameters, but is generally determined by the local linear power, the change in linear power, and the local burnup</a:t>
-            </a:r>
-          </a:p>
-          <a:p>
-            <a:endParaRPr lang="en-US" sz="2000" dirty="0"/>
-          </a:p>
-        </p:txBody>
-      </p:sp>
-      <p:sp>
-        <p:nvSpPr>
-          <p:cNvPr id="4" name="Slide Number Placeholder 3">
-            <a:extLst>
-              <a:ext uri="{FF2B5EF4-FFF2-40B4-BE49-F238E27FC236}">
-                <a16:creationId xmlns:a16="http://schemas.microsoft.com/office/drawing/2014/main" id="{3A9F73AA-344A-7548-A599-C67A90FDCACF}"/>
-              </a:ext>
-            </a:extLst>
-          </p:cNvPr>
-          <p:cNvSpPr>
-            <a:spLocks noGrp="1"/>
-          </p:cNvSpPr>
-          <p:nvPr>
-            <p:ph type="sldNum" sz="quarter" idx="12"/>
-          </p:nvPr>
-        </p:nvSpPr>
-        <p:spPr/>
-        <p:txBody>
-          <a:bodyPr/>
-          <a:lstStyle/>
-          <a:p>
-            <a:pPr marL="0" marR="0" lvl="0" indent="0" algn="r" defTabSz="914400" rtl="0" eaLnBrk="1" fontAlgn="auto" latinLnBrk="0" hangingPunct="1">
-              <a:lnSpc>
-                <a:spcPct val="100000"/>
-              </a:lnSpc>
-              <a:spcBef>
-                <a:spcPts val="0"/>
-              </a:spcBef>
-              <a:spcAft>
-                <a:spcPts val="0"/>
-              </a:spcAft>
-              <a:buClrTx/>
-              <a:buSzTx/>
-              <a:buFontTx/>
-              <a:buNone/>
-              <a:tabLst/>
-              <a:defRPr/>
-            </a:pPr>
-            <a:fld id="{3FF2C605-4958-CF43-AA48-80339EFDB0AF}" type="slidenum">
-              <a:rPr kumimoji="0" lang="en-US" sz="1200" b="0" i="0" u="none" strike="noStrike" kern="1200" cap="none" spc="0" normalizeH="0" baseline="0" noProof="0" smtClean="0">
-                <a:ln>
-                  <a:noFill/>
-                </a:ln>
-                <a:solidFill>
-                  <a:prstClr val="black">
-                    <a:tint val="75000"/>
-                  </a:prstClr>
-                </a:solidFill>
-                <a:effectLst/>
-                <a:uLnTx/>
-                <a:uFillTx/>
-                <a:latin typeface="Calibri"/>
-                <a:ea typeface="+mn-ea"/>
-                <a:cs typeface="+mn-cs"/>
-              </a:rPr>
-              <a:pPr marL="0" marR="0" lvl="0" indent="0" algn="r" defTabSz="914400" rtl="0" eaLnBrk="1" fontAlgn="auto" latinLnBrk="0" hangingPunct="1">
-                <a:lnSpc>
-                  <a:spcPct val="100000"/>
-                </a:lnSpc>
-                <a:spcBef>
-                  <a:spcPts val="0"/>
-                </a:spcBef>
-                <a:spcAft>
-                  <a:spcPts val="0"/>
-                </a:spcAft>
-                <a:buClrTx/>
-                <a:buSzTx/>
-                <a:buFontTx/>
-                <a:buNone/>
-                <a:tabLst/>
-                <a:defRPr/>
-              </a:pPr>
-              <a:t>20</a:t>
-            </a:fld>
-            <a:endParaRPr kumimoji="0" lang="en-US" sz="1200" b="0" i="0" u="none" strike="noStrike" kern="1200" cap="none" spc="0" normalizeH="0" baseline="0" noProof="0">
-              <a:ln>
-                <a:noFill/>
-              </a:ln>
-              <a:solidFill>
-                <a:prstClr val="black">
-                  <a:tint val="75000"/>
-                </a:prstClr>
-              </a:solidFill>
-              <a:effectLst/>
-              <a:uLnTx/>
-              <a:uFillTx/>
-              <a:latin typeface="Calibri"/>
-              <a:ea typeface="+mn-ea"/>
-              <a:cs typeface="+mn-cs"/>
-            </a:endParaRPr>
-          </a:p>
-        </p:txBody>
-      </p:sp>
-    </p:spTree>
-    <p:extLst>
-      <p:ext uri="{BB962C8B-B14F-4D97-AF65-F5344CB8AC3E}">
-        <p14:creationId xmlns:p14="http://schemas.microsoft.com/office/powerpoint/2010/main" val="1232766779"/>
-      </p:ext>
-    </p:extLst>
-  </p:cSld>
-  <p:clrMapOvr>
-    <a:masterClrMapping/>
-  </p:clrMapOvr>
-</p:sld>
-</file>
-
-<file path=ppt/slides/slide21.xml><?xml version="1.0" encoding="utf-8"?>
-<p:sld xmlns:a="http://schemas.openxmlformats.org/drawingml/2006/main" xmlns:r="http://schemas.openxmlformats.org/officeDocument/2006/relationships" xmlns:p="http://schemas.openxmlformats.org/presentationml/2006/main">
-  <p:cSld>
-    <p:spTree>
-      <p:nvGrpSpPr>
-        <p:cNvPr id="1" name=""/>
-        <p:cNvGrpSpPr/>
-        <p:nvPr/>
-      </p:nvGrpSpPr>
-      <p:grpSpPr>
-        <a:xfrm>
-          <a:off x="0" y="0"/>
-          <a:ext cx="0" cy="0"/>
-          <a:chOff x="0" y="0"/>
-          <a:chExt cx="0" cy="0"/>
-        </a:xfrm>
-      </p:grpSpPr>
-      <p:sp>
-        <p:nvSpPr>
-          <p:cNvPr id="2" name="Title 1">
-            <a:extLst>
-              <a:ext uri="{FF2B5EF4-FFF2-40B4-BE49-F238E27FC236}">
-                <a16:creationId xmlns:a16="http://schemas.microsoft.com/office/drawing/2014/main" id="{B16AAD79-5D47-294E-8347-12E7FA582E89}"/>
-              </a:ext>
-            </a:extLst>
-          </p:cNvPr>
-          <p:cNvSpPr>
-            <a:spLocks noGrp="1"/>
-          </p:cNvSpPr>
-          <p:nvPr>
-            <p:ph type="title"/>
-          </p:nvPr>
-        </p:nvSpPr>
-        <p:spPr/>
-        <p:txBody>
-          <a:bodyPr/>
-          <a:lstStyle/>
-          <a:p>
-            <a:r>
-              <a:rPr lang="en-US" dirty="0"/>
-              <a:t>PCI Mitigation</a:t>
-            </a:r>
-          </a:p>
-        </p:txBody>
-      </p:sp>
-      <p:sp>
-        <p:nvSpPr>
-          <p:cNvPr id="3" name="Content Placeholder 2">
-            <a:extLst>
-              <a:ext uri="{FF2B5EF4-FFF2-40B4-BE49-F238E27FC236}">
-                <a16:creationId xmlns:a16="http://schemas.microsoft.com/office/drawing/2014/main" id="{24A15A08-ED25-5C49-AAF1-50993BB389EE}"/>
-              </a:ext>
-            </a:extLst>
-          </p:cNvPr>
-          <p:cNvSpPr>
-            <a:spLocks noGrp="1"/>
-          </p:cNvSpPr>
-          <p:nvPr>
-            <p:ph idx="1"/>
-          </p:nvPr>
-        </p:nvSpPr>
-        <p:spPr>
-          <a:xfrm>
-            <a:off x="609600" y="1968501"/>
-            <a:ext cx="7371522" cy="3965670"/>
-          </a:xfrm>
-        </p:spPr>
-        <p:txBody>
-          <a:bodyPr/>
-          <a:lstStyle/>
-          <a:p>
-            <a:r>
-              <a:rPr lang="en-US" sz="1900" dirty="0"/>
-              <a:t>There are two primary approaches to mitigate PCI failures: 1) changes in the design of various components – notably, the fuel pellet, fuel cladding and fuel assembly; 2) the manner in which the reactor is operated can be altered to minimize PCI failures</a:t>
-            </a:r>
-          </a:p>
-          <a:p>
-            <a:r>
-              <a:rPr lang="en-US" sz="1900" dirty="0"/>
-              <a:t>The design of fuel has changed to better optimize performance and reliability, including modifying the fuel pellet geometry, microstructure (i.e., grain size and porosity), and composition (i.e., initial O/M, minor additives)</a:t>
-            </a:r>
-          </a:p>
-          <a:p>
-            <a:r>
-              <a:rPr lang="en-US" sz="1900" dirty="0"/>
-              <a:t>Many design changes of the cladding have been investigated, including the development of small grain sizes and texture control, alloy composition, inclusion of an inner liner and the application of a pellet-clad interlayer </a:t>
-            </a:r>
-          </a:p>
-          <a:p>
-            <a:endParaRPr lang="en-US" sz="1900" dirty="0"/>
-          </a:p>
-        </p:txBody>
-      </p:sp>
-      <p:sp>
-        <p:nvSpPr>
-          <p:cNvPr id="4" name="Slide Number Placeholder 3">
-            <a:extLst>
-              <a:ext uri="{FF2B5EF4-FFF2-40B4-BE49-F238E27FC236}">
-                <a16:creationId xmlns:a16="http://schemas.microsoft.com/office/drawing/2014/main" id="{215C8750-2B58-7A4B-84C2-24D693AD1937}"/>
-              </a:ext>
-            </a:extLst>
-          </p:cNvPr>
-          <p:cNvSpPr>
-            <a:spLocks noGrp="1"/>
-          </p:cNvSpPr>
-          <p:nvPr>
-            <p:ph type="sldNum" sz="quarter" idx="12"/>
-          </p:nvPr>
-        </p:nvSpPr>
-        <p:spPr/>
-        <p:txBody>
-          <a:bodyPr/>
-          <a:lstStyle/>
-          <a:p>
-            <a:pPr marL="0" marR="0" lvl="0" indent="0" algn="r" defTabSz="914400" rtl="0" eaLnBrk="1" fontAlgn="auto" latinLnBrk="0" hangingPunct="1">
-              <a:lnSpc>
-                <a:spcPct val="100000"/>
-              </a:lnSpc>
-              <a:spcBef>
-                <a:spcPts val="0"/>
-              </a:spcBef>
-              <a:spcAft>
-                <a:spcPts val="0"/>
-              </a:spcAft>
-              <a:buClrTx/>
-              <a:buSzTx/>
-              <a:buFontTx/>
-              <a:buNone/>
-              <a:tabLst/>
-              <a:defRPr/>
-            </a:pPr>
-            <a:fld id="{3FF2C605-4958-CF43-AA48-80339EFDB0AF}" type="slidenum">
-              <a:rPr kumimoji="0" lang="en-US" sz="1200" b="0" i="0" u="none" strike="noStrike" kern="1200" cap="none" spc="0" normalizeH="0" baseline="0" noProof="0" smtClean="0">
-                <a:ln>
-                  <a:noFill/>
-                </a:ln>
-                <a:solidFill>
-                  <a:prstClr val="black">
-                    <a:tint val="75000"/>
-                  </a:prstClr>
-                </a:solidFill>
-                <a:effectLst/>
-                <a:uLnTx/>
-                <a:uFillTx/>
-                <a:latin typeface="Calibri"/>
-                <a:ea typeface="+mn-ea"/>
-                <a:cs typeface="+mn-cs"/>
-              </a:rPr>
-              <a:pPr marL="0" marR="0" lvl="0" indent="0" algn="r" defTabSz="914400" rtl="0" eaLnBrk="1" fontAlgn="auto" latinLnBrk="0" hangingPunct="1">
-                <a:lnSpc>
-                  <a:spcPct val="100000"/>
-                </a:lnSpc>
-                <a:spcBef>
-                  <a:spcPts val="0"/>
-                </a:spcBef>
-                <a:spcAft>
-                  <a:spcPts val="0"/>
-                </a:spcAft>
-                <a:buClrTx/>
-                <a:buSzTx/>
-                <a:buFontTx/>
-                <a:buNone/>
-                <a:tabLst/>
-                <a:defRPr/>
-              </a:pPr>
-              <a:t>21</a:t>
+              <a:t>10</a:t>
             </a:fld>
             <a:endParaRPr kumimoji="0" lang="en-US" sz="1200" b="0" i="0" u="none" strike="noStrike" kern="1200" cap="none" spc="0" normalizeH="0" baseline="0" noProof="0">
               <a:ln>
@@ -6962,7 +4017,7 @@
     </p:spTree>
     <p:extLst>
       <p:ext uri="{BB962C8B-B14F-4D97-AF65-F5344CB8AC3E}">
-        <p14:creationId xmlns:p14="http://schemas.microsoft.com/office/powerpoint/2010/main" val="1142583913"/>
+        <p14:creationId xmlns:p14="http://schemas.microsoft.com/office/powerpoint/2010/main" val="1029084067"/>
       </p:ext>
     </p:extLst>
   </p:cSld>
@@ -6972,7 +4027,7 @@
 </p:sld>
 </file>
 
-<file path=ppt/slides/slide22.xml><?xml version="1.0" encoding="utf-8"?>
+<file path=ppt/slides/slide11.xml><?xml version="1.0" encoding="utf-8"?>
 <p:sld xmlns:a="http://schemas.openxmlformats.org/drawingml/2006/main" xmlns:r="http://schemas.openxmlformats.org/officeDocument/2006/relationships" xmlns:p="http://schemas.openxmlformats.org/presentationml/2006/main">
   <p:cSld>
     <p:spTree>
@@ -7058,7 +4113,7 @@
           <a:p>
             <a:r>
               <a:rPr lang="en-US" sz="2000" dirty="0"/>
-              <a:t>The three variables that are controlled from an operational point of view are the linear power, change in linear power, ramp rate, and discharge burnup</a:t>
+              <a:t>The three variables that are controlled from an operational point of view are the linear power, change in linear power, ramp rate and discharge burnup</a:t>
             </a:r>
           </a:p>
           <a:p>
@@ -7138,7 +4193,7 @@
                 <a:tabLst/>
                 <a:defRPr/>
               </a:pPr>
-              <a:t>22</a:t>
+              <a:t>11</a:t>
             </a:fld>
             <a:endParaRPr kumimoji="0" lang="en-US" sz="1200" b="0" i="0" u="none" strike="noStrike" kern="1200" cap="none" spc="0" normalizeH="0" baseline="0" noProof="0">
               <a:ln>
@@ -7162,7 +4217,7 @@
     </p:spTree>
     <p:extLst>
       <p:ext uri="{BB962C8B-B14F-4D97-AF65-F5344CB8AC3E}">
-        <p14:creationId xmlns:p14="http://schemas.microsoft.com/office/powerpoint/2010/main" val="492444445"/>
+        <p14:creationId xmlns:p14="http://schemas.microsoft.com/office/powerpoint/2010/main" val="3244468133"/>
       </p:ext>
     </p:extLst>
   </p:cSld>
@@ -7172,7 +4227,7 @@
 </p:sld>
 </file>
 
-<file path=ppt/slides/slide23.xml><?xml version="1.0" encoding="utf-8"?>
+<file path=ppt/slides/slide12.xml><?xml version="1.0" encoding="utf-8"?>
 <p:sld xmlns:a="http://schemas.openxmlformats.org/drawingml/2006/main" xmlns:r="http://schemas.openxmlformats.org/officeDocument/2006/relationships" xmlns:p="http://schemas.openxmlformats.org/presentationml/2006/main">
   <p:cSld>
     <p:spTree>
@@ -7194,7 +4249,7 @@
           <p:cNvPr id="2" name="Title 1">
             <a:extLst>
               <a:ext uri="{FF2B5EF4-FFF2-40B4-BE49-F238E27FC236}">
-                <a16:creationId xmlns:a16="http://schemas.microsoft.com/office/drawing/2014/main" id="{D2D1C0B6-3F8C-FF4D-A150-7B07ACA639B8}"/>
+                <a16:creationId xmlns:a16="http://schemas.microsoft.com/office/drawing/2014/main" id="{3D458A14-8248-8B4D-2AB6-E11265A03FF3}"/>
               </a:ext>
             </a:extLst>
           </p:cNvPr>
@@ -7222,7 +4277,7 @@
           <p:cNvPr id="3" name="Content Placeholder 2">
             <a:extLst>
               <a:ext uri="{FF2B5EF4-FFF2-40B4-BE49-F238E27FC236}">
-                <a16:creationId xmlns:a16="http://schemas.microsoft.com/office/drawing/2014/main" id="{DB878354-690C-9A4E-845C-374B1E17BC22}"/>
+                <a16:creationId xmlns:a16="http://schemas.microsoft.com/office/drawing/2014/main" id="{A1F3468E-03E5-2D65-E218-6B7B23ABB878}"/>
               </a:ext>
             </a:extLst>
           </p:cNvPr>
@@ -7233,84 +4288,12 @@
             <p:ph idx="1"/>
           </p:nvPr>
         </p:nvSpPr>
-        <p:spPr>
-          <a:xfrm>
-            <a:off x="609600" y="1968501"/>
-            <a:ext cx="10972800" cy="4157664"/>
-          </a:xfrm>
-        </p:spPr>
+        <p:spPr/>
         <p:txBody>
           <a:bodyPr/>
           <a:lstStyle/>
           <a:p>
-            <a:r>
-              <a:rPr lang="en-US" sz="2000" dirty="0"/>
-              <a:t>In order for SCC to initiate and propagate in any material, four conditions are simultaneously required:</a:t>
-            </a:r>
-          </a:p>
-          <a:p>
-            <a:pPr lvl="1"/>
-            <a:r>
-              <a:rPr lang="en-US" sz="2000" dirty="0"/>
-              <a:t>corrosive environment (ZrI4 -&gt; ZrO2)</a:t>
-            </a:r>
-          </a:p>
-          <a:p>
-            <a:pPr lvl="1"/>
-            <a:r>
-              <a:rPr lang="en-US" sz="2000" dirty="0"/>
-              <a:t>susceptible material (all Zr alloys are susceptible, minor additions make small improvements)</a:t>
-            </a:r>
-          </a:p>
-          <a:p>
-            <a:pPr lvl="1"/>
-            <a:r>
-              <a:rPr lang="en-US" sz="2000" dirty="0"/>
-              <a:t>sufficient stress (pellet expansion, creep down, </a:t>
-            </a:r>
-            <a:r>
-              <a:rPr lang="en-US" sz="2000" dirty="0" err="1"/>
-              <a:t>etc</a:t>
-            </a:r>
-            <a:r>
-              <a:rPr lang="en-US" sz="2000" dirty="0"/>
-              <a:t>)</a:t>
-            </a:r>
-          </a:p>
-          <a:p>
-            <a:pPr lvl="1"/>
-            <a:r>
-              <a:rPr lang="en-US" sz="2000" dirty="0"/>
-              <a:t>sufficient time (incubation time, steady state crack growth, ductile failure)</a:t>
-            </a:r>
-          </a:p>
-          <a:p>
-            <a:r>
-              <a:rPr lang="en-US" sz="2000" dirty="0"/>
-              <a:t>Two types of mitigation strategies to limit PCI failures</a:t>
-            </a:r>
-          </a:p>
-          <a:p>
-            <a:endParaRPr lang="en-US" sz="2000" dirty="0"/>
-          </a:p>
-          <a:p>
-            <a:r>
-              <a:rPr lang="en-US" sz="2000" dirty="0"/>
-              <a:t>Reminder, exam on Thursday… </a:t>
-            </a:r>
-          </a:p>
-          <a:p>
-            <a:r>
-              <a:rPr lang="en-US" sz="2000" dirty="0"/>
-              <a:t>Problem session time</a:t>
-            </a:r>
-          </a:p>
-          <a:p>
-            <a:endParaRPr lang="en-US" sz="2000" dirty="0"/>
-          </a:p>
-          <a:p>
-            <a:pPr lvl="1"/>
-            <a:endParaRPr lang="en-US" sz="2000" dirty="0"/>
+            <a:endParaRPr lang="en-US"/>
           </a:p>
         </p:txBody>
       </p:sp>
@@ -7319,7 +4302,628 @@
           <p:cNvPr id="4" name="Slide Number Placeholder 3">
             <a:extLst>
               <a:ext uri="{FF2B5EF4-FFF2-40B4-BE49-F238E27FC236}">
-                <a16:creationId xmlns:a16="http://schemas.microsoft.com/office/drawing/2014/main" id="{ECDFCECC-1AE9-C442-A2D5-B7DDF2CA2A51}"/>
+                <a16:creationId xmlns:a16="http://schemas.microsoft.com/office/drawing/2014/main" id="{283F3F89-D7F1-9645-D93C-15C29373B99D}"/>
+              </a:ext>
+            </a:extLst>
+          </p:cNvPr>
+          <p:cNvSpPr>
+            <a:spLocks noGrp="1"/>
+          </p:cNvSpPr>
+          <p:nvPr>
+            <p:ph type="sldNum" sz="quarter" idx="12"/>
+          </p:nvPr>
+        </p:nvSpPr>
+        <p:spPr/>
+        <p:txBody>
+          <a:bodyPr/>
+          <a:lstStyle/>
+          <a:p>
+            <a:pPr>
+              <a:defRPr/>
+            </a:pPr>
+            <a:fld id="{3FF2C605-4958-CF43-AA48-80339EFDB0AF}" type="slidenum">
+              <a:rPr lang="en-US" smtClean="0"/>
+              <a:pPr>
+                <a:defRPr/>
+              </a:pPr>
+              <a:t>12</a:t>
+            </a:fld>
+            <a:endParaRPr lang="en-US"/>
+          </a:p>
+        </p:txBody>
+      </p:sp>
+    </p:spTree>
+    <p:extLst>
+      <p:ext uri="{BB962C8B-B14F-4D97-AF65-F5344CB8AC3E}">
+        <p14:creationId xmlns:p14="http://schemas.microsoft.com/office/powerpoint/2010/main" val="137848802"/>
+      </p:ext>
+    </p:extLst>
+  </p:cSld>
+  <p:clrMapOvr>
+    <a:masterClrMapping/>
+  </p:clrMapOvr>
+</p:sld>
+</file>
+
+<file path=ppt/slides/slide2.xml><?xml version="1.0" encoding="utf-8"?>
+<p:sld xmlns:a="http://schemas.openxmlformats.org/drawingml/2006/main" xmlns:r="http://schemas.openxmlformats.org/officeDocument/2006/relationships" xmlns:p="http://schemas.openxmlformats.org/presentationml/2006/main">
+  <p:cSld>
+    <p:spTree>
+      <p:nvGrpSpPr>
+        <p:cNvPr id="1" name=""/>
+        <p:cNvGrpSpPr/>
+        <p:nvPr/>
+      </p:nvGrpSpPr>
+      <p:grpSpPr>
+        <a:xfrm>
+          <a:off x="0" y="0"/>
+          <a:ext cx="0" cy="0"/>
+          <a:chOff x="0" y="0"/>
+          <a:chExt cx="0" cy="0"/>
+        </a:xfrm>
+      </p:grpSpPr>
+      <p:sp>
+        <p:nvSpPr>
+          <p:cNvPr id="2" name="Title 1">
+            <a:extLst>
+              <a:ext uri="{FF2B5EF4-FFF2-40B4-BE49-F238E27FC236}">
+                <a16:creationId xmlns:a16="http://schemas.microsoft.com/office/drawing/2014/main" id="{91C669C3-7586-8D5D-5213-3EAA1F236DA8}"/>
+              </a:ext>
+            </a:extLst>
+          </p:cNvPr>
+          <p:cNvSpPr>
+            <a:spLocks noGrp="1"/>
+          </p:cNvSpPr>
+          <p:nvPr>
+            <p:ph type="title"/>
+          </p:nvPr>
+        </p:nvSpPr>
+        <p:spPr/>
+        <p:txBody>
+          <a:bodyPr/>
+          <a:lstStyle/>
+          <a:p>
+            <a:r>
+              <a:rPr lang="en-US" dirty="0"/>
+              <a:t>Last Time</a:t>
+            </a:r>
+          </a:p>
+        </p:txBody>
+      </p:sp>
+      <p:sp>
+        <p:nvSpPr>
+          <p:cNvPr id="3" name="Content Placeholder 2">
+            <a:extLst>
+              <a:ext uri="{FF2B5EF4-FFF2-40B4-BE49-F238E27FC236}">
+                <a16:creationId xmlns:a16="http://schemas.microsoft.com/office/drawing/2014/main" id="{89B496EA-2615-5D83-73E6-1093C95A8AF1}"/>
+              </a:ext>
+            </a:extLst>
+          </p:cNvPr>
+          <p:cNvSpPr>
+            <a:spLocks noGrp="1"/>
+          </p:cNvSpPr>
+          <p:nvPr>
+            <p:ph idx="1"/>
+          </p:nvPr>
+        </p:nvSpPr>
+        <p:spPr>
+          <a:xfrm>
+            <a:off x="609600" y="1868395"/>
+            <a:ext cx="10972800" cy="3965670"/>
+          </a:xfrm>
+        </p:spPr>
+        <p:txBody>
+          <a:bodyPr/>
+          <a:lstStyle/>
+          <a:p>
+            <a:endParaRPr lang="en-US" sz="2000" dirty="0"/>
+          </a:p>
+        </p:txBody>
+      </p:sp>
+      <p:sp>
+        <p:nvSpPr>
+          <p:cNvPr id="4" name="Slide Number Placeholder 3">
+            <a:extLst>
+              <a:ext uri="{FF2B5EF4-FFF2-40B4-BE49-F238E27FC236}">
+                <a16:creationId xmlns:a16="http://schemas.microsoft.com/office/drawing/2014/main" id="{3B8FB79D-3C0F-B3AC-A960-0918542F0779}"/>
+              </a:ext>
+            </a:extLst>
+          </p:cNvPr>
+          <p:cNvSpPr>
+            <a:spLocks noGrp="1"/>
+          </p:cNvSpPr>
+          <p:nvPr>
+            <p:ph type="sldNum" sz="quarter" idx="12"/>
+          </p:nvPr>
+        </p:nvSpPr>
+        <p:spPr/>
+        <p:txBody>
+          <a:bodyPr/>
+          <a:lstStyle/>
+          <a:p>
+            <a:pPr>
+              <a:defRPr/>
+            </a:pPr>
+            <a:fld id="{3FF2C605-4958-CF43-AA48-80339EFDB0AF}" type="slidenum">
+              <a:rPr lang="en-US" smtClean="0"/>
+              <a:pPr>
+                <a:defRPr/>
+              </a:pPr>
+              <a:t>2</a:t>
+            </a:fld>
+            <a:endParaRPr lang="en-US"/>
+          </a:p>
+        </p:txBody>
+      </p:sp>
+    </p:spTree>
+    <p:extLst>
+      <p:ext uri="{BB962C8B-B14F-4D97-AF65-F5344CB8AC3E}">
+        <p14:creationId xmlns:p14="http://schemas.microsoft.com/office/powerpoint/2010/main" val="96840934"/>
+      </p:ext>
+    </p:extLst>
+  </p:cSld>
+  <p:clrMapOvr>
+    <a:masterClrMapping/>
+  </p:clrMapOvr>
+</p:sld>
+</file>
+
+<file path=ppt/slides/slide3.xml><?xml version="1.0" encoding="utf-8"?>
+<p:sld xmlns:a="http://schemas.openxmlformats.org/drawingml/2006/main" xmlns:r="http://schemas.openxmlformats.org/officeDocument/2006/relationships" xmlns:p="http://schemas.openxmlformats.org/presentationml/2006/main">
+  <p:cSld>
+    <p:spTree>
+      <p:nvGrpSpPr>
+        <p:cNvPr id="1" name=""/>
+        <p:cNvGrpSpPr/>
+        <p:nvPr/>
+      </p:nvGrpSpPr>
+      <p:grpSpPr>
+        <a:xfrm>
+          <a:off x="0" y="0"/>
+          <a:ext cx="0" cy="0"/>
+          <a:chOff x="0" y="0"/>
+          <a:chExt cx="0" cy="0"/>
+        </a:xfrm>
+      </p:grpSpPr>
+      <p:sp>
+        <p:nvSpPr>
+          <p:cNvPr id="2" name="Title 1">
+            <a:extLst>
+              <a:ext uri="{FF2B5EF4-FFF2-40B4-BE49-F238E27FC236}">
+                <a16:creationId xmlns:a16="http://schemas.microsoft.com/office/drawing/2014/main" id="{77E1810E-872A-8442-A155-D866A12AA58F}"/>
+              </a:ext>
+            </a:extLst>
+          </p:cNvPr>
+          <p:cNvSpPr>
+            <a:spLocks noGrp="1"/>
+          </p:cNvSpPr>
+          <p:nvPr>
+            <p:ph type="title"/>
+          </p:nvPr>
+        </p:nvSpPr>
+        <p:spPr>
+          <a:xfrm>
+            <a:off x="609600" y="601490"/>
+            <a:ext cx="10972800" cy="1068387"/>
+          </a:xfrm>
+        </p:spPr>
+        <p:txBody>
+          <a:bodyPr/>
+          <a:lstStyle/>
+          <a:p>
+            <a:r>
+              <a:rPr lang="en-US" dirty="0"/>
+              <a:t>Rim/HBS Region</a:t>
+            </a:r>
+          </a:p>
+        </p:txBody>
+      </p:sp>
+      <p:sp>
+        <p:nvSpPr>
+          <p:cNvPr id="3" name="Content Placeholder 2">
+            <a:extLst>
+              <a:ext uri="{FF2B5EF4-FFF2-40B4-BE49-F238E27FC236}">
+                <a16:creationId xmlns:a16="http://schemas.microsoft.com/office/drawing/2014/main" id="{54966A64-C35B-EB44-9E7E-612E7FC54E1C}"/>
+              </a:ext>
+            </a:extLst>
+          </p:cNvPr>
+          <p:cNvSpPr>
+            <a:spLocks noGrp="1"/>
+          </p:cNvSpPr>
+          <p:nvPr>
+            <p:ph idx="1"/>
+          </p:nvPr>
+        </p:nvSpPr>
+        <p:spPr>
+          <a:xfrm>
+            <a:off x="609600" y="2160495"/>
+            <a:ext cx="5661991" cy="3965670"/>
+          </a:xfrm>
+        </p:spPr>
+        <p:txBody>
+          <a:bodyPr/>
+          <a:lstStyle/>
+          <a:p>
+            <a:r>
+              <a:rPr lang="en-US" sz="2000" dirty="0"/>
+              <a:t>The HBS region has a much higher porosity (up to 30% locally) than the bulk of the fuel, which affects the mechanical properties</a:t>
+            </a:r>
+          </a:p>
+          <a:p>
+            <a:r>
+              <a:rPr lang="en-US" sz="2000" dirty="0"/>
+              <a:t>Microhardness measurements show a reciprocal trend of the strength with porosity</a:t>
+            </a:r>
+          </a:p>
+          <a:p>
+            <a:r>
+              <a:rPr lang="en-US" sz="2000" dirty="0"/>
+              <a:t>The softening of the fuel surface might be beneficial in reducing mechanical stresses imposed by the fuel on the cladding at the point of contact</a:t>
+            </a:r>
+          </a:p>
+          <a:p>
+            <a:endParaRPr lang="en-US" sz="2000" dirty="0"/>
+          </a:p>
+        </p:txBody>
+      </p:sp>
+      <p:sp>
+        <p:nvSpPr>
+          <p:cNvPr id="4" name="Slide Number Placeholder 3">
+            <a:extLst>
+              <a:ext uri="{FF2B5EF4-FFF2-40B4-BE49-F238E27FC236}">
+                <a16:creationId xmlns:a16="http://schemas.microsoft.com/office/drawing/2014/main" id="{8FE7966F-5105-6146-B368-3408D6660A17}"/>
+              </a:ext>
+            </a:extLst>
+          </p:cNvPr>
+          <p:cNvSpPr>
+            <a:spLocks noGrp="1"/>
+          </p:cNvSpPr>
+          <p:nvPr>
+            <p:ph type="sldNum" sz="quarter" idx="12"/>
+          </p:nvPr>
+        </p:nvSpPr>
+        <p:spPr/>
+        <p:txBody>
+          <a:bodyPr/>
+          <a:lstStyle/>
+          <a:p>
+            <a:pPr>
+              <a:defRPr/>
+            </a:pPr>
+            <a:fld id="{3FF2C605-4958-CF43-AA48-80339EFDB0AF}" type="slidenum">
+              <a:rPr lang="en-US" smtClean="0"/>
+              <a:pPr>
+                <a:defRPr/>
+              </a:pPr>
+              <a:t>3</a:t>
+            </a:fld>
+            <a:endParaRPr lang="en-US"/>
+          </a:p>
+        </p:txBody>
+      </p:sp>
+      <p:pic>
+        <p:nvPicPr>
+          <p:cNvPr id="5" name="Picture 4">
+            <a:extLst>
+              <a:ext uri="{FF2B5EF4-FFF2-40B4-BE49-F238E27FC236}">
+                <a16:creationId xmlns:a16="http://schemas.microsoft.com/office/drawing/2014/main" id="{F79872E4-D76F-ED4C-B38E-B6D74EEFA821}"/>
+              </a:ext>
+            </a:extLst>
+          </p:cNvPr>
+          <p:cNvPicPr>
+            <a:picLocks noChangeAspect="1"/>
+          </p:cNvPicPr>
+          <p:nvPr/>
+        </p:nvPicPr>
+        <p:blipFill>
+          <a:blip r:embed="rId2"/>
+          <a:stretch>
+            <a:fillRect/>
+          </a:stretch>
+        </p:blipFill>
+        <p:spPr>
+          <a:xfrm>
+            <a:off x="6602773" y="2424111"/>
+            <a:ext cx="5371669" cy="3298205"/>
+          </a:xfrm>
+          <a:prstGeom prst="rect">
+            <a:avLst/>
+          </a:prstGeom>
+        </p:spPr>
+      </p:pic>
+    </p:spTree>
+    <p:extLst>
+      <p:ext uri="{BB962C8B-B14F-4D97-AF65-F5344CB8AC3E}">
+        <p14:creationId xmlns:p14="http://schemas.microsoft.com/office/powerpoint/2010/main" val="607759173"/>
+      </p:ext>
+    </p:extLst>
+  </p:cSld>
+  <p:clrMapOvr>
+    <a:masterClrMapping/>
+  </p:clrMapOvr>
+</p:sld>
+</file>
+
+<file path=ppt/slides/slide4.xml><?xml version="1.0" encoding="utf-8"?>
+<p:sld xmlns:a="http://schemas.openxmlformats.org/drawingml/2006/main" xmlns:r="http://schemas.openxmlformats.org/officeDocument/2006/relationships" xmlns:p="http://schemas.openxmlformats.org/presentationml/2006/main">
+  <p:cSld>
+    <p:spTree>
+      <p:nvGrpSpPr>
+        <p:cNvPr id="1" name=""/>
+        <p:cNvGrpSpPr/>
+        <p:nvPr/>
+      </p:nvGrpSpPr>
+      <p:grpSpPr>
+        <a:xfrm>
+          <a:off x="0" y="0"/>
+          <a:ext cx="0" cy="0"/>
+          <a:chOff x="0" y="0"/>
+          <a:chExt cx="0" cy="0"/>
+        </a:xfrm>
+      </p:grpSpPr>
+      <p:sp>
+        <p:nvSpPr>
+          <p:cNvPr id="2" name="Title 1">
+            <a:extLst>
+              <a:ext uri="{FF2B5EF4-FFF2-40B4-BE49-F238E27FC236}">
+                <a16:creationId xmlns:a16="http://schemas.microsoft.com/office/drawing/2014/main" id="{311FF886-29FF-7545-BBF9-5A5DD9867A13}"/>
+              </a:ext>
+            </a:extLst>
+          </p:cNvPr>
+          <p:cNvSpPr>
+            <a:spLocks noGrp="1"/>
+          </p:cNvSpPr>
+          <p:nvPr>
+            <p:ph type="title"/>
+          </p:nvPr>
+        </p:nvSpPr>
+        <p:spPr>
+          <a:xfrm>
+            <a:off x="609600" y="647866"/>
+            <a:ext cx="10972800" cy="1068387"/>
+          </a:xfrm>
+        </p:spPr>
+        <p:txBody>
+          <a:bodyPr/>
+          <a:lstStyle/>
+          <a:p>
+            <a:r>
+              <a:rPr lang="en-US" dirty="0"/>
+              <a:t>HBS and Fission Gas Release</a:t>
+            </a:r>
+          </a:p>
+        </p:txBody>
+      </p:sp>
+      <p:sp>
+        <p:nvSpPr>
+          <p:cNvPr id="3" name="Content Placeholder 2">
+            <a:extLst>
+              <a:ext uri="{FF2B5EF4-FFF2-40B4-BE49-F238E27FC236}">
+                <a16:creationId xmlns:a16="http://schemas.microsoft.com/office/drawing/2014/main" id="{C6178F3E-0DFC-EE47-AAAC-5F32BE74B5AD}"/>
+              </a:ext>
+            </a:extLst>
+          </p:cNvPr>
+          <p:cNvSpPr>
+            <a:spLocks noGrp="1"/>
+          </p:cNvSpPr>
+          <p:nvPr>
+            <p:ph idx="1"/>
+          </p:nvPr>
+        </p:nvSpPr>
+        <p:spPr>
+          <a:xfrm>
+            <a:off x="609600" y="2160495"/>
+            <a:ext cx="6725478" cy="3965670"/>
+          </a:xfrm>
+        </p:spPr>
+        <p:txBody>
+          <a:bodyPr/>
+          <a:lstStyle/>
+          <a:p>
+            <a:r>
+              <a:rPr lang="en-US" dirty="0"/>
+              <a:t>The large increase in porosity within the HBS in high burnup fuel also affects fission gas release, providing local intergranular accommodation for retaining fission gases</a:t>
+            </a:r>
+          </a:p>
+          <a:p>
+            <a:r>
+              <a:rPr lang="en-US" dirty="0"/>
+              <a:t>Although the formation of the HBS promotes local fission gas retention, the absolute amount of fission gases that are released to the gap increases with burnup</a:t>
+            </a:r>
+          </a:p>
+          <a:p>
+            <a:endParaRPr lang="en-US" dirty="0"/>
+          </a:p>
+          <a:p>
+            <a:endParaRPr lang="en-US" dirty="0"/>
+          </a:p>
+        </p:txBody>
+      </p:sp>
+      <p:sp>
+        <p:nvSpPr>
+          <p:cNvPr id="4" name="Slide Number Placeholder 3">
+            <a:extLst>
+              <a:ext uri="{FF2B5EF4-FFF2-40B4-BE49-F238E27FC236}">
+                <a16:creationId xmlns:a16="http://schemas.microsoft.com/office/drawing/2014/main" id="{3F5C3E58-1917-1447-9D06-A9D9853D6F04}"/>
+              </a:ext>
+            </a:extLst>
+          </p:cNvPr>
+          <p:cNvSpPr>
+            <a:spLocks noGrp="1"/>
+          </p:cNvSpPr>
+          <p:nvPr>
+            <p:ph type="sldNum" sz="quarter" idx="12"/>
+          </p:nvPr>
+        </p:nvSpPr>
+        <p:spPr/>
+        <p:txBody>
+          <a:bodyPr/>
+          <a:lstStyle/>
+          <a:p>
+            <a:pPr>
+              <a:defRPr/>
+            </a:pPr>
+            <a:fld id="{3FF2C605-4958-CF43-AA48-80339EFDB0AF}" type="slidenum">
+              <a:rPr lang="en-US" smtClean="0"/>
+              <a:pPr>
+                <a:defRPr/>
+              </a:pPr>
+              <a:t>4</a:t>
+            </a:fld>
+            <a:endParaRPr lang="en-US"/>
+          </a:p>
+        </p:txBody>
+      </p:sp>
+      <p:pic>
+        <p:nvPicPr>
+          <p:cNvPr id="5" name="Picture 4">
+            <a:extLst>
+              <a:ext uri="{FF2B5EF4-FFF2-40B4-BE49-F238E27FC236}">
+                <a16:creationId xmlns:a16="http://schemas.microsoft.com/office/drawing/2014/main" id="{49391CD0-F1F0-7B4F-9B77-8511B0997003}"/>
+              </a:ext>
+            </a:extLst>
+          </p:cNvPr>
+          <p:cNvPicPr>
+            <a:picLocks noChangeAspect="1"/>
+          </p:cNvPicPr>
+          <p:nvPr/>
+        </p:nvPicPr>
+        <p:blipFill>
+          <a:blip r:embed="rId2"/>
+          <a:stretch>
+            <a:fillRect/>
+          </a:stretch>
+        </p:blipFill>
+        <p:spPr>
+          <a:xfrm>
+            <a:off x="7684991" y="2075621"/>
+            <a:ext cx="4433018" cy="3221936"/>
+          </a:xfrm>
+          <a:prstGeom prst="rect">
+            <a:avLst/>
+          </a:prstGeom>
+        </p:spPr>
+      </p:pic>
+    </p:spTree>
+    <p:extLst>
+      <p:ext uri="{BB962C8B-B14F-4D97-AF65-F5344CB8AC3E}">
+        <p14:creationId xmlns:p14="http://schemas.microsoft.com/office/powerpoint/2010/main" val="3532577483"/>
+      </p:ext>
+    </p:extLst>
+  </p:cSld>
+  <p:clrMapOvr>
+    <a:masterClrMapping/>
+  </p:clrMapOvr>
+</p:sld>
+</file>
+
+<file path=ppt/slides/slide5.xml><?xml version="1.0" encoding="utf-8"?>
+<p:sld xmlns:a="http://schemas.openxmlformats.org/drawingml/2006/main" xmlns:r="http://schemas.openxmlformats.org/officeDocument/2006/relationships" xmlns:p="http://schemas.openxmlformats.org/presentationml/2006/main">
+  <p:cSld>
+    <p:spTree>
+      <p:nvGrpSpPr>
+        <p:cNvPr id="1" name=""/>
+        <p:cNvGrpSpPr/>
+        <p:nvPr/>
+      </p:nvGrpSpPr>
+      <p:grpSpPr>
+        <a:xfrm>
+          <a:off x="0" y="0"/>
+          <a:ext cx="0" cy="0"/>
+          <a:chOff x="0" y="0"/>
+          <a:chExt cx="0" cy="0"/>
+        </a:xfrm>
+      </p:grpSpPr>
+      <p:sp>
+        <p:nvSpPr>
+          <p:cNvPr id="2" name="Title 1">
+            <a:extLst>
+              <a:ext uri="{FF2B5EF4-FFF2-40B4-BE49-F238E27FC236}">
+                <a16:creationId xmlns:a16="http://schemas.microsoft.com/office/drawing/2014/main" id="{DA774063-561C-7B43-A6EC-B0A56677ECFB}"/>
+              </a:ext>
+            </a:extLst>
+          </p:cNvPr>
+          <p:cNvSpPr>
+            <a:spLocks noGrp="1"/>
+          </p:cNvSpPr>
+          <p:nvPr>
+            <p:ph type="title"/>
+          </p:nvPr>
+        </p:nvSpPr>
+        <p:spPr>
+          <a:xfrm>
+            <a:off x="609600" y="715104"/>
+            <a:ext cx="10972800" cy="1068387"/>
+          </a:xfrm>
+        </p:spPr>
+        <p:txBody>
+          <a:bodyPr/>
+          <a:lstStyle/>
+          <a:p>
+            <a:r>
+              <a:rPr lang="en-US" dirty="0"/>
+              <a:t>Incubation Time</a:t>
+            </a:r>
+          </a:p>
+        </p:txBody>
+      </p:sp>
+      <p:sp>
+        <p:nvSpPr>
+          <p:cNvPr id="3" name="Content Placeholder 2">
+            <a:extLst>
+              <a:ext uri="{FF2B5EF4-FFF2-40B4-BE49-F238E27FC236}">
+                <a16:creationId xmlns:a16="http://schemas.microsoft.com/office/drawing/2014/main" id="{D3CB08B0-934B-B34B-A890-0A932C4E7E43}"/>
+              </a:ext>
+            </a:extLst>
+          </p:cNvPr>
+          <p:cNvSpPr>
+            <a:spLocks noGrp="1"/>
+          </p:cNvSpPr>
+          <p:nvPr>
+            <p:ph idx="1"/>
+          </p:nvPr>
+        </p:nvSpPr>
+        <p:spPr>
+          <a:xfrm>
+            <a:off x="609600" y="2160495"/>
+            <a:ext cx="8128000" cy="3965670"/>
+          </a:xfrm>
+        </p:spPr>
+        <p:txBody>
+          <a:bodyPr/>
+          <a:lstStyle/>
+          <a:p>
+            <a:r>
+              <a:rPr lang="en-US" sz="2000" dirty="0"/>
+              <a:t>The corrosive environment, represented by a sufficient inventory of chemically active fission gases in the gap, not only depends on burnup, but the ability of these gases to chemically attack the cladding</a:t>
+            </a:r>
+          </a:p>
+          <a:p>
+            <a:r>
+              <a:rPr lang="en-US" sz="2000" dirty="0"/>
+              <a:t>This environment requires that the normally protective oxide coating on the inner surface of the cladding is breached, thus permitting corrosive species to chemically react with the bare cladding</a:t>
+            </a:r>
+          </a:p>
+          <a:p>
+            <a:r>
+              <a:rPr lang="en-US" sz="2000" dirty="0"/>
+              <a:t>The incubation time reflects the time required for a flaw in the protective oxide to be developed and for sufficient ZrI4 to form in the cladding, resulting in the development of cracks</a:t>
+            </a:r>
+          </a:p>
+          <a:p>
+            <a:endParaRPr lang="en-US" sz="2000" dirty="0"/>
+          </a:p>
+          <a:p>
+            <a:endParaRPr lang="en-US" sz="2000" dirty="0"/>
+          </a:p>
+        </p:txBody>
+      </p:sp>
+      <p:sp>
+        <p:nvSpPr>
+          <p:cNvPr id="4" name="Slide Number Placeholder 3">
+            <a:extLst>
+              <a:ext uri="{FF2B5EF4-FFF2-40B4-BE49-F238E27FC236}">
+                <a16:creationId xmlns:a16="http://schemas.microsoft.com/office/drawing/2014/main" id="{475BB7BF-C98F-A743-8620-62B55C634083}"/>
               </a:ext>
             </a:extLst>
           </p:cNvPr>
@@ -7386,7 +4990,7 @@
                 <a:tabLst/>
                 <a:defRPr/>
               </a:pPr>
-              <a:t>23</a:t>
+              <a:t>5</a:t>
             </a:fld>
             <a:endParaRPr kumimoji="0" lang="en-US" sz="1200" b="0" i="0" u="none" strike="noStrike" kern="1200" cap="none" spc="0" normalizeH="0" baseline="0" noProof="0">
               <a:ln>
@@ -7407,10 +5011,40 @@
           </a:p>
         </p:txBody>
       </p:sp>
+      <p:pic>
+        <p:nvPicPr>
+          <p:cNvPr id="5" name="Picture 4">
+            <a:extLst>
+              <a:ext uri="{FF2B5EF4-FFF2-40B4-BE49-F238E27FC236}">
+                <a16:creationId xmlns:a16="http://schemas.microsoft.com/office/drawing/2014/main" id="{5861E6A0-13FC-D44B-8134-B0065CA06AB3}"/>
+              </a:ext>
+            </a:extLst>
+          </p:cNvPr>
+          <p:cNvPicPr>
+            <a:picLocks noChangeAspect="1"/>
+          </p:cNvPicPr>
+          <p:nvPr/>
+        </p:nvPicPr>
+        <p:blipFill>
+          <a:blip r:embed="rId2"/>
+          <a:stretch>
+            <a:fillRect/>
+          </a:stretch>
+        </p:blipFill>
+        <p:spPr>
+          <a:xfrm>
+            <a:off x="8895354" y="1643031"/>
+            <a:ext cx="3296646" cy="3965671"/>
+          </a:xfrm>
+          <a:prstGeom prst="rect">
+            <a:avLst/>
+          </a:prstGeom>
+        </p:spPr>
+      </p:pic>
     </p:spTree>
     <p:extLst>
       <p:ext uri="{BB962C8B-B14F-4D97-AF65-F5344CB8AC3E}">
-        <p14:creationId xmlns:p14="http://schemas.microsoft.com/office/powerpoint/2010/main" val="1443275762"/>
+        <p14:creationId xmlns:p14="http://schemas.microsoft.com/office/powerpoint/2010/main" val="1589883171"/>
       </p:ext>
     </p:extLst>
   </p:cSld>
@@ -7420,7 +5054,676 @@
 </p:sld>
 </file>
 
-<file path=ppt/slides/slide24.xml><?xml version="1.0" encoding="utf-8"?>
+<file path=ppt/slides/slide6.xml><?xml version="1.0" encoding="utf-8"?>
+<p:sld xmlns:a="http://schemas.openxmlformats.org/drawingml/2006/main" xmlns:r="http://schemas.openxmlformats.org/officeDocument/2006/relationships" xmlns:p="http://schemas.openxmlformats.org/presentationml/2006/main">
+  <p:cSld>
+    <p:spTree>
+      <p:nvGrpSpPr>
+        <p:cNvPr id="1" name=""/>
+        <p:cNvGrpSpPr/>
+        <p:nvPr/>
+      </p:nvGrpSpPr>
+      <p:grpSpPr>
+        <a:xfrm>
+          <a:off x="0" y="0"/>
+          <a:ext cx="0" cy="0"/>
+          <a:chOff x="0" y="0"/>
+          <a:chExt cx="0" cy="0"/>
+        </a:xfrm>
+      </p:grpSpPr>
+      <p:sp>
+        <p:nvSpPr>
+          <p:cNvPr id="2" name="Title 1">
+            <a:extLst>
+              <a:ext uri="{FF2B5EF4-FFF2-40B4-BE49-F238E27FC236}">
+                <a16:creationId xmlns:a16="http://schemas.microsoft.com/office/drawing/2014/main" id="{94444BB4-24F5-7949-9004-1EE893D6C526}"/>
+              </a:ext>
+            </a:extLst>
+          </p:cNvPr>
+          <p:cNvSpPr>
+            <a:spLocks noGrp="1"/>
+          </p:cNvSpPr>
+          <p:nvPr>
+            <p:ph type="title"/>
+          </p:nvPr>
+        </p:nvSpPr>
+        <p:spPr>
+          <a:xfrm>
+            <a:off x="609600" y="686662"/>
+            <a:ext cx="10972800" cy="1068387"/>
+          </a:xfrm>
+        </p:spPr>
+        <p:txBody>
+          <a:bodyPr/>
+          <a:lstStyle/>
+          <a:p>
+            <a:r>
+              <a:rPr lang="en-US" dirty="0"/>
+              <a:t>Crack Propagation</a:t>
+            </a:r>
+          </a:p>
+        </p:txBody>
+      </p:sp>
+      <p:sp>
+        <p:nvSpPr>
+          <p:cNvPr id="3" name="Content Placeholder 2">
+            <a:extLst>
+              <a:ext uri="{FF2B5EF4-FFF2-40B4-BE49-F238E27FC236}">
+                <a16:creationId xmlns:a16="http://schemas.microsoft.com/office/drawing/2014/main" id="{CFD54EE0-E9D0-B84C-BFF4-B784E5135CB2}"/>
+              </a:ext>
+            </a:extLst>
+          </p:cNvPr>
+          <p:cNvSpPr>
+            <a:spLocks noGrp="1"/>
+          </p:cNvSpPr>
+          <p:nvPr>
+            <p:ph idx="1"/>
+          </p:nvPr>
+        </p:nvSpPr>
+        <p:spPr>
+          <a:xfrm>
+            <a:off x="609600" y="1897878"/>
+            <a:ext cx="7152861" cy="3965670"/>
+          </a:xfrm>
+        </p:spPr>
+        <p:txBody>
+          <a:bodyPr/>
+          <a:lstStyle/>
+          <a:p>
+            <a:r>
+              <a:rPr lang="en-US" sz="2000" dirty="0"/>
+              <a:t>Once a crack has initiated, it can propagate through the cladding wall with a sufficiently high applied load</a:t>
+            </a:r>
+          </a:p>
+          <a:p>
+            <a:r>
+              <a:rPr lang="en-US" sz="2000" dirty="0"/>
+              <a:t>Both intergranular and </a:t>
+            </a:r>
+            <a:r>
+              <a:rPr lang="en-US" sz="2000" dirty="0" err="1"/>
+              <a:t>transgranular</a:t>
+            </a:r>
+            <a:r>
+              <a:rPr lang="en-US" sz="2000" dirty="0"/>
+              <a:t> propagation modes are possible</a:t>
+            </a:r>
+          </a:p>
+          <a:p>
+            <a:r>
+              <a:rPr lang="en-US" sz="2000" dirty="0"/>
+              <a:t>The propagation rate is a linear function of the stress intensity factor, K</a:t>
+            </a:r>
+            <a:r>
+              <a:rPr lang="en-US" sz="2000" baseline="-25000" dirty="0"/>
+              <a:t>SCC</a:t>
+            </a:r>
+            <a:r>
+              <a:rPr lang="en-US" sz="2000" dirty="0"/>
+              <a:t>, and is independent on the propagation mode for sufficiently high K</a:t>
+            </a:r>
+            <a:r>
+              <a:rPr lang="en-US" sz="2000" baseline="-25000" dirty="0"/>
+              <a:t>SCC</a:t>
+            </a:r>
+            <a:endParaRPr lang="en-US" sz="2000" dirty="0"/>
+          </a:p>
+          <a:p>
+            <a:r>
+              <a:rPr lang="en-US" sz="2000" dirty="0"/>
+              <a:t>The increase in iodine content generally increases the crack propagation rate</a:t>
+            </a:r>
+          </a:p>
+          <a:p>
+            <a:r>
+              <a:rPr lang="en-US" sz="2000" dirty="0"/>
+              <a:t>Increasing temperature results in decreasing the susceptibility to PCI failure, while neutron irradiation has been found to increase susceptibility</a:t>
+            </a:r>
+          </a:p>
+          <a:p>
+            <a:endParaRPr lang="en-US" sz="2000" dirty="0"/>
+          </a:p>
+          <a:p>
+            <a:endParaRPr lang="en-US" sz="2000" dirty="0"/>
+          </a:p>
+          <a:p>
+            <a:endParaRPr lang="en-US" sz="2000" dirty="0"/>
+          </a:p>
+        </p:txBody>
+      </p:sp>
+      <p:sp>
+        <p:nvSpPr>
+          <p:cNvPr id="4" name="Slide Number Placeholder 3">
+            <a:extLst>
+              <a:ext uri="{FF2B5EF4-FFF2-40B4-BE49-F238E27FC236}">
+                <a16:creationId xmlns:a16="http://schemas.microsoft.com/office/drawing/2014/main" id="{574FE000-83A7-814E-8937-7C6C20C52B13}"/>
+              </a:ext>
+            </a:extLst>
+          </p:cNvPr>
+          <p:cNvSpPr>
+            <a:spLocks noGrp="1"/>
+          </p:cNvSpPr>
+          <p:nvPr>
+            <p:ph type="sldNum" sz="quarter" idx="12"/>
+          </p:nvPr>
+        </p:nvSpPr>
+        <p:spPr/>
+        <p:txBody>
+          <a:bodyPr/>
+          <a:lstStyle/>
+          <a:p>
+            <a:pPr marL="0" marR="0" lvl="0" indent="0" algn="r" defTabSz="914400" rtl="0" eaLnBrk="1" fontAlgn="auto" latinLnBrk="0" hangingPunct="1">
+              <a:lnSpc>
+                <a:spcPct val="100000"/>
+              </a:lnSpc>
+              <a:spcBef>
+                <a:spcPts val="0"/>
+              </a:spcBef>
+              <a:spcAft>
+                <a:spcPts val="0"/>
+              </a:spcAft>
+              <a:buClrTx/>
+              <a:buSzTx/>
+              <a:buFontTx/>
+              <a:buNone/>
+              <a:tabLst/>
+              <a:defRPr/>
+            </a:pPr>
+            <a:fld id="{3FF2C605-4958-CF43-AA48-80339EFDB0AF}" type="slidenum">
+              <a:rPr kumimoji="0" lang="en-US" sz="1200" b="0" i="0" u="none" strike="noStrike" kern="1200" cap="none" spc="0" normalizeH="0" baseline="0" noProof="0" smtClean="0">
+                <a:ln>
+                  <a:noFill/>
+                </a:ln>
+                <a:solidFill>
+                  <a:prstClr val="black">
+                    <a:tint val="75000"/>
+                  </a:prstClr>
+                </a:solidFill>
+                <a:effectLst/>
+                <a:uLnTx/>
+                <a:uFillTx/>
+                <a:latin typeface="Calibri"/>
+                <a:ea typeface="+mn-ea"/>
+                <a:cs typeface="+mn-cs"/>
+              </a:rPr>
+              <a:pPr marL="0" marR="0" lvl="0" indent="0" algn="r" defTabSz="914400" rtl="0" eaLnBrk="1" fontAlgn="auto" latinLnBrk="0" hangingPunct="1">
+                <a:lnSpc>
+                  <a:spcPct val="100000"/>
+                </a:lnSpc>
+                <a:spcBef>
+                  <a:spcPts val="0"/>
+                </a:spcBef>
+                <a:spcAft>
+                  <a:spcPts val="0"/>
+                </a:spcAft>
+                <a:buClrTx/>
+                <a:buSzTx/>
+                <a:buFontTx/>
+                <a:buNone/>
+                <a:tabLst/>
+                <a:defRPr/>
+              </a:pPr>
+              <a:t>6</a:t>
+            </a:fld>
+            <a:endParaRPr kumimoji="0" lang="en-US" sz="1200" b="0" i="0" u="none" strike="noStrike" kern="1200" cap="none" spc="0" normalizeH="0" baseline="0" noProof="0">
+              <a:ln>
+                <a:noFill/>
+              </a:ln>
+              <a:solidFill>
+                <a:prstClr val="black">
+                  <a:tint val="75000"/>
+                </a:prstClr>
+              </a:solidFill>
+              <a:effectLst/>
+              <a:uLnTx/>
+              <a:uFillTx/>
+              <a:latin typeface="Calibri"/>
+              <a:ea typeface="+mn-ea"/>
+              <a:cs typeface="+mn-cs"/>
+            </a:endParaRPr>
+          </a:p>
+        </p:txBody>
+      </p:sp>
+      <p:pic>
+        <p:nvPicPr>
+          <p:cNvPr id="5" name="Picture 4">
+            <a:extLst>
+              <a:ext uri="{FF2B5EF4-FFF2-40B4-BE49-F238E27FC236}">
+                <a16:creationId xmlns:a16="http://schemas.microsoft.com/office/drawing/2014/main" id="{852CF916-F7A8-784A-9DFD-FA3D3F9C07D6}"/>
+              </a:ext>
+            </a:extLst>
+          </p:cNvPr>
+          <p:cNvPicPr>
+            <a:picLocks noChangeAspect="1"/>
+          </p:cNvPicPr>
+          <p:nvPr/>
+        </p:nvPicPr>
+        <p:blipFill>
+          <a:blip r:embed="rId2"/>
+          <a:stretch>
+            <a:fillRect/>
+          </a:stretch>
+        </p:blipFill>
+        <p:spPr>
+          <a:xfrm>
+            <a:off x="8243491" y="1755049"/>
+            <a:ext cx="3246969" cy="2154896"/>
+          </a:xfrm>
+          <a:prstGeom prst="rect">
+            <a:avLst/>
+          </a:prstGeom>
+        </p:spPr>
+      </p:pic>
+      <p:pic>
+        <p:nvPicPr>
+          <p:cNvPr id="6" name="Picture 5">
+            <a:extLst>
+              <a:ext uri="{FF2B5EF4-FFF2-40B4-BE49-F238E27FC236}">
+                <a16:creationId xmlns:a16="http://schemas.microsoft.com/office/drawing/2014/main" id="{A129B5F3-830B-AA4D-B01B-7EA318FE12D8}"/>
+              </a:ext>
+            </a:extLst>
+          </p:cNvPr>
+          <p:cNvPicPr>
+            <a:picLocks noChangeAspect="1"/>
+          </p:cNvPicPr>
+          <p:nvPr/>
+        </p:nvPicPr>
+        <p:blipFill>
+          <a:blip r:embed="rId3"/>
+          <a:stretch>
+            <a:fillRect/>
+          </a:stretch>
+        </p:blipFill>
+        <p:spPr>
+          <a:xfrm>
+            <a:off x="8243491" y="4226247"/>
+            <a:ext cx="3246969" cy="2184147"/>
+          </a:xfrm>
+          <a:prstGeom prst="rect">
+            <a:avLst/>
+          </a:prstGeom>
+        </p:spPr>
+      </p:pic>
+      <p:sp>
+        <p:nvSpPr>
+          <p:cNvPr id="7" name="TextBox 6">
+            <a:extLst>
+              <a:ext uri="{FF2B5EF4-FFF2-40B4-BE49-F238E27FC236}">
+                <a16:creationId xmlns:a16="http://schemas.microsoft.com/office/drawing/2014/main" id="{452F32A7-C558-FD4D-97EB-EA788289C8C5}"/>
+              </a:ext>
+            </a:extLst>
+          </p:cNvPr>
+          <p:cNvSpPr txBox="1"/>
+          <p:nvPr/>
+        </p:nvSpPr>
+        <p:spPr>
+          <a:xfrm>
+            <a:off x="9257887" y="1434307"/>
+            <a:ext cx="1580322" cy="369332"/>
+          </a:xfrm>
+          <a:prstGeom prst="rect">
+            <a:avLst/>
+          </a:prstGeom>
+          <a:noFill/>
+        </p:spPr>
+        <p:txBody>
+          <a:bodyPr wrap="square" rtlCol="0">
+            <a:spAutoFit/>
+          </a:bodyPr>
+          <a:lstStyle/>
+          <a:p>
+            <a:pPr marL="0" marR="0" lvl="0" indent="0" algn="l" defTabSz="914400" rtl="0" eaLnBrk="1" fontAlgn="auto" latinLnBrk="0" hangingPunct="1">
+              <a:lnSpc>
+                <a:spcPct val="100000"/>
+              </a:lnSpc>
+              <a:spcBef>
+                <a:spcPts val="0"/>
+              </a:spcBef>
+              <a:spcAft>
+                <a:spcPts val="0"/>
+              </a:spcAft>
+              <a:buClrTx/>
+              <a:buSzTx/>
+              <a:buFontTx/>
+              <a:buNone/>
+              <a:tabLst/>
+              <a:defRPr/>
+            </a:pPr>
+            <a:r>
+              <a:rPr kumimoji="0" lang="en-US" sz="1800" b="0" i="0" u="none" strike="noStrike" kern="1200" cap="none" spc="0" normalizeH="0" baseline="0" noProof="0" dirty="0" err="1">
+                <a:ln>
+                  <a:noFill/>
+                </a:ln>
+                <a:solidFill>
+                  <a:prstClr val="black"/>
+                </a:solidFill>
+                <a:effectLst/>
+                <a:uLnTx/>
+                <a:uFillTx/>
+                <a:latin typeface="Calibri"/>
+                <a:ea typeface="+mn-ea"/>
+                <a:cs typeface="+mn-cs"/>
+              </a:rPr>
+              <a:t>Transgranular</a:t>
+            </a:r>
+            <a:endParaRPr kumimoji="0" lang="en-US" sz="1800" b="0" i="0" u="none" strike="noStrike" kern="1200" cap="none" spc="0" normalizeH="0" baseline="0" noProof="0" dirty="0">
+              <a:ln>
+                <a:noFill/>
+              </a:ln>
+              <a:solidFill>
+                <a:prstClr val="black"/>
+              </a:solidFill>
+              <a:effectLst/>
+              <a:uLnTx/>
+              <a:uFillTx/>
+              <a:latin typeface="Calibri"/>
+              <a:ea typeface="+mn-ea"/>
+              <a:cs typeface="+mn-cs"/>
+            </a:endParaRPr>
+          </a:p>
+        </p:txBody>
+      </p:sp>
+      <p:sp>
+        <p:nvSpPr>
+          <p:cNvPr id="8" name="TextBox 7">
+            <a:extLst>
+              <a:ext uri="{FF2B5EF4-FFF2-40B4-BE49-F238E27FC236}">
+                <a16:creationId xmlns:a16="http://schemas.microsoft.com/office/drawing/2014/main" id="{D3F0F608-C1C2-B94D-BE74-262B78983CDA}"/>
+              </a:ext>
+            </a:extLst>
+          </p:cNvPr>
+          <p:cNvSpPr txBox="1"/>
+          <p:nvPr/>
+        </p:nvSpPr>
+        <p:spPr>
+          <a:xfrm>
+            <a:off x="9257887" y="3880713"/>
+            <a:ext cx="1580322" cy="369332"/>
+          </a:xfrm>
+          <a:prstGeom prst="rect">
+            <a:avLst/>
+          </a:prstGeom>
+          <a:noFill/>
+        </p:spPr>
+        <p:txBody>
+          <a:bodyPr wrap="square" rtlCol="0">
+            <a:spAutoFit/>
+          </a:bodyPr>
+          <a:lstStyle/>
+          <a:p>
+            <a:pPr marL="0" marR="0" lvl="0" indent="0" algn="l" defTabSz="914400" rtl="0" eaLnBrk="1" fontAlgn="auto" latinLnBrk="0" hangingPunct="1">
+              <a:lnSpc>
+                <a:spcPct val="100000"/>
+              </a:lnSpc>
+              <a:spcBef>
+                <a:spcPts val="0"/>
+              </a:spcBef>
+              <a:spcAft>
+                <a:spcPts val="0"/>
+              </a:spcAft>
+              <a:buClrTx/>
+              <a:buSzTx/>
+              <a:buFontTx/>
+              <a:buNone/>
+              <a:tabLst/>
+              <a:defRPr/>
+            </a:pPr>
+            <a:r>
+              <a:rPr kumimoji="0" lang="en-US" sz="1800" b="0" i="0" u="none" strike="noStrike" kern="1200" cap="none" spc="0" normalizeH="0" baseline="0" noProof="0" dirty="0">
+                <a:ln>
+                  <a:noFill/>
+                </a:ln>
+                <a:solidFill>
+                  <a:prstClr val="black"/>
+                </a:solidFill>
+                <a:effectLst/>
+                <a:uLnTx/>
+                <a:uFillTx/>
+                <a:latin typeface="Calibri"/>
+                <a:ea typeface="+mn-ea"/>
+                <a:cs typeface="+mn-cs"/>
+              </a:rPr>
+              <a:t>Intergranular</a:t>
+            </a:r>
+          </a:p>
+        </p:txBody>
+      </p:sp>
+    </p:spTree>
+    <p:extLst>
+      <p:ext uri="{BB962C8B-B14F-4D97-AF65-F5344CB8AC3E}">
+        <p14:creationId xmlns:p14="http://schemas.microsoft.com/office/powerpoint/2010/main" val="1990755198"/>
+      </p:ext>
+    </p:extLst>
+  </p:cSld>
+  <p:clrMapOvr>
+    <a:masterClrMapping/>
+  </p:clrMapOvr>
+</p:sld>
+</file>
+
+<file path=ppt/slides/slide7.xml><?xml version="1.0" encoding="utf-8"?>
+<p:sld xmlns:a="http://schemas.openxmlformats.org/drawingml/2006/main" xmlns:r="http://schemas.openxmlformats.org/officeDocument/2006/relationships" xmlns:p="http://schemas.openxmlformats.org/presentationml/2006/main">
+  <p:cSld>
+    <p:spTree>
+      <p:nvGrpSpPr>
+        <p:cNvPr id="1" name=""/>
+        <p:cNvGrpSpPr/>
+        <p:nvPr/>
+      </p:nvGrpSpPr>
+      <p:grpSpPr>
+        <a:xfrm>
+          <a:off x="0" y="0"/>
+          <a:ext cx="0" cy="0"/>
+          <a:chOff x="0" y="0"/>
+          <a:chExt cx="0" cy="0"/>
+        </a:xfrm>
+      </p:grpSpPr>
+      <p:sp>
+        <p:nvSpPr>
+          <p:cNvPr id="2" name="Title 1">
+            <a:extLst>
+              <a:ext uri="{FF2B5EF4-FFF2-40B4-BE49-F238E27FC236}">
+                <a16:creationId xmlns:a16="http://schemas.microsoft.com/office/drawing/2014/main" id="{C4F649AA-0316-E54F-A523-93797234130E}"/>
+              </a:ext>
+            </a:extLst>
+          </p:cNvPr>
+          <p:cNvSpPr>
+            <a:spLocks noGrp="1"/>
+          </p:cNvSpPr>
+          <p:nvPr>
+            <p:ph type="title"/>
+          </p:nvPr>
+        </p:nvSpPr>
+        <p:spPr/>
+        <p:txBody>
+          <a:bodyPr/>
+          <a:lstStyle/>
+          <a:p>
+            <a:r>
+              <a:rPr lang="en-US" dirty="0"/>
+              <a:t>Through-Cracks</a:t>
+            </a:r>
+          </a:p>
+        </p:txBody>
+      </p:sp>
+      <p:sp>
+        <p:nvSpPr>
+          <p:cNvPr id="3" name="Content Placeholder 2">
+            <a:extLst>
+              <a:ext uri="{FF2B5EF4-FFF2-40B4-BE49-F238E27FC236}">
+                <a16:creationId xmlns:a16="http://schemas.microsoft.com/office/drawing/2014/main" id="{74F6013A-8125-5645-8D9E-38FD4740420A}"/>
+              </a:ext>
+            </a:extLst>
+          </p:cNvPr>
+          <p:cNvSpPr>
+            <a:spLocks noGrp="1"/>
+          </p:cNvSpPr>
+          <p:nvPr>
+            <p:ph idx="1"/>
+          </p:nvPr>
+        </p:nvSpPr>
+        <p:spPr/>
+        <p:txBody>
+          <a:bodyPr/>
+          <a:lstStyle/>
+          <a:p>
+            <a:r>
+              <a:rPr lang="en-US" sz="2000" dirty="0"/>
+              <a:t>Following the formation of a through-wall crack and the ingress of water into the fuel-clad gap, the cracking process is arrested since the corrosive species (notably I, Cs, and Cd) have been discharged</a:t>
+            </a:r>
+          </a:p>
+          <a:p>
+            <a:r>
+              <a:rPr lang="en-US" sz="2000" dirty="0"/>
+              <a:t>The ingress of water in the fuel-clad gap may result in clad </a:t>
+            </a:r>
+            <a:r>
+              <a:rPr lang="en-US" sz="2000" dirty="0" err="1"/>
+              <a:t>hydriding</a:t>
+            </a:r>
+            <a:r>
+              <a:rPr lang="en-US" sz="2000" dirty="0"/>
+              <a:t> on the inner surface</a:t>
+            </a:r>
+          </a:p>
+          <a:p>
+            <a:r>
+              <a:rPr lang="en-US" sz="2000" dirty="0"/>
+              <a:t>The initial SCC crack can oxidize, and volume expansion may lead to resealing the primary failure</a:t>
+            </a:r>
+          </a:p>
+          <a:p>
+            <a:r>
+              <a:rPr lang="en-US" sz="2000" dirty="0"/>
+              <a:t>All PCI cracks are pin-hole defects, whereas observable cracks are secondary due to clad </a:t>
+            </a:r>
+            <a:r>
+              <a:rPr lang="en-US" sz="2000" dirty="0" err="1"/>
+              <a:t>hydriding</a:t>
+            </a:r>
+            <a:r>
+              <a:rPr lang="en-US" sz="2000" dirty="0"/>
+              <a:t> or ductile tearing</a:t>
+            </a:r>
+          </a:p>
+          <a:p>
+            <a:r>
+              <a:rPr lang="en-US" sz="2000" dirty="0"/>
+              <a:t>The time to failure depends on many parameters, but is generally determined by the local linear power, the change in linear power, and the local burnup</a:t>
+            </a:r>
+          </a:p>
+          <a:p>
+            <a:endParaRPr lang="en-US" sz="2000" dirty="0"/>
+          </a:p>
+        </p:txBody>
+      </p:sp>
+      <p:sp>
+        <p:nvSpPr>
+          <p:cNvPr id="4" name="Slide Number Placeholder 3">
+            <a:extLst>
+              <a:ext uri="{FF2B5EF4-FFF2-40B4-BE49-F238E27FC236}">
+                <a16:creationId xmlns:a16="http://schemas.microsoft.com/office/drawing/2014/main" id="{3A9F73AA-344A-7548-A599-C67A90FDCACF}"/>
+              </a:ext>
+            </a:extLst>
+          </p:cNvPr>
+          <p:cNvSpPr>
+            <a:spLocks noGrp="1"/>
+          </p:cNvSpPr>
+          <p:nvPr>
+            <p:ph type="sldNum" sz="quarter" idx="12"/>
+          </p:nvPr>
+        </p:nvSpPr>
+        <p:spPr/>
+        <p:txBody>
+          <a:bodyPr/>
+          <a:lstStyle/>
+          <a:p>
+            <a:pPr marL="0" marR="0" lvl="0" indent="0" algn="r" defTabSz="914400" rtl="0" eaLnBrk="1" fontAlgn="auto" latinLnBrk="0" hangingPunct="1">
+              <a:lnSpc>
+                <a:spcPct val="100000"/>
+              </a:lnSpc>
+              <a:spcBef>
+                <a:spcPts val="0"/>
+              </a:spcBef>
+              <a:spcAft>
+                <a:spcPts val="0"/>
+              </a:spcAft>
+              <a:buClrTx/>
+              <a:buSzTx/>
+              <a:buFontTx/>
+              <a:buNone/>
+              <a:tabLst/>
+              <a:defRPr/>
+            </a:pPr>
+            <a:fld id="{3FF2C605-4958-CF43-AA48-80339EFDB0AF}" type="slidenum">
+              <a:rPr kumimoji="0" lang="en-US" sz="1200" b="0" i="0" u="none" strike="noStrike" kern="1200" cap="none" spc="0" normalizeH="0" baseline="0" noProof="0" smtClean="0">
+                <a:ln>
+                  <a:noFill/>
+                </a:ln>
+                <a:solidFill>
+                  <a:prstClr val="black">
+                    <a:tint val="75000"/>
+                  </a:prstClr>
+                </a:solidFill>
+                <a:effectLst/>
+                <a:uLnTx/>
+                <a:uFillTx/>
+                <a:latin typeface="Calibri"/>
+                <a:ea typeface="+mn-ea"/>
+                <a:cs typeface="+mn-cs"/>
+              </a:rPr>
+              <a:pPr marL="0" marR="0" lvl="0" indent="0" algn="r" defTabSz="914400" rtl="0" eaLnBrk="1" fontAlgn="auto" latinLnBrk="0" hangingPunct="1">
+                <a:lnSpc>
+                  <a:spcPct val="100000"/>
+                </a:lnSpc>
+                <a:spcBef>
+                  <a:spcPts val="0"/>
+                </a:spcBef>
+                <a:spcAft>
+                  <a:spcPts val="0"/>
+                </a:spcAft>
+                <a:buClrTx/>
+                <a:buSzTx/>
+                <a:buFontTx/>
+                <a:buNone/>
+                <a:tabLst/>
+                <a:defRPr/>
+              </a:pPr>
+              <a:t>7</a:t>
+            </a:fld>
+            <a:endParaRPr kumimoji="0" lang="en-US" sz="1200" b="0" i="0" u="none" strike="noStrike" kern="1200" cap="none" spc="0" normalizeH="0" baseline="0" noProof="0">
+              <a:ln>
+                <a:noFill/>
+              </a:ln>
+              <a:solidFill>
+                <a:prstClr val="black">
+                  <a:tint val="75000"/>
+                </a:prstClr>
+              </a:solidFill>
+              <a:effectLst/>
+              <a:uLnTx/>
+              <a:uFillTx/>
+              <a:latin typeface="Calibri"/>
+              <a:ea typeface="+mn-ea"/>
+              <a:cs typeface="+mn-cs"/>
+            </a:endParaRPr>
+          </a:p>
+        </p:txBody>
+      </p:sp>
+    </p:spTree>
+    <p:extLst>
+      <p:ext uri="{BB962C8B-B14F-4D97-AF65-F5344CB8AC3E}">
+        <p14:creationId xmlns:p14="http://schemas.microsoft.com/office/powerpoint/2010/main" val="2287382833"/>
+      </p:ext>
+    </p:extLst>
+  </p:cSld>
+  <p:clrMapOvr>
+    <a:masterClrMapping/>
+  </p:clrMapOvr>
+</p:sld>
+</file>
+
+<file path=ppt/slides/slide8.xml><?xml version="1.0" encoding="utf-8"?>
 <p:sld xmlns:a="http://schemas.openxmlformats.org/drawingml/2006/main" xmlns:r="http://schemas.openxmlformats.org/officeDocument/2006/relationships" xmlns:p="http://schemas.openxmlformats.org/presentationml/2006/main">
   <p:cSld>
     <p:spTree>
@@ -7647,7 +5950,7 @@
                 <a:tabLst/>
                 <a:defRPr/>
               </a:pPr>
-              <a:t>24</a:t>
+              <a:t>8</a:t>
             </a:fld>
             <a:endParaRPr kumimoji="0" lang="en-US" sz="1200" b="0" i="0" u="none" strike="noStrike" kern="1200" cap="none" spc="0" normalizeH="0" baseline="0" noProof="0">
               <a:ln>
@@ -7671,7 +5974,7 @@
     </p:spTree>
     <p:extLst>
       <p:ext uri="{BB962C8B-B14F-4D97-AF65-F5344CB8AC3E}">
-        <p14:creationId xmlns:p14="http://schemas.microsoft.com/office/powerpoint/2010/main" val="1495660091"/>
+        <p14:creationId xmlns:p14="http://schemas.microsoft.com/office/powerpoint/2010/main" val="2980613618"/>
       </p:ext>
     </p:extLst>
   </p:cSld>
@@ -7681,7 +5984,7 @@
 </p:sld>
 </file>
 
-<file path=ppt/slides/slide25.xml><?xml version="1.0" encoding="utf-8"?>
+<file path=ppt/slides/slide9.xml><?xml version="1.0" encoding="utf-8"?>
 <p:sld xmlns:a="http://schemas.openxmlformats.org/drawingml/2006/main" xmlns:r="http://schemas.openxmlformats.org/officeDocument/2006/relationships" xmlns:p="http://schemas.openxmlformats.org/presentationml/2006/main">
   <p:cSld>
     <p:spTree>
@@ -7878,7 +6181,7 @@
                 <a:tabLst/>
                 <a:defRPr/>
               </a:pPr>
-              <a:t>25</a:t>
+              <a:t>9</a:t>
             </a:fld>
             <a:endParaRPr kumimoji="0" lang="en-US" sz="1200" b="0" i="0" u="none" strike="noStrike" kern="1200" cap="none" spc="0" normalizeH="0" baseline="0" noProof="0">
               <a:ln>
@@ -7997,1538 +6300,7 @@
     </p:spTree>
     <p:extLst>
       <p:ext uri="{BB962C8B-B14F-4D97-AF65-F5344CB8AC3E}">
-        <p14:creationId xmlns:p14="http://schemas.microsoft.com/office/powerpoint/2010/main" val="105253351"/>
-      </p:ext>
-    </p:extLst>
-  </p:cSld>
-  <p:clrMapOvr>
-    <a:masterClrMapping/>
-  </p:clrMapOvr>
-</p:sld>
-</file>
-
-<file path=ppt/slides/slide3.xml><?xml version="1.0" encoding="utf-8"?>
-<p:sld xmlns:a="http://schemas.openxmlformats.org/drawingml/2006/main" xmlns:r="http://schemas.openxmlformats.org/officeDocument/2006/relationships" xmlns:p="http://schemas.openxmlformats.org/presentationml/2006/main">
-  <p:cSld>
-    <p:spTree>
-      <p:nvGrpSpPr>
-        <p:cNvPr id="1" name="">
-          <a:extLst>
-            <a:ext uri="{FF2B5EF4-FFF2-40B4-BE49-F238E27FC236}">
-              <a16:creationId xmlns:a16="http://schemas.microsoft.com/office/drawing/2014/main" id="{84A8B12A-16A3-771C-F41C-DBC0A5159BDB}"/>
-            </a:ext>
-          </a:extLst>
-        </p:cNvPr>
-        <p:cNvGrpSpPr/>
-        <p:nvPr/>
-      </p:nvGrpSpPr>
-      <p:grpSpPr>
-        <a:xfrm>
-          <a:off x="0" y="0"/>
-          <a:ext cx="0" cy="0"/>
-          <a:chOff x="0" y="0"/>
-          <a:chExt cx="0" cy="0"/>
-        </a:xfrm>
-      </p:grpSpPr>
-      <p:sp>
-        <p:nvSpPr>
-          <p:cNvPr id="2" name="Title 1">
-            <a:extLst>
-              <a:ext uri="{FF2B5EF4-FFF2-40B4-BE49-F238E27FC236}">
-                <a16:creationId xmlns:a16="http://schemas.microsoft.com/office/drawing/2014/main" id="{F0EE8955-F140-772A-3299-79D2581D79AD}"/>
-              </a:ext>
-            </a:extLst>
-          </p:cNvPr>
-          <p:cNvSpPr>
-            <a:spLocks noGrp="1"/>
-          </p:cNvSpPr>
-          <p:nvPr>
-            <p:ph type="title"/>
-          </p:nvPr>
-        </p:nvSpPr>
-        <p:spPr/>
-        <p:txBody>
-          <a:bodyPr/>
-          <a:lstStyle/>
-          <a:p>
-            <a:pPr algn="l"/>
-            <a:r>
-              <a:rPr lang="en-US" dirty="0"/>
-              <a:t>MOOSE Part 3 Writeup</a:t>
-            </a:r>
-          </a:p>
-        </p:txBody>
-      </p:sp>
-      <p:sp>
-        <p:nvSpPr>
-          <p:cNvPr id="3" name="Content Placeholder 2">
-            <a:extLst>
-              <a:ext uri="{FF2B5EF4-FFF2-40B4-BE49-F238E27FC236}">
-                <a16:creationId xmlns:a16="http://schemas.microsoft.com/office/drawing/2014/main" id="{F3FB7502-5F80-05D6-0320-653A9DFC19C0}"/>
-              </a:ext>
-            </a:extLst>
-          </p:cNvPr>
-          <p:cNvSpPr>
-            <a:spLocks noGrp="1"/>
-          </p:cNvSpPr>
-          <p:nvPr>
-            <p:ph idx="1"/>
-          </p:nvPr>
-        </p:nvSpPr>
-        <p:spPr/>
-        <p:txBody>
-          <a:bodyPr/>
-          <a:lstStyle/>
-          <a:p>
-            <a:pPr>
-              <a:spcBef>
-                <a:spcPts val="600"/>
-              </a:spcBef>
-            </a:pPr>
-            <a:r>
-              <a:rPr lang="en-US" dirty="0"/>
-              <a:t>Will upload input and output files to Moodle</a:t>
-            </a:r>
-          </a:p>
-          <a:p>
-            <a:r>
-              <a:rPr lang="en-US" dirty="0"/>
-              <a:t>Write up with deliverables from Part 1, 2, 3, choice of materials, mesh, details therein, etc. </a:t>
-            </a:r>
-          </a:p>
-          <a:p>
-            <a:r>
-              <a:rPr lang="en-US" dirty="0"/>
-              <a:t>Expected to have fixed any issues with Part 1/2 </a:t>
-            </a:r>
-          </a:p>
-          <a:p>
-            <a:r>
-              <a:rPr lang="en-US" dirty="0"/>
-              <a:t>Part 3 writeup max of 12 pages</a:t>
-            </a:r>
-          </a:p>
-          <a:p>
-            <a:r>
-              <a:rPr lang="en-US" dirty="0"/>
-              <a:t>Due April 24 at 11:59pm</a:t>
-            </a:r>
-          </a:p>
-          <a:p>
-            <a:endParaRPr lang="en-US" dirty="0"/>
-          </a:p>
-        </p:txBody>
-      </p:sp>
-      <p:sp>
-        <p:nvSpPr>
-          <p:cNvPr id="4" name="Slide Number Placeholder 3">
-            <a:extLst>
-              <a:ext uri="{FF2B5EF4-FFF2-40B4-BE49-F238E27FC236}">
-                <a16:creationId xmlns:a16="http://schemas.microsoft.com/office/drawing/2014/main" id="{BBEC51AF-A167-6717-3A24-771809C695D0}"/>
-              </a:ext>
-            </a:extLst>
-          </p:cNvPr>
-          <p:cNvSpPr>
-            <a:spLocks noGrp="1"/>
-          </p:cNvSpPr>
-          <p:nvPr>
-            <p:ph type="sldNum" sz="quarter" idx="12"/>
-          </p:nvPr>
-        </p:nvSpPr>
-        <p:spPr/>
-        <p:txBody>
-          <a:bodyPr/>
-          <a:lstStyle/>
-          <a:p>
-            <a:pPr marL="0" marR="0" lvl="0" indent="0" algn="r" defTabSz="914400" rtl="0" eaLnBrk="1" fontAlgn="auto" latinLnBrk="0" hangingPunct="1">
-              <a:lnSpc>
-                <a:spcPct val="100000"/>
-              </a:lnSpc>
-              <a:spcBef>
-                <a:spcPts val="0"/>
-              </a:spcBef>
-              <a:spcAft>
-                <a:spcPts val="0"/>
-              </a:spcAft>
-              <a:buClrTx/>
-              <a:buSzTx/>
-              <a:buFontTx/>
-              <a:buNone/>
-              <a:tabLst/>
-              <a:defRPr/>
-            </a:pPr>
-            <a:fld id="{3FF2C605-4958-CF43-AA48-80339EFDB0AF}" type="slidenum">
-              <a:rPr kumimoji="0" lang="en-US" sz="1200" b="0" i="0" u="none" strike="noStrike" kern="1200" cap="none" spc="0" normalizeH="0" baseline="0" noProof="0" smtClean="0">
-                <a:ln>
-                  <a:noFill/>
-                </a:ln>
-                <a:solidFill>
-                  <a:prstClr val="black">
-                    <a:tint val="75000"/>
-                  </a:prstClr>
-                </a:solidFill>
-                <a:effectLst/>
-                <a:uLnTx/>
-                <a:uFillTx/>
-                <a:latin typeface="Calibri"/>
-                <a:ea typeface="+mn-ea"/>
-                <a:cs typeface="+mn-cs"/>
-              </a:rPr>
-              <a:pPr marL="0" marR="0" lvl="0" indent="0" algn="r" defTabSz="914400" rtl="0" eaLnBrk="1" fontAlgn="auto" latinLnBrk="0" hangingPunct="1">
-                <a:lnSpc>
-                  <a:spcPct val="100000"/>
-                </a:lnSpc>
-                <a:spcBef>
-                  <a:spcPts val="0"/>
-                </a:spcBef>
-                <a:spcAft>
-                  <a:spcPts val="0"/>
-                </a:spcAft>
-                <a:buClrTx/>
-                <a:buSzTx/>
-                <a:buFontTx/>
-                <a:buNone/>
-                <a:tabLst/>
-                <a:defRPr/>
-              </a:pPr>
-              <a:t>3</a:t>
-            </a:fld>
-            <a:endParaRPr kumimoji="0" lang="en-US" sz="1200" b="0" i="0" u="none" strike="noStrike" kern="1200" cap="none" spc="0" normalizeH="0" baseline="0" noProof="0">
-              <a:ln>
-                <a:noFill/>
-              </a:ln>
-              <a:solidFill>
-                <a:prstClr val="black">
-                  <a:tint val="75000"/>
-                </a:prstClr>
-              </a:solidFill>
-              <a:effectLst/>
-              <a:uLnTx/>
-              <a:uFillTx/>
-              <a:latin typeface="Calibri"/>
-              <a:ea typeface="+mn-ea"/>
-              <a:cs typeface="+mn-cs"/>
-            </a:endParaRPr>
-          </a:p>
-        </p:txBody>
-      </p:sp>
-    </p:spTree>
-    <p:extLst>
-      <p:ext uri="{BB962C8B-B14F-4D97-AF65-F5344CB8AC3E}">
-        <p14:creationId xmlns:p14="http://schemas.microsoft.com/office/powerpoint/2010/main" val="2452201381"/>
-      </p:ext>
-    </p:extLst>
-  </p:cSld>
-  <p:clrMapOvr>
-    <a:masterClrMapping/>
-  </p:clrMapOvr>
-</p:sld>
-</file>
-
-<file path=ppt/slides/slide4.xml><?xml version="1.0" encoding="utf-8"?>
-<p:sld xmlns:a="http://schemas.openxmlformats.org/drawingml/2006/main" xmlns:r="http://schemas.openxmlformats.org/officeDocument/2006/relationships" xmlns:p="http://schemas.openxmlformats.org/presentationml/2006/main">
-  <p:cSld>
-    <p:spTree>
-      <p:nvGrpSpPr>
-        <p:cNvPr id="1" name=""/>
-        <p:cNvGrpSpPr/>
-        <p:nvPr/>
-      </p:nvGrpSpPr>
-      <p:grpSpPr>
-        <a:xfrm>
-          <a:off x="0" y="0"/>
-          <a:ext cx="0" cy="0"/>
-          <a:chOff x="0" y="0"/>
-          <a:chExt cx="0" cy="0"/>
-        </a:xfrm>
-      </p:grpSpPr>
-      <p:sp>
-        <p:nvSpPr>
-          <p:cNvPr id="2" name="Title 1">
-            <a:extLst>
-              <a:ext uri="{FF2B5EF4-FFF2-40B4-BE49-F238E27FC236}">
-                <a16:creationId xmlns:a16="http://schemas.microsoft.com/office/drawing/2014/main" id="{91C669C3-7586-8D5D-5213-3EAA1F236DA8}"/>
-              </a:ext>
-            </a:extLst>
-          </p:cNvPr>
-          <p:cNvSpPr>
-            <a:spLocks noGrp="1"/>
-          </p:cNvSpPr>
-          <p:nvPr>
-            <p:ph type="title"/>
-          </p:nvPr>
-        </p:nvSpPr>
-        <p:spPr/>
-        <p:txBody>
-          <a:bodyPr/>
-          <a:lstStyle/>
-          <a:p>
-            <a:r>
-              <a:rPr lang="en-US" dirty="0"/>
-              <a:t>Last Time</a:t>
-            </a:r>
-          </a:p>
-        </p:txBody>
-      </p:sp>
-      <p:sp>
-        <p:nvSpPr>
-          <p:cNvPr id="3" name="Content Placeholder 2">
-            <a:extLst>
-              <a:ext uri="{FF2B5EF4-FFF2-40B4-BE49-F238E27FC236}">
-                <a16:creationId xmlns:a16="http://schemas.microsoft.com/office/drawing/2014/main" id="{89B496EA-2615-5D83-73E6-1093C95A8AF1}"/>
-              </a:ext>
-            </a:extLst>
-          </p:cNvPr>
-          <p:cNvSpPr>
-            <a:spLocks noGrp="1"/>
-          </p:cNvSpPr>
-          <p:nvPr>
-            <p:ph idx="1"/>
-          </p:nvPr>
-        </p:nvSpPr>
-        <p:spPr>
-          <a:xfrm>
-            <a:off x="609600" y="1868395"/>
-            <a:ext cx="10972800" cy="3965670"/>
-          </a:xfrm>
-        </p:spPr>
-        <p:txBody>
-          <a:bodyPr/>
-          <a:lstStyle/>
-          <a:p>
-            <a:r>
-              <a:rPr lang="en-US" sz="2000" dirty="0"/>
-              <a:t>Zircaloy creep equations</a:t>
-            </a:r>
-          </a:p>
-          <a:p>
-            <a:r>
-              <a:rPr lang="en-US" sz="2000" dirty="0"/>
-              <a:t>Zircaloy cladding creep over time</a:t>
-            </a:r>
-          </a:p>
-          <a:p>
-            <a:pPr lvl="1"/>
-            <a:r>
-              <a:rPr lang="en-US" sz="2000" dirty="0"/>
-              <a:t>creeps down due to water pressure, reduces gap, elongates</a:t>
-            </a:r>
-          </a:p>
-          <a:p>
-            <a:pPr lvl="1"/>
-            <a:r>
-              <a:rPr lang="en-US" sz="2000" dirty="0"/>
-              <a:t>creeps out due to fuel expansion, shortens</a:t>
-            </a:r>
-          </a:p>
-          <a:p>
-            <a:r>
-              <a:rPr lang="en-US" sz="2000" dirty="0"/>
-              <a:t>Zr mechanical properties sensitive to radiation</a:t>
-            </a:r>
-          </a:p>
-          <a:p>
-            <a:r>
-              <a:rPr lang="en-US" sz="2000" dirty="0"/>
-              <a:t>Dislocation channel cleaning leads to plasticity in highly irradiation Zr</a:t>
-            </a:r>
-          </a:p>
-          <a:p>
-            <a:r>
-              <a:rPr lang="en-US" sz="2000" dirty="0"/>
-              <a:t>PCMI can lead to SCC</a:t>
-            </a:r>
-          </a:p>
-          <a:p>
-            <a:pPr lvl="1"/>
-            <a:r>
-              <a:rPr lang="en-US" sz="2000" dirty="0"/>
-              <a:t>A corrosive environment, a susceptible material, sufficient stress, and sufficient time</a:t>
-            </a:r>
-          </a:p>
-          <a:p>
-            <a:r>
-              <a:rPr lang="en-US" sz="2000" dirty="0"/>
-              <a:t>Talked through the basics of the corrosive environment</a:t>
-            </a:r>
-          </a:p>
-        </p:txBody>
-      </p:sp>
-      <p:sp>
-        <p:nvSpPr>
-          <p:cNvPr id="4" name="Slide Number Placeholder 3">
-            <a:extLst>
-              <a:ext uri="{FF2B5EF4-FFF2-40B4-BE49-F238E27FC236}">
-                <a16:creationId xmlns:a16="http://schemas.microsoft.com/office/drawing/2014/main" id="{3B8FB79D-3C0F-B3AC-A960-0918542F0779}"/>
-              </a:ext>
-            </a:extLst>
-          </p:cNvPr>
-          <p:cNvSpPr>
-            <a:spLocks noGrp="1"/>
-          </p:cNvSpPr>
-          <p:nvPr>
-            <p:ph type="sldNum" sz="quarter" idx="12"/>
-          </p:nvPr>
-        </p:nvSpPr>
-        <p:spPr/>
-        <p:txBody>
-          <a:bodyPr/>
-          <a:lstStyle/>
-          <a:p>
-            <a:pPr>
-              <a:defRPr/>
-            </a:pPr>
-            <a:fld id="{3FF2C605-4958-CF43-AA48-80339EFDB0AF}" type="slidenum">
-              <a:rPr lang="en-US" smtClean="0"/>
-              <a:pPr>
-                <a:defRPr/>
-              </a:pPr>
-              <a:t>4</a:t>
-            </a:fld>
-            <a:endParaRPr lang="en-US"/>
-          </a:p>
-        </p:txBody>
-      </p:sp>
-    </p:spTree>
-    <p:extLst>
-      <p:ext uri="{BB962C8B-B14F-4D97-AF65-F5344CB8AC3E}">
-        <p14:creationId xmlns:p14="http://schemas.microsoft.com/office/powerpoint/2010/main" val="96840934"/>
-      </p:ext>
-    </p:extLst>
-  </p:cSld>
-  <p:clrMapOvr>
-    <a:masterClrMapping/>
-  </p:clrMapOvr>
-  <p:timing>
-    <p:tnLst>
-      <p:par>
-        <p:cTn id="1" dur="indefinite" restart="never" nodeType="tmRoot">
-          <p:childTnLst>
-            <p:seq concurrent="1" nextAc="seek">
-              <p:cTn id="2" dur="indefinite" nodeType="mainSeq">
-                <p:childTnLst>
-                  <p:par>
-                    <p:cTn id="3" fill="hold">
-                      <p:stCondLst>
-                        <p:cond delay="indefinite"/>
-                      </p:stCondLst>
-                      <p:childTnLst>
-                        <p:par>
-                          <p:cTn id="4" fill="hold">
-                            <p:stCondLst>
-                              <p:cond delay="0"/>
-                            </p:stCondLst>
-                            <p:childTnLst>
-                              <p:par>
-                                <p:cTn id="5" presetID="1" presetClass="entr" presetSubtype="0" fill="hold" nodeType="clickEffect">
-                                  <p:stCondLst>
-                                    <p:cond delay="0"/>
-                                  </p:stCondLst>
-                                  <p:childTnLst>
-                                    <p:set>
-                                      <p:cBhvr>
-                                        <p:cTn id="6" dur="1" fill="hold">
-                                          <p:stCondLst>
-                                            <p:cond delay="0"/>
-                                          </p:stCondLst>
-                                        </p:cTn>
-                                        <p:tgtEl>
-                                          <p:spTgt spid="3">
-                                            <p:txEl>
-                                              <p:pRg st="2" end="2"/>
-                                            </p:txEl>
-                                          </p:spTgt>
-                                        </p:tgtEl>
-                                        <p:attrNameLst>
-                                          <p:attrName>style.visibility</p:attrName>
-                                        </p:attrNameLst>
-                                      </p:cBhvr>
-                                      <p:to>
-                                        <p:strVal val="visible"/>
-                                      </p:to>
-                                    </p:set>
-                                  </p:childTnLst>
-                                </p:cTn>
-                              </p:par>
-                              <p:par>
-                                <p:cTn id="7" presetID="1" presetClass="entr" presetSubtype="0" fill="hold" nodeType="withEffect">
-                                  <p:stCondLst>
-                                    <p:cond delay="0"/>
-                                  </p:stCondLst>
-                                  <p:childTnLst>
-                                    <p:set>
-                                      <p:cBhvr>
-                                        <p:cTn id="8" dur="1" fill="hold">
-                                          <p:stCondLst>
-                                            <p:cond delay="0"/>
-                                          </p:stCondLst>
-                                        </p:cTn>
-                                        <p:tgtEl>
-                                          <p:spTgt spid="3">
-                                            <p:txEl>
-                                              <p:pRg st="3" end="3"/>
-                                            </p:txEl>
-                                          </p:spTgt>
-                                        </p:tgtEl>
-                                        <p:attrNameLst>
-                                          <p:attrName>style.visibility</p:attrName>
-                                        </p:attrNameLst>
-                                      </p:cBhvr>
-                                      <p:to>
-                                        <p:strVal val="visible"/>
-                                      </p:to>
-                                    </p:set>
-                                  </p:childTnLst>
-                                </p:cTn>
-                              </p:par>
-                            </p:childTnLst>
-                          </p:cTn>
-                        </p:par>
-                      </p:childTnLst>
-                    </p:cTn>
-                  </p:par>
-                  <p:par>
-                    <p:cTn id="9" fill="hold">
-                      <p:stCondLst>
-                        <p:cond delay="indefinite"/>
-                      </p:stCondLst>
-                      <p:childTnLst>
-                        <p:par>
-                          <p:cTn id="10" fill="hold">
-                            <p:stCondLst>
-                              <p:cond delay="0"/>
-                            </p:stCondLst>
-                            <p:childTnLst>
-                              <p:par>
-                                <p:cTn id="11" presetID="1" presetClass="entr" presetSubtype="0" fill="hold" nodeType="clickEffect">
-                                  <p:stCondLst>
-                                    <p:cond delay="0"/>
-                                  </p:stCondLst>
-                                  <p:childTnLst>
-                                    <p:set>
-                                      <p:cBhvr>
-                                        <p:cTn id="12" dur="1" fill="hold">
-                                          <p:stCondLst>
-                                            <p:cond delay="0"/>
-                                          </p:stCondLst>
-                                        </p:cTn>
-                                        <p:tgtEl>
-                                          <p:spTgt spid="3">
-                                            <p:txEl>
-                                              <p:pRg st="4" end="4"/>
-                                            </p:txEl>
-                                          </p:spTgt>
-                                        </p:tgtEl>
-                                        <p:attrNameLst>
-                                          <p:attrName>style.visibility</p:attrName>
-                                        </p:attrNameLst>
-                                      </p:cBhvr>
-                                      <p:to>
-                                        <p:strVal val="visible"/>
-                                      </p:to>
-                                    </p:set>
-                                  </p:childTnLst>
-                                </p:cTn>
-                              </p:par>
-                            </p:childTnLst>
-                          </p:cTn>
-                        </p:par>
-                      </p:childTnLst>
-                    </p:cTn>
-                  </p:par>
-                  <p:par>
-                    <p:cTn id="13" fill="hold">
-                      <p:stCondLst>
-                        <p:cond delay="indefinite"/>
-                      </p:stCondLst>
-                      <p:childTnLst>
-                        <p:par>
-                          <p:cTn id="14" fill="hold">
-                            <p:stCondLst>
-                              <p:cond delay="0"/>
-                            </p:stCondLst>
-                            <p:childTnLst>
-                              <p:par>
-                                <p:cTn id="15" presetID="1" presetClass="entr" presetSubtype="0" fill="hold" nodeType="clickEffect">
-                                  <p:stCondLst>
-                                    <p:cond delay="0"/>
-                                  </p:stCondLst>
-                                  <p:childTnLst>
-                                    <p:set>
-                                      <p:cBhvr>
-                                        <p:cTn id="16" dur="1" fill="hold">
-                                          <p:stCondLst>
-                                            <p:cond delay="0"/>
-                                          </p:stCondLst>
-                                        </p:cTn>
-                                        <p:tgtEl>
-                                          <p:spTgt spid="3">
-                                            <p:txEl>
-                                              <p:pRg st="5" end="5"/>
-                                            </p:txEl>
-                                          </p:spTgt>
-                                        </p:tgtEl>
-                                        <p:attrNameLst>
-                                          <p:attrName>style.visibility</p:attrName>
-                                        </p:attrNameLst>
-                                      </p:cBhvr>
-                                      <p:to>
-                                        <p:strVal val="visible"/>
-                                      </p:to>
-                                    </p:set>
-                                  </p:childTnLst>
-                                </p:cTn>
-                              </p:par>
-                            </p:childTnLst>
-                          </p:cTn>
-                        </p:par>
-                      </p:childTnLst>
-                    </p:cTn>
-                  </p:par>
-                  <p:par>
-                    <p:cTn id="17" fill="hold">
-                      <p:stCondLst>
-                        <p:cond delay="indefinite"/>
-                      </p:stCondLst>
-                      <p:childTnLst>
-                        <p:par>
-                          <p:cTn id="18" fill="hold">
-                            <p:stCondLst>
-                              <p:cond delay="0"/>
-                            </p:stCondLst>
-                            <p:childTnLst>
-                              <p:par>
-                                <p:cTn id="19" presetID="1" presetClass="entr" presetSubtype="0" fill="hold" nodeType="clickEffect">
-                                  <p:stCondLst>
-                                    <p:cond delay="0"/>
-                                  </p:stCondLst>
-                                  <p:childTnLst>
-                                    <p:set>
-                                      <p:cBhvr>
-                                        <p:cTn id="20" dur="1" fill="hold">
-                                          <p:stCondLst>
-                                            <p:cond delay="0"/>
-                                          </p:stCondLst>
-                                        </p:cTn>
-                                        <p:tgtEl>
-                                          <p:spTgt spid="3">
-                                            <p:txEl>
-                                              <p:pRg st="6" end="6"/>
-                                            </p:txEl>
-                                          </p:spTgt>
-                                        </p:tgtEl>
-                                        <p:attrNameLst>
-                                          <p:attrName>style.visibility</p:attrName>
-                                        </p:attrNameLst>
-                                      </p:cBhvr>
-                                      <p:to>
-                                        <p:strVal val="visible"/>
-                                      </p:to>
-                                    </p:set>
-                                  </p:childTnLst>
-                                </p:cTn>
-                              </p:par>
-                            </p:childTnLst>
-                          </p:cTn>
-                        </p:par>
-                      </p:childTnLst>
-                    </p:cTn>
-                  </p:par>
-                  <p:par>
-                    <p:cTn id="21" fill="hold">
-                      <p:stCondLst>
-                        <p:cond delay="indefinite"/>
-                      </p:stCondLst>
-                      <p:childTnLst>
-                        <p:par>
-                          <p:cTn id="22" fill="hold">
-                            <p:stCondLst>
-                              <p:cond delay="0"/>
-                            </p:stCondLst>
-                            <p:childTnLst>
-                              <p:par>
-                                <p:cTn id="23" presetID="1" presetClass="entr" presetSubtype="0" fill="hold" nodeType="clickEffect">
-                                  <p:stCondLst>
-                                    <p:cond delay="0"/>
-                                  </p:stCondLst>
-                                  <p:childTnLst>
-                                    <p:set>
-                                      <p:cBhvr>
-                                        <p:cTn id="24" dur="1" fill="hold">
-                                          <p:stCondLst>
-                                            <p:cond delay="0"/>
-                                          </p:stCondLst>
-                                        </p:cTn>
-                                        <p:tgtEl>
-                                          <p:spTgt spid="3">
-                                            <p:txEl>
-                                              <p:pRg st="7" end="7"/>
-                                            </p:txEl>
-                                          </p:spTgt>
-                                        </p:tgtEl>
-                                        <p:attrNameLst>
-                                          <p:attrName>style.visibility</p:attrName>
-                                        </p:attrNameLst>
-                                      </p:cBhvr>
-                                      <p:to>
-                                        <p:strVal val="visible"/>
-                                      </p:to>
-                                    </p:set>
-                                  </p:childTnLst>
-                                </p:cTn>
-                              </p:par>
-                            </p:childTnLst>
-                          </p:cTn>
-                        </p:par>
-                      </p:childTnLst>
-                    </p:cTn>
-                  </p:par>
-                  <p:par>
-                    <p:cTn id="25" fill="hold">
-                      <p:stCondLst>
-                        <p:cond delay="indefinite"/>
-                      </p:stCondLst>
-                      <p:childTnLst>
-                        <p:par>
-                          <p:cTn id="26" fill="hold">
-                            <p:stCondLst>
-                              <p:cond delay="0"/>
-                            </p:stCondLst>
-                            <p:childTnLst>
-                              <p:par>
-                                <p:cTn id="27" presetID="1" presetClass="entr" presetSubtype="0" fill="hold" nodeType="clickEffect">
-                                  <p:stCondLst>
-                                    <p:cond delay="0"/>
-                                  </p:stCondLst>
-                                  <p:childTnLst>
-                                    <p:set>
-                                      <p:cBhvr>
-                                        <p:cTn id="28" dur="1" fill="hold">
-                                          <p:stCondLst>
-                                            <p:cond delay="0"/>
-                                          </p:stCondLst>
-                                        </p:cTn>
-                                        <p:tgtEl>
-                                          <p:spTgt spid="3">
-                                            <p:txEl>
-                                              <p:pRg st="8" end="8"/>
-                                            </p:txEl>
-                                          </p:spTgt>
-                                        </p:tgtEl>
-                                        <p:attrNameLst>
-                                          <p:attrName>style.visibility</p:attrName>
-                                        </p:attrNameLst>
-                                      </p:cBhvr>
-                                      <p:to>
-                                        <p:strVal val="visible"/>
-                                      </p:to>
-                                    </p:set>
-                                  </p:childTnLst>
-                                </p:cTn>
-                              </p:par>
-                            </p:childTnLst>
-                          </p:cTn>
-                        </p:par>
-                      </p:childTnLst>
-                    </p:cTn>
-                  </p:par>
-                </p:childTnLst>
-              </p:cTn>
-              <p:prevCondLst>
-                <p:cond evt="onPrev" delay="0">
-                  <p:tgtEl>
-                    <p:sldTgt/>
-                  </p:tgtEl>
-                </p:cond>
-              </p:prevCondLst>
-              <p:nextCondLst>
-                <p:cond evt="onNext" delay="0">
-                  <p:tgtEl>
-                    <p:sldTgt/>
-                  </p:tgtEl>
-                </p:cond>
-              </p:nextCondLst>
-            </p:seq>
-          </p:childTnLst>
-        </p:cTn>
-      </p:par>
-    </p:tnLst>
-  </p:timing>
-</p:sld>
-</file>
-
-<file path=ppt/slides/slide5.xml><?xml version="1.0" encoding="utf-8"?>
-<p:sld xmlns:a="http://schemas.openxmlformats.org/drawingml/2006/main" xmlns:r="http://schemas.openxmlformats.org/officeDocument/2006/relationships" xmlns:p="http://schemas.openxmlformats.org/presentationml/2006/main">
-  <p:cSld>
-    <p:spTree>
-      <p:nvGrpSpPr>
-        <p:cNvPr id="1" name=""/>
-        <p:cNvGrpSpPr/>
-        <p:nvPr/>
-      </p:nvGrpSpPr>
-      <p:grpSpPr>
-        <a:xfrm>
-          <a:off x="0" y="0"/>
-          <a:ext cx="0" cy="0"/>
-          <a:chOff x="0" y="0"/>
-          <a:chExt cx="0" cy="0"/>
-        </a:xfrm>
-      </p:grpSpPr>
-      <p:sp>
-        <p:nvSpPr>
-          <p:cNvPr id="2" name="Title 1">
-            <a:extLst>
-              <a:ext uri="{FF2B5EF4-FFF2-40B4-BE49-F238E27FC236}">
-                <a16:creationId xmlns:a16="http://schemas.microsoft.com/office/drawing/2014/main" id="{DB5A6184-2104-7145-B18B-4F65BAC72215}"/>
-              </a:ext>
-            </a:extLst>
-          </p:cNvPr>
-          <p:cNvSpPr>
-            <a:spLocks noGrp="1"/>
-          </p:cNvSpPr>
-          <p:nvPr>
-            <p:ph type="title"/>
-          </p:nvPr>
-        </p:nvSpPr>
-        <p:spPr/>
-        <p:txBody>
-          <a:bodyPr/>
-          <a:lstStyle/>
-          <a:p>
-            <a:r>
-              <a:rPr lang="en-US" dirty="0"/>
-              <a:t>Corrosive Environment</a:t>
-            </a:r>
-          </a:p>
-        </p:txBody>
-      </p:sp>
-      <p:sp>
-        <p:nvSpPr>
-          <p:cNvPr id="3" name="Content Placeholder 2">
-            <a:extLst>
-              <a:ext uri="{FF2B5EF4-FFF2-40B4-BE49-F238E27FC236}">
-                <a16:creationId xmlns:a16="http://schemas.microsoft.com/office/drawing/2014/main" id="{F8CCACE4-F628-8F43-82DA-6264E3EB9D31}"/>
-              </a:ext>
-            </a:extLst>
-          </p:cNvPr>
-          <p:cNvSpPr>
-            <a:spLocks noGrp="1"/>
-          </p:cNvSpPr>
-          <p:nvPr>
-            <p:ph idx="1"/>
-          </p:nvPr>
-        </p:nvSpPr>
-        <p:spPr>
-          <a:xfrm>
-            <a:off x="609600" y="2160495"/>
-            <a:ext cx="6268278" cy="3965670"/>
-          </a:xfrm>
-        </p:spPr>
-        <p:txBody>
-          <a:bodyPr/>
-          <a:lstStyle/>
-          <a:p>
-            <a:r>
-              <a:rPr lang="en-US" sz="2000" dirty="0"/>
-              <a:t>The chemical interaction of liberated I (and possibly other elements) with the cladding is of great importance in crack initiation</a:t>
-            </a:r>
-          </a:p>
-          <a:p>
-            <a:r>
-              <a:rPr lang="en-US" sz="2000" dirty="0"/>
-              <a:t>A zirconium iodide gaseous species migrates up the temperature gradient towards the crack mouth, whereby the high affinity of Zr for O may result in ZrO2 formation, and decomposition may once again liberate I2 gas</a:t>
-            </a:r>
-          </a:p>
-          <a:p>
-            <a:r>
-              <a:rPr lang="en-US" sz="2000" dirty="0"/>
-              <a:t>The deposition of ZrO2 on the crack walls is believed to create a passivation layer, which further localizes I encroachment at the crack tip</a:t>
-            </a:r>
-          </a:p>
-        </p:txBody>
-      </p:sp>
-      <p:sp>
-        <p:nvSpPr>
-          <p:cNvPr id="4" name="Slide Number Placeholder 3">
-            <a:extLst>
-              <a:ext uri="{FF2B5EF4-FFF2-40B4-BE49-F238E27FC236}">
-                <a16:creationId xmlns:a16="http://schemas.microsoft.com/office/drawing/2014/main" id="{AC381AA5-28A4-3B4B-AC5A-60769997DC28}"/>
-              </a:ext>
-            </a:extLst>
-          </p:cNvPr>
-          <p:cNvSpPr>
-            <a:spLocks noGrp="1"/>
-          </p:cNvSpPr>
-          <p:nvPr>
-            <p:ph type="sldNum" sz="quarter" idx="12"/>
-          </p:nvPr>
-        </p:nvSpPr>
-        <p:spPr/>
-        <p:txBody>
-          <a:bodyPr/>
-          <a:lstStyle/>
-          <a:p>
-            <a:pPr>
-              <a:defRPr/>
-            </a:pPr>
-            <a:fld id="{3FF2C605-4958-CF43-AA48-80339EFDB0AF}" type="slidenum">
-              <a:rPr lang="en-US" smtClean="0"/>
-              <a:pPr>
-                <a:defRPr/>
-              </a:pPr>
-              <a:t>5</a:t>
-            </a:fld>
-            <a:endParaRPr lang="en-US"/>
-          </a:p>
-        </p:txBody>
-      </p:sp>
-      <p:pic>
-        <p:nvPicPr>
-          <p:cNvPr id="5" name="Picture 4">
-            <a:extLst>
-              <a:ext uri="{FF2B5EF4-FFF2-40B4-BE49-F238E27FC236}">
-                <a16:creationId xmlns:a16="http://schemas.microsoft.com/office/drawing/2014/main" id="{F3CC3F3B-0124-1444-9A8F-7BAA6AADDDF8}"/>
-              </a:ext>
-            </a:extLst>
-          </p:cNvPr>
-          <p:cNvPicPr>
-            <a:picLocks noChangeAspect="1"/>
-          </p:cNvPicPr>
-          <p:nvPr/>
-        </p:nvPicPr>
-        <p:blipFill>
-          <a:blip r:embed="rId2"/>
-          <a:stretch>
-            <a:fillRect/>
-          </a:stretch>
-        </p:blipFill>
-        <p:spPr>
-          <a:xfrm>
-            <a:off x="7336183" y="2041495"/>
-            <a:ext cx="3586921" cy="4314855"/>
-          </a:xfrm>
-          <a:prstGeom prst="rect">
-            <a:avLst/>
-          </a:prstGeom>
-        </p:spPr>
-      </p:pic>
-    </p:spTree>
-    <p:extLst>
-      <p:ext uri="{BB962C8B-B14F-4D97-AF65-F5344CB8AC3E}">
-        <p14:creationId xmlns:p14="http://schemas.microsoft.com/office/powerpoint/2010/main" val="688378513"/>
-      </p:ext>
-    </p:extLst>
-  </p:cSld>
-  <p:clrMapOvr>
-    <a:masterClrMapping/>
-  </p:clrMapOvr>
-</p:sld>
-</file>
-
-<file path=ppt/slides/slide6.xml><?xml version="1.0" encoding="utf-8"?>
-<p:sld xmlns:a="http://schemas.openxmlformats.org/drawingml/2006/main" xmlns:r="http://schemas.openxmlformats.org/officeDocument/2006/relationships" xmlns:p="http://schemas.openxmlformats.org/presentationml/2006/main">
-  <p:cSld>
-    <p:spTree>
-      <p:nvGrpSpPr>
-        <p:cNvPr id="1" name=""/>
-        <p:cNvGrpSpPr/>
-        <p:nvPr/>
-      </p:nvGrpSpPr>
-      <p:grpSpPr>
-        <a:xfrm>
-          <a:off x="0" y="0"/>
-          <a:ext cx="0" cy="0"/>
-          <a:chOff x="0" y="0"/>
-          <a:chExt cx="0" cy="0"/>
-        </a:xfrm>
-      </p:grpSpPr>
-      <p:sp>
-        <p:nvSpPr>
-          <p:cNvPr id="2" name="Title 1">
-            <a:extLst>
-              <a:ext uri="{FF2B5EF4-FFF2-40B4-BE49-F238E27FC236}">
-                <a16:creationId xmlns:a16="http://schemas.microsoft.com/office/drawing/2014/main" id="{BC763CEB-5646-2C41-9974-D3143B31F47C}"/>
-              </a:ext>
-            </a:extLst>
-          </p:cNvPr>
-          <p:cNvSpPr>
-            <a:spLocks noGrp="1"/>
-          </p:cNvSpPr>
-          <p:nvPr>
-            <p:ph type="title"/>
-          </p:nvPr>
-        </p:nvSpPr>
-        <p:spPr/>
-        <p:txBody>
-          <a:bodyPr/>
-          <a:lstStyle/>
-          <a:p>
-            <a:r>
-              <a:rPr lang="en-US" dirty="0"/>
-              <a:t>Susceptible Material</a:t>
-            </a:r>
-          </a:p>
-        </p:txBody>
-      </p:sp>
-      <p:sp>
-        <p:nvSpPr>
-          <p:cNvPr id="3" name="Content Placeholder 2">
-            <a:extLst>
-              <a:ext uri="{FF2B5EF4-FFF2-40B4-BE49-F238E27FC236}">
-                <a16:creationId xmlns:a16="http://schemas.microsoft.com/office/drawing/2014/main" id="{E614C47A-8D82-674B-84B3-8BCDC093A943}"/>
-              </a:ext>
-            </a:extLst>
-          </p:cNvPr>
-          <p:cNvSpPr>
-            <a:spLocks noGrp="1"/>
-          </p:cNvSpPr>
-          <p:nvPr>
-            <p:ph idx="1"/>
-          </p:nvPr>
-        </p:nvSpPr>
-        <p:spPr/>
-        <p:txBody>
-          <a:bodyPr/>
-          <a:lstStyle/>
-          <a:p>
-            <a:r>
-              <a:rPr lang="en-US" sz="2000" dirty="0"/>
-              <a:t>The susceptibility of the cladding to SCC can be influenced by many factors, including the composition, microstructure, texture, and irradiation damage of the cladding, and the presence of an oxide passivation layer, which protects the metal from chemical attack</a:t>
-            </a:r>
-          </a:p>
-          <a:p>
-            <a:r>
-              <a:rPr lang="en-US" sz="2000" dirty="0"/>
-              <a:t>All zirconium alloy cladding materials used in commercial power reactors are prone to PCI failure</a:t>
-            </a:r>
-          </a:p>
-          <a:p>
-            <a:r>
-              <a:rPr lang="en-US" sz="2000" dirty="0"/>
-              <a:t>Minor compositional changes have been shown to offer slightly different performance characteristics</a:t>
-            </a:r>
-          </a:p>
-          <a:p>
-            <a:endParaRPr lang="en-US" sz="2000" dirty="0"/>
-          </a:p>
-        </p:txBody>
-      </p:sp>
-      <p:sp>
-        <p:nvSpPr>
-          <p:cNvPr id="4" name="Slide Number Placeholder 3">
-            <a:extLst>
-              <a:ext uri="{FF2B5EF4-FFF2-40B4-BE49-F238E27FC236}">
-                <a16:creationId xmlns:a16="http://schemas.microsoft.com/office/drawing/2014/main" id="{554832A2-50CC-D344-9F2B-49D4297FF780}"/>
-              </a:ext>
-            </a:extLst>
-          </p:cNvPr>
-          <p:cNvSpPr>
-            <a:spLocks noGrp="1"/>
-          </p:cNvSpPr>
-          <p:nvPr>
-            <p:ph type="sldNum" sz="quarter" idx="12"/>
-          </p:nvPr>
-        </p:nvSpPr>
-        <p:spPr/>
-        <p:txBody>
-          <a:bodyPr/>
-          <a:lstStyle/>
-          <a:p>
-            <a:pPr>
-              <a:defRPr/>
-            </a:pPr>
-            <a:fld id="{3FF2C605-4958-CF43-AA48-80339EFDB0AF}" type="slidenum">
-              <a:rPr lang="en-US" smtClean="0"/>
-              <a:pPr>
-                <a:defRPr/>
-              </a:pPr>
-              <a:t>6</a:t>
-            </a:fld>
-            <a:endParaRPr lang="en-US"/>
-          </a:p>
-        </p:txBody>
-      </p:sp>
-      <p:pic>
-        <p:nvPicPr>
-          <p:cNvPr id="5" name="Picture 4">
-            <a:extLst>
-              <a:ext uri="{FF2B5EF4-FFF2-40B4-BE49-F238E27FC236}">
-                <a16:creationId xmlns:a16="http://schemas.microsoft.com/office/drawing/2014/main" id="{97E51968-E3E5-6B48-8856-D0DDD7D0D985}"/>
-              </a:ext>
-            </a:extLst>
-          </p:cNvPr>
-          <p:cNvPicPr>
-            <a:picLocks noChangeAspect="1"/>
-          </p:cNvPicPr>
-          <p:nvPr/>
-        </p:nvPicPr>
-        <p:blipFill>
-          <a:blip r:embed="rId2"/>
-          <a:stretch>
-            <a:fillRect/>
-          </a:stretch>
-        </p:blipFill>
-        <p:spPr>
-          <a:xfrm>
-            <a:off x="1803400" y="4628358"/>
-            <a:ext cx="8356600" cy="1612900"/>
-          </a:xfrm>
-          <a:prstGeom prst="rect">
-            <a:avLst/>
-          </a:prstGeom>
-        </p:spPr>
-      </p:pic>
-    </p:spTree>
-    <p:extLst>
-      <p:ext uri="{BB962C8B-B14F-4D97-AF65-F5344CB8AC3E}">
-        <p14:creationId xmlns:p14="http://schemas.microsoft.com/office/powerpoint/2010/main" val="4107844040"/>
-      </p:ext>
-    </p:extLst>
-  </p:cSld>
-  <p:clrMapOvr>
-    <a:masterClrMapping/>
-  </p:clrMapOvr>
-</p:sld>
-</file>
-
-<file path=ppt/slides/slide7.xml><?xml version="1.0" encoding="utf-8"?>
-<p:sld xmlns:a="http://schemas.openxmlformats.org/drawingml/2006/main" xmlns:r="http://schemas.openxmlformats.org/officeDocument/2006/relationships" xmlns:p="http://schemas.openxmlformats.org/presentationml/2006/main">
-  <p:cSld>
-    <p:spTree>
-      <p:nvGrpSpPr>
-        <p:cNvPr id="1" name=""/>
-        <p:cNvGrpSpPr/>
-        <p:nvPr/>
-      </p:nvGrpSpPr>
-      <p:grpSpPr>
-        <a:xfrm>
-          <a:off x="0" y="0"/>
-          <a:ext cx="0" cy="0"/>
-          <a:chOff x="0" y="0"/>
-          <a:chExt cx="0" cy="0"/>
-        </a:xfrm>
-      </p:grpSpPr>
-      <p:sp>
-        <p:nvSpPr>
-          <p:cNvPr id="2" name="Title 1">
-            <a:extLst>
-              <a:ext uri="{FF2B5EF4-FFF2-40B4-BE49-F238E27FC236}">
-                <a16:creationId xmlns:a16="http://schemas.microsoft.com/office/drawing/2014/main" id="{46B9C7F1-3F12-494A-B78B-3800878E66B7}"/>
-              </a:ext>
-            </a:extLst>
-          </p:cNvPr>
-          <p:cNvSpPr>
-            <a:spLocks noGrp="1"/>
-          </p:cNvSpPr>
-          <p:nvPr>
-            <p:ph type="title"/>
-          </p:nvPr>
-        </p:nvSpPr>
-        <p:spPr/>
-        <p:txBody>
-          <a:bodyPr/>
-          <a:lstStyle/>
-          <a:p>
-            <a:r>
-              <a:rPr lang="en-US" dirty="0"/>
-              <a:t>Susceptible Material</a:t>
-            </a:r>
-          </a:p>
-        </p:txBody>
-      </p:sp>
-      <p:sp>
-        <p:nvSpPr>
-          <p:cNvPr id="3" name="Content Placeholder 2">
-            <a:extLst>
-              <a:ext uri="{FF2B5EF4-FFF2-40B4-BE49-F238E27FC236}">
-                <a16:creationId xmlns:a16="http://schemas.microsoft.com/office/drawing/2014/main" id="{E2A68BBD-3E65-0D4B-A9AD-46E95A91D2E5}"/>
-              </a:ext>
-            </a:extLst>
-          </p:cNvPr>
-          <p:cNvSpPr>
-            <a:spLocks noGrp="1"/>
-          </p:cNvSpPr>
-          <p:nvPr>
-            <p:ph idx="1"/>
-          </p:nvPr>
-        </p:nvSpPr>
-        <p:spPr/>
-        <p:txBody>
-          <a:bodyPr/>
-          <a:lstStyle/>
-          <a:p>
-            <a:r>
-              <a:rPr lang="en-US" sz="2000" dirty="0"/>
-              <a:t>The initial motivation of alloying zirconium with small amounts of tin was to offset the loss of corrosion resistance resulting from the introduction of nitrogen impurities during fabrication</a:t>
-            </a:r>
-          </a:p>
-          <a:p>
-            <a:r>
-              <a:rPr lang="en-US" sz="2000" dirty="0"/>
-              <a:t>The control of impurities during manufacturing have significantly improved since the introduction of these alloys, making the addition of unnecessary</a:t>
-            </a:r>
-          </a:p>
-          <a:p>
-            <a:r>
-              <a:rPr lang="en-US" sz="2000" dirty="0"/>
-              <a:t>The addition of niobium to these zirconium alloys increases the strength of the cladding while providing higher irradiation creep resistance and has exhibited elevated corrosion resistance, which is desirable for higher burnup fuel</a:t>
-            </a:r>
-          </a:p>
-          <a:p>
-            <a:r>
-              <a:rPr lang="en-US" sz="2000" dirty="0"/>
-              <a:t>All Zr alloys are somewhat equally susceptible to SCC cracking following prolonged irradiation</a:t>
-            </a:r>
-          </a:p>
-          <a:p>
-            <a:endParaRPr lang="en-US" sz="2000" dirty="0"/>
-          </a:p>
-          <a:p>
-            <a:endParaRPr lang="en-US" sz="2000" dirty="0"/>
-          </a:p>
-        </p:txBody>
-      </p:sp>
-      <p:sp>
-        <p:nvSpPr>
-          <p:cNvPr id="4" name="Slide Number Placeholder 3">
-            <a:extLst>
-              <a:ext uri="{FF2B5EF4-FFF2-40B4-BE49-F238E27FC236}">
-                <a16:creationId xmlns:a16="http://schemas.microsoft.com/office/drawing/2014/main" id="{1604284E-C393-8E4E-9E37-5CDE1FA02460}"/>
-              </a:ext>
-            </a:extLst>
-          </p:cNvPr>
-          <p:cNvSpPr>
-            <a:spLocks noGrp="1"/>
-          </p:cNvSpPr>
-          <p:nvPr>
-            <p:ph type="sldNum" sz="quarter" idx="12"/>
-          </p:nvPr>
-        </p:nvSpPr>
-        <p:spPr/>
-        <p:txBody>
-          <a:bodyPr/>
-          <a:lstStyle/>
-          <a:p>
-            <a:pPr>
-              <a:defRPr/>
-            </a:pPr>
-            <a:fld id="{3FF2C605-4958-CF43-AA48-80339EFDB0AF}" type="slidenum">
-              <a:rPr lang="en-US" smtClean="0"/>
-              <a:pPr>
-                <a:defRPr/>
-              </a:pPr>
-              <a:t>7</a:t>
-            </a:fld>
-            <a:endParaRPr lang="en-US"/>
-          </a:p>
-        </p:txBody>
-      </p:sp>
-    </p:spTree>
-    <p:extLst>
-      <p:ext uri="{BB962C8B-B14F-4D97-AF65-F5344CB8AC3E}">
-        <p14:creationId xmlns:p14="http://schemas.microsoft.com/office/powerpoint/2010/main" val="1378059254"/>
-      </p:ext>
-    </p:extLst>
-  </p:cSld>
-  <p:clrMapOvr>
-    <a:masterClrMapping/>
-  </p:clrMapOvr>
-</p:sld>
-</file>
-
-<file path=ppt/slides/slide8.xml><?xml version="1.0" encoding="utf-8"?>
-<p:sld xmlns:a="http://schemas.openxmlformats.org/drawingml/2006/main" xmlns:r="http://schemas.openxmlformats.org/officeDocument/2006/relationships" xmlns:p="http://schemas.openxmlformats.org/presentationml/2006/main">
-  <p:cSld>
-    <p:spTree>
-      <p:nvGrpSpPr>
-        <p:cNvPr id="1" name=""/>
-        <p:cNvGrpSpPr/>
-        <p:nvPr/>
-      </p:nvGrpSpPr>
-      <p:grpSpPr>
-        <a:xfrm>
-          <a:off x="0" y="0"/>
-          <a:ext cx="0" cy="0"/>
-          <a:chOff x="0" y="0"/>
-          <a:chExt cx="0" cy="0"/>
-        </a:xfrm>
-      </p:grpSpPr>
-      <p:sp>
-        <p:nvSpPr>
-          <p:cNvPr id="2" name="Title 1">
-            <a:extLst>
-              <a:ext uri="{FF2B5EF4-FFF2-40B4-BE49-F238E27FC236}">
-                <a16:creationId xmlns:a16="http://schemas.microsoft.com/office/drawing/2014/main" id="{270E3787-0DE8-F149-A324-6F4969BA90FE}"/>
-              </a:ext>
-            </a:extLst>
-          </p:cNvPr>
-          <p:cNvSpPr>
-            <a:spLocks noGrp="1"/>
-          </p:cNvSpPr>
-          <p:nvPr>
-            <p:ph type="title"/>
-          </p:nvPr>
-        </p:nvSpPr>
-        <p:spPr/>
-        <p:txBody>
-          <a:bodyPr/>
-          <a:lstStyle/>
-          <a:p>
-            <a:r>
-              <a:rPr lang="en-US" dirty="0"/>
-              <a:t>Sufficient Stress</a:t>
-            </a:r>
-          </a:p>
-        </p:txBody>
-      </p:sp>
-      <p:sp>
-        <p:nvSpPr>
-          <p:cNvPr id="3" name="Content Placeholder 2">
-            <a:extLst>
-              <a:ext uri="{FF2B5EF4-FFF2-40B4-BE49-F238E27FC236}">
-                <a16:creationId xmlns:a16="http://schemas.microsoft.com/office/drawing/2014/main" id="{48555B14-B891-0145-BCD0-6F1C0A82B4E1}"/>
-              </a:ext>
-            </a:extLst>
-          </p:cNvPr>
-          <p:cNvSpPr>
-            <a:spLocks noGrp="1"/>
-          </p:cNvSpPr>
-          <p:nvPr>
-            <p:ph idx="1"/>
-          </p:nvPr>
-        </p:nvSpPr>
-        <p:spPr/>
-        <p:txBody>
-          <a:bodyPr/>
-          <a:lstStyle/>
-          <a:p>
-            <a:r>
-              <a:rPr lang="en-US" sz="2000" dirty="0"/>
-              <a:t>The stress on the cladding depends on the external coolant pressure and creep, in addition to the stress imposed internally by the fuel</a:t>
-            </a:r>
-          </a:p>
-          <a:p>
-            <a:r>
-              <a:rPr lang="en-US" sz="2000" dirty="0"/>
-              <a:t>The fuel pellet structurally deforms as a result of the following mechanisms: thermal expansion, solid and gaseous fission product swelling, thermal and irradiation-induced creep, irradiation-induced densification and cracking</a:t>
-            </a:r>
-          </a:p>
-          <a:p>
-            <a:r>
-              <a:rPr lang="en-US" sz="2000" dirty="0"/>
-              <a:t>The fuel thermally expands almost immediately in response to an increase in temperature, whereas the contributions of creep and fission product swelling are longer term and depend on burnup</a:t>
-            </a:r>
-          </a:p>
-          <a:p>
-            <a:r>
-              <a:rPr lang="en-US" sz="2000" dirty="0"/>
-              <a:t>UO2 fuel is typically fabricated with an initial porosity of 3%–5% to accommodate fission products</a:t>
-            </a:r>
-          </a:p>
-          <a:p>
-            <a:r>
-              <a:rPr lang="en-US" sz="2000" dirty="0"/>
-              <a:t>The benefits of this with respect to minimizing SCC are twofold: first, the effect of swelling is diminished by solid fission products filling internal voids; second, initial pores provide sinks for fission gases, thus impeding their release to the fuel-clad gap</a:t>
-            </a:r>
-          </a:p>
-          <a:p>
-            <a:endParaRPr lang="en-US" sz="2000" dirty="0"/>
-          </a:p>
-          <a:p>
-            <a:endParaRPr lang="en-US" sz="2000" dirty="0"/>
-          </a:p>
-          <a:p>
-            <a:endParaRPr lang="en-US" sz="2000" dirty="0"/>
-          </a:p>
-          <a:p>
-            <a:endParaRPr lang="en-US" sz="2000" dirty="0"/>
-          </a:p>
-        </p:txBody>
-      </p:sp>
-      <p:sp>
-        <p:nvSpPr>
-          <p:cNvPr id="4" name="Slide Number Placeholder 3">
-            <a:extLst>
-              <a:ext uri="{FF2B5EF4-FFF2-40B4-BE49-F238E27FC236}">
-                <a16:creationId xmlns:a16="http://schemas.microsoft.com/office/drawing/2014/main" id="{85997AC4-5C28-1F4C-8856-475E43A4CBBF}"/>
-              </a:ext>
-            </a:extLst>
-          </p:cNvPr>
-          <p:cNvSpPr>
-            <a:spLocks noGrp="1"/>
-          </p:cNvSpPr>
-          <p:nvPr>
-            <p:ph type="sldNum" sz="quarter" idx="12"/>
-          </p:nvPr>
-        </p:nvSpPr>
-        <p:spPr/>
-        <p:txBody>
-          <a:bodyPr/>
-          <a:lstStyle/>
-          <a:p>
-            <a:pPr>
-              <a:defRPr/>
-            </a:pPr>
-            <a:fld id="{3FF2C605-4958-CF43-AA48-80339EFDB0AF}" type="slidenum">
-              <a:rPr lang="en-US" smtClean="0"/>
-              <a:pPr>
-                <a:defRPr/>
-              </a:pPr>
-              <a:t>8</a:t>
-            </a:fld>
-            <a:endParaRPr lang="en-US"/>
-          </a:p>
-        </p:txBody>
-      </p:sp>
-    </p:spTree>
-    <p:extLst>
-      <p:ext uri="{BB962C8B-B14F-4D97-AF65-F5344CB8AC3E}">
-        <p14:creationId xmlns:p14="http://schemas.microsoft.com/office/powerpoint/2010/main" val="3729790101"/>
-      </p:ext>
-    </p:extLst>
-  </p:cSld>
-  <p:clrMapOvr>
-    <a:masterClrMapping/>
-  </p:clrMapOvr>
-</p:sld>
-</file>
-
-<file path=ppt/slides/slide9.xml><?xml version="1.0" encoding="utf-8"?>
-<p:sld xmlns:a="http://schemas.openxmlformats.org/drawingml/2006/main" xmlns:r="http://schemas.openxmlformats.org/officeDocument/2006/relationships" xmlns:p="http://schemas.openxmlformats.org/presentationml/2006/main">
-  <p:cSld>
-    <p:spTree>
-      <p:nvGrpSpPr>
-        <p:cNvPr id="1" name=""/>
-        <p:cNvGrpSpPr/>
-        <p:nvPr/>
-      </p:nvGrpSpPr>
-      <p:grpSpPr>
-        <a:xfrm>
-          <a:off x="0" y="0"/>
-          <a:ext cx="0" cy="0"/>
-          <a:chOff x="0" y="0"/>
-          <a:chExt cx="0" cy="0"/>
-        </a:xfrm>
-      </p:grpSpPr>
-      <p:sp>
-        <p:nvSpPr>
-          <p:cNvPr id="2" name="Title 1">
-            <a:extLst>
-              <a:ext uri="{FF2B5EF4-FFF2-40B4-BE49-F238E27FC236}">
-                <a16:creationId xmlns:a16="http://schemas.microsoft.com/office/drawing/2014/main" id="{8643C4AC-BD55-1843-A432-788589280BCF}"/>
-              </a:ext>
-            </a:extLst>
-          </p:cNvPr>
-          <p:cNvSpPr>
-            <a:spLocks noGrp="1"/>
-          </p:cNvSpPr>
-          <p:nvPr>
-            <p:ph type="title"/>
-          </p:nvPr>
-        </p:nvSpPr>
-        <p:spPr/>
-        <p:txBody>
-          <a:bodyPr/>
-          <a:lstStyle/>
-          <a:p>
-            <a:r>
-              <a:rPr lang="en-US" dirty="0"/>
-              <a:t>Reducing Internal Pressure</a:t>
-            </a:r>
-          </a:p>
-        </p:txBody>
-      </p:sp>
-      <p:sp>
-        <p:nvSpPr>
-          <p:cNvPr id="3" name="Content Placeholder 2">
-            <a:extLst>
-              <a:ext uri="{FF2B5EF4-FFF2-40B4-BE49-F238E27FC236}">
-                <a16:creationId xmlns:a16="http://schemas.microsoft.com/office/drawing/2014/main" id="{69D1B448-D551-F440-84B2-F0541CE49F20}"/>
-              </a:ext>
-            </a:extLst>
-          </p:cNvPr>
-          <p:cNvSpPr>
-            <a:spLocks noGrp="1"/>
-          </p:cNvSpPr>
-          <p:nvPr>
-            <p:ph idx="1"/>
-          </p:nvPr>
-        </p:nvSpPr>
-        <p:spPr/>
-        <p:txBody>
-          <a:bodyPr/>
-          <a:lstStyle/>
-          <a:p>
-            <a:r>
-              <a:rPr lang="en-US" sz="2000" dirty="0"/>
-              <a:t>The initial grain size of the fuel, which evolves with burnup, affects fission gas release, among other factors</a:t>
-            </a:r>
-          </a:p>
-          <a:p>
-            <a:r>
-              <a:rPr lang="en-US" sz="2000" dirty="0"/>
-              <a:t>Since intragranular fission gas diffusion occurs at a much slower rate than intergranular diffusion, larger grain sizes impede the overall release of fission gases to the fuel surface</a:t>
-            </a:r>
-          </a:p>
-          <a:p>
-            <a:r>
-              <a:rPr lang="en-US" sz="2000" dirty="0"/>
-              <a:t>Reducing fission gas release with large grained fuel is less effective with increasing linear powers from 50-65 kW/m</a:t>
-            </a:r>
-          </a:p>
-          <a:p>
-            <a:r>
-              <a:rPr lang="en-US" sz="2000" dirty="0"/>
-              <a:t>As an undesired consequence to improved fission gas retention with large grained fuel, fission product swelling can be more pronounced</a:t>
-            </a:r>
-          </a:p>
-          <a:p>
-            <a:endParaRPr lang="en-US" sz="2000" dirty="0"/>
-          </a:p>
-          <a:p>
-            <a:endParaRPr lang="en-US" sz="2000" dirty="0"/>
-          </a:p>
-        </p:txBody>
-      </p:sp>
-      <p:sp>
-        <p:nvSpPr>
-          <p:cNvPr id="4" name="Slide Number Placeholder 3">
-            <a:extLst>
-              <a:ext uri="{FF2B5EF4-FFF2-40B4-BE49-F238E27FC236}">
-                <a16:creationId xmlns:a16="http://schemas.microsoft.com/office/drawing/2014/main" id="{C94F6377-1AAD-6943-ABCA-96AC451534C5}"/>
-              </a:ext>
-            </a:extLst>
-          </p:cNvPr>
-          <p:cNvSpPr>
-            <a:spLocks noGrp="1"/>
-          </p:cNvSpPr>
-          <p:nvPr>
-            <p:ph type="sldNum" sz="quarter" idx="12"/>
-          </p:nvPr>
-        </p:nvSpPr>
-        <p:spPr/>
-        <p:txBody>
-          <a:bodyPr/>
-          <a:lstStyle/>
-          <a:p>
-            <a:pPr>
-              <a:defRPr/>
-            </a:pPr>
-            <a:fld id="{3FF2C605-4958-CF43-AA48-80339EFDB0AF}" type="slidenum">
-              <a:rPr lang="en-US" smtClean="0"/>
-              <a:pPr>
-                <a:defRPr/>
-              </a:pPr>
-              <a:t>9</a:t>
-            </a:fld>
-            <a:endParaRPr lang="en-US"/>
-          </a:p>
-        </p:txBody>
-      </p:sp>
-    </p:spTree>
-    <p:extLst>
-      <p:ext uri="{BB962C8B-B14F-4D97-AF65-F5344CB8AC3E}">
-        <p14:creationId xmlns:p14="http://schemas.microsoft.com/office/powerpoint/2010/main" val="3578866111"/>
+        <p14:creationId xmlns:p14="http://schemas.microsoft.com/office/powerpoint/2010/main" val="510275999"/>
       </p:ext>
     </p:extLst>
   </p:cSld>

--- a/Nuclear_Fuel_Performance/NE533_Spring2026/Module3/Lec16_PCI.pptx
+++ b/Nuclear_Fuel_Performance/NE533_Spring2026/Module3/Lec16_PCI.pptx
@@ -6,17 +6,22 @@
   </p:sldMasterIdLst>
   <p:sldIdLst>
     <p:sldId id="537" r:id="rId2"/>
-    <p:sldId id="575" r:id="rId3"/>
-    <p:sldId id="588" r:id="rId4"/>
-    <p:sldId id="589" r:id="rId5"/>
-    <p:sldId id="590" r:id="rId6"/>
-    <p:sldId id="591" r:id="rId7"/>
-    <p:sldId id="592" r:id="rId8"/>
-    <p:sldId id="593" r:id="rId9"/>
-    <p:sldId id="594" r:id="rId10"/>
-    <p:sldId id="595" r:id="rId11"/>
-    <p:sldId id="596" r:id="rId12"/>
-    <p:sldId id="597" r:id="rId13"/>
+    <p:sldId id="601" r:id="rId3"/>
+    <p:sldId id="279" r:id="rId4"/>
+    <p:sldId id="587" r:id="rId5"/>
+    <p:sldId id="575" r:id="rId6"/>
+    <p:sldId id="588" r:id="rId7"/>
+    <p:sldId id="590" r:id="rId8"/>
+    <p:sldId id="591" r:id="rId9"/>
+    <p:sldId id="592" r:id="rId10"/>
+    <p:sldId id="593" r:id="rId11"/>
+    <p:sldId id="594" r:id="rId12"/>
+    <p:sldId id="595" r:id="rId13"/>
+    <p:sldId id="596" r:id="rId14"/>
+    <p:sldId id="597" r:id="rId15"/>
+    <p:sldId id="598" r:id="rId16"/>
+    <p:sldId id="599" r:id="rId17"/>
+    <p:sldId id="600" r:id="rId18"/>
   </p:sldIdLst>
   <p:sldSz cx="12192000" cy="6858000"/>
   <p:notesSz cx="6858000" cy="9144000"/>
@@ -311,7 +316,7 @@
             </a:pPr>
             <a:fld id="{D6F3A803-A045-354B-887A-01433CE46FC2}" type="datetime1">
               <a:rPr lang="en-US" smtClean="0"/>
-              <a:t>3/20/26</a:t>
+              <a:t>3/23/26</a:t>
             </a:fld>
             <a:endParaRPr lang="en-US"/>
           </a:p>
@@ -504,7 +509,7 @@
             </a:pPr>
             <a:fld id="{A8B33C1D-C2E2-1049-AA3F-CD6E91052752}" type="datetime1">
               <a:rPr lang="en-US" smtClean="0"/>
-              <a:t>3/20/26</a:t>
+              <a:t>3/23/26</a:t>
             </a:fld>
             <a:endParaRPr lang="en-US"/>
           </a:p>
@@ -706,7 +711,7 @@
             </a:pPr>
             <a:fld id="{2791AD68-B60C-4542-BDDD-2074DE6DE828}" type="datetime1">
               <a:rPr lang="en-US" smtClean="0"/>
-              <a:t>3/20/26</a:t>
+              <a:t>3/23/26</a:t>
             </a:fld>
             <a:endParaRPr lang="en-US"/>
           </a:p>
@@ -908,7 +913,7 @@
             </a:pPr>
             <a:fld id="{C5BD04BF-9DC2-6341-92B2-BD109A2EF3B1}" type="datetime1">
               <a:rPr lang="en-US" smtClean="0"/>
-              <a:t>3/20/26</a:t>
+              <a:t>3/23/26</a:t>
             </a:fld>
             <a:endParaRPr lang="en-US"/>
           </a:p>
@@ -1178,7 +1183,7 @@
             </a:pPr>
             <a:fld id="{FB0FFBC7-3028-644D-986B-D9855CB74B38}" type="datetime1">
               <a:rPr lang="en-US" smtClean="0"/>
-              <a:t>3/20/26</a:t>
+              <a:t>3/23/26</a:t>
             </a:fld>
             <a:endParaRPr lang="en-US"/>
           </a:p>
@@ -1493,7 +1498,7 @@
             </a:pPr>
             <a:fld id="{2C3B8AE4-01F5-CC42-9C62-61BC6528368B}" type="datetime1">
               <a:rPr lang="en-US" smtClean="0"/>
-              <a:t>3/20/26</a:t>
+              <a:t>3/23/26</a:t>
             </a:fld>
             <a:endParaRPr lang="en-US"/>
           </a:p>
@@ -1936,7 +1941,7 @@
             </a:pPr>
             <a:fld id="{77E49314-4A78-2444-9569-44EB70168344}" type="datetime1">
               <a:rPr lang="en-US" smtClean="0"/>
-              <a:t>3/20/26</a:t>
+              <a:t>3/23/26</a:t>
             </a:fld>
             <a:endParaRPr lang="en-US"/>
           </a:p>
@@ -2081,7 +2086,7 @@
             </a:pPr>
             <a:fld id="{5BC22837-4683-B242-B000-BCEE30621787}" type="datetime1">
               <a:rPr lang="en-US" smtClean="0"/>
-              <a:t>3/20/26</a:t>
+              <a:t>3/23/26</a:t>
             </a:fld>
             <a:endParaRPr lang="en-US"/>
           </a:p>
@@ -2200,7 +2205,7 @@
             </a:pPr>
             <a:fld id="{DCDAE926-7EF1-0B40-B57E-417D188A609C}" type="datetime1">
               <a:rPr lang="en-US" smtClean="0"/>
-              <a:t>3/20/26</a:t>
+              <a:t>3/23/26</a:t>
             </a:fld>
             <a:endParaRPr lang="en-US"/>
           </a:p>
@@ -2499,7 +2504,7 @@
             </a:pPr>
             <a:fld id="{518D107B-B9C7-5B41-A168-55258AB95F52}" type="datetime1">
               <a:rPr lang="en-US" smtClean="0"/>
-              <a:t>3/20/26</a:t>
+              <a:t>3/23/26</a:t>
             </a:fld>
             <a:endParaRPr lang="en-US"/>
           </a:p>
@@ -2783,7 +2788,7 @@
             </a:pPr>
             <a:fld id="{3AD92D36-EE82-3142-B011-9831FB5E702F}" type="datetime1">
               <a:rPr lang="en-US" smtClean="0"/>
-              <a:t>3/20/26</a:t>
+              <a:t>3/23/26</a:t>
             </a:fld>
             <a:endParaRPr lang="en-US"/>
           </a:p>
@@ -2924,7 +2929,7 @@
               </a14:hiddenLine>
             </a:ext>
             <a:ext uri="{FAA26D3D-D897-4be2-8F04-BA451C77F1D7}">
-              <ma14:placeholderFlag xmlns:ma14="http://schemas.microsoft.com/office/mac/drawingml/2011/main" xmlns="" val="1"/>
+              <ma14:placeholderFlag xmlns="" xmlns:ma14="http://schemas.microsoft.com/office/mac/drawingml/2011/main" val="1"/>
             </a:ext>
           </a:extLst>
         </p:spPr>
@@ -2992,7 +2997,7 @@
               </a14:hiddenLine>
             </a:ext>
             <a:ext uri="{FAA26D3D-D897-4be2-8F04-BA451C77F1D7}">
-              <ma14:placeholderFlag xmlns:ma14="http://schemas.microsoft.com/office/mac/drawingml/2011/main" xmlns="" val="1"/>
+              <ma14:placeholderFlag xmlns="" xmlns:ma14="http://schemas.microsoft.com/office/mac/drawingml/2011/main" val="1"/>
             </a:ext>
           </a:extLst>
         </p:spPr>
@@ -3088,7 +3093,7 @@
             </a:pPr>
             <a:fld id="{3EE08B4B-7256-494F-A90D-3891BD685F4A}" type="datetime1">
               <a:rPr lang="en-US" smtClean="0"/>
-              <a:t>3/20/26</a:t>
+              <a:t>3/23/26</a:t>
             </a:fld>
             <a:endParaRPr lang="en-US" dirty="0"/>
           </a:p>
@@ -3790,6 +3795,593 @@
           <p:cNvPr id="2" name="Title 1">
             <a:extLst>
               <a:ext uri="{FF2B5EF4-FFF2-40B4-BE49-F238E27FC236}">
+                <a16:creationId xmlns:a16="http://schemas.microsoft.com/office/drawing/2014/main" id="{C41A6137-476A-35F1-5EDC-244711AD6A14}"/>
+              </a:ext>
+            </a:extLst>
+          </p:cNvPr>
+          <p:cNvSpPr>
+            <a:spLocks noGrp="1"/>
+          </p:cNvSpPr>
+          <p:nvPr>
+            <p:ph type="title"/>
+          </p:nvPr>
+        </p:nvSpPr>
+        <p:spPr>
+          <a:xfrm>
+            <a:off x="609600" y="900114"/>
+            <a:ext cx="10972800" cy="1068387"/>
+          </a:xfrm>
+        </p:spPr>
+        <p:txBody>
+          <a:bodyPr wrap="square" anchor="ctr">
+            <a:normAutofit/>
+          </a:bodyPr>
+          <a:lstStyle/>
+          <a:p>
+            <a:r>
+              <a:rPr lang="en-US" dirty="0"/>
+              <a:t>Reactor Susceptibility</a:t>
+            </a:r>
+          </a:p>
+        </p:txBody>
+      </p:sp>
+      <p:sp>
+        <p:nvSpPr>
+          <p:cNvPr id="3" name="Content Placeholder 2">
+            <a:extLst>
+              <a:ext uri="{FF2B5EF4-FFF2-40B4-BE49-F238E27FC236}">
+                <a16:creationId xmlns:a16="http://schemas.microsoft.com/office/drawing/2014/main" id="{67899FF1-6DC6-F80B-3A91-932C12E560E3}"/>
+              </a:ext>
+            </a:extLst>
+          </p:cNvPr>
+          <p:cNvSpPr>
+            <a:spLocks noGrp="1"/>
+          </p:cNvSpPr>
+          <p:nvPr>
+            <p:ph sz="half" idx="1"/>
+          </p:nvPr>
+        </p:nvSpPr>
+        <p:spPr>
+          <a:xfrm>
+            <a:off x="609600" y="1968501"/>
+            <a:ext cx="5588000" cy="4157663"/>
+          </a:xfrm>
+        </p:spPr>
+        <p:txBody>
+          <a:bodyPr wrap="square" anchor="t">
+            <a:normAutofit lnSpcReduction="10000"/>
+          </a:bodyPr>
+          <a:lstStyle/>
+          <a:p>
+            <a:r>
+              <a:rPr lang="en-US" sz="1800" dirty="0"/>
+              <a:t>All current PWR, BWR and CANDU reactors utilize UO2 fuel, zirconium alloy cladding, and are water cooled</a:t>
+            </a:r>
+          </a:p>
+          <a:p>
+            <a:r>
+              <a:rPr lang="en-US" sz="1800" dirty="0"/>
+              <a:t>The degree of susceptibility of each reactor and fuel design to PCI rests on numerous design specifications</a:t>
+            </a:r>
+          </a:p>
+          <a:p>
+            <a:r>
+              <a:rPr lang="en-US" sz="1800" dirty="0"/>
+              <a:t>PWRs have smaller fuel diameters, BWRs have the thickest cladding</a:t>
+            </a:r>
+          </a:p>
+          <a:p>
+            <a:r>
+              <a:rPr lang="en-US" sz="1800" dirty="0"/>
+              <a:t>The geometric design has an influence on the stresses in the fuel and cladding</a:t>
+            </a:r>
+          </a:p>
+          <a:p>
+            <a:r>
+              <a:rPr lang="en-US" sz="1800" dirty="0"/>
+              <a:t>Linear power affects the temperature, which impacts a variety of other phenomena</a:t>
+            </a:r>
+          </a:p>
+          <a:p>
+            <a:r>
+              <a:rPr lang="en-US" sz="1800" dirty="0"/>
+              <a:t>Discharge burnup influences the inventory of fission products in the fuel/cladding interface</a:t>
+            </a:r>
+          </a:p>
+        </p:txBody>
+      </p:sp>
+      <p:pic>
+        <p:nvPicPr>
+          <p:cNvPr id="5" name="Picture 4">
+            <a:extLst>
+              <a:ext uri="{FF2B5EF4-FFF2-40B4-BE49-F238E27FC236}">
+                <a16:creationId xmlns:a16="http://schemas.microsoft.com/office/drawing/2014/main" id="{31EA8CF3-43C2-874B-9F3E-223061419146}"/>
+              </a:ext>
+            </a:extLst>
+          </p:cNvPr>
+          <p:cNvPicPr>
+            <a:picLocks noChangeAspect="1"/>
+          </p:cNvPicPr>
+          <p:nvPr/>
+        </p:nvPicPr>
+        <p:blipFill>
+          <a:blip r:embed="rId2"/>
+          <a:stretch>
+            <a:fillRect/>
+          </a:stretch>
+        </p:blipFill>
+        <p:spPr>
+          <a:xfrm>
+            <a:off x="6197600" y="2574037"/>
+            <a:ext cx="5987056" cy="2574433"/>
+          </a:xfrm>
+          <a:prstGeom prst="rect">
+            <a:avLst/>
+          </a:prstGeom>
+          <a:noFill/>
+        </p:spPr>
+      </p:pic>
+      <p:sp>
+        <p:nvSpPr>
+          <p:cNvPr id="4" name="Slide Number Placeholder 3">
+            <a:extLst>
+              <a:ext uri="{FF2B5EF4-FFF2-40B4-BE49-F238E27FC236}">
+                <a16:creationId xmlns:a16="http://schemas.microsoft.com/office/drawing/2014/main" id="{197DE1D3-18CC-90BA-32F2-D50B58B17206}"/>
+              </a:ext>
+            </a:extLst>
+          </p:cNvPr>
+          <p:cNvSpPr>
+            <a:spLocks noGrp="1"/>
+          </p:cNvSpPr>
+          <p:nvPr>
+            <p:ph type="sldNum" sz="quarter" idx="12"/>
+          </p:nvPr>
+        </p:nvSpPr>
+        <p:spPr>
+          <a:xfrm>
+            <a:off x="8737600" y="6356351"/>
+            <a:ext cx="2844800" cy="365125"/>
+          </a:xfrm>
+        </p:spPr>
+        <p:txBody>
+          <a:bodyPr anchor="ctr">
+            <a:normAutofit/>
+          </a:bodyPr>
+          <a:lstStyle/>
+          <a:p>
+            <a:pPr marL="0" marR="0" lvl="0" indent="0" algn="r" defTabSz="914400" rtl="0" eaLnBrk="1" fontAlgn="auto" latinLnBrk="0" hangingPunct="1">
+              <a:lnSpc>
+                <a:spcPct val="100000"/>
+              </a:lnSpc>
+              <a:spcBef>
+                <a:spcPts val="0"/>
+              </a:spcBef>
+              <a:spcAft>
+                <a:spcPts val="600"/>
+              </a:spcAft>
+              <a:buClrTx/>
+              <a:buSzTx/>
+              <a:buFontTx/>
+              <a:buNone/>
+              <a:tabLst/>
+              <a:defRPr/>
+            </a:pPr>
+            <a:fld id="{3FF2C605-4958-CF43-AA48-80339EFDB0AF}" type="slidenum">
+              <a:rPr kumimoji="0" lang="en-US" sz="1200" b="0" i="0" u="none" strike="noStrike" kern="1200" cap="none" spc="0" normalizeH="0" baseline="0" noProof="0" smtClean="0">
+                <a:ln>
+                  <a:noFill/>
+                </a:ln>
+                <a:solidFill>
+                  <a:prstClr val="black">
+                    <a:tint val="75000"/>
+                  </a:prstClr>
+                </a:solidFill>
+                <a:effectLst/>
+                <a:uLnTx/>
+                <a:uFillTx/>
+                <a:latin typeface="Calibri"/>
+                <a:ea typeface="+mn-ea"/>
+                <a:cs typeface="+mn-cs"/>
+              </a:rPr>
+              <a:pPr marL="0" marR="0" lvl="0" indent="0" algn="r" defTabSz="914400" rtl="0" eaLnBrk="1" fontAlgn="auto" latinLnBrk="0" hangingPunct="1">
+                <a:lnSpc>
+                  <a:spcPct val="100000"/>
+                </a:lnSpc>
+                <a:spcBef>
+                  <a:spcPts val="0"/>
+                </a:spcBef>
+                <a:spcAft>
+                  <a:spcPts val="600"/>
+                </a:spcAft>
+                <a:buClrTx/>
+                <a:buSzTx/>
+                <a:buFontTx/>
+                <a:buNone/>
+                <a:tabLst/>
+                <a:defRPr/>
+              </a:pPr>
+              <a:t>10</a:t>
+            </a:fld>
+            <a:endParaRPr kumimoji="0" lang="en-US" sz="1200" b="0" i="0" u="none" strike="noStrike" kern="1200" cap="none" spc="0" normalizeH="0" baseline="0" noProof="0">
+              <a:ln>
+                <a:noFill/>
+              </a:ln>
+              <a:solidFill>
+                <a:prstClr val="black">
+                  <a:tint val="75000"/>
+                </a:prstClr>
+              </a:solidFill>
+              <a:effectLst/>
+              <a:uLnTx/>
+              <a:uFillTx/>
+              <a:latin typeface="Calibri"/>
+              <a:ea typeface="+mn-ea"/>
+              <a:cs typeface="+mn-cs"/>
+            </a:endParaRPr>
+          </a:p>
+        </p:txBody>
+      </p:sp>
+    </p:spTree>
+    <p:extLst>
+      <p:ext uri="{BB962C8B-B14F-4D97-AF65-F5344CB8AC3E}">
+        <p14:creationId xmlns:p14="http://schemas.microsoft.com/office/powerpoint/2010/main" val="2980613618"/>
+      </p:ext>
+    </p:extLst>
+  </p:cSld>
+  <p:clrMapOvr>
+    <a:masterClrMapping/>
+  </p:clrMapOvr>
+</p:sld>
+</file>
+
+<file path=ppt/slides/slide11.xml><?xml version="1.0" encoding="utf-8"?>
+<p:sld xmlns:a="http://schemas.openxmlformats.org/drawingml/2006/main" xmlns:r="http://schemas.openxmlformats.org/officeDocument/2006/relationships" xmlns:p="http://schemas.openxmlformats.org/presentationml/2006/main">
+  <p:cSld>
+    <p:spTree>
+      <p:nvGrpSpPr>
+        <p:cNvPr id="1" name=""/>
+        <p:cNvGrpSpPr/>
+        <p:nvPr/>
+      </p:nvGrpSpPr>
+      <p:grpSpPr>
+        <a:xfrm>
+          <a:off x="0" y="0"/>
+          <a:ext cx="0" cy="0"/>
+          <a:chOff x="0" y="0"/>
+          <a:chExt cx="0" cy="0"/>
+        </a:xfrm>
+      </p:grpSpPr>
+      <p:sp>
+        <p:nvSpPr>
+          <p:cNvPr id="2" name="Title 1">
+            <a:extLst>
+              <a:ext uri="{FF2B5EF4-FFF2-40B4-BE49-F238E27FC236}">
+                <a16:creationId xmlns:a16="http://schemas.microsoft.com/office/drawing/2014/main" id="{C1A275EF-D507-1151-E20C-BADE1BA2FEE7}"/>
+              </a:ext>
+            </a:extLst>
+          </p:cNvPr>
+          <p:cNvSpPr>
+            <a:spLocks noGrp="1"/>
+          </p:cNvSpPr>
+          <p:nvPr>
+            <p:ph type="title"/>
+          </p:nvPr>
+        </p:nvSpPr>
+        <p:spPr/>
+        <p:txBody>
+          <a:bodyPr/>
+          <a:lstStyle/>
+          <a:p>
+            <a:r>
+              <a:rPr lang="en-US" dirty="0"/>
+              <a:t>Reactor Susceptibility</a:t>
+            </a:r>
+          </a:p>
+        </p:txBody>
+      </p:sp>
+      <p:sp>
+        <p:nvSpPr>
+          <p:cNvPr id="3" name="Content Placeholder 2">
+            <a:extLst>
+              <a:ext uri="{FF2B5EF4-FFF2-40B4-BE49-F238E27FC236}">
+                <a16:creationId xmlns:a16="http://schemas.microsoft.com/office/drawing/2014/main" id="{A97AA86B-72D0-F8D0-5D1E-9498576CCAA8}"/>
+              </a:ext>
+            </a:extLst>
+          </p:cNvPr>
+          <p:cNvSpPr>
+            <a:spLocks noGrp="1"/>
+          </p:cNvSpPr>
+          <p:nvPr>
+            <p:ph sz="half" idx="1"/>
+          </p:nvPr>
+        </p:nvSpPr>
+        <p:spPr/>
+        <p:txBody>
+          <a:bodyPr/>
+          <a:lstStyle/>
+          <a:p>
+            <a:r>
+              <a:rPr lang="en-US" sz="1800" dirty="0"/>
+              <a:t>In general, PCI failures are typically experienced (by any reactor) during a large change in power; thus, the manner in which power changes dictates to a large degree the likelihood of PCI failure</a:t>
+            </a:r>
+          </a:p>
+          <a:p>
+            <a:r>
+              <a:rPr lang="en-US" sz="1800" dirty="0"/>
+              <a:t>Unlike BWRs, the neutron flux in a PWR is not primarily controlled by the insertion and extraction of control rods during operation</a:t>
+            </a:r>
+          </a:p>
+          <a:p>
+            <a:r>
+              <a:rPr lang="en-US" sz="1800" dirty="0"/>
+              <a:t>Due to smoother control of reactivity and a lower linear power, PCI failures are significantly less frequent in PWRs than other major commercial power reactor designs</a:t>
+            </a:r>
+          </a:p>
+          <a:p>
+            <a:r>
+              <a:rPr lang="en-US" sz="1800" dirty="0"/>
+              <a:t>PCI failures are more of a concern in BWRs</a:t>
+            </a:r>
+          </a:p>
+          <a:p>
+            <a:endParaRPr lang="en-US" sz="1800" dirty="0"/>
+          </a:p>
+        </p:txBody>
+      </p:sp>
+      <p:sp>
+        <p:nvSpPr>
+          <p:cNvPr id="4" name="Content Placeholder 3">
+            <a:extLst>
+              <a:ext uri="{FF2B5EF4-FFF2-40B4-BE49-F238E27FC236}">
+                <a16:creationId xmlns:a16="http://schemas.microsoft.com/office/drawing/2014/main" id="{26FF7CCE-0AAC-C3AE-5239-3271E47306F9}"/>
+              </a:ext>
+            </a:extLst>
+          </p:cNvPr>
+          <p:cNvSpPr>
+            <a:spLocks noGrp="1"/>
+          </p:cNvSpPr>
+          <p:nvPr>
+            <p:ph sz="half" idx="2"/>
+          </p:nvPr>
+        </p:nvSpPr>
+        <p:spPr/>
+        <p:txBody>
+          <a:bodyPr/>
+          <a:lstStyle/>
+          <a:p>
+            <a:r>
+              <a:rPr lang="en-US" sz="1800" dirty="0"/>
+              <a:t>Control blade maneuvers in BWRs create local power transients that often lead to PCI failures in fuel rods adjacent to these blades</a:t>
+            </a:r>
+          </a:p>
+          <a:p>
+            <a:endParaRPr lang="en-US" sz="1800" dirty="0"/>
+          </a:p>
+        </p:txBody>
+      </p:sp>
+      <p:sp>
+        <p:nvSpPr>
+          <p:cNvPr id="5" name="Slide Number Placeholder 4">
+            <a:extLst>
+              <a:ext uri="{FF2B5EF4-FFF2-40B4-BE49-F238E27FC236}">
+                <a16:creationId xmlns:a16="http://schemas.microsoft.com/office/drawing/2014/main" id="{17496774-16C2-A1C1-9C78-3D357E8DB988}"/>
+              </a:ext>
+            </a:extLst>
+          </p:cNvPr>
+          <p:cNvSpPr>
+            <a:spLocks noGrp="1"/>
+          </p:cNvSpPr>
+          <p:nvPr>
+            <p:ph type="sldNum" sz="quarter" idx="12"/>
+          </p:nvPr>
+        </p:nvSpPr>
+        <p:spPr/>
+        <p:txBody>
+          <a:bodyPr/>
+          <a:lstStyle/>
+          <a:p>
+            <a:pPr marL="0" marR="0" lvl="0" indent="0" algn="r" defTabSz="914400" rtl="0" eaLnBrk="1" fontAlgn="auto" latinLnBrk="0" hangingPunct="1">
+              <a:lnSpc>
+                <a:spcPct val="100000"/>
+              </a:lnSpc>
+              <a:spcBef>
+                <a:spcPts val="0"/>
+              </a:spcBef>
+              <a:spcAft>
+                <a:spcPts val="0"/>
+              </a:spcAft>
+              <a:buClrTx/>
+              <a:buSzTx/>
+              <a:buFontTx/>
+              <a:buNone/>
+              <a:tabLst/>
+              <a:defRPr/>
+            </a:pPr>
+            <a:fld id="{EC35E9FC-F6D5-0349-BBED-EA7D7A9BC49B}" type="slidenum">
+              <a:rPr kumimoji="0" lang="en-US" sz="1200" b="0" i="0" u="none" strike="noStrike" kern="1200" cap="none" spc="0" normalizeH="0" baseline="0" noProof="0" smtClean="0">
+                <a:ln>
+                  <a:noFill/>
+                </a:ln>
+                <a:solidFill>
+                  <a:prstClr val="black">
+                    <a:tint val="75000"/>
+                  </a:prstClr>
+                </a:solidFill>
+                <a:effectLst/>
+                <a:uLnTx/>
+                <a:uFillTx/>
+                <a:latin typeface="Calibri"/>
+                <a:ea typeface="+mn-ea"/>
+                <a:cs typeface="+mn-cs"/>
+              </a:rPr>
+              <a:pPr marL="0" marR="0" lvl="0" indent="0" algn="r" defTabSz="914400" rtl="0" eaLnBrk="1" fontAlgn="auto" latinLnBrk="0" hangingPunct="1">
+                <a:lnSpc>
+                  <a:spcPct val="100000"/>
+                </a:lnSpc>
+                <a:spcBef>
+                  <a:spcPts val="0"/>
+                </a:spcBef>
+                <a:spcAft>
+                  <a:spcPts val="0"/>
+                </a:spcAft>
+                <a:buClrTx/>
+                <a:buSzTx/>
+                <a:buFontTx/>
+                <a:buNone/>
+                <a:tabLst/>
+                <a:defRPr/>
+              </a:pPr>
+              <a:t>11</a:t>
+            </a:fld>
+            <a:endParaRPr kumimoji="0" lang="en-US" sz="1200" b="0" i="0" u="none" strike="noStrike" kern="1200" cap="none" spc="0" normalizeH="0" baseline="0" noProof="0">
+              <a:ln>
+                <a:noFill/>
+              </a:ln>
+              <a:solidFill>
+                <a:prstClr val="black">
+                  <a:tint val="75000"/>
+                </a:prstClr>
+              </a:solidFill>
+              <a:effectLst/>
+              <a:uLnTx/>
+              <a:uFillTx/>
+              <a:latin typeface="Calibri"/>
+              <a:ea typeface="+mn-ea"/>
+              <a:cs typeface="+mn-cs"/>
+            </a:endParaRPr>
+          </a:p>
+        </p:txBody>
+      </p:sp>
+      <p:pic>
+        <p:nvPicPr>
+          <p:cNvPr id="6" name="Picture 5">
+            <a:extLst>
+              <a:ext uri="{FF2B5EF4-FFF2-40B4-BE49-F238E27FC236}">
+                <a16:creationId xmlns:a16="http://schemas.microsoft.com/office/drawing/2014/main" id="{237996D1-E163-3BAB-1271-B5D301D0F296}"/>
+              </a:ext>
+            </a:extLst>
+          </p:cNvPr>
+          <p:cNvPicPr>
+            <a:picLocks noChangeAspect="1"/>
+          </p:cNvPicPr>
+          <p:nvPr/>
+        </p:nvPicPr>
+        <p:blipFill>
+          <a:blip r:embed="rId2"/>
+          <a:stretch>
+            <a:fillRect/>
+          </a:stretch>
+        </p:blipFill>
+        <p:spPr>
+          <a:xfrm>
+            <a:off x="6900517" y="3036888"/>
+            <a:ext cx="3978965" cy="2917908"/>
+          </a:xfrm>
+          <a:prstGeom prst="rect">
+            <a:avLst/>
+          </a:prstGeom>
+        </p:spPr>
+      </p:pic>
+      <p:sp>
+        <p:nvSpPr>
+          <p:cNvPr id="8" name="TextBox 7">
+            <a:extLst>
+              <a:ext uri="{FF2B5EF4-FFF2-40B4-BE49-F238E27FC236}">
+                <a16:creationId xmlns:a16="http://schemas.microsoft.com/office/drawing/2014/main" id="{AC01F94F-EE6B-3484-AFC7-243D285E1758}"/>
+              </a:ext>
+            </a:extLst>
+          </p:cNvPr>
+          <p:cNvSpPr txBox="1"/>
+          <p:nvPr/>
+        </p:nvSpPr>
+        <p:spPr>
+          <a:xfrm>
+            <a:off x="6197600" y="5954796"/>
+            <a:ext cx="5588828" cy="261610"/>
+          </a:xfrm>
+          <a:prstGeom prst="rect">
+            <a:avLst/>
+          </a:prstGeom>
+          <a:noFill/>
+        </p:spPr>
+        <p:txBody>
+          <a:bodyPr wrap="square">
+            <a:spAutoFit/>
+          </a:bodyPr>
+          <a:lstStyle/>
+          <a:p>
+            <a:pPr marL="0" marR="0" lvl="0" indent="0" algn="ctr" defTabSz="914400" rtl="0" eaLnBrk="1" fontAlgn="auto" latinLnBrk="0" hangingPunct="1">
+              <a:lnSpc>
+                <a:spcPct val="100000"/>
+              </a:lnSpc>
+              <a:spcBef>
+                <a:spcPts val="0"/>
+              </a:spcBef>
+              <a:spcAft>
+                <a:spcPts val="0"/>
+              </a:spcAft>
+              <a:buClrTx/>
+              <a:buSzTx/>
+              <a:buFontTx/>
+              <a:buNone/>
+              <a:tabLst/>
+              <a:defRPr/>
+            </a:pPr>
+            <a:r>
+              <a:rPr kumimoji="0" lang="en-US" sz="1100" b="0" i="0" u="none" strike="noStrike" kern="1200" cap="none" spc="0" normalizeH="0" baseline="0" noProof="0" dirty="0">
+                <a:ln>
+                  <a:noFill/>
+                </a:ln>
+                <a:solidFill>
+                  <a:prstClr val="black"/>
+                </a:solidFill>
+                <a:effectLst/>
+                <a:uLnTx/>
+                <a:uFillTx/>
+                <a:latin typeface="Helvetica" pitchFamily="2" charset="0"/>
+                <a:ea typeface="+mn-ea"/>
+                <a:cs typeface="+mn-cs"/>
+              </a:rPr>
+              <a:t>The change in LHR resulting from the successive removal of three control rod blades</a:t>
+            </a:r>
+          </a:p>
+        </p:txBody>
+      </p:sp>
+    </p:spTree>
+    <p:extLst>
+      <p:ext uri="{BB962C8B-B14F-4D97-AF65-F5344CB8AC3E}">
+        <p14:creationId xmlns:p14="http://schemas.microsoft.com/office/powerpoint/2010/main" val="510275999"/>
+      </p:ext>
+    </p:extLst>
+  </p:cSld>
+  <p:clrMapOvr>
+    <a:masterClrMapping/>
+  </p:clrMapOvr>
+</p:sld>
+</file>
+
+<file path=ppt/slides/slide12.xml><?xml version="1.0" encoding="utf-8"?>
+<p:sld xmlns:a="http://schemas.openxmlformats.org/drawingml/2006/main" xmlns:r="http://schemas.openxmlformats.org/officeDocument/2006/relationships" xmlns:p="http://schemas.openxmlformats.org/presentationml/2006/main">
+  <p:cSld>
+    <p:spTree>
+      <p:nvGrpSpPr>
+        <p:cNvPr id="1" name=""/>
+        <p:cNvGrpSpPr/>
+        <p:nvPr/>
+      </p:nvGrpSpPr>
+      <p:grpSpPr>
+        <a:xfrm>
+          <a:off x="0" y="0"/>
+          <a:ext cx="0" cy="0"/>
+          <a:chOff x="0" y="0"/>
+          <a:chExt cx="0" cy="0"/>
+        </a:xfrm>
+      </p:grpSpPr>
+      <p:sp>
+        <p:nvSpPr>
+          <p:cNvPr id="2" name="Title 1">
+            <a:extLst>
+              <a:ext uri="{FF2B5EF4-FFF2-40B4-BE49-F238E27FC236}">
                 <a16:creationId xmlns:a16="http://schemas.microsoft.com/office/drawing/2014/main" id="{B16AAD79-5D47-294E-8347-12E7FA582E89}"/>
               </a:ext>
             </a:extLst>
@@ -3841,7 +4433,7 @@
           <a:p>
             <a:r>
               <a:rPr lang="en-US" sz="1900" dirty="0"/>
-              <a:t>There are two primary approaches to mitigate PCI failures: 1) changes in the design of various components – notably, the fuel pellet, fuel cladding and fuel assembly; 2) the manner in which the reactor is operated can be altered to minimize PCI failures</a:t>
+              <a:t>There are two primary approaches to mitigate PCI failures: 1) changes in the design of various components – notably, the fuel pellet, fuel cladding, and fuel assembly; 2) the manner in which the reactor is operated can be altered to minimize PCI failures</a:t>
             </a:r>
           </a:p>
           <a:p>
@@ -3933,7 +4525,7 @@
                 <a:tabLst/>
                 <a:defRPr/>
               </a:pPr>
-              <a:t>10</a:t>
+              <a:t>12</a:t>
             </a:fld>
             <a:endParaRPr kumimoji="0" lang="en-US" sz="1200" b="0" i="0" u="none" strike="noStrike" kern="1200" cap="none" spc="0" normalizeH="0" baseline="0" noProof="0">
               <a:ln>
@@ -4027,7 +4619,7 @@
 </p:sld>
 </file>
 
-<file path=ppt/slides/slide11.xml><?xml version="1.0" encoding="utf-8"?>
+<file path=ppt/slides/slide13.xml><?xml version="1.0" encoding="utf-8"?>
 <p:sld xmlns:a="http://schemas.openxmlformats.org/drawingml/2006/main" xmlns:r="http://schemas.openxmlformats.org/officeDocument/2006/relationships" xmlns:p="http://schemas.openxmlformats.org/presentationml/2006/main">
   <p:cSld>
     <p:spTree>
@@ -4113,7 +4705,7 @@
           <a:p>
             <a:r>
               <a:rPr lang="en-US" sz="2000" dirty="0"/>
-              <a:t>The three variables that are controlled from an operational point of view are the linear power, change in linear power, ramp rate and discharge burnup</a:t>
+              <a:t>Operational mitigation: The three variables that are controlled from an operational point of view are the linear power, change in linear power, ramp rate and discharge burnup</a:t>
             </a:r>
           </a:p>
           <a:p>
@@ -4193,7 +4785,7 @@
                 <a:tabLst/>
                 <a:defRPr/>
               </a:pPr>
-              <a:t>11</a:t>
+              <a:t>13</a:t>
             </a:fld>
             <a:endParaRPr kumimoji="0" lang="en-US" sz="1200" b="0" i="0" u="none" strike="noStrike" kern="1200" cap="none" spc="0" normalizeH="0" baseline="0" noProof="0">
               <a:ln>
@@ -4227,7 +4819,7 @@
 </p:sld>
 </file>
 
-<file path=ppt/slides/slide12.xml><?xml version="1.0" encoding="utf-8"?>
+<file path=ppt/slides/slide14.xml><?xml version="1.0" encoding="utf-8"?>
 <p:sld xmlns:a="http://schemas.openxmlformats.org/drawingml/2006/main" xmlns:r="http://schemas.openxmlformats.org/officeDocument/2006/relationships" xmlns:p="http://schemas.openxmlformats.org/presentationml/2006/main">
   <p:cSld>
     <p:spTree>
@@ -4267,7 +4859,7 @@
           <a:p>
             <a:r>
               <a:rPr lang="en-US" dirty="0"/>
-              <a:t>Summary</a:t>
+              <a:t>End of Module 3</a:t>
             </a:r>
           </a:p>
         </p:txBody>
@@ -4293,7 +4885,7 @@
           <a:bodyPr/>
           <a:lstStyle/>
           <a:p>
-            <a:endParaRPr lang="en-US"/>
+            <a:endParaRPr lang="en-US" dirty="0"/>
           </a:p>
         </p:txBody>
       </p:sp>
@@ -4326,7 +4918,7 @@
               <a:pPr>
                 <a:defRPr/>
               </a:pPr>
-              <a:t>12</a:t>
+              <a:t>14</a:t>
             </a:fld>
             <a:endParaRPr lang="en-US"/>
           </a:p>
@@ -4336,6 +4928,482 @@
     <p:extLst>
       <p:ext uri="{BB962C8B-B14F-4D97-AF65-F5344CB8AC3E}">
         <p14:creationId xmlns:p14="http://schemas.microsoft.com/office/powerpoint/2010/main" val="137848802"/>
+      </p:ext>
+    </p:extLst>
+  </p:cSld>
+  <p:clrMapOvr>
+    <a:masterClrMapping/>
+  </p:clrMapOvr>
+</p:sld>
+</file>
+
+<file path=ppt/slides/slide15.xml><?xml version="1.0" encoding="utf-8"?>
+<p:sld xmlns:a="http://schemas.openxmlformats.org/drawingml/2006/main" xmlns:r="http://schemas.openxmlformats.org/officeDocument/2006/relationships" xmlns:p="http://schemas.openxmlformats.org/presentationml/2006/main">
+  <p:cSld>
+    <p:spTree>
+      <p:nvGrpSpPr>
+        <p:cNvPr id="1" name=""/>
+        <p:cNvGrpSpPr/>
+        <p:nvPr/>
+      </p:nvGrpSpPr>
+      <p:grpSpPr>
+        <a:xfrm>
+          <a:off x="0" y="0"/>
+          <a:ext cx="0" cy="0"/>
+          <a:chOff x="0" y="0"/>
+          <a:chExt cx="0" cy="0"/>
+        </a:xfrm>
+      </p:grpSpPr>
+      <p:sp>
+        <p:nvSpPr>
+          <p:cNvPr id="2" name="Title 1">
+            <a:extLst>
+              <a:ext uri="{FF2B5EF4-FFF2-40B4-BE49-F238E27FC236}">
+                <a16:creationId xmlns:a16="http://schemas.microsoft.com/office/drawing/2014/main" id="{1AA5AA7F-1509-5B48-E49B-ED1D0F3BA5FE}"/>
+              </a:ext>
+            </a:extLst>
+          </p:cNvPr>
+          <p:cNvSpPr>
+            <a:spLocks noGrp="1"/>
+          </p:cNvSpPr>
+          <p:nvPr>
+            <p:ph type="title"/>
+          </p:nvPr>
+        </p:nvSpPr>
+        <p:spPr>
+          <a:xfrm>
+            <a:off x="609600" y="532366"/>
+            <a:ext cx="10972800" cy="1068387"/>
+          </a:xfrm>
+        </p:spPr>
+        <p:txBody>
+          <a:bodyPr/>
+          <a:lstStyle/>
+          <a:p>
+            <a:r>
+              <a:rPr lang="en-US" dirty="0"/>
+              <a:t>Module Review</a:t>
+            </a:r>
+          </a:p>
+        </p:txBody>
+      </p:sp>
+      <p:sp>
+        <p:nvSpPr>
+          <p:cNvPr id="3" name="Content Placeholder 2">
+            <a:extLst>
+              <a:ext uri="{FF2B5EF4-FFF2-40B4-BE49-F238E27FC236}">
+                <a16:creationId xmlns:a16="http://schemas.microsoft.com/office/drawing/2014/main" id="{525AFF98-0B55-CF4C-3C7A-D1196C5479C9}"/>
+              </a:ext>
+            </a:extLst>
+          </p:cNvPr>
+          <p:cNvSpPr>
+            <a:spLocks noGrp="1"/>
+          </p:cNvSpPr>
+          <p:nvPr>
+            <p:ph idx="1"/>
+          </p:nvPr>
+        </p:nvSpPr>
+        <p:spPr>
+          <a:xfrm>
+            <a:off x="609600" y="1600753"/>
+            <a:ext cx="10972800" cy="4525412"/>
+          </a:xfrm>
+        </p:spPr>
+        <p:txBody>
+          <a:bodyPr/>
+          <a:lstStyle/>
+          <a:p>
+            <a:r>
+              <a:rPr lang="en-US" dirty="0"/>
+              <a:t>Radiation damage effects in UO2</a:t>
+            </a:r>
+          </a:p>
+          <a:p>
+            <a:pPr lvl="1"/>
+            <a:r>
+              <a:rPr lang="en-US" dirty="0"/>
+              <a:t>thermal conductivity degradation, high burnup structure formation, etc. </a:t>
+            </a:r>
+          </a:p>
+          <a:p>
+            <a:r>
+              <a:rPr lang="en-US" dirty="0"/>
+              <a:t>Chemistry of the fuel</a:t>
+            </a:r>
+          </a:p>
+          <a:p>
+            <a:pPr lvl="1"/>
+            <a:r>
+              <a:rPr lang="en-US" dirty="0"/>
+              <a:t>charge state, O/M ratio, impact on properties, etc.</a:t>
+            </a:r>
+          </a:p>
+          <a:p>
+            <a:r>
+              <a:rPr lang="en-US" dirty="0"/>
+              <a:t>Fission products</a:t>
+            </a:r>
+          </a:p>
+          <a:p>
+            <a:pPr lvl="1"/>
+            <a:r>
+              <a:rPr lang="en-US" dirty="0"/>
+              <a:t>five groups, impact fuel properties, impacted by chemistry</a:t>
+            </a:r>
+          </a:p>
+          <a:p>
+            <a:r>
+              <a:rPr lang="en-US" dirty="0"/>
+              <a:t>Fission gas release</a:t>
+            </a:r>
+          </a:p>
+          <a:p>
+            <a:pPr lvl="1"/>
+            <a:r>
+              <a:rPr lang="en-US" dirty="0"/>
+              <a:t>three stages, Booth model, Forsberg-Massih, etc.</a:t>
+            </a:r>
+          </a:p>
+          <a:p>
+            <a:pPr lvl="1"/>
+            <a:endParaRPr lang="en-US" dirty="0"/>
+          </a:p>
+        </p:txBody>
+      </p:sp>
+      <p:sp>
+        <p:nvSpPr>
+          <p:cNvPr id="4" name="Slide Number Placeholder 3">
+            <a:extLst>
+              <a:ext uri="{FF2B5EF4-FFF2-40B4-BE49-F238E27FC236}">
+                <a16:creationId xmlns:a16="http://schemas.microsoft.com/office/drawing/2014/main" id="{1871A921-3174-0788-90B0-A753155634E6}"/>
+              </a:ext>
+            </a:extLst>
+          </p:cNvPr>
+          <p:cNvSpPr>
+            <a:spLocks noGrp="1"/>
+          </p:cNvSpPr>
+          <p:nvPr>
+            <p:ph type="sldNum" sz="quarter" idx="12"/>
+          </p:nvPr>
+        </p:nvSpPr>
+        <p:spPr/>
+        <p:txBody>
+          <a:bodyPr/>
+          <a:lstStyle/>
+          <a:p>
+            <a:pPr>
+              <a:defRPr/>
+            </a:pPr>
+            <a:fld id="{3FF2C605-4958-CF43-AA48-80339EFDB0AF}" type="slidenum">
+              <a:rPr lang="en-US" smtClean="0"/>
+              <a:pPr>
+                <a:defRPr/>
+              </a:pPr>
+              <a:t>15</a:t>
+            </a:fld>
+            <a:endParaRPr lang="en-US"/>
+          </a:p>
+        </p:txBody>
+      </p:sp>
+    </p:spTree>
+    <p:extLst>
+      <p:ext uri="{BB962C8B-B14F-4D97-AF65-F5344CB8AC3E}">
+        <p14:creationId xmlns:p14="http://schemas.microsoft.com/office/powerpoint/2010/main" val="4104262112"/>
+      </p:ext>
+    </p:extLst>
+  </p:cSld>
+  <p:clrMapOvr>
+    <a:masterClrMapping/>
+  </p:clrMapOvr>
+</p:sld>
+</file>
+
+<file path=ppt/slides/slide16.xml><?xml version="1.0" encoding="utf-8"?>
+<p:sld xmlns:a="http://schemas.openxmlformats.org/drawingml/2006/main" xmlns:r="http://schemas.openxmlformats.org/officeDocument/2006/relationships" xmlns:p="http://schemas.openxmlformats.org/presentationml/2006/main">
+  <p:cSld>
+    <p:spTree>
+      <p:nvGrpSpPr>
+        <p:cNvPr id="1" name="">
+          <a:extLst>
+            <a:ext uri="{FF2B5EF4-FFF2-40B4-BE49-F238E27FC236}">
+              <a16:creationId xmlns:a16="http://schemas.microsoft.com/office/drawing/2014/main" id="{408C70AF-3FEC-0222-EFB3-1BFD654889CD}"/>
+            </a:ext>
+          </a:extLst>
+        </p:cNvPr>
+        <p:cNvGrpSpPr/>
+        <p:nvPr/>
+      </p:nvGrpSpPr>
+      <p:grpSpPr>
+        <a:xfrm>
+          <a:off x="0" y="0"/>
+          <a:ext cx="0" cy="0"/>
+          <a:chOff x="0" y="0"/>
+          <a:chExt cx="0" cy="0"/>
+        </a:xfrm>
+      </p:grpSpPr>
+      <p:sp>
+        <p:nvSpPr>
+          <p:cNvPr id="2" name="Title 1">
+            <a:extLst>
+              <a:ext uri="{FF2B5EF4-FFF2-40B4-BE49-F238E27FC236}">
+                <a16:creationId xmlns:a16="http://schemas.microsoft.com/office/drawing/2014/main" id="{B8E90BC8-2029-7F80-1AEE-233C71E00AFC}"/>
+              </a:ext>
+            </a:extLst>
+          </p:cNvPr>
+          <p:cNvSpPr>
+            <a:spLocks noGrp="1"/>
+          </p:cNvSpPr>
+          <p:nvPr>
+            <p:ph type="title"/>
+          </p:nvPr>
+        </p:nvSpPr>
+        <p:spPr>
+          <a:xfrm>
+            <a:off x="609600" y="532366"/>
+            <a:ext cx="10972800" cy="1068387"/>
+          </a:xfrm>
+        </p:spPr>
+        <p:txBody>
+          <a:bodyPr/>
+          <a:lstStyle/>
+          <a:p>
+            <a:r>
+              <a:rPr lang="en-US" dirty="0"/>
+              <a:t>Module Review</a:t>
+            </a:r>
+          </a:p>
+        </p:txBody>
+      </p:sp>
+      <p:sp>
+        <p:nvSpPr>
+          <p:cNvPr id="3" name="Content Placeholder 2">
+            <a:extLst>
+              <a:ext uri="{FF2B5EF4-FFF2-40B4-BE49-F238E27FC236}">
+                <a16:creationId xmlns:a16="http://schemas.microsoft.com/office/drawing/2014/main" id="{46D0F5D7-E4FC-70F2-937E-305997B88312}"/>
+              </a:ext>
+            </a:extLst>
+          </p:cNvPr>
+          <p:cNvSpPr>
+            <a:spLocks noGrp="1"/>
+          </p:cNvSpPr>
+          <p:nvPr>
+            <p:ph idx="1"/>
+          </p:nvPr>
+        </p:nvSpPr>
+        <p:spPr>
+          <a:xfrm>
+            <a:off x="609600" y="1600753"/>
+            <a:ext cx="10972800" cy="4525412"/>
+          </a:xfrm>
+        </p:spPr>
+        <p:txBody>
+          <a:bodyPr/>
+          <a:lstStyle/>
+          <a:p>
+            <a:r>
+              <a:rPr lang="en-US" dirty="0"/>
+              <a:t>Fuel swelling and dimensional change</a:t>
+            </a:r>
+          </a:p>
+          <a:p>
+            <a:pPr lvl="1"/>
+            <a:r>
+              <a:rPr lang="en-US" dirty="0"/>
+              <a:t>thermal expansion, fission product swelling, creep, densification</a:t>
+            </a:r>
+          </a:p>
+          <a:p>
+            <a:r>
+              <a:rPr lang="en-US" dirty="0"/>
+              <a:t>Zirconium cladding</a:t>
+            </a:r>
+          </a:p>
+          <a:p>
+            <a:pPr lvl="1"/>
+            <a:r>
+              <a:rPr lang="en-US" dirty="0"/>
+              <a:t>processing, irradiation growth, creep, hydrides, hardening, etc.</a:t>
+            </a:r>
+          </a:p>
+          <a:p>
+            <a:r>
+              <a:rPr lang="en-US" dirty="0"/>
+              <a:t>Pellet/Cladding Interaction</a:t>
+            </a:r>
+          </a:p>
+          <a:p>
+            <a:pPr lvl="1"/>
+            <a:r>
+              <a:rPr lang="en-US" dirty="0"/>
+              <a:t>SCC</a:t>
+            </a:r>
+          </a:p>
+          <a:p>
+            <a:endParaRPr lang="en-US" dirty="0"/>
+          </a:p>
+          <a:p>
+            <a:pPr lvl="1"/>
+            <a:endParaRPr lang="en-US" dirty="0"/>
+          </a:p>
+        </p:txBody>
+      </p:sp>
+      <p:sp>
+        <p:nvSpPr>
+          <p:cNvPr id="4" name="Slide Number Placeholder 3">
+            <a:extLst>
+              <a:ext uri="{FF2B5EF4-FFF2-40B4-BE49-F238E27FC236}">
+                <a16:creationId xmlns:a16="http://schemas.microsoft.com/office/drawing/2014/main" id="{78FC6CEE-645D-0DFE-3239-2BC13F21FBAB}"/>
+              </a:ext>
+            </a:extLst>
+          </p:cNvPr>
+          <p:cNvSpPr>
+            <a:spLocks noGrp="1"/>
+          </p:cNvSpPr>
+          <p:nvPr>
+            <p:ph type="sldNum" sz="quarter" idx="12"/>
+          </p:nvPr>
+        </p:nvSpPr>
+        <p:spPr/>
+        <p:txBody>
+          <a:bodyPr/>
+          <a:lstStyle/>
+          <a:p>
+            <a:pPr>
+              <a:defRPr/>
+            </a:pPr>
+            <a:fld id="{3FF2C605-4958-CF43-AA48-80339EFDB0AF}" type="slidenum">
+              <a:rPr lang="en-US" smtClean="0"/>
+              <a:pPr>
+                <a:defRPr/>
+              </a:pPr>
+              <a:t>16</a:t>
+            </a:fld>
+            <a:endParaRPr lang="en-US"/>
+          </a:p>
+        </p:txBody>
+      </p:sp>
+    </p:spTree>
+    <p:extLst>
+      <p:ext uri="{BB962C8B-B14F-4D97-AF65-F5344CB8AC3E}">
+        <p14:creationId xmlns:p14="http://schemas.microsoft.com/office/powerpoint/2010/main" val="1210203466"/>
+      </p:ext>
+    </p:extLst>
+  </p:cSld>
+  <p:clrMapOvr>
+    <a:masterClrMapping/>
+  </p:clrMapOvr>
+</p:sld>
+</file>
+
+<file path=ppt/slides/slide17.xml><?xml version="1.0" encoding="utf-8"?>
+<p:sld xmlns:a="http://schemas.openxmlformats.org/drawingml/2006/main" xmlns:r="http://schemas.openxmlformats.org/officeDocument/2006/relationships" xmlns:p="http://schemas.openxmlformats.org/presentationml/2006/main">
+  <p:cSld>
+    <p:spTree>
+      <p:nvGrpSpPr>
+        <p:cNvPr id="1" name=""/>
+        <p:cNvGrpSpPr/>
+        <p:nvPr/>
+      </p:nvGrpSpPr>
+      <p:grpSpPr>
+        <a:xfrm>
+          <a:off x="0" y="0"/>
+          <a:ext cx="0" cy="0"/>
+          <a:chOff x="0" y="0"/>
+          <a:chExt cx="0" cy="0"/>
+        </a:xfrm>
+      </p:grpSpPr>
+      <p:sp>
+        <p:nvSpPr>
+          <p:cNvPr id="2" name="Title 1">
+            <a:extLst>
+              <a:ext uri="{FF2B5EF4-FFF2-40B4-BE49-F238E27FC236}">
+                <a16:creationId xmlns:a16="http://schemas.microsoft.com/office/drawing/2014/main" id="{75502784-E12D-843C-E794-523F2F503AF8}"/>
+              </a:ext>
+            </a:extLst>
+          </p:cNvPr>
+          <p:cNvSpPr>
+            <a:spLocks noGrp="1"/>
+          </p:cNvSpPr>
+          <p:nvPr>
+            <p:ph type="title"/>
+          </p:nvPr>
+        </p:nvSpPr>
+        <p:spPr/>
+        <p:txBody>
+          <a:bodyPr/>
+          <a:lstStyle/>
+          <a:p>
+            <a:r>
+              <a:rPr lang="en-US" dirty="0"/>
+              <a:t>Problem Session</a:t>
+            </a:r>
+          </a:p>
+        </p:txBody>
+      </p:sp>
+      <p:sp>
+        <p:nvSpPr>
+          <p:cNvPr id="3" name="Content Placeholder 2">
+            <a:extLst>
+              <a:ext uri="{FF2B5EF4-FFF2-40B4-BE49-F238E27FC236}">
+                <a16:creationId xmlns:a16="http://schemas.microsoft.com/office/drawing/2014/main" id="{76ED508B-08AC-41A9-6B12-9BE088C05FA4}"/>
+              </a:ext>
+            </a:extLst>
+          </p:cNvPr>
+          <p:cNvSpPr>
+            <a:spLocks noGrp="1"/>
+          </p:cNvSpPr>
+          <p:nvPr>
+            <p:ph idx="1"/>
+          </p:nvPr>
+        </p:nvSpPr>
+        <p:spPr/>
+        <p:txBody>
+          <a:bodyPr/>
+          <a:lstStyle/>
+          <a:p>
+            <a:endParaRPr lang="en-US"/>
+          </a:p>
+        </p:txBody>
+      </p:sp>
+      <p:sp>
+        <p:nvSpPr>
+          <p:cNvPr id="4" name="Slide Number Placeholder 3">
+            <a:extLst>
+              <a:ext uri="{FF2B5EF4-FFF2-40B4-BE49-F238E27FC236}">
+                <a16:creationId xmlns:a16="http://schemas.microsoft.com/office/drawing/2014/main" id="{C240E768-E852-CF2C-B95D-A17E75086D0C}"/>
+              </a:ext>
+            </a:extLst>
+          </p:cNvPr>
+          <p:cNvSpPr>
+            <a:spLocks noGrp="1"/>
+          </p:cNvSpPr>
+          <p:nvPr>
+            <p:ph type="sldNum" sz="quarter" idx="12"/>
+          </p:nvPr>
+        </p:nvSpPr>
+        <p:spPr/>
+        <p:txBody>
+          <a:bodyPr/>
+          <a:lstStyle/>
+          <a:p>
+            <a:pPr>
+              <a:defRPr/>
+            </a:pPr>
+            <a:fld id="{3FF2C605-4958-CF43-AA48-80339EFDB0AF}" type="slidenum">
+              <a:rPr lang="en-US" smtClean="0"/>
+              <a:pPr>
+                <a:defRPr/>
+              </a:pPr>
+              <a:t>17</a:t>
+            </a:fld>
+            <a:endParaRPr lang="en-US"/>
+          </a:p>
+        </p:txBody>
+      </p:sp>
+    </p:spTree>
+    <p:extLst>
+      <p:ext uri="{BB962C8B-B14F-4D97-AF65-F5344CB8AC3E}">
+        <p14:creationId xmlns:p14="http://schemas.microsoft.com/office/powerpoint/2010/main" val="1942034727"/>
       </p:ext>
     </p:extLst>
   </p:cSld>
@@ -4367,7 +5435,7 @@
           <p:cNvPr id="2" name="Title 1">
             <a:extLst>
               <a:ext uri="{FF2B5EF4-FFF2-40B4-BE49-F238E27FC236}">
-                <a16:creationId xmlns:a16="http://schemas.microsoft.com/office/drawing/2014/main" id="{91C669C3-7586-8D5D-5213-3EAA1F236DA8}"/>
+                <a16:creationId xmlns:a16="http://schemas.microsoft.com/office/drawing/2014/main" id="{0A1DA04E-02D3-D51F-FE02-FF50F346B4ED}"/>
               </a:ext>
             </a:extLst>
           </p:cNvPr>
@@ -4385,7 +5453,7 @@
           <a:p>
             <a:r>
               <a:rPr lang="en-US" dirty="0"/>
-              <a:t>Last Time</a:t>
+              <a:t>Housekeeping</a:t>
             </a:r>
           </a:p>
         </p:txBody>
@@ -4395,7 +5463,7 @@
           <p:cNvPr id="3" name="Content Placeholder 2">
             <a:extLst>
               <a:ext uri="{FF2B5EF4-FFF2-40B4-BE49-F238E27FC236}">
-                <a16:creationId xmlns:a16="http://schemas.microsoft.com/office/drawing/2014/main" id="{89B496EA-2615-5D83-73E6-1093C95A8AF1}"/>
+                <a16:creationId xmlns:a16="http://schemas.microsoft.com/office/drawing/2014/main" id="{83C070DE-222B-4F0C-07E5-06A34293D187}"/>
               </a:ext>
             </a:extLst>
           </p:cNvPr>
@@ -4406,17 +5474,51 @@
             <p:ph idx="1"/>
           </p:nvPr>
         </p:nvSpPr>
-        <p:spPr>
-          <a:xfrm>
-            <a:off x="609600" y="1868395"/>
-            <a:ext cx="10972800" cy="3965670"/>
-          </a:xfrm>
-        </p:spPr>
+        <p:spPr/>
         <p:txBody>
           <a:bodyPr/>
           <a:lstStyle/>
           <a:p>
-            <a:endParaRPr lang="en-US" sz="2000" dirty="0"/>
+            <a:r>
+              <a:rPr lang="en-US" dirty="0"/>
+              <a:t>Exam 2 graded</a:t>
+            </a:r>
+          </a:p>
+          <a:p>
+            <a:pPr lvl="1"/>
+            <a:r>
+              <a:rPr lang="en-US" dirty="0"/>
+              <a:t>average: 85.5</a:t>
+            </a:r>
+          </a:p>
+          <a:p>
+            <a:pPr lvl="1"/>
+            <a:r>
+              <a:rPr lang="en-US" dirty="0" err="1"/>
+              <a:t>stdev</a:t>
+            </a:r>
+            <a:r>
+              <a:rPr lang="en-US" dirty="0"/>
+              <a:t>: 18</a:t>
+            </a:r>
+          </a:p>
+          <a:p>
+            <a:r>
+              <a:rPr lang="en-US" dirty="0"/>
+              <a:t>5-point curve</a:t>
+            </a:r>
+          </a:p>
+          <a:p>
+            <a:endParaRPr lang="en-US" dirty="0"/>
+          </a:p>
+          <a:p>
+            <a:r>
+              <a:rPr lang="en-US" dirty="0"/>
+              <a:t>MOOSE feedback will be out by the end of the week</a:t>
+            </a:r>
+          </a:p>
+          <a:p>
+            <a:endParaRPr lang="en-US" dirty="0"/>
           </a:p>
         </p:txBody>
       </p:sp>
@@ -4425,7 +5527,7 @@
           <p:cNvPr id="4" name="Slide Number Placeholder 3">
             <a:extLst>
               <a:ext uri="{FF2B5EF4-FFF2-40B4-BE49-F238E27FC236}">
-                <a16:creationId xmlns:a16="http://schemas.microsoft.com/office/drawing/2014/main" id="{3B8FB79D-3C0F-B3AC-A960-0918542F0779}"/>
+                <a16:creationId xmlns:a16="http://schemas.microsoft.com/office/drawing/2014/main" id="{A523958B-E43F-F352-CE89-335692605B0D}"/>
               </a:ext>
             </a:extLst>
           </p:cNvPr>
@@ -4458,7 +5560,7 @@
     </p:spTree>
     <p:extLst>
       <p:ext uri="{BB962C8B-B14F-4D97-AF65-F5344CB8AC3E}">
-        <p14:creationId xmlns:p14="http://schemas.microsoft.com/office/powerpoint/2010/main" val="96840934"/>
+        <p14:creationId xmlns:p14="http://schemas.microsoft.com/office/powerpoint/2010/main" val="1381515701"/>
       </p:ext>
     </p:extLst>
   </p:cSld>
@@ -4490,6 +5592,1906 @@
           <p:cNvPr id="2" name="Title 1">
             <a:extLst>
               <a:ext uri="{FF2B5EF4-FFF2-40B4-BE49-F238E27FC236}">
+                <a16:creationId xmlns:a16="http://schemas.microsoft.com/office/drawing/2014/main" id="{E6A26517-7A8C-6D44-8A80-103F9AD20C90}"/>
+              </a:ext>
+            </a:extLst>
+          </p:cNvPr>
+          <p:cNvSpPr>
+            <a:spLocks noGrp="1"/>
+          </p:cNvSpPr>
+          <p:nvPr>
+            <p:ph type="title"/>
+          </p:nvPr>
+        </p:nvSpPr>
+        <p:spPr/>
+        <p:txBody>
+          <a:bodyPr/>
+          <a:lstStyle/>
+          <a:p>
+            <a:pPr algn="l"/>
+            <a:r>
+              <a:rPr lang="en-US" dirty="0"/>
+              <a:t>MOOSE Project Part 2</a:t>
+            </a:r>
+          </a:p>
+        </p:txBody>
+      </p:sp>
+      <p:sp>
+        <p:nvSpPr>
+          <p:cNvPr id="4" name="Slide Number Placeholder 3">
+            <a:extLst>
+              <a:ext uri="{FF2B5EF4-FFF2-40B4-BE49-F238E27FC236}">
+                <a16:creationId xmlns:a16="http://schemas.microsoft.com/office/drawing/2014/main" id="{8AF4B4B8-A41F-4142-861A-4CEFCF7BBA69}"/>
+              </a:ext>
+            </a:extLst>
+          </p:cNvPr>
+          <p:cNvSpPr>
+            <a:spLocks noGrp="1"/>
+          </p:cNvSpPr>
+          <p:nvPr>
+            <p:ph type="sldNum" sz="quarter" idx="12"/>
+          </p:nvPr>
+        </p:nvSpPr>
+        <p:spPr/>
+        <p:txBody>
+          <a:bodyPr/>
+          <a:lstStyle/>
+          <a:p>
+            <a:pPr marL="0" marR="0" lvl="0" indent="0" algn="r" defTabSz="914400" rtl="0" eaLnBrk="1" fontAlgn="auto" latinLnBrk="0" hangingPunct="1">
+              <a:lnSpc>
+                <a:spcPct val="100000"/>
+              </a:lnSpc>
+              <a:spcBef>
+                <a:spcPts val="0"/>
+              </a:spcBef>
+              <a:spcAft>
+                <a:spcPts val="0"/>
+              </a:spcAft>
+              <a:buClrTx/>
+              <a:buSzTx/>
+              <a:buFontTx/>
+              <a:buNone/>
+              <a:tabLst/>
+              <a:defRPr/>
+            </a:pPr>
+            <a:fld id="{3FF2C605-4958-CF43-AA48-80339EFDB0AF}" type="slidenum">
+              <a:rPr kumimoji="0" lang="en-US" sz="1200" b="0" i="0" u="none" strike="noStrike" kern="1200" cap="none" spc="0" normalizeH="0" baseline="0" noProof="0" smtClean="0">
+                <a:ln>
+                  <a:noFill/>
+                </a:ln>
+                <a:solidFill>
+                  <a:prstClr val="black">
+                    <a:tint val="75000"/>
+                  </a:prstClr>
+                </a:solidFill>
+                <a:effectLst/>
+                <a:uLnTx/>
+                <a:uFillTx/>
+                <a:latin typeface="Calibri"/>
+                <a:ea typeface="+mn-ea"/>
+                <a:cs typeface="+mn-cs"/>
+              </a:rPr>
+              <a:pPr marL="0" marR="0" lvl="0" indent="0" algn="r" defTabSz="914400" rtl="0" eaLnBrk="1" fontAlgn="auto" latinLnBrk="0" hangingPunct="1">
+                <a:lnSpc>
+                  <a:spcPct val="100000"/>
+                </a:lnSpc>
+                <a:spcBef>
+                  <a:spcPts val="0"/>
+                </a:spcBef>
+                <a:spcAft>
+                  <a:spcPts val="0"/>
+                </a:spcAft>
+                <a:buClrTx/>
+                <a:buSzTx/>
+                <a:buFontTx/>
+                <a:buNone/>
+                <a:tabLst/>
+                <a:defRPr/>
+              </a:pPr>
+              <a:t>3</a:t>
+            </a:fld>
+            <a:endParaRPr kumimoji="0" lang="en-US" sz="1200" b="0" i="0" u="none" strike="noStrike" kern="1200" cap="none" spc="0" normalizeH="0" baseline="0" noProof="0">
+              <a:ln>
+                <a:noFill/>
+              </a:ln>
+              <a:solidFill>
+                <a:prstClr val="black">
+                  <a:tint val="75000"/>
+                </a:prstClr>
+              </a:solidFill>
+              <a:effectLst/>
+              <a:uLnTx/>
+              <a:uFillTx/>
+              <a:latin typeface="Calibri"/>
+              <a:ea typeface="+mn-ea"/>
+              <a:cs typeface="+mn-cs"/>
+            </a:endParaRPr>
+          </a:p>
+        </p:txBody>
+      </p:sp>
+      <p:grpSp>
+        <p:nvGrpSpPr>
+          <p:cNvPr id="3" name="Group 2">
+            <a:extLst>
+              <a:ext uri="{FF2B5EF4-FFF2-40B4-BE49-F238E27FC236}">
+                <a16:creationId xmlns:a16="http://schemas.microsoft.com/office/drawing/2014/main" id="{DD68B926-310D-134B-9DB8-1679F014C89C}"/>
+              </a:ext>
+            </a:extLst>
+          </p:cNvPr>
+          <p:cNvGrpSpPr/>
+          <p:nvPr/>
+        </p:nvGrpSpPr>
+        <p:grpSpPr>
+          <a:xfrm>
+            <a:off x="9117106" y="900114"/>
+            <a:ext cx="2008094" cy="5729286"/>
+            <a:chOff x="6651811" y="2122956"/>
+            <a:chExt cx="4473388" cy="4078940"/>
+          </a:xfrm>
+        </p:grpSpPr>
+        <p:sp>
+          <p:nvSpPr>
+            <p:cNvPr id="5" name="Rectangle 4">
+              <a:extLst>
+                <a:ext uri="{FF2B5EF4-FFF2-40B4-BE49-F238E27FC236}">
+                  <a16:creationId xmlns:a16="http://schemas.microsoft.com/office/drawing/2014/main" id="{6A14A53C-B601-344D-BB6C-C144C19C902A}"/>
+                </a:ext>
+              </a:extLst>
+            </p:cNvPr>
+            <p:cNvSpPr/>
+            <p:nvPr/>
+          </p:nvSpPr>
+          <p:spPr>
+            <a:xfrm>
+              <a:off x="6651811" y="2122956"/>
+              <a:ext cx="2877672" cy="4078940"/>
+            </a:xfrm>
+            <a:prstGeom prst="rect">
+              <a:avLst/>
+            </a:prstGeom>
+            <a:solidFill>
+              <a:schemeClr val="accent1"/>
+            </a:solidFill>
+          </p:spPr>
+          <p:style>
+            <a:lnRef idx="1">
+              <a:schemeClr val="accent1"/>
+            </a:lnRef>
+            <a:fillRef idx="3">
+              <a:schemeClr val="accent1"/>
+            </a:fillRef>
+            <a:effectRef idx="2">
+              <a:schemeClr val="accent1"/>
+            </a:effectRef>
+            <a:fontRef idx="minor">
+              <a:schemeClr val="lt1"/>
+            </a:fontRef>
+          </p:style>
+          <p:txBody>
+            <a:bodyPr rtlCol="0" anchor="ctr"/>
+            <a:lstStyle/>
+            <a:p>
+              <a:pPr marL="0" marR="0" lvl="0" indent="0" algn="ctr" defTabSz="914400" rtl="0" eaLnBrk="1" fontAlgn="auto" latinLnBrk="0" hangingPunct="1">
+                <a:lnSpc>
+                  <a:spcPct val="100000"/>
+                </a:lnSpc>
+                <a:spcBef>
+                  <a:spcPts val="0"/>
+                </a:spcBef>
+                <a:spcAft>
+                  <a:spcPts val="0"/>
+                </a:spcAft>
+                <a:buClrTx/>
+                <a:buSzTx/>
+                <a:buFontTx/>
+                <a:buNone/>
+                <a:tabLst/>
+                <a:defRPr/>
+              </a:pPr>
+              <a:endParaRPr kumimoji="0" lang="en-US" sz="1800" b="0" i="0" u="none" strike="noStrike" kern="1200" cap="none" spc="0" normalizeH="0" baseline="0" noProof="0">
+                <a:ln>
+                  <a:noFill/>
+                </a:ln>
+                <a:solidFill>
+                  <a:prstClr val="white"/>
+                </a:solidFill>
+                <a:effectLst/>
+                <a:uLnTx/>
+                <a:uFillTx/>
+                <a:latin typeface="Calibri"/>
+                <a:ea typeface="+mn-ea"/>
+                <a:cs typeface="+mn-cs"/>
+              </a:endParaRPr>
+            </a:p>
+          </p:txBody>
+        </p:sp>
+        <p:sp>
+          <p:nvSpPr>
+            <p:cNvPr id="6" name="Rectangle 5">
+              <a:extLst>
+                <a:ext uri="{FF2B5EF4-FFF2-40B4-BE49-F238E27FC236}">
+                  <a16:creationId xmlns:a16="http://schemas.microsoft.com/office/drawing/2014/main" id="{B24263C4-2011-2F4C-9640-AC5B4D2FFF98}"/>
+                </a:ext>
+              </a:extLst>
+            </p:cNvPr>
+            <p:cNvSpPr/>
+            <p:nvPr/>
+          </p:nvSpPr>
+          <p:spPr>
+            <a:xfrm>
+              <a:off x="9529483" y="2122956"/>
+              <a:ext cx="797858" cy="4078940"/>
+            </a:xfrm>
+            <a:prstGeom prst="rect">
+              <a:avLst/>
+            </a:prstGeom>
+            <a:solidFill>
+              <a:srgbClr val="FFC000"/>
+            </a:solidFill>
+          </p:spPr>
+          <p:style>
+            <a:lnRef idx="1">
+              <a:schemeClr val="accent1"/>
+            </a:lnRef>
+            <a:fillRef idx="3">
+              <a:schemeClr val="accent1"/>
+            </a:fillRef>
+            <a:effectRef idx="2">
+              <a:schemeClr val="accent1"/>
+            </a:effectRef>
+            <a:fontRef idx="minor">
+              <a:schemeClr val="lt1"/>
+            </a:fontRef>
+          </p:style>
+          <p:txBody>
+            <a:bodyPr rtlCol="0" anchor="ctr"/>
+            <a:lstStyle/>
+            <a:p>
+              <a:pPr marL="0" marR="0" lvl="0" indent="0" algn="ctr" defTabSz="914400" rtl="0" eaLnBrk="1" fontAlgn="auto" latinLnBrk="0" hangingPunct="1">
+                <a:lnSpc>
+                  <a:spcPct val="100000"/>
+                </a:lnSpc>
+                <a:spcBef>
+                  <a:spcPts val="0"/>
+                </a:spcBef>
+                <a:spcAft>
+                  <a:spcPts val="0"/>
+                </a:spcAft>
+                <a:buClrTx/>
+                <a:buSzTx/>
+                <a:buFontTx/>
+                <a:buNone/>
+                <a:tabLst/>
+                <a:defRPr/>
+              </a:pPr>
+              <a:endParaRPr kumimoji="0" lang="en-US" sz="1800" b="0" i="0" u="none" strike="noStrike" kern="1200" cap="none" spc="0" normalizeH="0" baseline="0" noProof="0">
+                <a:ln>
+                  <a:noFill/>
+                </a:ln>
+                <a:solidFill>
+                  <a:prstClr val="white"/>
+                </a:solidFill>
+                <a:effectLst/>
+                <a:uLnTx/>
+                <a:uFillTx/>
+                <a:latin typeface="Calibri"/>
+                <a:ea typeface="+mn-ea"/>
+                <a:cs typeface="+mn-cs"/>
+              </a:endParaRPr>
+            </a:p>
+          </p:txBody>
+        </p:sp>
+        <p:sp>
+          <p:nvSpPr>
+            <p:cNvPr id="7" name="Rectangle 6">
+              <a:extLst>
+                <a:ext uri="{FF2B5EF4-FFF2-40B4-BE49-F238E27FC236}">
+                  <a16:creationId xmlns:a16="http://schemas.microsoft.com/office/drawing/2014/main" id="{6E1977BC-41AE-5748-982F-B0B0A7CF4573}"/>
+                </a:ext>
+              </a:extLst>
+            </p:cNvPr>
+            <p:cNvSpPr/>
+            <p:nvPr/>
+          </p:nvSpPr>
+          <p:spPr>
+            <a:xfrm>
+              <a:off x="10327341" y="2122956"/>
+              <a:ext cx="797858" cy="4078940"/>
+            </a:xfrm>
+            <a:prstGeom prst="rect">
+              <a:avLst/>
+            </a:prstGeom>
+            <a:solidFill>
+              <a:srgbClr val="92D050"/>
+            </a:solidFill>
+          </p:spPr>
+          <p:style>
+            <a:lnRef idx="1">
+              <a:schemeClr val="accent1"/>
+            </a:lnRef>
+            <a:fillRef idx="3">
+              <a:schemeClr val="accent1"/>
+            </a:fillRef>
+            <a:effectRef idx="2">
+              <a:schemeClr val="accent1"/>
+            </a:effectRef>
+            <a:fontRef idx="minor">
+              <a:schemeClr val="lt1"/>
+            </a:fontRef>
+          </p:style>
+          <p:txBody>
+            <a:bodyPr rtlCol="0" anchor="ctr"/>
+            <a:lstStyle/>
+            <a:p>
+              <a:pPr marL="0" marR="0" lvl="0" indent="0" algn="ctr" defTabSz="914400" rtl="0" eaLnBrk="1" fontAlgn="auto" latinLnBrk="0" hangingPunct="1">
+                <a:lnSpc>
+                  <a:spcPct val="100000"/>
+                </a:lnSpc>
+                <a:spcBef>
+                  <a:spcPts val="0"/>
+                </a:spcBef>
+                <a:spcAft>
+                  <a:spcPts val="0"/>
+                </a:spcAft>
+                <a:buClrTx/>
+                <a:buSzTx/>
+                <a:buFontTx/>
+                <a:buNone/>
+                <a:tabLst/>
+                <a:defRPr/>
+              </a:pPr>
+              <a:endParaRPr kumimoji="0" lang="en-US" sz="1800" b="0" i="0" u="none" strike="noStrike" kern="1200" cap="none" spc="0" normalizeH="0" baseline="0" noProof="0">
+                <a:ln>
+                  <a:noFill/>
+                </a:ln>
+                <a:solidFill>
+                  <a:prstClr val="white"/>
+                </a:solidFill>
+                <a:effectLst/>
+                <a:uLnTx/>
+                <a:uFillTx/>
+                <a:latin typeface="Calibri"/>
+                <a:ea typeface="+mn-ea"/>
+                <a:cs typeface="+mn-cs"/>
+              </a:endParaRPr>
+            </a:p>
+          </p:txBody>
+        </p:sp>
+      </p:grpSp>
+      <p:cxnSp>
+        <p:nvCxnSpPr>
+          <p:cNvPr id="9" name="Straight Arrow Connector 8">
+            <a:extLst>
+              <a:ext uri="{FF2B5EF4-FFF2-40B4-BE49-F238E27FC236}">
+                <a16:creationId xmlns:a16="http://schemas.microsoft.com/office/drawing/2014/main" id="{B4CE7341-0281-C44A-9030-313AEB440CB7}"/>
+              </a:ext>
+            </a:extLst>
+          </p:cNvPr>
+          <p:cNvCxnSpPr>
+            <a:cxnSpLocks/>
+          </p:cNvCxnSpPr>
+          <p:nvPr/>
+        </p:nvCxnSpPr>
+        <p:spPr>
+          <a:xfrm>
+            <a:off x="9085730" y="775550"/>
+            <a:ext cx="1323157" cy="0"/>
+          </a:xfrm>
+          <a:prstGeom prst="straightConnector1">
+            <a:avLst/>
+          </a:prstGeom>
+          <a:ln>
+            <a:headEnd type="triangle"/>
+            <a:tailEnd type="triangle"/>
+          </a:ln>
+        </p:spPr>
+        <p:style>
+          <a:lnRef idx="2">
+            <a:schemeClr val="accent1"/>
+          </a:lnRef>
+          <a:fillRef idx="0">
+            <a:schemeClr val="accent1"/>
+          </a:fillRef>
+          <a:effectRef idx="1">
+            <a:schemeClr val="accent1"/>
+          </a:effectRef>
+          <a:fontRef idx="minor">
+            <a:schemeClr val="tx1"/>
+          </a:fontRef>
+        </p:style>
+      </p:cxnSp>
+      <p:cxnSp>
+        <p:nvCxnSpPr>
+          <p:cNvPr id="11" name="Straight Arrow Connector 10">
+            <a:extLst>
+              <a:ext uri="{FF2B5EF4-FFF2-40B4-BE49-F238E27FC236}">
+                <a16:creationId xmlns:a16="http://schemas.microsoft.com/office/drawing/2014/main" id="{591A5C7E-91BA-4440-B271-E3AF08120135}"/>
+              </a:ext>
+            </a:extLst>
+          </p:cNvPr>
+          <p:cNvCxnSpPr>
+            <a:cxnSpLocks/>
+          </p:cNvCxnSpPr>
+          <p:nvPr/>
+        </p:nvCxnSpPr>
+        <p:spPr>
+          <a:xfrm>
+            <a:off x="10408887" y="787825"/>
+            <a:ext cx="346980" cy="0"/>
+          </a:xfrm>
+          <a:prstGeom prst="straightConnector1">
+            <a:avLst/>
+          </a:prstGeom>
+          <a:ln>
+            <a:headEnd type="triangle"/>
+            <a:tailEnd type="triangle"/>
+          </a:ln>
+        </p:spPr>
+        <p:style>
+          <a:lnRef idx="2">
+            <a:schemeClr val="accent1"/>
+          </a:lnRef>
+          <a:fillRef idx="0">
+            <a:schemeClr val="accent1"/>
+          </a:fillRef>
+          <a:effectRef idx="1">
+            <a:schemeClr val="accent1"/>
+          </a:effectRef>
+          <a:fontRef idx="minor">
+            <a:schemeClr val="tx1"/>
+          </a:fontRef>
+        </p:style>
+      </p:cxnSp>
+      <p:cxnSp>
+        <p:nvCxnSpPr>
+          <p:cNvPr id="13" name="Straight Arrow Connector 12">
+            <a:extLst>
+              <a:ext uri="{FF2B5EF4-FFF2-40B4-BE49-F238E27FC236}">
+                <a16:creationId xmlns:a16="http://schemas.microsoft.com/office/drawing/2014/main" id="{E7AD19DE-FBC8-8A45-B373-70FA74B6224B}"/>
+              </a:ext>
+            </a:extLst>
+          </p:cNvPr>
+          <p:cNvCxnSpPr>
+            <a:cxnSpLocks/>
+          </p:cNvCxnSpPr>
+          <p:nvPr/>
+        </p:nvCxnSpPr>
+        <p:spPr>
+          <a:xfrm>
+            <a:off x="10784542" y="787825"/>
+            <a:ext cx="355031" cy="0"/>
+          </a:xfrm>
+          <a:prstGeom prst="straightConnector1">
+            <a:avLst/>
+          </a:prstGeom>
+          <a:ln>
+            <a:headEnd type="triangle"/>
+            <a:tailEnd type="triangle"/>
+          </a:ln>
+        </p:spPr>
+        <p:style>
+          <a:lnRef idx="2">
+            <a:schemeClr val="accent1"/>
+          </a:lnRef>
+          <a:fillRef idx="0">
+            <a:schemeClr val="accent1"/>
+          </a:fillRef>
+          <a:effectRef idx="1">
+            <a:schemeClr val="accent1"/>
+          </a:effectRef>
+          <a:fontRef idx="minor">
+            <a:schemeClr val="tx1"/>
+          </a:fontRef>
+        </p:style>
+      </p:cxnSp>
+      <p:cxnSp>
+        <p:nvCxnSpPr>
+          <p:cNvPr id="14" name="Straight Arrow Connector 13">
+            <a:extLst>
+              <a:ext uri="{FF2B5EF4-FFF2-40B4-BE49-F238E27FC236}">
+                <a16:creationId xmlns:a16="http://schemas.microsoft.com/office/drawing/2014/main" id="{B8F40A3F-E5AC-AA42-BFC3-19A6A409A2EB}"/>
+              </a:ext>
+            </a:extLst>
+          </p:cNvPr>
+          <p:cNvCxnSpPr>
+            <a:cxnSpLocks/>
+          </p:cNvCxnSpPr>
+          <p:nvPr/>
+        </p:nvCxnSpPr>
+        <p:spPr>
+          <a:xfrm flipV="1">
+            <a:off x="8951500" y="900114"/>
+            <a:ext cx="0" cy="5729286"/>
+          </a:xfrm>
+          <a:prstGeom prst="straightConnector1">
+            <a:avLst/>
+          </a:prstGeom>
+          <a:ln>
+            <a:headEnd type="triangle"/>
+            <a:tailEnd type="triangle"/>
+          </a:ln>
+        </p:spPr>
+        <p:style>
+          <a:lnRef idx="2">
+            <a:schemeClr val="accent1"/>
+          </a:lnRef>
+          <a:fillRef idx="0">
+            <a:schemeClr val="accent1"/>
+          </a:fillRef>
+          <a:effectRef idx="1">
+            <a:schemeClr val="accent1"/>
+          </a:effectRef>
+          <a:fontRef idx="minor">
+            <a:schemeClr val="tx1"/>
+          </a:fontRef>
+        </p:style>
+      </p:cxnSp>
+      <p:sp>
+        <p:nvSpPr>
+          <p:cNvPr id="16" name="TextBox 15">
+            <a:extLst>
+              <a:ext uri="{FF2B5EF4-FFF2-40B4-BE49-F238E27FC236}">
+                <a16:creationId xmlns:a16="http://schemas.microsoft.com/office/drawing/2014/main" id="{7FC4C34D-9F6B-3A44-A4E8-FDD2910214C5}"/>
+              </a:ext>
+            </a:extLst>
+          </p:cNvPr>
+          <p:cNvSpPr txBox="1"/>
+          <p:nvPr/>
+        </p:nvSpPr>
+        <p:spPr>
+          <a:xfrm>
+            <a:off x="667872" y="1968501"/>
+            <a:ext cx="7726433" cy="4247317"/>
+          </a:xfrm>
+          <a:prstGeom prst="rect">
+            <a:avLst/>
+          </a:prstGeom>
+          <a:noFill/>
+        </p:spPr>
+        <p:txBody>
+          <a:bodyPr wrap="square" rtlCol="0">
+            <a:spAutoFit/>
+          </a:bodyPr>
+          <a:lstStyle/>
+          <a:p>
+            <a:pPr marL="285750" marR="0" lvl="0" indent="-285750" algn="l" defTabSz="914400" rtl="0" eaLnBrk="1" fontAlgn="auto" latinLnBrk="0" hangingPunct="1">
+              <a:lnSpc>
+                <a:spcPct val="100000"/>
+              </a:lnSpc>
+              <a:spcBef>
+                <a:spcPts val="600"/>
+              </a:spcBef>
+              <a:spcAft>
+                <a:spcPts val="0"/>
+              </a:spcAft>
+              <a:buClrTx/>
+              <a:buSzTx/>
+              <a:buFont typeface="Arial" panose="020B0604020202020204" pitchFamily="34" charset="0"/>
+              <a:buChar char="•"/>
+              <a:tabLst/>
+              <a:defRPr/>
+            </a:pPr>
+            <a:r>
+              <a:rPr kumimoji="0" lang="en-US" sz="2400" b="0" i="0" u="none" strike="noStrike" kern="1200" cap="none" spc="0" normalizeH="0" baseline="0" noProof="0" dirty="0">
+                <a:ln>
+                  <a:noFill/>
+                </a:ln>
+                <a:solidFill>
+                  <a:prstClr val="black"/>
+                </a:solidFill>
+                <a:effectLst/>
+                <a:uLnTx/>
+                <a:uFillTx/>
+                <a:latin typeface="Arial" panose="020B0604020202020204" pitchFamily="34" charset="0"/>
+                <a:cs typeface="Arial" panose="020B0604020202020204" pitchFamily="34" charset="0"/>
+              </a:rPr>
+              <a:t>Fuel pin dimensions listed – 2D RZ</a:t>
+            </a:r>
+          </a:p>
+          <a:p>
+            <a:pPr marL="285750" marR="0" lvl="0" indent="-285750" algn="l" defTabSz="914400" rtl="0" eaLnBrk="1" fontAlgn="auto" latinLnBrk="0" hangingPunct="1">
+              <a:lnSpc>
+                <a:spcPct val="100000"/>
+              </a:lnSpc>
+              <a:spcBef>
+                <a:spcPts val="600"/>
+              </a:spcBef>
+              <a:spcAft>
+                <a:spcPts val="0"/>
+              </a:spcAft>
+              <a:buClrTx/>
+              <a:buSzTx/>
+              <a:buFont typeface="Arial" panose="020B0604020202020204" pitchFamily="34" charset="0"/>
+              <a:buChar char="•"/>
+              <a:tabLst/>
+              <a:defRPr/>
+            </a:pPr>
+            <a:r>
+              <a:rPr kumimoji="0" lang="en-US" sz="2400" b="0" i="0" u="none" strike="noStrike" kern="1200" cap="none" spc="0" normalizeH="0" baseline="0" noProof="0" dirty="0">
+                <a:ln>
+                  <a:noFill/>
+                </a:ln>
+                <a:solidFill>
+                  <a:prstClr val="black"/>
+                </a:solidFill>
+                <a:effectLst/>
+                <a:uLnTx/>
+                <a:uFillTx/>
+                <a:latin typeface="Arial" panose="020B0604020202020204" pitchFamily="34" charset="0"/>
+                <a:cs typeface="Arial" panose="020B0604020202020204" pitchFamily="34" charset="0"/>
+              </a:rPr>
+              <a:t>Assume reasonable values for thermal conductivities, T dependent</a:t>
+            </a:r>
+          </a:p>
+          <a:p>
+            <a:pPr marL="285750" marR="0" lvl="0" indent="-285750" algn="l" defTabSz="914400" rtl="0" eaLnBrk="1" fontAlgn="auto" latinLnBrk="0" hangingPunct="1">
+              <a:lnSpc>
+                <a:spcPct val="100000"/>
+              </a:lnSpc>
+              <a:spcBef>
+                <a:spcPts val="600"/>
+              </a:spcBef>
+              <a:spcAft>
+                <a:spcPts val="0"/>
+              </a:spcAft>
+              <a:buClrTx/>
+              <a:buSzTx/>
+              <a:buFont typeface="Arial" panose="020B0604020202020204" pitchFamily="34" charset="0"/>
+              <a:buChar char="•"/>
+              <a:tabLst/>
+              <a:defRPr/>
+            </a:pPr>
+            <a:r>
+              <a:rPr kumimoji="0" lang="en-US" sz="2400" b="0" i="0" u="none" strike="noStrike" kern="1200" cap="none" spc="0" normalizeH="0" baseline="0" noProof="0" dirty="0">
+                <a:ln>
+                  <a:noFill/>
+                </a:ln>
+                <a:solidFill>
+                  <a:prstClr val="black"/>
+                </a:solidFill>
+                <a:effectLst/>
+                <a:uLnTx/>
+                <a:uFillTx/>
+                <a:latin typeface="Arial" panose="020B0604020202020204" pitchFamily="34" charset="0"/>
+                <a:cs typeface="Arial" panose="020B0604020202020204" pitchFamily="34" charset="0"/>
+              </a:rPr>
+              <a:t>Utilize axial </a:t>
+            </a:r>
+            <a:r>
+              <a:rPr kumimoji="0" lang="en-US" sz="2400" b="0" i="0" u="none" strike="noStrike" kern="1200" cap="none" spc="0" normalizeH="0" baseline="0" noProof="0" dirty="0" err="1">
+                <a:ln>
+                  <a:noFill/>
+                </a:ln>
+                <a:solidFill>
+                  <a:prstClr val="black"/>
+                </a:solidFill>
+                <a:effectLst/>
+                <a:uLnTx/>
+                <a:uFillTx/>
+                <a:latin typeface="Arial" panose="020B0604020202020204" pitchFamily="34" charset="0"/>
+                <a:cs typeface="Arial" panose="020B0604020202020204" pitchFamily="34" charset="0"/>
+              </a:rPr>
+              <a:t>T</a:t>
+            </a:r>
+            <a:r>
+              <a:rPr kumimoji="0" lang="en-US" sz="2400" b="0" i="0" u="none" strike="noStrike" kern="1200" cap="none" spc="0" normalizeH="0" baseline="-25000" noProof="0" dirty="0" err="1">
+                <a:ln>
+                  <a:noFill/>
+                </a:ln>
+                <a:solidFill>
+                  <a:prstClr val="black"/>
+                </a:solidFill>
+                <a:effectLst/>
+                <a:uLnTx/>
+                <a:uFillTx/>
+                <a:latin typeface="Arial" panose="020B0604020202020204" pitchFamily="34" charset="0"/>
+                <a:cs typeface="Arial" panose="020B0604020202020204" pitchFamily="34" charset="0"/>
+              </a:rPr>
+              <a:t>cool</a:t>
+            </a:r>
+            <a:r>
+              <a:rPr kumimoji="0" lang="en-US" sz="2400" b="0" i="0" u="none" strike="noStrike" kern="1200" cap="none" spc="0" normalizeH="0" baseline="0" noProof="0" dirty="0">
+                <a:ln>
+                  <a:noFill/>
+                </a:ln>
+                <a:solidFill>
+                  <a:prstClr val="black"/>
+                </a:solidFill>
+                <a:effectLst/>
+                <a:uLnTx/>
+                <a:uFillTx/>
+                <a:latin typeface="Arial" panose="020B0604020202020204" pitchFamily="34" charset="0"/>
+                <a:cs typeface="Arial" panose="020B0604020202020204" pitchFamily="34" charset="0"/>
+              </a:rPr>
+              <a:t>, with </a:t>
+            </a:r>
+            <a:r>
+              <a:rPr kumimoji="0" lang="en-US" sz="2400" b="0" i="0" u="none" strike="noStrike" kern="1200" cap="none" spc="0" normalizeH="0" baseline="0" noProof="0" dirty="0" err="1">
+                <a:ln>
+                  <a:noFill/>
+                </a:ln>
+                <a:solidFill>
+                  <a:prstClr val="black"/>
+                </a:solidFill>
+                <a:effectLst/>
+                <a:uLnTx/>
+                <a:uFillTx/>
+                <a:latin typeface="Arial" panose="020B0604020202020204" pitchFamily="34" charset="0"/>
+                <a:cs typeface="Arial" panose="020B0604020202020204" pitchFamily="34" charset="0"/>
+              </a:rPr>
+              <a:t>T</a:t>
+            </a:r>
+            <a:r>
+              <a:rPr kumimoji="0" lang="en-US" sz="2400" b="0" i="0" u="none" strike="noStrike" kern="1200" cap="none" spc="0" normalizeH="0" baseline="-25000" noProof="0" dirty="0" err="1">
+                <a:ln>
+                  <a:noFill/>
+                </a:ln>
+                <a:solidFill>
+                  <a:prstClr val="black"/>
+                </a:solidFill>
+                <a:effectLst/>
+                <a:uLnTx/>
+                <a:uFillTx/>
+                <a:latin typeface="Arial" panose="020B0604020202020204" pitchFamily="34" charset="0"/>
+                <a:cs typeface="Arial" panose="020B0604020202020204" pitchFamily="34" charset="0"/>
+              </a:rPr>
+              <a:t>cool</a:t>
+            </a:r>
+            <a:r>
+              <a:rPr kumimoji="0" lang="en-US" sz="2400" b="0" i="0" u="none" strike="noStrike" kern="1200" cap="none" spc="0" normalizeH="0" baseline="30000" noProof="0" dirty="0" err="1">
+                <a:ln>
+                  <a:noFill/>
+                </a:ln>
+                <a:solidFill>
+                  <a:prstClr val="black"/>
+                </a:solidFill>
+                <a:effectLst/>
+                <a:uLnTx/>
+                <a:uFillTx/>
+                <a:latin typeface="Arial" panose="020B0604020202020204" pitchFamily="34" charset="0"/>
+                <a:cs typeface="Arial" panose="020B0604020202020204" pitchFamily="34" charset="0"/>
+              </a:rPr>
+              <a:t>in</a:t>
+            </a:r>
+            <a:r>
+              <a:rPr kumimoji="0" lang="en-US" sz="2400" b="0" i="0" u="none" strike="noStrike" kern="1200" cap="none" spc="0" normalizeH="0" baseline="0" noProof="0" dirty="0">
+                <a:ln>
+                  <a:noFill/>
+                </a:ln>
+                <a:solidFill>
+                  <a:prstClr val="black"/>
+                </a:solidFill>
+                <a:effectLst/>
+                <a:uLnTx/>
+                <a:uFillTx/>
+                <a:latin typeface="Arial" panose="020B0604020202020204" pitchFamily="34" charset="0"/>
+                <a:cs typeface="Arial" panose="020B0604020202020204" pitchFamily="34" charset="0"/>
+              </a:rPr>
+              <a:t>= 500 K, reasonable flow rate, heat capacity, etc.</a:t>
+            </a:r>
+          </a:p>
+          <a:p>
+            <a:pPr marL="285750" marR="0" lvl="0" indent="-285750" algn="l" defTabSz="914400" rtl="0" eaLnBrk="1" fontAlgn="auto" latinLnBrk="0" hangingPunct="1">
+              <a:lnSpc>
+                <a:spcPct val="100000"/>
+              </a:lnSpc>
+              <a:spcBef>
+                <a:spcPts val="600"/>
+              </a:spcBef>
+              <a:spcAft>
+                <a:spcPts val="0"/>
+              </a:spcAft>
+              <a:buClrTx/>
+              <a:buSzTx/>
+              <a:buFont typeface="Arial" panose="020B0604020202020204" pitchFamily="34" charset="0"/>
+              <a:buChar char="•"/>
+              <a:tabLst/>
+              <a:defRPr/>
+            </a:pPr>
+            <a:r>
+              <a:rPr kumimoji="0" lang="en-US" sz="2400" b="0" i="0" u="none" strike="noStrike" kern="1200" cap="none" spc="0" normalizeH="0" baseline="0" noProof="0" dirty="0">
+                <a:ln>
+                  <a:noFill/>
+                </a:ln>
+                <a:solidFill>
+                  <a:prstClr val="black"/>
+                </a:solidFill>
+                <a:effectLst/>
+                <a:uLnTx/>
+                <a:uFillTx/>
+                <a:latin typeface="Arial" panose="020B0604020202020204" pitchFamily="34" charset="0"/>
+                <a:cs typeface="Arial" panose="020B0604020202020204" pitchFamily="34" charset="0"/>
+              </a:rPr>
+              <a:t>Utilize axial LHR, with LHR</a:t>
+            </a:r>
+            <a:r>
+              <a:rPr kumimoji="0" lang="en-US" sz="2400" b="0" i="0" u="none" strike="noStrike" kern="1200" cap="none" spc="0" normalizeH="0" baseline="30000" noProof="0" dirty="0">
+                <a:ln>
+                  <a:noFill/>
+                </a:ln>
+                <a:solidFill>
+                  <a:prstClr val="black"/>
+                </a:solidFill>
+                <a:effectLst/>
+                <a:uLnTx/>
+                <a:uFillTx/>
+                <a:latin typeface="Arial" panose="020B0604020202020204" pitchFamily="34" charset="0"/>
+                <a:cs typeface="Arial" panose="020B0604020202020204" pitchFamily="34" charset="0"/>
+              </a:rPr>
+              <a:t>0</a:t>
+            </a:r>
+            <a:r>
+              <a:rPr kumimoji="0" lang="en-US" sz="2400" b="0" i="0" u="none" strike="noStrike" kern="1200" cap="none" spc="0" normalizeH="0" baseline="0" noProof="0" dirty="0">
+                <a:ln>
+                  <a:noFill/>
+                </a:ln>
+                <a:solidFill>
+                  <a:prstClr val="black"/>
+                </a:solidFill>
+                <a:effectLst/>
+                <a:uLnTx/>
+                <a:uFillTx/>
+                <a:latin typeface="Arial" panose="020B0604020202020204" pitchFamily="34" charset="0"/>
+                <a:cs typeface="Arial" panose="020B0604020202020204" pitchFamily="34" charset="0"/>
+              </a:rPr>
+              <a:t>=350 W/cm</a:t>
+            </a:r>
+          </a:p>
+          <a:p>
+            <a:pPr marL="285750" marR="0" lvl="0" indent="-285750" algn="l" defTabSz="914400" rtl="0" eaLnBrk="1" fontAlgn="auto" latinLnBrk="0" hangingPunct="1">
+              <a:lnSpc>
+                <a:spcPct val="100000"/>
+              </a:lnSpc>
+              <a:spcBef>
+                <a:spcPts val="600"/>
+              </a:spcBef>
+              <a:spcAft>
+                <a:spcPts val="0"/>
+              </a:spcAft>
+              <a:buClrTx/>
+              <a:buSzTx/>
+              <a:buFont typeface="Arial" panose="020B0604020202020204" pitchFamily="34" charset="0"/>
+              <a:buChar char="•"/>
+              <a:tabLst/>
+              <a:defRPr/>
+            </a:pPr>
+            <a:r>
+              <a:rPr kumimoji="0" lang="en-US" sz="2400" b="0" i="0" u="none" strike="noStrike" kern="1200" cap="none" spc="0" normalizeH="0" baseline="0" noProof="0" dirty="0">
+                <a:ln>
+                  <a:noFill/>
+                </a:ln>
+                <a:solidFill>
+                  <a:prstClr val="black"/>
+                </a:solidFill>
+                <a:effectLst/>
+                <a:uLnTx/>
+                <a:uFillTx/>
+                <a:latin typeface="Arial" panose="020B0604020202020204" pitchFamily="34" charset="0"/>
+                <a:cs typeface="Arial" panose="020B0604020202020204" pitchFamily="34" charset="0"/>
+              </a:rPr>
+              <a:t>Solve temperature profile for cladding surface, fuel surface, fuel centerline</a:t>
+            </a:r>
+          </a:p>
+          <a:p>
+            <a:pPr marL="285750" marR="0" lvl="0" indent="-285750" algn="l" defTabSz="914400" rtl="0" eaLnBrk="1" fontAlgn="auto" latinLnBrk="0" hangingPunct="1">
+              <a:lnSpc>
+                <a:spcPct val="100000"/>
+              </a:lnSpc>
+              <a:spcBef>
+                <a:spcPts val="600"/>
+              </a:spcBef>
+              <a:spcAft>
+                <a:spcPts val="0"/>
+              </a:spcAft>
+              <a:buClrTx/>
+              <a:buSzTx/>
+              <a:buFont typeface="Arial" panose="020B0604020202020204" pitchFamily="34" charset="0"/>
+              <a:buChar char="•"/>
+              <a:tabLst/>
+              <a:defRPr/>
+            </a:pPr>
+            <a:r>
+              <a:rPr kumimoji="0" lang="en-US" sz="2400" b="0" i="0" u="none" strike="noStrike" kern="1200" cap="none" spc="0" normalizeH="0" baseline="0" noProof="0" dirty="0">
+                <a:ln>
+                  <a:noFill/>
+                </a:ln>
+                <a:solidFill>
+                  <a:prstClr val="black"/>
+                </a:solidFill>
+                <a:effectLst/>
+                <a:uLnTx/>
+                <a:uFillTx/>
+                <a:latin typeface="Arial" panose="020B0604020202020204" pitchFamily="34" charset="0"/>
+                <a:cs typeface="Arial" panose="020B0604020202020204" pitchFamily="34" charset="0"/>
+              </a:rPr>
+              <a:t>Find axial location of peak temperatures</a:t>
+            </a:r>
+          </a:p>
+          <a:p>
+            <a:pPr marL="285750" marR="0" lvl="0" indent="-285750" algn="l" defTabSz="914400" rtl="0" eaLnBrk="1" fontAlgn="auto" latinLnBrk="0" hangingPunct="1">
+              <a:lnSpc>
+                <a:spcPct val="100000"/>
+              </a:lnSpc>
+              <a:spcBef>
+                <a:spcPts val="600"/>
+              </a:spcBef>
+              <a:spcAft>
+                <a:spcPts val="0"/>
+              </a:spcAft>
+              <a:buClrTx/>
+              <a:buSzTx/>
+              <a:buFont typeface="Arial" panose="020B0604020202020204" pitchFamily="34" charset="0"/>
+              <a:buChar char="•"/>
+              <a:tabLst/>
+              <a:defRPr/>
+            </a:pPr>
+            <a:r>
+              <a:rPr lang="en-US" sz="2400" dirty="0">
+                <a:solidFill>
+                  <a:prstClr val="black"/>
+                </a:solidFill>
+                <a:latin typeface="Arial" panose="020B0604020202020204" pitchFamily="34" charset="0"/>
+                <a:cs typeface="Arial" panose="020B0604020202020204" pitchFamily="34" charset="0"/>
+              </a:rPr>
+              <a:t>Make sure you are instituting an appropriate mesh!</a:t>
+            </a:r>
+            <a:endParaRPr kumimoji="0" lang="en-US" sz="2400" b="0" i="0" u="none" strike="noStrike" kern="1200" cap="none" spc="0" normalizeH="0" baseline="0" noProof="0" dirty="0">
+              <a:ln>
+                <a:noFill/>
+              </a:ln>
+              <a:solidFill>
+                <a:prstClr val="black"/>
+              </a:solidFill>
+              <a:effectLst/>
+              <a:uLnTx/>
+              <a:uFillTx/>
+              <a:latin typeface="Arial" panose="020B0604020202020204" pitchFamily="34" charset="0"/>
+              <a:cs typeface="Arial" panose="020B0604020202020204" pitchFamily="34" charset="0"/>
+            </a:endParaRPr>
+          </a:p>
+        </p:txBody>
+      </p:sp>
+      <p:sp>
+        <p:nvSpPr>
+          <p:cNvPr id="17" name="TextBox 16">
+            <a:extLst>
+              <a:ext uri="{FF2B5EF4-FFF2-40B4-BE49-F238E27FC236}">
+                <a16:creationId xmlns:a16="http://schemas.microsoft.com/office/drawing/2014/main" id="{BF1AC033-6409-0C4A-AA93-30785D045B24}"/>
+              </a:ext>
+            </a:extLst>
+          </p:cNvPr>
+          <p:cNvSpPr txBox="1"/>
+          <p:nvPr/>
+        </p:nvSpPr>
+        <p:spPr>
+          <a:xfrm>
+            <a:off x="8947425" y="3793094"/>
+            <a:ext cx="1640540" cy="369332"/>
+          </a:xfrm>
+          <a:prstGeom prst="rect">
+            <a:avLst/>
+          </a:prstGeom>
+          <a:noFill/>
+        </p:spPr>
+        <p:txBody>
+          <a:bodyPr wrap="square" rtlCol="0">
+            <a:spAutoFit/>
+          </a:bodyPr>
+          <a:lstStyle/>
+          <a:p>
+            <a:pPr marL="0" marR="0" lvl="0" indent="0" algn="ctr" defTabSz="914400" rtl="0" eaLnBrk="1" fontAlgn="auto" latinLnBrk="0" hangingPunct="1">
+              <a:lnSpc>
+                <a:spcPct val="100000"/>
+              </a:lnSpc>
+              <a:spcBef>
+                <a:spcPts val="0"/>
+              </a:spcBef>
+              <a:spcAft>
+                <a:spcPts val="0"/>
+              </a:spcAft>
+              <a:buClrTx/>
+              <a:buSzTx/>
+              <a:buFontTx/>
+              <a:buNone/>
+              <a:tabLst/>
+              <a:defRPr/>
+            </a:pPr>
+            <a:r>
+              <a:rPr kumimoji="0" lang="en-US" sz="1800" b="0" i="0" u="none" strike="noStrike" kern="1200" cap="none" spc="0" normalizeH="0" baseline="0" noProof="0" dirty="0">
+                <a:ln>
+                  <a:noFill/>
+                </a:ln>
+                <a:solidFill>
+                  <a:prstClr val="black"/>
+                </a:solidFill>
+                <a:effectLst/>
+                <a:uLnTx/>
+                <a:uFillTx/>
+                <a:latin typeface="Calibri"/>
+                <a:ea typeface="+mn-ea"/>
+                <a:cs typeface="+mn-cs"/>
+              </a:rPr>
+              <a:t>Fuel</a:t>
+            </a:r>
+          </a:p>
+        </p:txBody>
+      </p:sp>
+      <p:sp>
+        <p:nvSpPr>
+          <p:cNvPr id="18" name="TextBox 17">
+            <a:extLst>
+              <a:ext uri="{FF2B5EF4-FFF2-40B4-BE49-F238E27FC236}">
+                <a16:creationId xmlns:a16="http://schemas.microsoft.com/office/drawing/2014/main" id="{140AB814-5772-5A48-AA51-C140D737CD00}"/>
+              </a:ext>
+            </a:extLst>
+          </p:cNvPr>
+          <p:cNvSpPr txBox="1"/>
+          <p:nvPr/>
+        </p:nvSpPr>
+        <p:spPr>
+          <a:xfrm rot="16200000">
+            <a:off x="9721334" y="3852362"/>
+            <a:ext cx="1640540" cy="369332"/>
+          </a:xfrm>
+          <a:prstGeom prst="rect">
+            <a:avLst/>
+          </a:prstGeom>
+          <a:noFill/>
+        </p:spPr>
+        <p:txBody>
+          <a:bodyPr wrap="square" rtlCol="0">
+            <a:spAutoFit/>
+          </a:bodyPr>
+          <a:lstStyle/>
+          <a:p>
+            <a:pPr marL="0" marR="0" lvl="0" indent="0" algn="ctr" defTabSz="914400" rtl="0" eaLnBrk="1" fontAlgn="auto" latinLnBrk="0" hangingPunct="1">
+              <a:lnSpc>
+                <a:spcPct val="100000"/>
+              </a:lnSpc>
+              <a:spcBef>
+                <a:spcPts val="0"/>
+              </a:spcBef>
+              <a:spcAft>
+                <a:spcPts val="0"/>
+              </a:spcAft>
+              <a:buClrTx/>
+              <a:buSzTx/>
+              <a:buFontTx/>
+              <a:buNone/>
+              <a:tabLst/>
+              <a:defRPr/>
+            </a:pPr>
+            <a:r>
+              <a:rPr kumimoji="0" lang="en-US" sz="1800" b="0" i="0" u="none" strike="noStrike" kern="1200" cap="none" spc="0" normalizeH="0" baseline="0" noProof="0" dirty="0">
+                <a:ln>
+                  <a:noFill/>
+                </a:ln>
+                <a:solidFill>
+                  <a:prstClr val="black"/>
+                </a:solidFill>
+                <a:effectLst/>
+                <a:uLnTx/>
+                <a:uFillTx/>
+                <a:latin typeface="Calibri"/>
+                <a:ea typeface="+mn-ea"/>
+                <a:cs typeface="+mn-cs"/>
+              </a:rPr>
+              <a:t>Gap</a:t>
+            </a:r>
+          </a:p>
+        </p:txBody>
+      </p:sp>
+      <p:sp>
+        <p:nvSpPr>
+          <p:cNvPr id="19" name="TextBox 18">
+            <a:extLst>
+              <a:ext uri="{FF2B5EF4-FFF2-40B4-BE49-F238E27FC236}">
+                <a16:creationId xmlns:a16="http://schemas.microsoft.com/office/drawing/2014/main" id="{5120E950-52CE-184A-96FC-2D43E51B266F}"/>
+              </a:ext>
+            </a:extLst>
+          </p:cNvPr>
+          <p:cNvSpPr txBox="1"/>
+          <p:nvPr/>
+        </p:nvSpPr>
+        <p:spPr>
+          <a:xfrm rot="16200000">
+            <a:off x="10134637" y="3893485"/>
+            <a:ext cx="1640540" cy="369332"/>
+          </a:xfrm>
+          <a:prstGeom prst="rect">
+            <a:avLst/>
+          </a:prstGeom>
+          <a:noFill/>
+        </p:spPr>
+        <p:txBody>
+          <a:bodyPr wrap="square" rtlCol="0">
+            <a:spAutoFit/>
+          </a:bodyPr>
+          <a:lstStyle/>
+          <a:p>
+            <a:pPr marL="0" marR="0" lvl="0" indent="0" algn="ctr" defTabSz="914400" rtl="0" eaLnBrk="1" fontAlgn="auto" latinLnBrk="0" hangingPunct="1">
+              <a:lnSpc>
+                <a:spcPct val="100000"/>
+              </a:lnSpc>
+              <a:spcBef>
+                <a:spcPts val="0"/>
+              </a:spcBef>
+              <a:spcAft>
+                <a:spcPts val="0"/>
+              </a:spcAft>
+              <a:buClrTx/>
+              <a:buSzTx/>
+              <a:buFontTx/>
+              <a:buNone/>
+              <a:tabLst/>
+              <a:defRPr/>
+            </a:pPr>
+            <a:r>
+              <a:rPr kumimoji="0" lang="en-US" sz="1800" b="0" i="0" u="none" strike="noStrike" kern="1200" cap="none" spc="0" normalizeH="0" baseline="0" noProof="0" dirty="0">
+                <a:ln>
+                  <a:noFill/>
+                </a:ln>
+                <a:solidFill>
+                  <a:prstClr val="black"/>
+                </a:solidFill>
+                <a:effectLst/>
+                <a:uLnTx/>
+                <a:uFillTx/>
+                <a:latin typeface="Calibri"/>
+                <a:ea typeface="+mn-ea"/>
+                <a:cs typeface="+mn-cs"/>
+              </a:rPr>
+              <a:t>Cladding</a:t>
+            </a:r>
+          </a:p>
+        </p:txBody>
+      </p:sp>
+      <p:sp>
+        <p:nvSpPr>
+          <p:cNvPr id="20" name="TextBox 19">
+            <a:extLst>
+              <a:ext uri="{FF2B5EF4-FFF2-40B4-BE49-F238E27FC236}">
+                <a16:creationId xmlns:a16="http://schemas.microsoft.com/office/drawing/2014/main" id="{500D7D2B-ACB3-E84C-8015-B6D0EFA467D3}"/>
+              </a:ext>
+            </a:extLst>
+          </p:cNvPr>
+          <p:cNvSpPr txBox="1"/>
+          <p:nvPr/>
+        </p:nvSpPr>
+        <p:spPr>
+          <a:xfrm>
+            <a:off x="8957514" y="451111"/>
+            <a:ext cx="1640540" cy="369332"/>
+          </a:xfrm>
+          <a:prstGeom prst="rect">
+            <a:avLst/>
+          </a:prstGeom>
+          <a:noFill/>
+        </p:spPr>
+        <p:txBody>
+          <a:bodyPr wrap="square" rtlCol="0">
+            <a:spAutoFit/>
+          </a:bodyPr>
+          <a:lstStyle/>
+          <a:p>
+            <a:pPr marL="0" marR="0" lvl="0" indent="0" algn="ctr" defTabSz="914400" rtl="0" eaLnBrk="1" fontAlgn="auto" latinLnBrk="0" hangingPunct="1">
+              <a:lnSpc>
+                <a:spcPct val="100000"/>
+              </a:lnSpc>
+              <a:spcBef>
+                <a:spcPts val="0"/>
+              </a:spcBef>
+              <a:spcAft>
+                <a:spcPts val="0"/>
+              </a:spcAft>
+              <a:buClrTx/>
+              <a:buSzTx/>
+              <a:buFontTx/>
+              <a:buNone/>
+              <a:tabLst/>
+              <a:defRPr/>
+            </a:pPr>
+            <a:r>
+              <a:rPr kumimoji="0" lang="en-US" sz="1800" b="0" i="0" u="none" strike="noStrike" kern="1200" cap="none" spc="0" normalizeH="0" baseline="0" noProof="0" dirty="0">
+                <a:ln>
+                  <a:noFill/>
+                </a:ln>
+                <a:solidFill>
+                  <a:prstClr val="black"/>
+                </a:solidFill>
+                <a:effectLst/>
+                <a:uLnTx/>
+                <a:uFillTx/>
+                <a:latin typeface="Calibri"/>
+                <a:ea typeface="+mn-ea"/>
+                <a:cs typeface="+mn-cs"/>
+              </a:rPr>
+              <a:t>0.5 cm</a:t>
+            </a:r>
+          </a:p>
+        </p:txBody>
+      </p:sp>
+      <p:sp>
+        <p:nvSpPr>
+          <p:cNvPr id="21" name="TextBox 20">
+            <a:extLst>
+              <a:ext uri="{FF2B5EF4-FFF2-40B4-BE49-F238E27FC236}">
+                <a16:creationId xmlns:a16="http://schemas.microsoft.com/office/drawing/2014/main" id="{B5933A57-5260-6845-8485-AD035242A637}"/>
+              </a:ext>
+            </a:extLst>
+          </p:cNvPr>
+          <p:cNvSpPr txBox="1"/>
+          <p:nvPr/>
+        </p:nvSpPr>
+        <p:spPr>
+          <a:xfrm>
+            <a:off x="9906000" y="841494"/>
+            <a:ext cx="1640540" cy="369332"/>
+          </a:xfrm>
+          <a:prstGeom prst="rect">
+            <a:avLst/>
+          </a:prstGeom>
+          <a:noFill/>
+        </p:spPr>
+        <p:txBody>
+          <a:bodyPr wrap="square" rtlCol="0">
+            <a:spAutoFit/>
+          </a:bodyPr>
+          <a:lstStyle/>
+          <a:p>
+            <a:pPr marL="0" marR="0" lvl="0" indent="0" algn="ctr" defTabSz="914400" rtl="0" eaLnBrk="1" fontAlgn="auto" latinLnBrk="0" hangingPunct="1">
+              <a:lnSpc>
+                <a:spcPct val="100000"/>
+              </a:lnSpc>
+              <a:spcBef>
+                <a:spcPts val="0"/>
+              </a:spcBef>
+              <a:spcAft>
+                <a:spcPts val="0"/>
+              </a:spcAft>
+              <a:buClrTx/>
+              <a:buSzTx/>
+              <a:buFontTx/>
+              <a:buNone/>
+              <a:tabLst/>
+              <a:defRPr/>
+            </a:pPr>
+            <a:r>
+              <a:rPr kumimoji="0" lang="en-US" sz="1800" b="0" i="0" u="none" strike="noStrike" kern="1200" cap="none" spc="0" normalizeH="0" baseline="0" noProof="0" dirty="0">
+                <a:ln>
+                  <a:noFill/>
+                </a:ln>
+                <a:solidFill>
+                  <a:prstClr val="black"/>
+                </a:solidFill>
+                <a:effectLst/>
+                <a:uLnTx/>
+                <a:uFillTx/>
+                <a:latin typeface="Calibri"/>
+                <a:ea typeface="+mn-ea"/>
+                <a:cs typeface="+mn-cs"/>
+              </a:rPr>
+              <a:t>0.005 cm</a:t>
+            </a:r>
+          </a:p>
+        </p:txBody>
+      </p:sp>
+      <p:sp>
+        <p:nvSpPr>
+          <p:cNvPr id="22" name="TextBox 21">
+            <a:extLst>
+              <a:ext uri="{FF2B5EF4-FFF2-40B4-BE49-F238E27FC236}">
+                <a16:creationId xmlns:a16="http://schemas.microsoft.com/office/drawing/2014/main" id="{94BB60B0-6BC9-B948-BD66-42B123FD7F61}"/>
+              </a:ext>
+            </a:extLst>
+          </p:cNvPr>
+          <p:cNvSpPr txBox="1"/>
+          <p:nvPr/>
+        </p:nvSpPr>
+        <p:spPr>
+          <a:xfrm>
+            <a:off x="10304310" y="426465"/>
+            <a:ext cx="1640540" cy="369332"/>
+          </a:xfrm>
+          <a:prstGeom prst="rect">
+            <a:avLst/>
+          </a:prstGeom>
+          <a:noFill/>
+        </p:spPr>
+        <p:txBody>
+          <a:bodyPr wrap="square" rtlCol="0">
+            <a:spAutoFit/>
+          </a:bodyPr>
+          <a:lstStyle/>
+          <a:p>
+            <a:pPr marL="0" marR="0" lvl="0" indent="0" algn="ctr" defTabSz="914400" rtl="0" eaLnBrk="1" fontAlgn="auto" latinLnBrk="0" hangingPunct="1">
+              <a:lnSpc>
+                <a:spcPct val="100000"/>
+              </a:lnSpc>
+              <a:spcBef>
+                <a:spcPts val="0"/>
+              </a:spcBef>
+              <a:spcAft>
+                <a:spcPts val="0"/>
+              </a:spcAft>
+              <a:buClrTx/>
+              <a:buSzTx/>
+              <a:buFontTx/>
+              <a:buNone/>
+              <a:tabLst/>
+              <a:defRPr/>
+            </a:pPr>
+            <a:r>
+              <a:rPr kumimoji="0" lang="en-US" sz="1800" b="0" i="0" u="none" strike="noStrike" kern="1200" cap="none" spc="0" normalizeH="0" baseline="0" noProof="0" dirty="0">
+                <a:ln>
+                  <a:noFill/>
+                </a:ln>
+                <a:solidFill>
+                  <a:prstClr val="black"/>
+                </a:solidFill>
+                <a:effectLst/>
+                <a:uLnTx/>
+                <a:uFillTx/>
+                <a:latin typeface="Calibri"/>
+                <a:ea typeface="+mn-ea"/>
+                <a:cs typeface="+mn-cs"/>
+              </a:rPr>
+              <a:t>0.1 cm</a:t>
+            </a:r>
+          </a:p>
+        </p:txBody>
+      </p:sp>
+      <p:sp>
+        <p:nvSpPr>
+          <p:cNvPr id="23" name="TextBox 22">
+            <a:extLst>
+              <a:ext uri="{FF2B5EF4-FFF2-40B4-BE49-F238E27FC236}">
+                <a16:creationId xmlns:a16="http://schemas.microsoft.com/office/drawing/2014/main" id="{9585D5CD-26F8-1C40-B55C-D9B4F132CE15}"/>
+              </a:ext>
+            </a:extLst>
+          </p:cNvPr>
+          <p:cNvSpPr txBox="1"/>
+          <p:nvPr/>
+        </p:nvSpPr>
+        <p:spPr>
+          <a:xfrm rot="16200000">
+            <a:off x="7761900" y="3608428"/>
+            <a:ext cx="1640540" cy="369332"/>
+          </a:xfrm>
+          <a:prstGeom prst="rect">
+            <a:avLst/>
+          </a:prstGeom>
+          <a:noFill/>
+        </p:spPr>
+        <p:txBody>
+          <a:bodyPr wrap="square" rtlCol="0">
+            <a:spAutoFit/>
+          </a:bodyPr>
+          <a:lstStyle/>
+          <a:p>
+            <a:pPr marL="0" marR="0" lvl="0" indent="0" algn="ctr" defTabSz="914400" rtl="0" eaLnBrk="1" fontAlgn="auto" latinLnBrk="0" hangingPunct="1">
+              <a:lnSpc>
+                <a:spcPct val="100000"/>
+              </a:lnSpc>
+              <a:spcBef>
+                <a:spcPts val="0"/>
+              </a:spcBef>
+              <a:spcAft>
+                <a:spcPts val="0"/>
+              </a:spcAft>
+              <a:buClrTx/>
+              <a:buSzTx/>
+              <a:buFontTx/>
+              <a:buNone/>
+              <a:tabLst/>
+              <a:defRPr/>
+            </a:pPr>
+            <a:r>
+              <a:rPr kumimoji="0" lang="en-US" sz="1800" b="0" i="0" u="none" strike="noStrike" kern="1200" cap="none" spc="0" normalizeH="0" baseline="0" noProof="0" dirty="0">
+                <a:ln>
+                  <a:noFill/>
+                </a:ln>
+                <a:solidFill>
+                  <a:prstClr val="black"/>
+                </a:solidFill>
+                <a:effectLst/>
+                <a:uLnTx/>
+                <a:uFillTx/>
+                <a:latin typeface="Calibri"/>
+                <a:ea typeface="+mn-ea"/>
+                <a:cs typeface="+mn-cs"/>
+              </a:rPr>
+              <a:t>2 m</a:t>
+            </a:r>
+          </a:p>
+        </p:txBody>
+      </p:sp>
+    </p:spTree>
+    <p:extLst>
+      <p:ext uri="{BB962C8B-B14F-4D97-AF65-F5344CB8AC3E}">
+        <p14:creationId xmlns:p14="http://schemas.microsoft.com/office/powerpoint/2010/main" val="2003456929"/>
+      </p:ext>
+    </p:extLst>
+  </p:cSld>
+  <p:clrMapOvr>
+    <a:masterClrMapping/>
+  </p:clrMapOvr>
+</p:sld>
+</file>
+
+<file path=ppt/slides/slide4.xml><?xml version="1.0" encoding="utf-8"?>
+<p:sld xmlns:a="http://schemas.openxmlformats.org/drawingml/2006/main" xmlns:r="http://schemas.openxmlformats.org/officeDocument/2006/relationships" xmlns:p="http://schemas.openxmlformats.org/presentationml/2006/main">
+  <p:cSld>
+    <p:spTree>
+      <p:nvGrpSpPr>
+        <p:cNvPr id="1" name="">
+          <a:extLst>
+            <a:ext uri="{FF2B5EF4-FFF2-40B4-BE49-F238E27FC236}">
+              <a16:creationId xmlns:a16="http://schemas.microsoft.com/office/drawing/2014/main" id="{84A8B12A-16A3-771C-F41C-DBC0A5159BDB}"/>
+            </a:ext>
+          </a:extLst>
+        </p:cNvPr>
+        <p:cNvGrpSpPr/>
+        <p:nvPr/>
+      </p:nvGrpSpPr>
+      <p:grpSpPr>
+        <a:xfrm>
+          <a:off x="0" y="0"/>
+          <a:ext cx="0" cy="0"/>
+          <a:chOff x="0" y="0"/>
+          <a:chExt cx="0" cy="0"/>
+        </a:xfrm>
+      </p:grpSpPr>
+      <p:sp>
+        <p:nvSpPr>
+          <p:cNvPr id="2" name="Title 1">
+            <a:extLst>
+              <a:ext uri="{FF2B5EF4-FFF2-40B4-BE49-F238E27FC236}">
+                <a16:creationId xmlns:a16="http://schemas.microsoft.com/office/drawing/2014/main" id="{F0EE8955-F140-772A-3299-79D2581D79AD}"/>
+              </a:ext>
+            </a:extLst>
+          </p:cNvPr>
+          <p:cNvSpPr>
+            <a:spLocks noGrp="1"/>
+          </p:cNvSpPr>
+          <p:nvPr>
+            <p:ph type="title"/>
+          </p:nvPr>
+        </p:nvSpPr>
+        <p:spPr/>
+        <p:txBody>
+          <a:bodyPr/>
+          <a:lstStyle/>
+          <a:p>
+            <a:pPr algn="l"/>
+            <a:r>
+              <a:rPr lang="en-US" dirty="0"/>
+              <a:t>MOOSE Part 2 Writeup</a:t>
+            </a:r>
+          </a:p>
+        </p:txBody>
+      </p:sp>
+      <p:sp>
+        <p:nvSpPr>
+          <p:cNvPr id="3" name="Content Placeholder 2">
+            <a:extLst>
+              <a:ext uri="{FF2B5EF4-FFF2-40B4-BE49-F238E27FC236}">
+                <a16:creationId xmlns:a16="http://schemas.microsoft.com/office/drawing/2014/main" id="{F3FB7502-5F80-05D6-0320-653A9DFC19C0}"/>
+              </a:ext>
+            </a:extLst>
+          </p:cNvPr>
+          <p:cNvSpPr>
+            <a:spLocks noGrp="1"/>
+          </p:cNvSpPr>
+          <p:nvPr>
+            <p:ph idx="1"/>
+          </p:nvPr>
+        </p:nvSpPr>
+        <p:spPr/>
+        <p:txBody>
+          <a:bodyPr/>
+          <a:lstStyle/>
+          <a:p>
+            <a:pPr>
+              <a:spcBef>
+                <a:spcPts val="600"/>
+              </a:spcBef>
+            </a:pPr>
+            <a:r>
+              <a:rPr lang="en-US" dirty="0"/>
+              <a:t>Will upload input and output files to Moodle</a:t>
+            </a:r>
+          </a:p>
+          <a:p>
+            <a:r>
+              <a:rPr lang="en-US" dirty="0"/>
+              <a:t>Write up with deliverables from Part 1 &amp; 2, choice of materials, mesh, details therein, etc. </a:t>
+            </a:r>
+          </a:p>
+          <a:p>
+            <a:r>
+              <a:rPr lang="en-US" dirty="0"/>
+              <a:t>Expected to have fixed any issues with Part 1 </a:t>
+            </a:r>
+          </a:p>
+          <a:p>
+            <a:r>
+              <a:rPr lang="en-US" dirty="0"/>
+              <a:t>If any major changes to Part 1 files, include them in submission</a:t>
+            </a:r>
+          </a:p>
+          <a:p>
+            <a:r>
+              <a:rPr lang="en-US" dirty="0"/>
+              <a:t>Part 2 writeup max of 10 pages</a:t>
+            </a:r>
+          </a:p>
+          <a:p>
+            <a:r>
+              <a:rPr lang="en-US" dirty="0"/>
+              <a:t>Due April 7</a:t>
+            </a:r>
+          </a:p>
+          <a:p>
+            <a:endParaRPr lang="en-US" dirty="0"/>
+          </a:p>
+        </p:txBody>
+      </p:sp>
+      <p:sp>
+        <p:nvSpPr>
+          <p:cNvPr id="4" name="Slide Number Placeholder 3">
+            <a:extLst>
+              <a:ext uri="{FF2B5EF4-FFF2-40B4-BE49-F238E27FC236}">
+                <a16:creationId xmlns:a16="http://schemas.microsoft.com/office/drawing/2014/main" id="{BBEC51AF-A167-6717-3A24-771809C695D0}"/>
+              </a:ext>
+            </a:extLst>
+          </p:cNvPr>
+          <p:cNvSpPr>
+            <a:spLocks noGrp="1"/>
+          </p:cNvSpPr>
+          <p:nvPr>
+            <p:ph type="sldNum" sz="quarter" idx="12"/>
+          </p:nvPr>
+        </p:nvSpPr>
+        <p:spPr/>
+        <p:txBody>
+          <a:bodyPr/>
+          <a:lstStyle/>
+          <a:p>
+            <a:pPr marL="0" marR="0" lvl="0" indent="0" algn="r" defTabSz="914400" rtl="0" eaLnBrk="1" fontAlgn="auto" latinLnBrk="0" hangingPunct="1">
+              <a:lnSpc>
+                <a:spcPct val="100000"/>
+              </a:lnSpc>
+              <a:spcBef>
+                <a:spcPts val="0"/>
+              </a:spcBef>
+              <a:spcAft>
+                <a:spcPts val="0"/>
+              </a:spcAft>
+              <a:buClrTx/>
+              <a:buSzTx/>
+              <a:buFontTx/>
+              <a:buNone/>
+              <a:tabLst/>
+              <a:defRPr/>
+            </a:pPr>
+            <a:fld id="{3FF2C605-4958-CF43-AA48-80339EFDB0AF}" type="slidenum">
+              <a:rPr kumimoji="0" lang="en-US" sz="1200" b="0" i="0" u="none" strike="noStrike" kern="1200" cap="none" spc="0" normalizeH="0" baseline="0" noProof="0" smtClean="0">
+                <a:ln>
+                  <a:noFill/>
+                </a:ln>
+                <a:solidFill>
+                  <a:prstClr val="black">
+                    <a:tint val="75000"/>
+                  </a:prstClr>
+                </a:solidFill>
+                <a:effectLst/>
+                <a:uLnTx/>
+                <a:uFillTx/>
+                <a:latin typeface="Calibri"/>
+                <a:ea typeface="+mn-ea"/>
+                <a:cs typeface="+mn-cs"/>
+              </a:rPr>
+              <a:pPr marL="0" marR="0" lvl="0" indent="0" algn="r" defTabSz="914400" rtl="0" eaLnBrk="1" fontAlgn="auto" latinLnBrk="0" hangingPunct="1">
+                <a:lnSpc>
+                  <a:spcPct val="100000"/>
+                </a:lnSpc>
+                <a:spcBef>
+                  <a:spcPts val="0"/>
+                </a:spcBef>
+                <a:spcAft>
+                  <a:spcPts val="0"/>
+                </a:spcAft>
+                <a:buClrTx/>
+                <a:buSzTx/>
+                <a:buFontTx/>
+                <a:buNone/>
+                <a:tabLst/>
+                <a:defRPr/>
+              </a:pPr>
+              <a:t>4</a:t>
+            </a:fld>
+            <a:endParaRPr kumimoji="0" lang="en-US" sz="1200" b="0" i="0" u="none" strike="noStrike" kern="1200" cap="none" spc="0" normalizeH="0" baseline="0" noProof="0">
+              <a:ln>
+                <a:noFill/>
+              </a:ln>
+              <a:solidFill>
+                <a:prstClr val="black">
+                  <a:tint val="75000"/>
+                </a:prstClr>
+              </a:solidFill>
+              <a:effectLst/>
+              <a:uLnTx/>
+              <a:uFillTx/>
+              <a:latin typeface="Calibri"/>
+              <a:ea typeface="+mn-ea"/>
+              <a:cs typeface="+mn-cs"/>
+            </a:endParaRPr>
+          </a:p>
+        </p:txBody>
+      </p:sp>
+    </p:spTree>
+    <p:extLst>
+      <p:ext uri="{BB962C8B-B14F-4D97-AF65-F5344CB8AC3E}">
+        <p14:creationId xmlns:p14="http://schemas.microsoft.com/office/powerpoint/2010/main" val="2452201381"/>
+      </p:ext>
+    </p:extLst>
+  </p:cSld>
+  <p:clrMapOvr>
+    <a:masterClrMapping/>
+  </p:clrMapOvr>
+</p:sld>
+</file>
+
+<file path=ppt/slides/slide5.xml><?xml version="1.0" encoding="utf-8"?>
+<p:sld xmlns:a="http://schemas.openxmlformats.org/drawingml/2006/main" xmlns:r="http://schemas.openxmlformats.org/officeDocument/2006/relationships" xmlns:p="http://schemas.openxmlformats.org/presentationml/2006/main">
+  <p:cSld>
+    <p:spTree>
+      <p:nvGrpSpPr>
+        <p:cNvPr id="1" name=""/>
+        <p:cNvGrpSpPr/>
+        <p:nvPr/>
+      </p:nvGrpSpPr>
+      <p:grpSpPr>
+        <a:xfrm>
+          <a:off x="0" y="0"/>
+          <a:ext cx="0" cy="0"/>
+          <a:chOff x="0" y="0"/>
+          <a:chExt cx="0" cy="0"/>
+        </a:xfrm>
+      </p:grpSpPr>
+      <p:sp>
+        <p:nvSpPr>
+          <p:cNvPr id="2" name="Title 1">
+            <a:extLst>
+              <a:ext uri="{FF2B5EF4-FFF2-40B4-BE49-F238E27FC236}">
+                <a16:creationId xmlns:a16="http://schemas.microsoft.com/office/drawing/2014/main" id="{91C669C3-7586-8D5D-5213-3EAA1F236DA8}"/>
+              </a:ext>
+            </a:extLst>
+          </p:cNvPr>
+          <p:cNvSpPr>
+            <a:spLocks noGrp="1"/>
+          </p:cNvSpPr>
+          <p:nvPr>
+            <p:ph type="title"/>
+          </p:nvPr>
+        </p:nvSpPr>
+        <p:spPr>
+          <a:xfrm>
+            <a:off x="609600" y="538865"/>
+            <a:ext cx="10972800" cy="1068387"/>
+          </a:xfrm>
+        </p:spPr>
+        <p:txBody>
+          <a:bodyPr/>
+          <a:lstStyle/>
+          <a:p>
+            <a:r>
+              <a:rPr lang="en-US" dirty="0"/>
+              <a:t>Last Time</a:t>
+            </a:r>
+          </a:p>
+        </p:txBody>
+      </p:sp>
+      <p:sp>
+        <p:nvSpPr>
+          <p:cNvPr id="3" name="Content Placeholder 2">
+            <a:extLst>
+              <a:ext uri="{FF2B5EF4-FFF2-40B4-BE49-F238E27FC236}">
+                <a16:creationId xmlns:a16="http://schemas.microsoft.com/office/drawing/2014/main" id="{89B496EA-2615-5D83-73E6-1093C95A8AF1}"/>
+              </a:ext>
+            </a:extLst>
+          </p:cNvPr>
+          <p:cNvSpPr>
+            <a:spLocks noGrp="1"/>
+          </p:cNvSpPr>
+          <p:nvPr>
+            <p:ph idx="1"/>
+          </p:nvPr>
+        </p:nvSpPr>
+        <p:spPr>
+          <a:xfrm>
+            <a:off x="609600" y="1607252"/>
+            <a:ext cx="10972800" cy="4226813"/>
+          </a:xfrm>
+        </p:spPr>
+        <p:txBody>
+          <a:bodyPr/>
+          <a:lstStyle/>
+          <a:p>
+            <a:r>
+              <a:rPr lang="en-US" sz="1800" dirty="0"/>
+              <a:t>Wrapped up Zr cladding overview</a:t>
+            </a:r>
+          </a:p>
+          <a:p>
+            <a:pPr lvl="1"/>
+            <a:r>
+              <a:rPr lang="en-US" sz="1800" dirty="0"/>
+              <a:t>Zr hydrides can form and lead to dimensional change; Zr alloys undergo substantial irradiation hardening; Dislocation channels can extend the ductility of the cladding; Discussed Zr fatigue</a:t>
+            </a:r>
+          </a:p>
+          <a:p>
+            <a:r>
+              <a:rPr lang="en-US" sz="1800" dirty="0"/>
+              <a:t>Pellet cladding interaction (PCI)</a:t>
+            </a:r>
+          </a:p>
+          <a:p>
+            <a:pPr lvl="1"/>
+            <a:r>
+              <a:rPr lang="en-US" sz="1800" dirty="0"/>
+              <a:t>Mechanical, chemical, and combined effects</a:t>
+            </a:r>
+          </a:p>
+          <a:p>
+            <a:pPr lvl="1"/>
+            <a:r>
+              <a:rPr lang="en-US" sz="1800" dirty="0"/>
+              <a:t>Stress corrosion cracking: cracks only develop with both stress and the corrosive environment </a:t>
+            </a:r>
+          </a:p>
+          <a:p>
+            <a:pPr lvl="2"/>
+            <a:r>
+              <a:rPr lang="en-US" dirty="0"/>
+              <a:t>corrosive environment, a susceptible material, sufficient stress, and sufficient time</a:t>
+            </a:r>
+          </a:p>
+          <a:p>
+            <a:r>
+              <a:rPr lang="en-US" sz="1800" dirty="0"/>
+              <a:t>Corrosive environment</a:t>
+            </a:r>
+          </a:p>
+          <a:p>
+            <a:pPr lvl="1"/>
+            <a:r>
+              <a:rPr lang="en-US" sz="1800" dirty="0"/>
+              <a:t>iodine liberated from </a:t>
+            </a:r>
+            <a:r>
+              <a:rPr lang="en-US" sz="1800" dirty="0" err="1"/>
+              <a:t>CsI</a:t>
+            </a:r>
+            <a:r>
+              <a:rPr lang="en-US" sz="1800" dirty="0"/>
+              <a:t> interacts with Zr metal, forms ZrI4, then interacts with O2, forms ZrO2, releases I2 for more corrosion</a:t>
+            </a:r>
+          </a:p>
+          <a:p>
+            <a:r>
+              <a:rPr lang="en-US" sz="1800" dirty="0"/>
+              <a:t>Susceptible materials</a:t>
+            </a:r>
+          </a:p>
+          <a:p>
+            <a:pPr lvl="1"/>
+            <a:r>
+              <a:rPr lang="en-US" sz="1800" dirty="0"/>
+              <a:t>all Zr alloys are susceptible, alloying can modify this slightly</a:t>
+            </a:r>
+          </a:p>
+          <a:p>
+            <a:r>
+              <a:rPr lang="en-US" sz="1800" dirty="0"/>
+              <a:t>Sufficient Stress</a:t>
+            </a:r>
+          </a:p>
+          <a:p>
+            <a:pPr lvl="1"/>
+            <a:r>
+              <a:rPr lang="en-US" sz="1800" dirty="0"/>
+              <a:t>creep down, fuel </a:t>
+            </a:r>
+            <a:r>
+              <a:rPr lang="en-US" sz="1800" dirty="0" err="1"/>
+              <a:t>expansion+swelling</a:t>
+            </a:r>
+            <a:r>
+              <a:rPr lang="en-US" sz="1800" dirty="0"/>
+              <a:t>, cracks and defects, etc.</a:t>
+            </a:r>
+          </a:p>
+          <a:p>
+            <a:pPr lvl="1"/>
+            <a:endParaRPr lang="en-US" sz="1800" dirty="0"/>
+          </a:p>
+          <a:p>
+            <a:endParaRPr lang="en-US" sz="1800" dirty="0"/>
+          </a:p>
+        </p:txBody>
+      </p:sp>
+      <p:sp>
+        <p:nvSpPr>
+          <p:cNvPr id="4" name="Slide Number Placeholder 3">
+            <a:extLst>
+              <a:ext uri="{FF2B5EF4-FFF2-40B4-BE49-F238E27FC236}">
+                <a16:creationId xmlns:a16="http://schemas.microsoft.com/office/drawing/2014/main" id="{3B8FB79D-3C0F-B3AC-A960-0918542F0779}"/>
+              </a:ext>
+            </a:extLst>
+          </p:cNvPr>
+          <p:cNvSpPr>
+            <a:spLocks noGrp="1"/>
+          </p:cNvSpPr>
+          <p:nvPr>
+            <p:ph type="sldNum" sz="quarter" idx="12"/>
+          </p:nvPr>
+        </p:nvSpPr>
+        <p:spPr/>
+        <p:txBody>
+          <a:bodyPr/>
+          <a:lstStyle/>
+          <a:p>
+            <a:pPr>
+              <a:defRPr/>
+            </a:pPr>
+            <a:fld id="{3FF2C605-4958-CF43-AA48-80339EFDB0AF}" type="slidenum">
+              <a:rPr lang="en-US" smtClean="0"/>
+              <a:pPr>
+                <a:defRPr/>
+              </a:pPr>
+              <a:t>5</a:t>
+            </a:fld>
+            <a:endParaRPr lang="en-US"/>
+          </a:p>
+        </p:txBody>
+      </p:sp>
+    </p:spTree>
+    <p:extLst>
+      <p:ext uri="{BB962C8B-B14F-4D97-AF65-F5344CB8AC3E}">
+        <p14:creationId xmlns:p14="http://schemas.microsoft.com/office/powerpoint/2010/main" val="96840934"/>
+      </p:ext>
+    </p:extLst>
+  </p:cSld>
+  <p:clrMapOvr>
+    <a:masterClrMapping/>
+  </p:clrMapOvr>
+</p:sld>
+</file>
+
+<file path=ppt/slides/slide6.xml><?xml version="1.0" encoding="utf-8"?>
+<p:sld xmlns:a="http://schemas.openxmlformats.org/drawingml/2006/main" xmlns:r="http://schemas.openxmlformats.org/officeDocument/2006/relationships" xmlns:p="http://schemas.openxmlformats.org/presentationml/2006/main">
+  <p:cSld>
+    <p:spTree>
+      <p:nvGrpSpPr>
+        <p:cNvPr id="1" name=""/>
+        <p:cNvGrpSpPr/>
+        <p:nvPr/>
+      </p:nvGrpSpPr>
+      <p:grpSpPr>
+        <a:xfrm>
+          <a:off x="0" y="0"/>
+          <a:ext cx="0" cy="0"/>
+          <a:chOff x="0" y="0"/>
+          <a:chExt cx="0" cy="0"/>
+        </a:xfrm>
+      </p:grpSpPr>
+      <p:sp>
+        <p:nvSpPr>
+          <p:cNvPr id="2" name="Title 1">
+            <a:extLst>
+              <a:ext uri="{FF2B5EF4-FFF2-40B4-BE49-F238E27FC236}">
                 <a16:creationId xmlns:a16="http://schemas.microsoft.com/office/drawing/2014/main" id="{77E1810E-872A-8442-A155-D866A12AA58F}"/>
               </a:ext>
             </a:extLst>
@@ -4595,7 +7597,7 @@
               <a:pPr>
                 <a:defRPr/>
               </a:pPr>
-              <a:t>3</a:t>
+              <a:t>6</a:t>
             </a:fld>
             <a:endParaRPr lang="en-US"/>
           </a:p>
@@ -4644,180 +7646,7 @@
 </p:sld>
 </file>
 
-<file path=ppt/slides/slide4.xml><?xml version="1.0" encoding="utf-8"?>
-<p:sld xmlns:a="http://schemas.openxmlformats.org/drawingml/2006/main" xmlns:r="http://schemas.openxmlformats.org/officeDocument/2006/relationships" xmlns:p="http://schemas.openxmlformats.org/presentationml/2006/main">
-  <p:cSld>
-    <p:spTree>
-      <p:nvGrpSpPr>
-        <p:cNvPr id="1" name=""/>
-        <p:cNvGrpSpPr/>
-        <p:nvPr/>
-      </p:nvGrpSpPr>
-      <p:grpSpPr>
-        <a:xfrm>
-          <a:off x="0" y="0"/>
-          <a:ext cx="0" cy="0"/>
-          <a:chOff x="0" y="0"/>
-          <a:chExt cx="0" cy="0"/>
-        </a:xfrm>
-      </p:grpSpPr>
-      <p:sp>
-        <p:nvSpPr>
-          <p:cNvPr id="2" name="Title 1">
-            <a:extLst>
-              <a:ext uri="{FF2B5EF4-FFF2-40B4-BE49-F238E27FC236}">
-                <a16:creationId xmlns:a16="http://schemas.microsoft.com/office/drawing/2014/main" id="{311FF886-29FF-7545-BBF9-5A5DD9867A13}"/>
-              </a:ext>
-            </a:extLst>
-          </p:cNvPr>
-          <p:cNvSpPr>
-            <a:spLocks noGrp="1"/>
-          </p:cNvSpPr>
-          <p:nvPr>
-            <p:ph type="title"/>
-          </p:nvPr>
-        </p:nvSpPr>
-        <p:spPr>
-          <a:xfrm>
-            <a:off x="609600" y="647866"/>
-            <a:ext cx="10972800" cy="1068387"/>
-          </a:xfrm>
-        </p:spPr>
-        <p:txBody>
-          <a:bodyPr/>
-          <a:lstStyle/>
-          <a:p>
-            <a:r>
-              <a:rPr lang="en-US" dirty="0"/>
-              <a:t>HBS and Fission Gas Release</a:t>
-            </a:r>
-          </a:p>
-        </p:txBody>
-      </p:sp>
-      <p:sp>
-        <p:nvSpPr>
-          <p:cNvPr id="3" name="Content Placeholder 2">
-            <a:extLst>
-              <a:ext uri="{FF2B5EF4-FFF2-40B4-BE49-F238E27FC236}">
-                <a16:creationId xmlns:a16="http://schemas.microsoft.com/office/drawing/2014/main" id="{C6178F3E-0DFC-EE47-AAAC-5F32BE74B5AD}"/>
-              </a:ext>
-            </a:extLst>
-          </p:cNvPr>
-          <p:cNvSpPr>
-            <a:spLocks noGrp="1"/>
-          </p:cNvSpPr>
-          <p:nvPr>
-            <p:ph idx="1"/>
-          </p:nvPr>
-        </p:nvSpPr>
-        <p:spPr>
-          <a:xfrm>
-            <a:off x="609600" y="2160495"/>
-            <a:ext cx="6725478" cy="3965670"/>
-          </a:xfrm>
-        </p:spPr>
-        <p:txBody>
-          <a:bodyPr/>
-          <a:lstStyle/>
-          <a:p>
-            <a:r>
-              <a:rPr lang="en-US" dirty="0"/>
-              <a:t>The large increase in porosity within the HBS in high burnup fuel also affects fission gas release, providing local intergranular accommodation for retaining fission gases</a:t>
-            </a:r>
-          </a:p>
-          <a:p>
-            <a:r>
-              <a:rPr lang="en-US" dirty="0"/>
-              <a:t>Although the formation of the HBS promotes local fission gas retention, the absolute amount of fission gases that are released to the gap increases with burnup</a:t>
-            </a:r>
-          </a:p>
-          <a:p>
-            <a:endParaRPr lang="en-US" dirty="0"/>
-          </a:p>
-          <a:p>
-            <a:endParaRPr lang="en-US" dirty="0"/>
-          </a:p>
-        </p:txBody>
-      </p:sp>
-      <p:sp>
-        <p:nvSpPr>
-          <p:cNvPr id="4" name="Slide Number Placeholder 3">
-            <a:extLst>
-              <a:ext uri="{FF2B5EF4-FFF2-40B4-BE49-F238E27FC236}">
-                <a16:creationId xmlns:a16="http://schemas.microsoft.com/office/drawing/2014/main" id="{3F5C3E58-1917-1447-9D06-A9D9853D6F04}"/>
-              </a:ext>
-            </a:extLst>
-          </p:cNvPr>
-          <p:cNvSpPr>
-            <a:spLocks noGrp="1"/>
-          </p:cNvSpPr>
-          <p:nvPr>
-            <p:ph type="sldNum" sz="quarter" idx="12"/>
-          </p:nvPr>
-        </p:nvSpPr>
-        <p:spPr/>
-        <p:txBody>
-          <a:bodyPr/>
-          <a:lstStyle/>
-          <a:p>
-            <a:pPr>
-              <a:defRPr/>
-            </a:pPr>
-            <a:fld id="{3FF2C605-4958-CF43-AA48-80339EFDB0AF}" type="slidenum">
-              <a:rPr lang="en-US" smtClean="0"/>
-              <a:pPr>
-                <a:defRPr/>
-              </a:pPr>
-              <a:t>4</a:t>
-            </a:fld>
-            <a:endParaRPr lang="en-US"/>
-          </a:p>
-        </p:txBody>
-      </p:sp>
-      <p:pic>
-        <p:nvPicPr>
-          <p:cNvPr id="5" name="Picture 4">
-            <a:extLst>
-              <a:ext uri="{FF2B5EF4-FFF2-40B4-BE49-F238E27FC236}">
-                <a16:creationId xmlns:a16="http://schemas.microsoft.com/office/drawing/2014/main" id="{49391CD0-F1F0-7B4F-9B77-8511B0997003}"/>
-              </a:ext>
-            </a:extLst>
-          </p:cNvPr>
-          <p:cNvPicPr>
-            <a:picLocks noChangeAspect="1"/>
-          </p:cNvPicPr>
-          <p:nvPr/>
-        </p:nvPicPr>
-        <p:blipFill>
-          <a:blip r:embed="rId2"/>
-          <a:stretch>
-            <a:fillRect/>
-          </a:stretch>
-        </p:blipFill>
-        <p:spPr>
-          <a:xfrm>
-            <a:off x="7684991" y="2075621"/>
-            <a:ext cx="4433018" cy="3221936"/>
-          </a:xfrm>
-          <a:prstGeom prst="rect">
-            <a:avLst/>
-          </a:prstGeom>
-        </p:spPr>
-      </p:pic>
-    </p:spTree>
-    <p:extLst>
-      <p:ext uri="{BB962C8B-B14F-4D97-AF65-F5344CB8AC3E}">
-        <p14:creationId xmlns:p14="http://schemas.microsoft.com/office/powerpoint/2010/main" val="3532577483"/>
-      </p:ext>
-    </p:extLst>
-  </p:cSld>
-  <p:clrMapOvr>
-    <a:masterClrMapping/>
-  </p:clrMapOvr>
-</p:sld>
-</file>
-
-<file path=ppt/slides/slide5.xml><?xml version="1.0" encoding="utf-8"?>
+<file path=ppt/slides/slide7.xml><?xml version="1.0" encoding="utf-8"?>
 <p:sld xmlns:a="http://schemas.openxmlformats.org/drawingml/2006/main" xmlns:r="http://schemas.openxmlformats.org/officeDocument/2006/relationships" xmlns:p="http://schemas.openxmlformats.org/presentationml/2006/main">
   <p:cSld>
     <p:spTree>
@@ -4990,7 +7819,7 @@
                 <a:tabLst/>
                 <a:defRPr/>
               </a:pPr>
-              <a:t>5</a:t>
+              <a:t>7</a:t>
             </a:fld>
             <a:endParaRPr kumimoji="0" lang="en-US" sz="1200" b="0" i="0" u="none" strike="noStrike" kern="1200" cap="none" spc="0" normalizeH="0" baseline="0" noProof="0">
               <a:ln>
@@ -5054,7 +7883,7 @@
 </p:sld>
 </file>
 
-<file path=ppt/slides/slide6.xml><?xml version="1.0" encoding="utf-8"?>
+<file path=ppt/slides/slide8.xml><?xml version="1.0" encoding="utf-8"?>
 <p:sld xmlns:a="http://schemas.openxmlformats.org/drawingml/2006/main" xmlns:r="http://schemas.openxmlformats.org/officeDocument/2006/relationships" xmlns:p="http://schemas.openxmlformats.org/presentationml/2006/main">
   <p:cSld>
     <p:spTree>
@@ -5263,7 +8092,7 @@
                 <a:tabLst/>
                 <a:defRPr/>
               </a:pPr>
-              <a:t>6</a:t>
+              <a:t>8</a:t>
             </a:fld>
             <a:endParaRPr kumimoji="0" lang="en-US" sz="1200" b="0" i="0" u="none" strike="noStrike" kern="1200" cap="none" spc="0" normalizeH="0" baseline="0" noProof="0">
               <a:ln>
@@ -5501,489 +8330,6 @@
 </p:sld>
 </file>
 
-<file path=ppt/slides/slide7.xml><?xml version="1.0" encoding="utf-8"?>
-<p:sld xmlns:a="http://schemas.openxmlformats.org/drawingml/2006/main" xmlns:r="http://schemas.openxmlformats.org/officeDocument/2006/relationships" xmlns:p="http://schemas.openxmlformats.org/presentationml/2006/main">
-  <p:cSld>
-    <p:spTree>
-      <p:nvGrpSpPr>
-        <p:cNvPr id="1" name=""/>
-        <p:cNvGrpSpPr/>
-        <p:nvPr/>
-      </p:nvGrpSpPr>
-      <p:grpSpPr>
-        <a:xfrm>
-          <a:off x="0" y="0"/>
-          <a:ext cx="0" cy="0"/>
-          <a:chOff x="0" y="0"/>
-          <a:chExt cx="0" cy="0"/>
-        </a:xfrm>
-      </p:grpSpPr>
-      <p:sp>
-        <p:nvSpPr>
-          <p:cNvPr id="2" name="Title 1">
-            <a:extLst>
-              <a:ext uri="{FF2B5EF4-FFF2-40B4-BE49-F238E27FC236}">
-                <a16:creationId xmlns:a16="http://schemas.microsoft.com/office/drawing/2014/main" id="{C4F649AA-0316-E54F-A523-93797234130E}"/>
-              </a:ext>
-            </a:extLst>
-          </p:cNvPr>
-          <p:cNvSpPr>
-            <a:spLocks noGrp="1"/>
-          </p:cNvSpPr>
-          <p:nvPr>
-            <p:ph type="title"/>
-          </p:nvPr>
-        </p:nvSpPr>
-        <p:spPr/>
-        <p:txBody>
-          <a:bodyPr/>
-          <a:lstStyle/>
-          <a:p>
-            <a:r>
-              <a:rPr lang="en-US" dirty="0"/>
-              <a:t>Through-Cracks</a:t>
-            </a:r>
-          </a:p>
-        </p:txBody>
-      </p:sp>
-      <p:sp>
-        <p:nvSpPr>
-          <p:cNvPr id="3" name="Content Placeholder 2">
-            <a:extLst>
-              <a:ext uri="{FF2B5EF4-FFF2-40B4-BE49-F238E27FC236}">
-                <a16:creationId xmlns:a16="http://schemas.microsoft.com/office/drawing/2014/main" id="{74F6013A-8125-5645-8D9E-38FD4740420A}"/>
-              </a:ext>
-            </a:extLst>
-          </p:cNvPr>
-          <p:cNvSpPr>
-            <a:spLocks noGrp="1"/>
-          </p:cNvSpPr>
-          <p:nvPr>
-            <p:ph idx="1"/>
-          </p:nvPr>
-        </p:nvSpPr>
-        <p:spPr/>
-        <p:txBody>
-          <a:bodyPr/>
-          <a:lstStyle/>
-          <a:p>
-            <a:r>
-              <a:rPr lang="en-US" sz="2000" dirty="0"/>
-              <a:t>Following the formation of a through-wall crack and the ingress of water into the fuel-clad gap, the cracking process is arrested since the corrosive species (notably I, Cs, and Cd) have been discharged</a:t>
-            </a:r>
-          </a:p>
-          <a:p>
-            <a:r>
-              <a:rPr lang="en-US" sz="2000" dirty="0"/>
-              <a:t>The ingress of water in the fuel-clad gap may result in clad </a:t>
-            </a:r>
-            <a:r>
-              <a:rPr lang="en-US" sz="2000" dirty="0" err="1"/>
-              <a:t>hydriding</a:t>
-            </a:r>
-            <a:r>
-              <a:rPr lang="en-US" sz="2000" dirty="0"/>
-              <a:t> on the inner surface</a:t>
-            </a:r>
-          </a:p>
-          <a:p>
-            <a:r>
-              <a:rPr lang="en-US" sz="2000" dirty="0"/>
-              <a:t>The initial SCC crack can oxidize, and volume expansion may lead to resealing the primary failure</a:t>
-            </a:r>
-          </a:p>
-          <a:p>
-            <a:r>
-              <a:rPr lang="en-US" sz="2000" dirty="0"/>
-              <a:t>All PCI cracks are pin-hole defects, whereas observable cracks are secondary due to clad </a:t>
-            </a:r>
-            <a:r>
-              <a:rPr lang="en-US" sz="2000" dirty="0" err="1"/>
-              <a:t>hydriding</a:t>
-            </a:r>
-            <a:r>
-              <a:rPr lang="en-US" sz="2000" dirty="0"/>
-              <a:t> or ductile tearing</a:t>
-            </a:r>
-          </a:p>
-          <a:p>
-            <a:r>
-              <a:rPr lang="en-US" sz="2000" dirty="0"/>
-              <a:t>The time to failure depends on many parameters, but is generally determined by the local linear power, the change in linear power, and the local burnup</a:t>
-            </a:r>
-          </a:p>
-          <a:p>
-            <a:endParaRPr lang="en-US" sz="2000" dirty="0"/>
-          </a:p>
-        </p:txBody>
-      </p:sp>
-      <p:sp>
-        <p:nvSpPr>
-          <p:cNvPr id="4" name="Slide Number Placeholder 3">
-            <a:extLst>
-              <a:ext uri="{FF2B5EF4-FFF2-40B4-BE49-F238E27FC236}">
-                <a16:creationId xmlns:a16="http://schemas.microsoft.com/office/drawing/2014/main" id="{3A9F73AA-344A-7548-A599-C67A90FDCACF}"/>
-              </a:ext>
-            </a:extLst>
-          </p:cNvPr>
-          <p:cNvSpPr>
-            <a:spLocks noGrp="1"/>
-          </p:cNvSpPr>
-          <p:nvPr>
-            <p:ph type="sldNum" sz="quarter" idx="12"/>
-          </p:nvPr>
-        </p:nvSpPr>
-        <p:spPr/>
-        <p:txBody>
-          <a:bodyPr/>
-          <a:lstStyle/>
-          <a:p>
-            <a:pPr marL="0" marR="0" lvl="0" indent="0" algn="r" defTabSz="914400" rtl="0" eaLnBrk="1" fontAlgn="auto" latinLnBrk="0" hangingPunct="1">
-              <a:lnSpc>
-                <a:spcPct val="100000"/>
-              </a:lnSpc>
-              <a:spcBef>
-                <a:spcPts val="0"/>
-              </a:spcBef>
-              <a:spcAft>
-                <a:spcPts val="0"/>
-              </a:spcAft>
-              <a:buClrTx/>
-              <a:buSzTx/>
-              <a:buFontTx/>
-              <a:buNone/>
-              <a:tabLst/>
-              <a:defRPr/>
-            </a:pPr>
-            <a:fld id="{3FF2C605-4958-CF43-AA48-80339EFDB0AF}" type="slidenum">
-              <a:rPr kumimoji="0" lang="en-US" sz="1200" b="0" i="0" u="none" strike="noStrike" kern="1200" cap="none" spc="0" normalizeH="0" baseline="0" noProof="0" smtClean="0">
-                <a:ln>
-                  <a:noFill/>
-                </a:ln>
-                <a:solidFill>
-                  <a:prstClr val="black">
-                    <a:tint val="75000"/>
-                  </a:prstClr>
-                </a:solidFill>
-                <a:effectLst/>
-                <a:uLnTx/>
-                <a:uFillTx/>
-                <a:latin typeface="Calibri"/>
-                <a:ea typeface="+mn-ea"/>
-                <a:cs typeface="+mn-cs"/>
-              </a:rPr>
-              <a:pPr marL="0" marR="0" lvl="0" indent="0" algn="r" defTabSz="914400" rtl="0" eaLnBrk="1" fontAlgn="auto" latinLnBrk="0" hangingPunct="1">
-                <a:lnSpc>
-                  <a:spcPct val="100000"/>
-                </a:lnSpc>
-                <a:spcBef>
-                  <a:spcPts val="0"/>
-                </a:spcBef>
-                <a:spcAft>
-                  <a:spcPts val="0"/>
-                </a:spcAft>
-                <a:buClrTx/>
-                <a:buSzTx/>
-                <a:buFontTx/>
-                <a:buNone/>
-                <a:tabLst/>
-                <a:defRPr/>
-              </a:pPr>
-              <a:t>7</a:t>
-            </a:fld>
-            <a:endParaRPr kumimoji="0" lang="en-US" sz="1200" b="0" i="0" u="none" strike="noStrike" kern="1200" cap="none" spc="0" normalizeH="0" baseline="0" noProof="0">
-              <a:ln>
-                <a:noFill/>
-              </a:ln>
-              <a:solidFill>
-                <a:prstClr val="black">
-                  <a:tint val="75000"/>
-                </a:prstClr>
-              </a:solidFill>
-              <a:effectLst/>
-              <a:uLnTx/>
-              <a:uFillTx/>
-              <a:latin typeface="Calibri"/>
-              <a:ea typeface="+mn-ea"/>
-              <a:cs typeface="+mn-cs"/>
-            </a:endParaRPr>
-          </a:p>
-        </p:txBody>
-      </p:sp>
-    </p:spTree>
-    <p:extLst>
-      <p:ext uri="{BB962C8B-B14F-4D97-AF65-F5344CB8AC3E}">
-        <p14:creationId xmlns:p14="http://schemas.microsoft.com/office/powerpoint/2010/main" val="2287382833"/>
-      </p:ext>
-    </p:extLst>
-  </p:cSld>
-  <p:clrMapOvr>
-    <a:masterClrMapping/>
-  </p:clrMapOvr>
-</p:sld>
-</file>
-
-<file path=ppt/slides/slide8.xml><?xml version="1.0" encoding="utf-8"?>
-<p:sld xmlns:a="http://schemas.openxmlformats.org/drawingml/2006/main" xmlns:r="http://schemas.openxmlformats.org/officeDocument/2006/relationships" xmlns:p="http://schemas.openxmlformats.org/presentationml/2006/main">
-  <p:cSld>
-    <p:spTree>
-      <p:nvGrpSpPr>
-        <p:cNvPr id="1" name=""/>
-        <p:cNvGrpSpPr/>
-        <p:nvPr/>
-      </p:nvGrpSpPr>
-      <p:grpSpPr>
-        <a:xfrm>
-          <a:off x="0" y="0"/>
-          <a:ext cx="0" cy="0"/>
-          <a:chOff x="0" y="0"/>
-          <a:chExt cx="0" cy="0"/>
-        </a:xfrm>
-      </p:grpSpPr>
-      <p:sp>
-        <p:nvSpPr>
-          <p:cNvPr id="2" name="Title 1">
-            <a:extLst>
-              <a:ext uri="{FF2B5EF4-FFF2-40B4-BE49-F238E27FC236}">
-                <a16:creationId xmlns:a16="http://schemas.microsoft.com/office/drawing/2014/main" id="{C41A6137-476A-35F1-5EDC-244711AD6A14}"/>
-              </a:ext>
-            </a:extLst>
-          </p:cNvPr>
-          <p:cNvSpPr>
-            <a:spLocks noGrp="1"/>
-          </p:cNvSpPr>
-          <p:nvPr>
-            <p:ph type="title"/>
-          </p:nvPr>
-        </p:nvSpPr>
-        <p:spPr>
-          <a:xfrm>
-            <a:off x="609600" y="900114"/>
-            <a:ext cx="10972800" cy="1068387"/>
-          </a:xfrm>
-        </p:spPr>
-        <p:txBody>
-          <a:bodyPr wrap="square" anchor="ctr">
-            <a:normAutofit/>
-          </a:bodyPr>
-          <a:lstStyle/>
-          <a:p>
-            <a:r>
-              <a:rPr lang="en-US" dirty="0"/>
-              <a:t>Reactor Susceptibility</a:t>
-            </a:r>
-          </a:p>
-        </p:txBody>
-      </p:sp>
-      <p:sp>
-        <p:nvSpPr>
-          <p:cNvPr id="3" name="Content Placeholder 2">
-            <a:extLst>
-              <a:ext uri="{FF2B5EF4-FFF2-40B4-BE49-F238E27FC236}">
-                <a16:creationId xmlns:a16="http://schemas.microsoft.com/office/drawing/2014/main" id="{67899FF1-6DC6-F80B-3A91-932C12E560E3}"/>
-              </a:ext>
-            </a:extLst>
-          </p:cNvPr>
-          <p:cNvSpPr>
-            <a:spLocks noGrp="1"/>
-          </p:cNvSpPr>
-          <p:nvPr>
-            <p:ph sz="half" idx="1"/>
-          </p:nvPr>
-        </p:nvSpPr>
-        <p:spPr>
-          <a:xfrm>
-            <a:off x="609600" y="1968501"/>
-            <a:ext cx="5588000" cy="4157663"/>
-          </a:xfrm>
-        </p:spPr>
-        <p:txBody>
-          <a:bodyPr wrap="square" anchor="t">
-            <a:normAutofit lnSpcReduction="10000"/>
-          </a:bodyPr>
-          <a:lstStyle/>
-          <a:p>
-            <a:r>
-              <a:rPr lang="en-US" sz="1800" dirty="0"/>
-              <a:t>All current PWR, BWR and CANDU reactors utilize UO2 fuel, zirconium alloy cladding, and are water cooled</a:t>
-            </a:r>
-          </a:p>
-          <a:p>
-            <a:r>
-              <a:rPr lang="en-US" sz="1800" dirty="0"/>
-              <a:t>The degree of susceptibility of each reactor and fuel design to PCI rests on numerous design specifications</a:t>
-            </a:r>
-          </a:p>
-          <a:p>
-            <a:r>
-              <a:rPr lang="en-US" sz="1800" dirty="0"/>
-              <a:t>PWRs have smaller fuel diameters, BWRs have the thickest cladding</a:t>
-            </a:r>
-          </a:p>
-          <a:p>
-            <a:r>
-              <a:rPr lang="en-US" sz="1800" dirty="0"/>
-              <a:t>The geometric design has an influence on the stresses in the fuel and cladding</a:t>
-            </a:r>
-          </a:p>
-          <a:p>
-            <a:r>
-              <a:rPr lang="en-US" sz="1800" dirty="0"/>
-              <a:t>Linear power affects the temperature, which impacts a variety of other phenomena</a:t>
-            </a:r>
-          </a:p>
-          <a:p>
-            <a:r>
-              <a:rPr lang="en-US" sz="1800" dirty="0"/>
-              <a:t>Discharge burnup influences the inventory of fission products in the fuel/cladding interface</a:t>
-            </a:r>
-          </a:p>
-        </p:txBody>
-      </p:sp>
-      <p:pic>
-        <p:nvPicPr>
-          <p:cNvPr id="5" name="Picture 4">
-            <a:extLst>
-              <a:ext uri="{FF2B5EF4-FFF2-40B4-BE49-F238E27FC236}">
-                <a16:creationId xmlns:a16="http://schemas.microsoft.com/office/drawing/2014/main" id="{31EA8CF3-43C2-874B-9F3E-223061419146}"/>
-              </a:ext>
-            </a:extLst>
-          </p:cNvPr>
-          <p:cNvPicPr>
-            <a:picLocks noChangeAspect="1"/>
-          </p:cNvPicPr>
-          <p:nvPr/>
-        </p:nvPicPr>
-        <p:blipFill>
-          <a:blip r:embed="rId2"/>
-          <a:stretch>
-            <a:fillRect/>
-          </a:stretch>
-        </p:blipFill>
-        <p:spPr>
-          <a:xfrm>
-            <a:off x="6197600" y="2574037"/>
-            <a:ext cx="5987056" cy="2574433"/>
-          </a:xfrm>
-          <a:prstGeom prst="rect">
-            <a:avLst/>
-          </a:prstGeom>
-          <a:noFill/>
-        </p:spPr>
-      </p:pic>
-      <p:sp>
-        <p:nvSpPr>
-          <p:cNvPr id="4" name="Slide Number Placeholder 3">
-            <a:extLst>
-              <a:ext uri="{FF2B5EF4-FFF2-40B4-BE49-F238E27FC236}">
-                <a16:creationId xmlns:a16="http://schemas.microsoft.com/office/drawing/2014/main" id="{197DE1D3-18CC-90BA-32F2-D50B58B17206}"/>
-              </a:ext>
-            </a:extLst>
-          </p:cNvPr>
-          <p:cNvSpPr>
-            <a:spLocks noGrp="1"/>
-          </p:cNvSpPr>
-          <p:nvPr>
-            <p:ph type="sldNum" sz="quarter" idx="12"/>
-          </p:nvPr>
-        </p:nvSpPr>
-        <p:spPr>
-          <a:xfrm>
-            <a:off x="8737600" y="6356351"/>
-            <a:ext cx="2844800" cy="365125"/>
-          </a:xfrm>
-        </p:spPr>
-        <p:txBody>
-          <a:bodyPr anchor="ctr">
-            <a:normAutofit/>
-          </a:bodyPr>
-          <a:lstStyle/>
-          <a:p>
-            <a:pPr marL="0" marR="0" lvl="0" indent="0" algn="r" defTabSz="914400" rtl="0" eaLnBrk="1" fontAlgn="auto" latinLnBrk="0" hangingPunct="1">
-              <a:lnSpc>
-                <a:spcPct val="100000"/>
-              </a:lnSpc>
-              <a:spcBef>
-                <a:spcPts val="0"/>
-              </a:spcBef>
-              <a:spcAft>
-                <a:spcPts val="600"/>
-              </a:spcAft>
-              <a:buClrTx/>
-              <a:buSzTx/>
-              <a:buFontTx/>
-              <a:buNone/>
-              <a:tabLst/>
-              <a:defRPr/>
-            </a:pPr>
-            <a:fld id="{3FF2C605-4958-CF43-AA48-80339EFDB0AF}" type="slidenum">
-              <a:rPr kumimoji="0" lang="en-US" sz="1200" b="0" i="0" u="none" strike="noStrike" kern="1200" cap="none" spc="0" normalizeH="0" baseline="0" noProof="0" smtClean="0">
-                <a:ln>
-                  <a:noFill/>
-                </a:ln>
-                <a:solidFill>
-                  <a:prstClr val="black">
-                    <a:tint val="75000"/>
-                  </a:prstClr>
-                </a:solidFill>
-                <a:effectLst/>
-                <a:uLnTx/>
-                <a:uFillTx/>
-                <a:latin typeface="Calibri"/>
-                <a:ea typeface="+mn-ea"/>
-                <a:cs typeface="+mn-cs"/>
-              </a:rPr>
-              <a:pPr marL="0" marR="0" lvl="0" indent="0" algn="r" defTabSz="914400" rtl="0" eaLnBrk="1" fontAlgn="auto" latinLnBrk="0" hangingPunct="1">
-                <a:lnSpc>
-                  <a:spcPct val="100000"/>
-                </a:lnSpc>
-                <a:spcBef>
-                  <a:spcPts val="0"/>
-                </a:spcBef>
-                <a:spcAft>
-                  <a:spcPts val="600"/>
-                </a:spcAft>
-                <a:buClrTx/>
-                <a:buSzTx/>
-                <a:buFontTx/>
-                <a:buNone/>
-                <a:tabLst/>
-                <a:defRPr/>
-              </a:pPr>
-              <a:t>8</a:t>
-            </a:fld>
-            <a:endParaRPr kumimoji="0" lang="en-US" sz="1200" b="0" i="0" u="none" strike="noStrike" kern="1200" cap="none" spc="0" normalizeH="0" baseline="0" noProof="0">
-              <a:ln>
-                <a:noFill/>
-              </a:ln>
-              <a:solidFill>
-                <a:prstClr val="black">
-                  <a:tint val="75000"/>
-                </a:prstClr>
-              </a:solidFill>
-              <a:effectLst/>
-              <a:uLnTx/>
-              <a:uFillTx/>
-              <a:latin typeface="Calibri"/>
-              <a:ea typeface="+mn-ea"/>
-              <a:cs typeface="+mn-cs"/>
-            </a:endParaRPr>
-          </a:p>
-        </p:txBody>
-      </p:sp>
-    </p:spTree>
-    <p:extLst>
-      <p:ext uri="{BB962C8B-B14F-4D97-AF65-F5344CB8AC3E}">
-        <p14:creationId xmlns:p14="http://schemas.microsoft.com/office/powerpoint/2010/main" val="2980613618"/>
-      </p:ext>
-    </p:extLst>
-  </p:cSld>
-  <p:clrMapOvr>
-    <a:masterClrMapping/>
-  </p:clrMapOvr>
-</p:sld>
-</file>
-
 <file path=ppt/slides/slide9.xml><?xml version="1.0" encoding="utf-8"?>
 <p:sld xmlns:a="http://schemas.openxmlformats.org/drawingml/2006/main" xmlns:r="http://schemas.openxmlformats.org/officeDocument/2006/relationships" xmlns:p="http://schemas.openxmlformats.org/presentationml/2006/main">
   <p:cSld>
@@ -6006,7 +8352,7 @@
           <p:cNvPr id="2" name="Title 1">
             <a:extLst>
               <a:ext uri="{FF2B5EF4-FFF2-40B4-BE49-F238E27FC236}">
-                <a16:creationId xmlns:a16="http://schemas.microsoft.com/office/drawing/2014/main" id="{C1A275EF-D507-1151-E20C-BADE1BA2FEE7}"/>
+                <a16:creationId xmlns:a16="http://schemas.microsoft.com/office/drawing/2014/main" id="{C4F649AA-0316-E54F-A523-93797234130E}"/>
               </a:ext>
             </a:extLst>
           </p:cNvPr>
@@ -6024,7 +8370,7 @@
           <a:p>
             <a:r>
               <a:rPr lang="en-US" dirty="0"/>
-              <a:t>Reactor Susceptibility</a:t>
+              <a:t>Through-Cracks</a:t>
             </a:r>
           </a:p>
         </p:txBody>
@@ -6034,7 +8380,7 @@
           <p:cNvPr id="3" name="Content Placeholder 2">
             <a:extLst>
               <a:ext uri="{FF2B5EF4-FFF2-40B4-BE49-F238E27FC236}">
-                <a16:creationId xmlns:a16="http://schemas.microsoft.com/office/drawing/2014/main" id="{A97AA86B-72D0-F8D0-5D1E-9498576CCAA8}"/>
+                <a16:creationId xmlns:a16="http://schemas.microsoft.com/office/drawing/2014/main" id="{74F6013A-8125-5645-8D9E-38FD4740420A}"/>
               </a:ext>
             </a:extLst>
           </p:cNvPr>
@@ -6042,7 +8388,7 @@
             <a:spLocks noGrp="1"/>
           </p:cNvSpPr>
           <p:nvPr>
-            <p:ph sz="half" idx="1"/>
+            <p:ph idx="1"/>
           </p:nvPr>
         </p:nvSpPr>
         <p:spPr/>
@@ -6051,70 +8397,61 @@
           <a:lstStyle/>
           <a:p>
             <a:r>
-              <a:rPr lang="en-US" sz="1800" dirty="0"/>
-              <a:t>In general, PCI failures are typically experienced (by any reactor) during a large change in power; thus, the manner in which power changes dictates to a large degree the likelihood of PCI failure</a:t>
-            </a:r>
-          </a:p>
-          <a:p>
-            <a:r>
-              <a:rPr lang="en-US" sz="1800" dirty="0"/>
-              <a:t>Unlike BWRs, the neutron flux in a PWR is not primarily controlled by the insertion and extraction of control rods during operation</a:t>
-            </a:r>
-          </a:p>
-          <a:p>
-            <a:r>
-              <a:rPr lang="en-US" sz="1800" dirty="0"/>
-              <a:t>Due to smoother control of reactivity and a lower linear power, PCI failures are significantly less frequent in PWRs than other major commercial power reactor designs</a:t>
-            </a:r>
-          </a:p>
-          <a:p>
-            <a:r>
-              <a:rPr lang="en-US" sz="1800" dirty="0"/>
-              <a:t>PCI failures are more of a concern in BWRs</a:t>
-            </a:r>
-          </a:p>
-          <a:p>
-            <a:endParaRPr lang="en-US" sz="1800" dirty="0"/>
-          </a:p>
-        </p:txBody>
-      </p:sp>
-      <p:sp>
-        <p:nvSpPr>
-          <p:cNvPr id="4" name="Content Placeholder 3">
+              <a:rPr lang="en-US" sz="2000" dirty="0"/>
+              <a:t>Following the formation of a through-wall crack and the ingress of water into the fuel-clad gap, the cracking process is arrested since the corrosive species (notably I, Cs, and Cd) have been discharged</a:t>
+            </a:r>
+          </a:p>
+          <a:p>
+            <a:r>
+              <a:rPr lang="en-US" sz="2000" dirty="0"/>
+              <a:t>The ingress of water in the fuel-clad gap may result in clad </a:t>
+            </a:r>
+            <a:r>
+              <a:rPr lang="en-US" sz="2000" dirty="0" err="1"/>
+              <a:t>hydriding</a:t>
+            </a:r>
+            <a:r>
+              <a:rPr lang="en-US" sz="2000" dirty="0"/>
+              <a:t> on the inner surface</a:t>
+            </a:r>
+          </a:p>
+          <a:p>
+            <a:r>
+              <a:rPr lang="en-US" sz="2000" dirty="0"/>
+              <a:t>The initial SCC crack can oxidize, and volume expansion may lead to resealing the primary failure</a:t>
+            </a:r>
+          </a:p>
+          <a:p>
+            <a:r>
+              <a:rPr lang="en-US" sz="2000" dirty="0"/>
+              <a:t>All PCI cracks are pin-hole defects, whereas observable cracks are secondary due to clad </a:t>
+            </a:r>
+            <a:r>
+              <a:rPr lang="en-US" sz="2000" dirty="0" err="1"/>
+              <a:t>hydriding</a:t>
+            </a:r>
+            <a:r>
+              <a:rPr lang="en-US" sz="2000" dirty="0"/>
+              <a:t> or ductile tearing</a:t>
+            </a:r>
+          </a:p>
+          <a:p>
+            <a:r>
+              <a:rPr lang="en-US" sz="2000" dirty="0"/>
+              <a:t>The time to failure depends on many parameters, but is generally determined by the local linear power, the change in linear power, and the local burnup</a:t>
+            </a:r>
+          </a:p>
+          <a:p>
+            <a:endParaRPr lang="en-US" sz="2000" dirty="0"/>
+          </a:p>
+        </p:txBody>
+      </p:sp>
+      <p:sp>
+        <p:nvSpPr>
+          <p:cNvPr id="4" name="Slide Number Placeholder 3">
             <a:extLst>
               <a:ext uri="{FF2B5EF4-FFF2-40B4-BE49-F238E27FC236}">
-                <a16:creationId xmlns:a16="http://schemas.microsoft.com/office/drawing/2014/main" id="{26FF7CCE-0AAC-C3AE-5239-3271E47306F9}"/>
-              </a:ext>
-            </a:extLst>
-          </p:cNvPr>
-          <p:cNvSpPr>
-            <a:spLocks noGrp="1"/>
-          </p:cNvSpPr>
-          <p:nvPr>
-            <p:ph sz="half" idx="2"/>
-          </p:nvPr>
-        </p:nvSpPr>
-        <p:spPr/>
-        <p:txBody>
-          <a:bodyPr/>
-          <a:lstStyle/>
-          <a:p>
-            <a:r>
-              <a:rPr lang="en-US" sz="1800" dirty="0"/>
-              <a:t>Control blade maneuvers in BWRs create local power transients that often lead to PCI failures in fuel rods adjacent to these blades</a:t>
-            </a:r>
-          </a:p>
-          <a:p>
-            <a:endParaRPr lang="en-US" sz="1800" dirty="0"/>
-          </a:p>
-        </p:txBody>
-      </p:sp>
-      <p:sp>
-        <p:nvSpPr>
-          <p:cNvPr id="5" name="Slide Number Placeholder 4">
-            <a:extLst>
-              <a:ext uri="{FF2B5EF4-FFF2-40B4-BE49-F238E27FC236}">
-                <a16:creationId xmlns:a16="http://schemas.microsoft.com/office/drawing/2014/main" id="{17496774-16C2-A1C1-9C78-3D357E8DB988}"/>
+                <a16:creationId xmlns:a16="http://schemas.microsoft.com/office/drawing/2014/main" id="{3A9F73AA-344A-7548-A599-C67A90FDCACF}"/>
               </a:ext>
             </a:extLst>
           </p:cNvPr>
@@ -6147,7 +8484,7 @@
               <a:tabLst/>
               <a:defRPr/>
             </a:pPr>
-            <a:fld id="{EC35E9FC-F6D5-0349-BBED-EA7D7A9BC49B}" type="slidenum">
+            <a:fld id="{3FF2C605-4958-CF43-AA48-80339EFDB0AF}" type="slidenum">
               <a:rPr kumimoji="0" lang="en-US" sz="1200" b="0" i="0" u="none" strike="noStrike" kern="1200" cap="none" spc="0" normalizeH="0" baseline="0" noProof="0" smtClean="0">
                 <a:ln>
                   <a:noFill/>
@@ -6202,105 +8539,10 @@
           </a:p>
         </p:txBody>
       </p:sp>
-      <p:pic>
-        <p:nvPicPr>
-          <p:cNvPr id="6" name="Picture 5">
-            <a:extLst>
-              <a:ext uri="{FF2B5EF4-FFF2-40B4-BE49-F238E27FC236}">
-                <a16:creationId xmlns:a16="http://schemas.microsoft.com/office/drawing/2014/main" id="{237996D1-E163-3BAB-1271-B5D301D0F296}"/>
-              </a:ext>
-            </a:extLst>
-          </p:cNvPr>
-          <p:cNvPicPr>
-            <a:picLocks noChangeAspect="1"/>
-          </p:cNvPicPr>
-          <p:nvPr/>
-        </p:nvPicPr>
-        <p:blipFill>
-          <a:blip r:embed="rId2"/>
-          <a:stretch>
-            <a:fillRect/>
-          </a:stretch>
-        </p:blipFill>
-        <p:spPr>
-          <a:xfrm>
-            <a:off x="6900517" y="3036888"/>
-            <a:ext cx="3978965" cy="2917908"/>
-          </a:xfrm>
-          <a:prstGeom prst="rect">
-            <a:avLst/>
-          </a:prstGeom>
-        </p:spPr>
-      </p:pic>
-      <p:sp>
-        <p:nvSpPr>
-          <p:cNvPr id="8" name="TextBox 7">
-            <a:extLst>
-              <a:ext uri="{FF2B5EF4-FFF2-40B4-BE49-F238E27FC236}">
-                <a16:creationId xmlns:a16="http://schemas.microsoft.com/office/drawing/2014/main" id="{AC01F94F-EE6B-3484-AFC7-243D285E1758}"/>
-              </a:ext>
-            </a:extLst>
-          </p:cNvPr>
-          <p:cNvSpPr txBox="1"/>
-          <p:nvPr/>
-        </p:nvSpPr>
-        <p:spPr>
-          <a:xfrm>
-            <a:off x="6197600" y="5954796"/>
-            <a:ext cx="5588828" cy="261610"/>
-          </a:xfrm>
-          <a:prstGeom prst="rect">
-            <a:avLst/>
-          </a:prstGeom>
-          <a:noFill/>
-        </p:spPr>
-        <p:txBody>
-          <a:bodyPr wrap="square">
-            <a:spAutoFit/>
-          </a:bodyPr>
-          <a:lstStyle/>
-          <a:p>
-            <a:pPr marL="0" marR="0" lvl="0" indent="0" algn="ctr" defTabSz="914400" rtl="0" eaLnBrk="1" fontAlgn="auto" latinLnBrk="0" hangingPunct="1">
-              <a:lnSpc>
-                <a:spcPct val="100000"/>
-              </a:lnSpc>
-              <a:spcBef>
-                <a:spcPts val="0"/>
-              </a:spcBef>
-              <a:spcAft>
-                <a:spcPts val="0"/>
-              </a:spcAft>
-              <a:buClrTx/>
-              <a:buSzTx/>
-              <a:buFontTx/>
-              <a:buNone/>
-              <a:tabLst/>
-              <a:defRPr/>
-            </a:pPr>
-            <a:r>
-              <a:rPr kumimoji="0" lang="en-US" sz="1100" b="0" i="0" u="none" strike="noStrike" kern="1200" cap="none" spc="0" normalizeH="0" baseline="0" noProof="0" dirty="0">
-                <a:ln>
-                  <a:noFill/>
-                </a:ln>
-                <a:solidFill>
-                  <a:prstClr val="black"/>
-                </a:solidFill>
-                <a:effectLst/>
-                <a:uLnTx/>
-                <a:uFillTx/>
-                <a:latin typeface="Helvetica" pitchFamily="2" charset="0"/>
-                <a:ea typeface="+mn-ea"/>
-                <a:cs typeface="+mn-cs"/>
-              </a:rPr>
-              <a:t>The change in LHR resulting from the successive removal of three control rod blades</a:t>
-            </a:r>
-          </a:p>
-        </p:txBody>
-      </p:sp>
     </p:spTree>
     <p:extLst>
       <p:ext uri="{BB962C8B-B14F-4D97-AF65-F5344CB8AC3E}">
-        <p14:creationId xmlns:p14="http://schemas.microsoft.com/office/powerpoint/2010/main" val="510275999"/>
+        <p14:creationId xmlns:p14="http://schemas.microsoft.com/office/powerpoint/2010/main" val="2287382833"/>
       </p:ext>
     </p:extLst>
   </p:cSld>
